--- a/slides/day3.pptx
+++ b/slides/day3.pptx
@@ -30,9 +30,6 @@
     <p:sldId id="278" r:id="rId29"/>
     <p:sldId id="279" r:id="rId30"/>
     <p:sldId id="280" r:id="rId31"/>
-    <p:sldId id="281" r:id="rId32"/>
-    <p:sldId id="282" r:id="rId33"/>
-    <p:sldId id="283" r:id="rId34"/>
   </p:sldIdLst>
   <p:sldSz cx="12191695" cy="6858000" type="screen4x3"/>
   <p:notesSz cx="6858000" cy="9144000"/>
@@ -3985,7 +3982,7 @@
                 <a:ea typeface="NanumGothic"/>
                 <a:cs typeface="NanumGothic"/>
               </a:rPr>
-              <a:t>리서치 프로세스 이론 + 팀 구성</a:t>
+              <a:t>리서치 프로세스·쟁점 + 팀 구성</a:t>
             </a:r>
           </a:p>
         </p:txBody>
@@ -9138,7 +9135,7 @@
                 <a:ea typeface="NanumSquare"/>
                 <a:cs typeface="NanumSquare"/>
               </a:rPr>
-              <a:t>AI 에이전트 기반 리서치 프로세스 이론 + 팀 구성·주제 설정</a:t>
+              <a:t>리서치 프로세스(기존·agentic) + 쟁점 토론 + 팀·주제 설정</a:t>
             </a:r>
           </a:p>
         </p:txBody>
@@ -9185,7 +9182,7 @@
                 <a:ea typeface="NanumGothic"/>
                 <a:cs typeface="NanumGothic"/>
               </a:rPr>
-              <a:t>리서치 에이전트의 내부 구조를 이해하고, 팀과 리서치 주제를 확정한다.</a:t>
+              <a:t>기존 연구 프로세스와 그 agentic 버전·핵심 쟁점을 함께 본 뒤, 팀과 리서치 주제를 정한다.</a:t>
             </a:r>
           </a:p>
         </p:txBody>
@@ -9429,7 +9426,7 @@
                 <a:ea typeface="NanumSquare"/>
                 <a:cs typeface="NanumSquare"/>
               </a:rPr>
-              <a:t>AI 에이전트 기반 리서치 프로세스 이론 + 팀 구성·주제 설정</a:t>
+              <a:t>리서치 프로세스(기존·agentic) + 쟁점 토론 + 팀·주제 설정</a:t>
             </a:r>
           </a:p>
         </p:txBody>
@@ -9660,7 +9657,7 @@
                 <a:ea typeface="NanumGothic"/>
                 <a:cs typeface="NanumGothic"/>
               </a:rPr>
-              <a:t>90분 · 10 파트</a:t>
+              <a:t>90분 · 7 파트</a:t>
             </a:r>
           </a:p>
         </p:txBody>
@@ -9891,7 +9888,7 @@
                 <a:ea typeface="NanumGothic"/>
                 <a:cs typeface="NanumGothic"/>
               </a:rPr>
-              <a:t>리서치 에이전트 다시 보기</a:t>
+              <a:t>기존 연구 프로세스</a:t>
             </a:r>
           </a:p>
         </p:txBody>
@@ -10075,7 +10072,7 @@
                 <a:ea typeface="NanumGothic"/>
                 <a:cs typeface="NanumGothic"/>
               </a:rPr>
-              <a:t>전체 아키텍처</a:t>
+              <a:t>agentic 프로세스 5개 질문</a:t>
             </a:r>
           </a:p>
         </p:txBody>
@@ -10259,7 +10256,7 @@
                 <a:ea typeface="NanumGothic"/>
                 <a:cs typeface="NanumGothic"/>
               </a:rPr>
-              <a:t>검색(Search)</a:t>
+              <a:t>핵심 쟁점: 생성 vs 선별</a:t>
             </a:r>
           </a:p>
         </p:txBody>
@@ -10443,7 +10440,7 @@
                 <a:ea typeface="NanumGothic"/>
                 <a:cs typeface="NanumGothic"/>
               </a:rPr>
-              <a:t>검색 전략 — 넓게·병렬로</a:t>
+              <a:t>쟁점 정리·권고</a:t>
             </a:r>
           </a:p>
         </p:txBody>
@@ -10456,7 +10453,7 @@
         </p:nvSpPr>
         <p:spPr>
           <a:xfrm>
-            <a:off x="502920" y="4855464"/>
+            <a:off x="6217920" y="2148840"/>
             <a:ext cx="5440680" cy="566928"/>
           </a:xfrm>
           <a:prstGeom prst="roundRect">
@@ -10502,7 +10499,7 @@
         </p:nvSpPr>
         <p:spPr>
           <a:xfrm>
-            <a:off x="649224" y="4974336"/>
+            <a:off x="6364224" y="2267712"/>
             <a:ext cx="384048" cy="384048"/>
           </a:xfrm>
           <a:prstGeom prst="ellipse">
@@ -10546,7 +10543,7 @@
         </p:nvSpPr>
         <p:spPr>
           <a:xfrm>
-            <a:off x="649224" y="4974336"/>
+            <a:off x="6364224" y="2267712"/>
             <a:ext cx="384048" cy="384048"/>
           </a:xfrm>
           <a:prstGeom prst="rect">
@@ -10593,7 +10590,7 @@
         </p:nvSpPr>
         <p:spPr>
           <a:xfrm>
-            <a:off x="1216152" y="4855464"/>
+            <a:off x="6931152" y="2148840"/>
             <a:ext cx="4572000" cy="566928"/>
           </a:xfrm>
           <a:prstGeom prst="rect">
@@ -10627,7 +10624,7 @@
                 <a:ea typeface="NanumGothic"/>
                 <a:cs typeface="NanumGothic"/>
               </a:rPr>
-              <a:t>검증(Verify) — 환각 방지</a:t>
+              <a:t>프로젝트 형식 + 3세션 스코프</a:t>
             </a:r>
           </a:p>
         </p:txBody>
@@ -10640,7 +10637,7 @@
         </p:nvSpPr>
         <p:spPr>
           <a:xfrm>
-            <a:off x="6217920" y="2148840"/>
+            <a:off x="6217920" y="2825496"/>
             <a:ext cx="5440680" cy="566928"/>
           </a:xfrm>
           <a:prstGeom prst="roundRect">
@@ -10686,7 +10683,7 @@
         </p:nvSpPr>
         <p:spPr>
           <a:xfrm>
-            <a:off x="6364224" y="2267712"/>
+            <a:off x="6364224" y="2944368"/>
             <a:ext cx="384048" cy="384048"/>
           </a:xfrm>
           <a:prstGeom prst="ellipse">
@@ -10730,7 +10727,7 @@
         </p:nvSpPr>
         <p:spPr>
           <a:xfrm>
-            <a:off x="6364224" y="2267712"/>
+            <a:off x="6364224" y="2944368"/>
             <a:ext cx="384048" cy="384048"/>
           </a:xfrm>
           <a:prstGeom prst="rect">
@@ -10777,7 +10774,7 @@
         </p:nvSpPr>
         <p:spPr>
           <a:xfrm>
-            <a:off x="6931152" y="2148840"/>
+            <a:off x="6931152" y="2825496"/>
             <a:ext cx="4572000" cy="566928"/>
           </a:xfrm>
           <a:prstGeom prst="rect">
@@ -10811,7 +10808,7 @@
                 <a:ea typeface="NanumGothic"/>
                 <a:cs typeface="NanumGothic"/>
               </a:rPr>
-              <a:t>교차검증과 출처관리</a:t>
+              <a:t>리서치 에이전트 파이프라인</a:t>
             </a:r>
           </a:p>
         </p:txBody>
@@ -10824,7 +10821,7 @@
         </p:nvSpPr>
         <p:spPr>
           <a:xfrm>
-            <a:off x="6217920" y="2825496"/>
+            <a:off x="6217920" y="3502152"/>
             <a:ext cx="5440680" cy="566928"/>
           </a:xfrm>
           <a:prstGeom prst="roundRect">
@@ -10870,7 +10867,7 @@
         </p:nvSpPr>
         <p:spPr>
           <a:xfrm>
-            <a:off x="6364224" y="2944368"/>
+            <a:off x="6364224" y="3621024"/>
             <a:ext cx="384048" cy="384048"/>
           </a:xfrm>
           <a:prstGeom prst="ellipse">
@@ -10914,7 +10911,7 @@
         </p:nvSpPr>
         <p:spPr>
           <a:xfrm>
-            <a:off x="6364224" y="2944368"/>
+            <a:off x="6364224" y="3621024"/>
             <a:ext cx="384048" cy="384048"/>
           </a:xfrm>
           <a:prstGeom prst="rect">
@@ -10961,7 +10958,7 @@
         </p:nvSpPr>
         <p:spPr>
           <a:xfrm>
-            <a:off x="6931152" y="2825496"/>
+            <a:off x="6931152" y="3502152"/>
             <a:ext cx="4572000" cy="566928"/>
           </a:xfrm>
           <a:prstGeom prst="rect">
@@ -10995,559 +10992,7 @@
                 <a:ea typeface="NanumGothic"/>
                 <a:cs typeface="NanumGothic"/>
               </a:rPr>
-              <a:t>종합(Synthesize)</a:t>
-            </a:r>
-          </a:p>
-        </p:txBody>
-      </p:sp>
-      <p:sp>
-        <p:nvSpPr>
-          <p:cNvPr id="40" name="Rounded Rectangle 39"/>
-          <p:cNvSpPr/>
-          <p:nvPr/>
-        </p:nvSpPr>
-        <p:spPr>
-          <a:xfrm>
-            <a:off x="6217920" y="3502152"/>
-            <a:ext cx="5440680" cy="566928"/>
-          </a:xfrm>
-          <a:prstGeom prst="roundRect">
-            <a:avLst/>
-          </a:prstGeom>
-          <a:solidFill>
-            <a:srgbClr val="F8FAFC"/>
-          </a:solidFill>
-          <a:ln w="12700">
-            <a:solidFill>
-              <a:srgbClr val="E2E8F0"/>
-            </a:solidFill>
-          </a:ln>
-          <a:effectLst/>
-        </p:spPr>
-        <p:style>
-          <a:lnRef idx="1">
-            <a:schemeClr val="accent1"/>
-          </a:lnRef>
-          <a:fillRef idx="3">
-            <a:schemeClr val="accent1"/>
-          </a:fillRef>
-          <a:effectRef idx="2">
-            <a:schemeClr val="accent1"/>
-          </a:effectRef>
-          <a:fontRef idx="minor">
-            <a:schemeClr val="lt1"/>
-          </a:fontRef>
-        </p:style>
-        <p:txBody>
-          <a:bodyPr rtlCol="0" anchor="ctr"/>
-          <a:lstStyle/>
-          <a:p>
-            <a:pPr algn="ctr"/>
-          </a:p>
-        </p:txBody>
-      </p:sp>
-      <p:sp>
-        <p:nvSpPr>
-          <p:cNvPr id="41" name="Oval 40"/>
-          <p:cNvSpPr/>
-          <p:nvPr/>
-        </p:nvSpPr>
-        <p:spPr>
-          <a:xfrm>
-            <a:off x="6364224" y="3621024"/>
-            <a:ext cx="384048" cy="384048"/>
-          </a:xfrm>
-          <a:prstGeom prst="ellipse">
-            <a:avLst/>
-          </a:prstGeom>
-          <a:solidFill>
-            <a:srgbClr val="10B981"/>
-          </a:solidFill>
-          <a:ln>
-            <a:noFill/>
-          </a:ln>
-          <a:effectLst/>
-        </p:spPr>
-        <p:style>
-          <a:lnRef idx="1">
-            <a:schemeClr val="accent1"/>
-          </a:lnRef>
-          <a:fillRef idx="3">
-            <a:schemeClr val="accent1"/>
-          </a:fillRef>
-          <a:effectRef idx="2">
-            <a:schemeClr val="accent1"/>
-          </a:effectRef>
-          <a:fontRef idx="minor">
-            <a:schemeClr val="lt1"/>
-          </a:fontRef>
-        </p:style>
-        <p:txBody>
-          <a:bodyPr rtlCol="0" anchor="ctr"/>
-          <a:lstStyle/>
-          <a:p>
-            <a:pPr algn="ctr"/>
-          </a:p>
-        </p:txBody>
-      </p:sp>
-      <p:sp>
-        <p:nvSpPr>
-          <p:cNvPr id="42" name="TextBox 41"/>
-          <p:cNvSpPr txBox="1"/>
-          <p:nvPr/>
-        </p:nvSpPr>
-        <p:spPr>
-          <a:xfrm>
-            <a:off x="6364224" y="3621024"/>
-            <a:ext cx="384048" cy="384048"/>
-          </a:xfrm>
-          <a:prstGeom prst="rect">
-            <a:avLst/>
-          </a:prstGeom>
-          <a:noFill/>
-        </p:spPr>
-        <p:txBody>
-          <a:bodyPr wrap="square" anchor="ctr" lIns="0" rIns="0" tIns="0" bIns="0">
-            <a:spAutoFit/>
-          </a:bodyPr>
-          <a:lstStyle/>
-          <a:p>
-            <a:pPr algn="ctr">
-              <a:lnSpc>
-                <a:spcPct val="100000"/>
-              </a:lnSpc>
-              <a:spcBef>
-                <a:spcPts val="0"/>
-              </a:spcBef>
-              <a:spcAft>
-                <a:spcPts val="600"/>
-              </a:spcAft>
-            </a:pPr>
-            <a:r>
-              <a:rPr sz="1300" b="1">
-                <a:solidFill>
-                  <a:srgbClr val="FFFFFF"/>
-                </a:solidFill>
-                <a:latin typeface="NanumSquare"/>
-                <a:ea typeface="NanumSquare"/>
-                <a:cs typeface="NanumSquare"/>
-              </a:rPr>
-              <a:t>8</a:t>
-            </a:r>
-          </a:p>
-        </p:txBody>
-      </p:sp>
-      <p:sp>
-        <p:nvSpPr>
-          <p:cNvPr id="43" name="TextBox 42"/>
-          <p:cNvSpPr txBox="1"/>
-          <p:nvPr/>
-        </p:nvSpPr>
-        <p:spPr>
-          <a:xfrm>
-            <a:off x="6931152" y="3502152"/>
-            <a:ext cx="4572000" cy="566928"/>
-          </a:xfrm>
-          <a:prstGeom prst="rect">
-            <a:avLst/>
-          </a:prstGeom>
-          <a:noFill/>
-        </p:spPr>
-        <p:txBody>
-          <a:bodyPr wrap="square" anchor="ctr" lIns="0" rIns="0" tIns="0" bIns="0">
-            <a:spAutoFit/>
-          </a:bodyPr>
-          <a:lstStyle/>
-          <a:p>
-            <a:pPr algn="l">
-              <a:lnSpc>
-                <a:spcPct val="100000"/>
-              </a:lnSpc>
-              <a:spcBef>
-                <a:spcPts val="0"/>
-              </a:spcBef>
-              <a:spcAft>
-                <a:spcPts val="600"/>
-              </a:spcAft>
-            </a:pPr>
-            <a:r>
-              <a:rPr sz="1400" b="1">
-                <a:solidFill>
-                  <a:srgbClr val="0F172A"/>
-                </a:solidFill>
-                <a:latin typeface="NanumGothic"/>
-                <a:ea typeface="NanumGothic"/>
-                <a:cs typeface="NanumGothic"/>
-              </a:rPr>
-              <a:t>좋은 리서치 에이전트의 조건</a:t>
-            </a:r>
-          </a:p>
-        </p:txBody>
-      </p:sp>
-      <p:sp>
-        <p:nvSpPr>
-          <p:cNvPr id="44" name="Rounded Rectangle 43"/>
-          <p:cNvSpPr/>
-          <p:nvPr/>
-        </p:nvSpPr>
-        <p:spPr>
-          <a:xfrm>
-            <a:off x="6217920" y="4178808"/>
-            <a:ext cx="5440680" cy="566928"/>
-          </a:xfrm>
-          <a:prstGeom prst="roundRect">
-            <a:avLst/>
-          </a:prstGeom>
-          <a:solidFill>
-            <a:srgbClr val="F8FAFC"/>
-          </a:solidFill>
-          <a:ln w="12700">
-            <a:solidFill>
-              <a:srgbClr val="E2E8F0"/>
-            </a:solidFill>
-          </a:ln>
-          <a:effectLst/>
-        </p:spPr>
-        <p:style>
-          <a:lnRef idx="1">
-            <a:schemeClr val="accent1"/>
-          </a:lnRef>
-          <a:fillRef idx="3">
-            <a:schemeClr val="accent1"/>
-          </a:fillRef>
-          <a:effectRef idx="2">
-            <a:schemeClr val="accent1"/>
-          </a:effectRef>
-          <a:fontRef idx="minor">
-            <a:schemeClr val="lt1"/>
-          </a:fontRef>
-        </p:style>
-        <p:txBody>
-          <a:bodyPr rtlCol="0" anchor="ctr"/>
-          <a:lstStyle/>
-          <a:p>
-            <a:pPr algn="ctr"/>
-          </a:p>
-        </p:txBody>
-      </p:sp>
-      <p:sp>
-        <p:nvSpPr>
-          <p:cNvPr id="45" name="Oval 44"/>
-          <p:cNvSpPr/>
-          <p:nvPr/>
-        </p:nvSpPr>
-        <p:spPr>
-          <a:xfrm>
-            <a:off x="6364224" y="4297680"/>
-            <a:ext cx="384048" cy="384048"/>
-          </a:xfrm>
-          <a:prstGeom prst="ellipse">
-            <a:avLst/>
-          </a:prstGeom>
-          <a:solidFill>
-            <a:srgbClr val="10B981"/>
-          </a:solidFill>
-          <a:ln>
-            <a:noFill/>
-          </a:ln>
-          <a:effectLst/>
-        </p:spPr>
-        <p:style>
-          <a:lnRef idx="1">
-            <a:schemeClr val="accent1"/>
-          </a:lnRef>
-          <a:fillRef idx="3">
-            <a:schemeClr val="accent1"/>
-          </a:fillRef>
-          <a:effectRef idx="2">
-            <a:schemeClr val="accent1"/>
-          </a:effectRef>
-          <a:fontRef idx="minor">
-            <a:schemeClr val="lt1"/>
-          </a:fontRef>
-        </p:style>
-        <p:txBody>
-          <a:bodyPr rtlCol="0" anchor="ctr"/>
-          <a:lstStyle/>
-          <a:p>
-            <a:pPr algn="ctr"/>
-          </a:p>
-        </p:txBody>
-      </p:sp>
-      <p:sp>
-        <p:nvSpPr>
-          <p:cNvPr id="46" name="TextBox 45"/>
-          <p:cNvSpPr txBox="1"/>
-          <p:nvPr/>
-        </p:nvSpPr>
-        <p:spPr>
-          <a:xfrm>
-            <a:off x="6364224" y="4297680"/>
-            <a:ext cx="384048" cy="384048"/>
-          </a:xfrm>
-          <a:prstGeom prst="rect">
-            <a:avLst/>
-          </a:prstGeom>
-          <a:noFill/>
-        </p:spPr>
-        <p:txBody>
-          <a:bodyPr wrap="square" anchor="ctr" lIns="0" rIns="0" tIns="0" bIns="0">
-            <a:spAutoFit/>
-          </a:bodyPr>
-          <a:lstStyle/>
-          <a:p>
-            <a:pPr algn="ctr">
-              <a:lnSpc>
-                <a:spcPct val="100000"/>
-              </a:lnSpc>
-              <a:spcBef>
-                <a:spcPts val="0"/>
-              </a:spcBef>
-              <a:spcAft>
-                <a:spcPts val="600"/>
-              </a:spcAft>
-            </a:pPr>
-            <a:r>
-              <a:rPr sz="1300" b="1">
-                <a:solidFill>
-                  <a:srgbClr val="FFFFFF"/>
-                </a:solidFill>
-                <a:latin typeface="NanumSquare"/>
-                <a:ea typeface="NanumSquare"/>
-                <a:cs typeface="NanumSquare"/>
-              </a:rPr>
-              <a:t>9</a:t>
-            </a:r>
-          </a:p>
-        </p:txBody>
-      </p:sp>
-      <p:sp>
-        <p:nvSpPr>
-          <p:cNvPr id="47" name="TextBox 46"/>
-          <p:cNvSpPr txBox="1"/>
-          <p:nvPr/>
-        </p:nvSpPr>
-        <p:spPr>
-          <a:xfrm>
-            <a:off x="6931152" y="4178808"/>
-            <a:ext cx="4572000" cy="566928"/>
-          </a:xfrm>
-          <a:prstGeom prst="rect">
-            <a:avLst/>
-          </a:prstGeom>
-          <a:noFill/>
-        </p:spPr>
-        <p:txBody>
-          <a:bodyPr wrap="square" anchor="ctr" lIns="0" rIns="0" tIns="0" bIns="0">
-            <a:spAutoFit/>
-          </a:bodyPr>
-          <a:lstStyle/>
-          <a:p>
-            <a:pPr algn="l">
-              <a:lnSpc>
-                <a:spcPct val="100000"/>
-              </a:lnSpc>
-              <a:spcBef>
-                <a:spcPts val="0"/>
-              </a:spcBef>
-              <a:spcAft>
-                <a:spcPts val="600"/>
-              </a:spcAft>
-            </a:pPr>
-            <a:r>
-              <a:rPr sz="1400" b="1">
-                <a:solidFill>
-                  <a:srgbClr val="0F172A"/>
-                </a:solidFill>
-                <a:latin typeface="NanumGothic"/>
-                <a:ea typeface="NanumGothic"/>
-                <a:cs typeface="NanumGothic"/>
-              </a:rPr>
-              <a:t>오케스트레이션과 반복</a:t>
-            </a:r>
-          </a:p>
-        </p:txBody>
-      </p:sp>
-      <p:sp>
-        <p:nvSpPr>
-          <p:cNvPr id="48" name="Rounded Rectangle 47"/>
-          <p:cNvSpPr/>
-          <p:nvPr/>
-        </p:nvSpPr>
-        <p:spPr>
-          <a:xfrm>
-            <a:off x="6217920" y="4855464"/>
-            <a:ext cx="5440680" cy="566928"/>
-          </a:xfrm>
-          <a:prstGeom prst="roundRect">
-            <a:avLst/>
-          </a:prstGeom>
-          <a:solidFill>
-            <a:srgbClr val="F8FAFC"/>
-          </a:solidFill>
-          <a:ln w="12700">
-            <a:solidFill>
-              <a:srgbClr val="E2E8F0"/>
-            </a:solidFill>
-          </a:ln>
-          <a:effectLst/>
-        </p:spPr>
-        <p:style>
-          <a:lnRef idx="1">
-            <a:schemeClr val="accent1"/>
-          </a:lnRef>
-          <a:fillRef idx="3">
-            <a:schemeClr val="accent1"/>
-          </a:fillRef>
-          <a:effectRef idx="2">
-            <a:schemeClr val="accent1"/>
-          </a:effectRef>
-          <a:fontRef idx="minor">
-            <a:schemeClr val="lt1"/>
-          </a:fontRef>
-        </p:style>
-        <p:txBody>
-          <a:bodyPr rtlCol="0" anchor="ctr"/>
-          <a:lstStyle/>
-          <a:p>
-            <a:pPr algn="ctr"/>
-          </a:p>
-        </p:txBody>
-      </p:sp>
-      <p:sp>
-        <p:nvSpPr>
-          <p:cNvPr id="49" name="Oval 48"/>
-          <p:cNvSpPr/>
-          <p:nvPr/>
-        </p:nvSpPr>
-        <p:spPr>
-          <a:xfrm>
-            <a:off x="6364224" y="4974336"/>
-            <a:ext cx="384048" cy="384048"/>
-          </a:xfrm>
-          <a:prstGeom prst="ellipse">
-            <a:avLst/>
-          </a:prstGeom>
-          <a:solidFill>
-            <a:srgbClr val="10B981"/>
-          </a:solidFill>
-          <a:ln>
-            <a:noFill/>
-          </a:ln>
-          <a:effectLst/>
-        </p:spPr>
-        <p:style>
-          <a:lnRef idx="1">
-            <a:schemeClr val="accent1"/>
-          </a:lnRef>
-          <a:fillRef idx="3">
-            <a:schemeClr val="accent1"/>
-          </a:fillRef>
-          <a:effectRef idx="2">
-            <a:schemeClr val="accent1"/>
-          </a:effectRef>
-          <a:fontRef idx="minor">
-            <a:schemeClr val="lt1"/>
-          </a:fontRef>
-        </p:style>
-        <p:txBody>
-          <a:bodyPr rtlCol="0" anchor="ctr"/>
-          <a:lstStyle/>
-          <a:p>
-            <a:pPr algn="ctr"/>
-          </a:p>
-        </p:txBody>
-      </p:sp>
-      <p:sp>
-        <p:nvSpPr>
-          <p:cNvPr id="50" name="TextBox 49"/>
-          <p:cNvSpPr txBox="1"/>
-          <p:nvPr/>
-        </p:nvSpPr>
-        <p:spPr>
-          <a:xfrm>
-            <a:off x="6364224" y="4974336"/>
-            <a:ext cx="384048" cy="384048"/>
-          </a:xfrm>
-          <a:prstGeom prst="rect">
-            <a:avLst/>
-          </a:prstGeom>
-          <a:noFill/>
-        </p:spPr>
-        <p:txBody>
-          <a:bodyPr wrap="square" anchor="ctr" lIns="0" rIns="0" tIns="0" bIns="0">
-            <a:spAutoFit/>
-          </a:bodyPr>
-          <a:lstStyle/>
-          <a:p>
-            <a:pPr algn="ctr">
-              <a:lnSpc>
-                <a:spcPct val="100000"/>
-              </a:lnSpc>
-              <a:spcBef>
-                <a:spcPts val="0"/>
-              </a:spcBef>
-              <a:spcAft>
-                <a:spcPts val="600"/>
-              </a:spcAft>
-            </a:pPr>
-            <a:r>
-              <a:rPr sz="1300" b="1">
-                <a:solidFill>
-                  <a:srgbClr val="FFFFFF"/>
-                </a:solidFill>
-                <a:latin typeface="NanumSquare"/>
-                <a:ea typeface="NanumSquare"/>
-                <a:cs typeface="NanumSquare"/>
-              </a:rPr>
-              <a:t>10</a:t>
-            </a:r>
-          </a:p>
-        </p:txBody>
-      </p:sp>
-      <p:sp>
-        <p:nvSpPr>
-          <p:cNvPr id="51" name="TextBox 50"/>
-          <p:cNvSpPr txBox="1"/>
-          <p:nvPr/>
-        </p:nvSpPr>
-        <p:spPr>
-          <a:xfrm>
-            <a:off x="6931152" y="4855464"/>
-            <a:ext cx="4572000" cy="566928"/>
-          </a:xfrm>
-          <a:prstGeom prst="rect">
-            <a:avLst/>
-          </a:prstGeom>
-          <a:noFill/>
-        </p:spPr>
-        <p:txBody>
-          <a:bodyPr wrap="square" anchor="ctr" lIns="0" rIns="0" tIns="0" bIns="0">
-            <a:spAutoFit/>
-          </a:bodyPr>
-          <a:lstStyle/>
-          <a:p>
-            <a:pPr algn="l">
-              <a:lnSpc>
-                <a:spcPct val="100000"/>
-              </a:lnSpc>
-              <a:spcBef>
-                <a:spcPts val="0"/>
-              </a:spcBef>
-              <a:spcAft>
-                <a:spcPts val="600"/>
-              </a:spcAft>
-            </a:pPr>
-            <a:r>
-              <a:rPr sz="1400" b="1">
-                <a:solidFill>
-                  <a:srgbClr val="0F172A"/>
-                </a:solidFill>
-                <a:latin typeface="NanumGothic"/>
-                <a:ea typeface="NanumGothic"/>
-                <a:cs typeface="NanumGothic"/>
-              </a:rPr>
-              <a:t>팀 구성 &amp; 주제 설정(실습)</a:t>
+              <a:t>팀 구성·주제·기획(실습)</a:t>
             </a:r>
           </a:p>
         </p:txBody>
@@ -11700,7 +11145,7 @@
                 <a:ea typeface="NanumGothic"/>
                 <a:cs typeface="NanumGothic"/>
               </a:rPr>
-              <a:t>복습</a:t>
+              <a:t>연구 프로세스</a:t>
             </a:r>
           </a:p>
         </p:txBody>
@@ -11747,7 +11192,7 @@
                 <a:ea typeface="NanumSquare"/>
                 <a:cs typeface="NanumSquare"/>
               </a:rPr>
-              <a:t>리서치 에이전트, 다시 보기</a:t>
+              <a:t>기존 연구 프로세스 (사람)</a:t>
             </a:r>
           </a:p>
         </p:txBody>
@@ -11892,16 +11337,62 @@
       </p:sp>
       <p:sp>
         <p:nvSpPr>
-          <p:cNvPr id="9" name="Oval 8"/>
+          <p:cNvPr id="9" name="Rounded Rectangle 8"/>
           <p:cNvSpPr/>
           <p:nvPr/>
         </p:nvSpPr>
         <p:spPr>
           <a:xfrm>
-            <a:off x="548640" y="1911096"/>
-            <a:ext cx="146304" cy="146304"/>
-          </a:xfrm>
-          <a:prstGeom prst="ellipse">
+            <a:off x="502920" y="2651760"/>
+            <a:ext cx="1975104" cy="1737360"/>
+          </a:xfrm>
+          <a:prstGeom prst="roundRect">
+            <a:avLst/>
+          </a:prstGeom>
+          <a:solidFill>
+            <a:srgbClr val="F8FAFC"/>
+          </a:solidFill>
+          <a:ln w="12700">
+            <a:solidFill>
+              <a:srgbClr val="E2E8F0"/>
+            </a:solidFill>
+          </a:ln>
+          <a:effectLst/>
+        </p:spPr>
+        <p:style>
+          <a:lnRef idx="1">
+            <a:schemeClr val="accent1"/>
+          </a:lnRef>
+          <a:fillRef idx="3">
+            <a:schemeClr val="accent1"/>
+          </a:fillRef>
+          <a:effectRef idx="2">
+            <a:schemeClr val="accent1"/>
+          </a:effectRef>
+          <a:fontRef idx="minor">
+            <a:schemeClr val="lt1"/>
+          </a:fontRef>
+        </p:style>
+        <p:txBody>
+          <a:bodyPr rtlCol="0" anchor="ctr"/>
+          <a:lstStyle/>
+          <a:p>
+            <a:pPr algn="ctr"/>
+          </a:p>
+        </p:txBody>
+      </p:sp>
+      <p:sp>
+        <p:nvSpPr>
+          <p:cNvPr id="10" name="Rectangle 9"/>
+          <p:cNvSpPr/>
+          <p:nvPr/>
+        </p:nvSpPr>
+        <p:spPr>
+          <a:xfrm>
+            <a:off x="502920" y="2651760"/>
+            <a:ext cx="1975104" cy="109728"/>
+          </a:xfrm>
+          <a:prstGeom prst="rect">
             <a:avLst/>
           </a:prstGeom>
           <a:solidFill>
@@ -11936,14 +11427,14 @@
       </p:sp>
       <p:sp>
         <p:nvSpPr>
-          <p:cNvPr id="10" name="TextBox 9"/>
-          <p:cNvSpPr txBox="1"/>
-          <p:nvPr/>
-        </p:nvSpPr>
-        <p:spPr>
-          <a:xfrm>
-            <a:off x="868680" y="1828800"/>
-            <a:ext cx="10607040" cy="457200"/>
+          <p:cNvPr id="11" name="TextBox 10"/>
+          <p:cNvSpPr txBox="1"/>
+          <p:nvPr/>
+        </p:nvSpPr>
+        <p:spPr>
+          <a:xfrm>
+            <a:off x="640080" y="2944368"/>
+            <a:ext cx="1700784" cy="365760"/>
           </a:xfrm>
           <a:prstGeom prst="rect">
             <a:avLst/>
@@ -11968,7 +11459,54 @@
               </a:spcAft>
             </a:pPr>
             <a:r>
-              <a:rPr sz="1600" b="1">
+              <a:rPr sz="1300" b="1">
+                <a:solidFill>
+                  <a:srgbClr val="10B981"/>
+                </a:solidFill>
+                <a:latin typeface="NanumSquare"/>
+                <a:ea typeface="NanumSquare"/>
+                <a:cs typeface="NanumSquare"/>
+              </a:rPr>
+              <a:t>1</a:t>
+            </a:r>
+          </a:p>
+        </p:txBody>
+      </p:sp>
+      <p:sp>
+        <p:nvSpPr>
+          <p:cNvPr id="12" name="TextBox 11"/>
+          <p:cNvSpPr txBox="1"/>
+          <p:nvPr/>
+        </p:nvSpPr>
+        <p:spPr>
+          <a:xfrm>
+            <a:off x="640080" y="3310128"/>
+            <a:ext cx="1700784" cy="548640"/>
+          </a:xfrm>
+          <a:prstGeom prst="rect">
+            <a:avLst/>
+          </a:prstGeom>
+          <a:noFill/>
+        </p:spPr>
+        <p:txBody>
+          <a:bodyPr wrap="square" anchor="t" lIns="0" rIns="0" tIns="0" bIns="0">
+            <a:spAutoFit/>
+          </a:bodyPr>
+          <a:lstStyle/>
+          <a:p>
+            <a:pPr algn="l">
+              <a:lnSpc>
+                <a:spcPct val="100000"/>
+              </a:lnSpc>
+              <a:spcBef>
+                <a:spcPts val="0"/>
+              </a:spcBef>
+              <a:spcAft>
+                <a:spcPts val="600"/>
+              </a:spcAft>
+            </a:pPr>
+            <a:r>
+              <a:rPr sz="1500" b="1">
                 <a:solidFill>
                   <a:srgbClr val="0F172A"/>
                 </a:solidFill>
@@ -11976,21 +11514,21 @@
                 <a:ea typeface="NanumGothic"/>
                 <a:cs typeface="NanumGothic"/>
               </a:rPr>
-              <a:t>질문→검색→검증→종합→보고</a:t>
-            </a:r>
-          </a:p>
-        </p:txBody>
-      </p:sp>
-      <p:sp>
-        <p:nvSpPr>
-          <p:cNvPr id="11" name="TextBox 10"/>
-          <p:cNvSpPr txBox="1"/>
-          <p:nvPr/>
-        </p:nvSpPr>
-        <p:spPr>
-          <a:xfrm>
-            <a:off x="868680" y="2212848"/>
-            <a:ext cx="10607040" cy="457200"/>
+              <a:t>분야 파악</a:t>
+            </a:r>
+          </a:p>
+        </p:txBody>
+      </p:sp>
+      <p:sp>
+        <p:nvSpPr>
+          <p:cNvPr id="13" name="TextBox 12"/>
+          <p:cNvSpPr txBox="1"/>
+          <p:nvPr/>
+        </p:nvSpPr>
+        <p:spPr>
+          <a:xfrm>
+            <a:off x="640080" y="3822192"/>
+            <a:ext cx="1700784" cy="457200"/>
           </a:xfrm>
           <a:prstGeom prst="rect">
             <a:avLst/>
@@ -12015,7 +11553,7 @@
               </a:spcAft>
             </a:pPr>
             <a:r>
-              <a:rPr sz="1300" b="0">
+              <a:rPr sz="1100" b="0">
                 <a:solidFill>
                   <a:srgbClr val="64748B"/>
                 </a:solidFill>
@@ -12023,23 +11561,116 @@
                 <a:ea typeface="NanumGothic"/>
                 <a:cs typeface="NanumGothic"/>
               </a:rPr>
-              <a:t>Day 2 개괄의 확장</a:t>
-            </a:r>
-          </a:p>
-        </p:txBody>
-      </p:sp>
-      <p:sp>
-        <p:nvSpPr>
-          <p:cNvPr id="12" name="Oval 11"/>
+              <a:t>전체를 훑기</a:t>
+            </a:r>
+          </a:p>
+        </p:txBody>
+      </p:sp>
+      <p:sp>
+        <p:nvSpPr>
+          <p:cNvPr id="14" name="TextBox 13"/>
+          <p:cNvSpPr txBox="1"/>
+          <p:nvPr/>
+        </p:nvSpPr>
+        <p:spPr>
+          <a:xfrm>
+            <a:off x="2523744" y="3154680"/>
+            <a:ext cx="274320" cy="548640"/>
+          </a:xfrm>
+          <a:prstGeom prst="rect">
+            <a:avLst/>
+          </a:prstGeom>
+          <a:noFill/>
+        </p:spPr>
+        <p:txBody>
+          <a:bodyPr wrap="square" anchor="ctr" lIns="0" rIns="0" tIns="0" bIns="0">
+            <a:spAutoFit/>
+          </a:bodyPr>
+          <a:lstStyle/>
+          <a:p>
+            <a:pPr algn="ctr">
+              <a:lnSpc>
+                <a:spcPct val="100000"/>
+              </a:lnSpc>
+              <a:spcBef>
+                <a:spcPts val="0"/>
+              </a:spcBef>
+              <a:spcAft>
+                <a:spcPts val="600"/>
+              </a:spcAft>
+            </a:pPr>
+            <a:r>
+              <a:rPr sz="2200" b="1">
+                <a:solidFill>
+                  <a:srgbClr val="10B981"/>
+                </a:solidFill>
+                <a:latin typeface="NanumSquare"/>
+                <a:ea typeface="NanumSquare"/>
+                <a:cs typeface="NanumSquare"/>
+              </a:rPr>
+              <a:t>→</a:t>
+            </a:r>
+          </a:p>
+        </p:txBody>
+      </p:sp>
+      <p:sp>
+        <p:nvSpPr>
+          <p:cNvPr id="15" name="Rounded Rectangle 14"/>
           <p:cNvSpPr/>
           <p:nvPr/>
         </p:nvSpPr>
         <p:spPr>
           <a:xfrm>
-            <a:off x="548640" y="2779776"/>
-            <a:ext cx="146304" cy="146304"/>
-          </a:xfrm>
-          <a:prstGeom prst="ellipse">
+            <a:off x="2798064" y="2651760"/>
+            <a:ext cx="1975104" cy="1737360"/>
+          </a:xfrm>
+          <a:prstGeom prst="roundRect">
+            <a:avLst/>
+          </a:prstGeom>
+          <a:solidFill>
+            <a:srgbClr val="F8FAFC"/>
+          </a:solidFill>
+          <a:ln w="12700">
+            <a:solidFill>
+              <a:srgbClr val="E2E8F0"/>
+            </a:solidFill>
+          </a:ln>
+          <a:effectLst/>
+        </p:spPr>
+        <p:style>
+          <a:lnRef idx="1">
+            <a:schemeClr val="accent1"/>
+          </a:lnRef>
+          <a:fillRef idx="3">
+            <a:schemeClr val="accent1"/>
+          </a:fillRef>
+          <a:effectRef idx="2">
+            <a:schemeClr val="accent1"/>
+          </a:effectRef>
+          <a:fontRef idx="minor">
+            <a:schemeClr val="lt1"/>
+          </a:fontRef>
+        </p:style>
+        <p:txBody>
+          <a:bodyPr rtlCol="0" anchor="ctr"/>
+          <a:lstStyle/>
+          <a:p>
+            <a:pPr algn="ctr"/>
+          </a:p>
+        </p:txBody>
+      </p:sp>
+      <p:sp>
+        <p:nvSpPr>
+          <p:cNvPr id="16" name="Rectangle 15"/>
+          <p:cNvSpPr/>
+          <p:nvPr/>
+        </p:nvSpPr>
+        <p:spPr>
+          <a:xfrm>
+            <a:off x="2798064" y="2651760"/>
+            <a:ext cx="1975104" cy="109728"/>
+          </a:xfrm>
+          <a:prstGeom prst="rect">
             <a:avLst/>
           </a:prstGeom>
           <a:solidFill>
@@ -12074,14 +11705,14 @@
       </p:sp>
       <p:sp>
         <p:nvSpPr>
-          <p:cNvPr id="13" name="TextBox 12"/>
-          <p:cNvSpPr txBox="1"/>
-          <p:nvPr/>
-        </p:nvSpPr>
-        <p:spPr>
-          <a:xfrm>
-            <a:off x="868680" y="2697480"/>
-            <a:ext cx="10607040" cy="457200"/>
+          <p:cNvPr id="17" name="TextBox 16"/>
+          <p:cNvSpPr txBox="1"/>
+          <p:nvPr/>
+        </p:nvSpPr>
+        <p:spPr>
+          <a:xfrm>
+            <a:off x="2935224" y="2944368"/>
+            <a:ext cx="1700784" cy="365760"/>
           </a:xfrm>
           <a:prstGeom prst="rect">
             <a:avLst/>
@@ -12106,7 +11737,54 @@
               </a:spcAft>
             </a:pPr>
             <a:r>
-              <a:rPr sz="1600" b="1">
+              <a:rPr sz="1300" b="1">
+                <a:solidFill>
+                  <a:srgbClr val="10B981"/>
+                </a:solidFill>
+                <a:latin typeface="NanumSquare"/>
+                <a:ea typeface="NanumSquare"/>
+                <a:cs typeface="NanumSquare"/>
+              </a:rPr>
+              <a:t>2</a:t>
+            </a:r>
+          </a:p>
+        </p:txBody>
+      </p:sp>
+      <p:sp>
+        <p:nvSpPr>
+          <p:cNvPr id="18" name="TextBox 17"/>
+          <p:cNvSpPr txBox="1"/>
+          <p:nvPr/>
+        </p:nvSpPr>
+        <p:spPr>
+          <a:xfrm>
+            <a:off x="2935224" y="3310128"/>
+            <a:ext cx="1700784" cy="548640"/>
+          </a:xfrm>
+          <a:prstGeom prst="rect">
+            <a:avLst/>
+          </a:prstGeom>
+          <a:noFill/>
+        </p:spPr>
+        <p:txBody>
+          <a:bodyPr wrap="square" anchor="t" lIns="0" rIns="0" tIns="0" bIns="0">
+            <a:spAutoFit/>
+          </a:bodyPr>
+          <a:lstStyle/>
+          <a:p>
+            <a:pPr algn="l">
+              <a:lnSpc>
+                <a:spcPct val="100000"/>
+              </a:lnSpc>
+              <a:spcBef>
+                <a:spcPts val="0"/>
+              </a:spcBef>
+              <a:spcAft>
+                <a:spcPts val="600"/>
+              </a:spcAft>
+            </a:pPr>
+            <a:r>
+              <a:rPr sz="1500" b="1">
                 <a:solidFill>
                   <a:srgbClr val="0F172A"/>
                 </a:solidFill>
@@ -12114,21 +11792,21 @@
                 <a:ea typeface="NanumGothic"/>
                 <a:cs typeface="NanumGothic"/>
               </a:rPr>
-              <a:t>왜 강력한가</a:t>
-            </a:r>
-          </a:p>
-        </p:txBody>
-      </p:sp>
-      <p:sp>
-        <p:nvSpPr>
-          <p:cNvPr id="14" name="TextBox 13"/>
-          <p:cNvSpPr txBox="1"/>
-          <p:nvPr/>
-        </p:nvSpPr>
-        <p:spPr>
-          <a:xfrm>
-            <a:off x="868680" y="3081528"/>
-            <a:ext cx="10607040" cy="457200"/>
+              <a:t>관심 좁히기</a:t>
+            </a:r>
+          </a:p>
+        </p:txBody>
+      </p:sp>
+      <p:sp>
+        <p:nvSpPr>
+          <p:cNvPr id="19" name="TextBox 18"/>
+          <p:cNvSpPr txBox="1"/>
+          <p:nvPr/>
+        </p:nvSpPr>
+        <p:spPr>
+          <a:xfrm>
+            <a:off x="2935224" y="3822192"/>
+            <a:ext cx="1700784" cy="457200"/>
           </a:xfrm>
           <a:prstGeom prst="rect">
             <a:avLst/>
@@ -12153,7 +11831,7 @@
               </a:spcAft>
             </a:pPr>
             <a:r>
-              <a:rPr sz="1300" b="0">
+              <a:rPr sz="1100" b="0">
                 <a:solidFill>
                   <a:srgbClr val="64748B"/>
                 </a:solidFill>
@@ -12161,23 +11839,116 @@
                 <a:ea typeface="NanumGothic"/>
                 <a:cs typeface="NanumGothic"/>
               </a:rPr>
-              <a:t>사람보다 넓게·빠르게 탐색</a:t>
-            </a:r>
-          </a:p>
-        </p:txBody>
-      </p:sp>
-      <p:sp>
-        <p:nvSpPr>
-          <p:cNvPr id="15" name="Oval 14"/>
+              <a:t>세부 주제</a:t>
+            </a:r>
+          </a:p>
+        </p:txBody>
+      </p:sp>
+      <p:sp>
+        <p:nvSpPr>
+          <p:cNvPr id="20" name="TextBox 19"/>
+          <p:cNvSpPr txBox="1"/>
+          <p:nvPr/>
+        </p:nvSpPr>
+        <p:spPr>
+          <a:xfrm>
+            <a:off x="4818888" y="3154680"/>
+            <a:ext cx="274320" cy="548640"/>
+          </a:xfrm>
+          <a:prstGeom prst="rect">
+            <a:avLst/>
+          </a:prstGeom>
+          <a:noFill/>
+        </p:spPr>
+        <p:txBody>
+          <a:bodyPr wrap="square" anchor="ctr" lIns="0" rIns="0" tIns="0" bIns="0">
+            <a:spAutoFit/>
+          </a:bodyPr>
+          <a:lstStyle/>
+          <a:p>
+            <a:pPr algn="ctr">
+              <a:lnSpc>
+                <a:spcPct val="100000"/>
+              </a:lnSpc>
+              <a:spcBef>
+                <a:spcPts val="0"/>
+              </a:spcBef>
+              <a:spcAft>
+                <a:spcPts val="600"/>
+              </a:spcAft>
+            </a:pPr>
+            <a:r>
+              <a:rPr sz="2200" b="1">
+                <a:solidFill>
+                  <a:srgbClr val="10B981"/>
+                </a:solidFill>
+                <a:latin typeface="NanumSquare"/>
+                <a:ea typeface="NanumSquare"/>
+                <a:cs typeface="NanumSquare"/>
+              </a:rPr>
+              <a:t>→</a:t>
+            </a:r>
+          </a:p>
+        </p:txBody>
+      </p:sp>
+      <p:sp>
+        <p:nvSpPr>
+          <p:cNvPr id="21" name="Rounded Rectangle 20"/>
           <p:cNvSpPr/>
           <p:nvPr/>
         </p:nvSpPr>
         <p:spPr>
           <a:xfrm>
-            <a:off x="548640" y="3648456"/>
-            <a:ext cx="146304" cy="146304"/>
-          </a:xfrm>
-          <a:prstGeom prst="ellipse">
+            <a:off x="5093208" y="2651760"/>
+            <a:ext cx="1975104" cy="1737360"/>
+          </a:xfrm>
+          <a:prstGeom prst="roundRect">
+            <a:avLst/>
+          </a:prstGeom>
+          <a:solidFill>
+            <a:srgbClr val="F8FAFC"/>
+          </a:solidFill>
+          <a:ln w="12700">
+            <a:solidFill>
+              <a:srgbClr val="E2E8F0"/>
+            </a:solidFill>
+          </a:ln>
+          <a:effectLst/>
+        </p:spPr>
+        <p:style>
+          <a:lnRef idx="1">
+            <a:schemeClr val="accent1"/>
+          </a:lnRef>
+          <a:fillRef idx="3">
+            <a:schemeClr val="accent1"/>
+          </a:fillRef>
+          <a:effectRef idx="2">
+            <a:schemeClr val="accent1"/>
+          </a:effectRef>
+          <a:fontRef idx="minor">
+            <a:schemeClr val="lt1"/>
+          </a:fontRef>
+        </p:style>
+        <p:txBody>
+          <a:bodyPr rtlCol="0" anchor="ctr"/>
+          <a:lstStyle/>
+          <a:p>
+            <a:pPr algn="ctr"/>
+          </a:p>
+        </p:txBody>
+      </p:sp>
+      <p:sp>
+        <p:nvSpPr>
+          <p:cNvPr id="22" name="Rectangle 21"/>
+          <p:cNvSpPr/>
+          <p:nvPr/>
+        </p:nvSpPr>
+        <p:spPr>
+          <a:xfrm>
+            <a:off x="5093208" y="2651760"/>
+            <a:ext cx="1975104" cy="109728"/>
+          </a:xfrm>
+          <a:prstGeom prst="rect">
             <a:avLst/>
           </a:prstGeom>
           <a:solidFill>
@@ -12212,14 +11983,14 @@
       </p:sp>
       <p:sp>
         <p:nvSpPr>
-          <p:cNvPr id="16" name="TextBox 15"/>
-          <p:cNvSpPr txBox="1"/>
-          <p:nvPr/>
-        </p:nvSpPr>
-        <p:spPr>
-          <a:xfrm>
-            <a:off x="868680" y="3566160"/>
-            <a:ext cx="10607040" cy="457200"/>
+          <p:cNvPr id="23" name="TextBox 22"/>
+          <p:cNvSpPr txBox="1"/>
+          <p:nvPr/>
+        </p:nvSpPr>
+        <p:spPr>
+          <a:xfrm>
+            <a:off x="5230368" y="2944368"/>
+            <a:ext cx="1700784" cy="365760"/>
           </a:xfrm>
           <a:prstGeom prst="rect">
             <a:avLst/>
@@ -12244,7 +12015,54 @@
               </a:spcAft>
             </a:pPr>
             <a:r>
-              <a:rPr sz="1600" b="1">
+              <a:rPr sz="1300" b="1">
+                <a:solidFill>
+                  <a:srgbClr val="10B981"/>
+                </a:solidFill>
+                <a:latin typeface="NanumSquare"/>
+                <a:ea typeface="NanumSquare"/>
+                <a:cs typeface="NanumSquare"/>
+              </a:rPr>
+              <a:t>3</a:t>
+            </a:r>
+          </a:p>
+        </p:txBody>
+      </p:sp>
+      <p:sp>
+        <p:nvSpPr>
+          <p:cNvPr id="24" name="TextBox 23"/>
+          <p:cNvSpPr txBox="1"/>
+          <p:nvPr/>
+        </p:nvSpPr>
+        <p:spPr>
+          <a:xfrm>
+            <a:off x="5230368" y="3310128"/>
+            <a:ext cx="1700784" cy="548640"/>
+          </a:xfrm>
+          <a:prstGeom prst="rect">
+            <a:avLst/>
+          </a:prstGeom>
+          <a:noFill/>
+        </p:spPr>
+        <p:txBody>
+          <a:bodyPr wrap="square" anchor="t" lIns="0" rIns="0" tIns="0" bIns="0">
+            <a:spAutoFit/>
+          </a:bodyPr>
+          <a:lstStyle/>
+          <a:p>
+            <a:pPr algn="l">
+              <a:lnSpc>
+                <a:spcPct val="100000"/>
+              </a:lnSpc>
+              <a:spcBef>
+                <a:spcPts val="0"/>
+              </a:spcBef>
+              <a:spcAft>
+                <a:spcPts val="600"/>
+              </a:spcAft>
+            </a:pPr>
+            <a:r>
+              <a:rPr sz="1500" b="1">
                 <a:solidFill>
                   <a:srgbClr val="0F172A"/>
                 </a:solidFill>
@@ -12252,21 +12070,21 @@
                 <a:ea typeface="NanumGothic"/>
                 <a:cs typeface="NanumGothic"/>
               </a:rPr>
-              <a:t>오늘 목표</a:t>
-            </a:r>
-          </a:p>
-        </p:txBody>
-      </p:sp>
-      <p:sp>
-        <p:nvSpPr>
-          <p:cNvPr id="17" name="TextBox 16"/>
-          <p:cNvSpPr txBox="1"/>
-          <p:nvPr/>
-        </p:nvSpPr>
-        <p:spPr>
-          <a:xfrm>
-            <a:off x="868680" y="3950208"/>
-            <a:ext cx="10607040" cy="457200"/>
+              <a:t>문헌 선별·검증</a:t>
+            </a:r>
+          </a:p>
+        </p:txBody>
+      </p:sp>
+      <p:sp>
+        <p:nvSpPr>
+          <p:cNvPr id="25" name="TextBox 24"/>
+          <p:cNvSpPr txBox="1"/>
+          <p:nvPr/>
+        </p:nvSpPr>
+        <p:spPr>
+          <a:xfrm>
+            <a:off x="5230368" y="3822192"/>
+            <a:ext cx="1700784" cy="457200"/>
           </a:xfrm>
           <a:prstGeom prst="rect">
             <a:avLst/>
@@ -12291,7 +12109,7 @@
               </a:spcAft>
             </a:pPr>
             <a:r>
-              <a:rPr sz="1300" b="0">
+              <a:rPr sz="1100" b="0">
                 <a:solidFill>
                   <a:srgbClr val="64748B"/>
                 </a:solidFill>
@@ -12299,7 +12117,667 @@
                 <a:ea typeface="NanumGothic"/>
                 <a:cs typeface="NanumGothic"/>
               </a:rPr>
-              <a:t>각 단계 이해 + 팀 주제 확정</a:t>
+              <a:t>선별 → 비판적 읽기</a:t>
+            </a:r>
+          </a:p>
+        </p:txBody>
+      </p:sp>
+      <p:sp>
+        <p:nvSpPr>
+          <p:cNvPr id="26" name="TextBox 25"/>
+          <p:cNvSpPr txBox="1"/>
+          <p:nvPr/>
+        </p:nvSpPr>
+        <p:spPr>
+          <a:xfrm>
+            <a:off x="7114032" y="3154680"/>
+            <a:ext cx="274320" cy="548640"/>
+          </a:xfrm>
+          <a:prstGeom prst="rect">
+            <a:avLst/>
+          </a:prstGeom>
+          <a:noFill/>
+        </p:spPr>
+        <p:txBody>
+          <a:bodyPr wrap="square" anchor="ctr" lIns="0" rIns="0" tIns="0" bIns="0">
+            <a:spAutoFit/>
+          </a:bodyPr>
+          <a:lstStyle/>
+          <a:p>
+            <a:pPr algn="ctr">
+              <a:lnSpc>
+                <a:spcPct val="100000"/>
+              </a:lnSpc>
+              <a:spcBef>
+                <a:spcPts val="0"/>
+              </a:spcBef>
+              <a:spcAft>
+                <a:spcPts val="600"/>
+              </a:spcAft>
+            </a:pPr>
+            <a:r>
+              <a:rPr sz="2200" b="1">
+                <a:solidFill>
+                  <a:srgbClr val="10B981"/>
+                </a:solidFill>
+                <a:latin typeface="NanumSquare"/>
+                <a:ea typeface="NanumSquare"/>
+                <a:cs typeface="NanumSquare"/>
+              </a:rPr>
+              <a:t>→</a:t>
+            </a:r>
+          </a:p>
+        </p:txBody>
+      </p:sp>
+      <p:sp>
+        <p:nvSpPr>
+          <p:cNvPr id="27" name="Rounded Rectangle 26"/>
+          <p:cNvSpPr/>
+          <p:nvPr/>
+        </p:nvSpPr>
+        <p:spPr>
+          <a:xfrm>
+            <a:off x="7388352" y="2651760"/>
+            <a:ext cx="1975104" cy="1737360"/>
+          </a:xfrm>
+          <a:prstGeom prst="roundRect">
+            <a:avLst/>
+          </a:prstGeom>
+          <a:solidFill>
+            <a:srgbClr val="F8FAFC"/>
+          </a:solidFill>
+          <a:ln w="12700">
+            <a:solidFill>
+              <a:srgbClr val="E2E8F0"/>
+            </a:solidFill>
+          </a:ln>
+          <a:effectLst/>
+        </p:spPr>
+        <p:style>
+          <a:lnRef idx="1">
+            <a:schemeClr val="accent1"/>
+          </a:lnRef>
+          <a:fillRef idx="3">
+            <a:schemeClr val="accent1"/>
+          </a:fillRef>
+          <a:effectRef idx="2">
+            <a:schemeClr val="accent1"/>
+          </a:effectRef>
+          <a:fontRef idx="minor">
+            <a:schemeClr val="lt1"/>
+          </a:fontRef>
+        </p:style>
+        <p:txBody>
+          <a:bodyPr rtlCol="0" anchor="ctr"/>
+          <a:lstStyle/>
+          <a:p>
+            <a:pPr algn="ctr"/>
+          </a:p>
+        </p:txBody>
+      </p:sp>
+      <p:sp>
+        <p:nvSpPr>
+          <p:cNvPr id="28" name="Rectangle 27"/>
+          <p:cNvSpPr/>
+          <p:nvPr/>
+        </p:nvSpPr>
+        <p:spPr>
+          <a:xfrm>
+            <a:off x="7388352" y="2651760"/>
+            <a:ext cx="1975104" cy="109728"/>
+          </a:xfrm>
+          <a:prstGeom prst="rect">
+            <a:avLst/>
+          </a:prstGeom>
+          <a:solidFill>
+            <a:srgbClr val="10B981"/>
+          </a:solidFill>
+          <a:ln>
+            <a:noFill/>
+          </a:ln>
+          <a:effectLst/>
+        </p:spPr>
+        <p:style>
+          <a:lnRef idx="1">
+            <a:schemeClr val="accent1"/>
+          </a:lnRef>
+          <a:fillRef idx="3">
+            <a:schemeClr val="accent1"/>
+          </a:fillRef>
+          <a:effectRef idx="2">
+            <a:schemeClr val="accent1"/>
+          </a:effectRef>
+          <a:fontRef idx="minor">
+            <a:schemeClr val="lt1"/>
+          </a:fontRef>
+        </p:style>
+        <p:txBody>
+          <a:bodyPr rtlCol="0" anchor="ctr"/>
+          <a:lstStyle/>
+          <a:p>
+            <a:pPr algn="ctr"/>
+          </a:p>
+        </p:txBody>
+      </p:sp>
+      <p:sp>
+        <p:nvSpPr>
+          <p:cNvPr id="29" name="TextBox 28"/>
+          <p:cNvSpPr txBox="1"/>
+          <p:nvPr/>
+        </p:nvSpPr>
+        <p:spPr>
+          <a:xfrm>
+            <a:off x="7525512" y="2944368"/>
+            <a:ext cx="1700784" cy="365760"/>
+          </a:xfrm>
+          <a:prstGeom prst="rect">
+            <a:avLst/>
+          </a:prstGeom>
+          <a:noFill/>
+        </p:spPr>
+        <p:txBody>
+          <a:bodyPr wrap="square" anchor="t" lIns="0" rIns="0" tIns="0" bIns="0">
+            <a:spAutoFit/>
+          </a:bodyPr>
+          <a:lstStyle/>
+          <a:p>
+            <a:pPr algn="l">
+              <a:lnSpc>
+                <a:spcPct val="100000"/>
+              </a:lnSpc>
+              <a:spcBef>
+                <a:spcPts val="0"/>
+              </a:spcBef>
+              <a:spcAft>
+                <a:spcPts val="600"/>
+              </a:spcAft>
+            </a:pPr>
+            <a:r>
+              <a:rPr sz="1300" b="1">
+                <a:solidFill>
+                  <a:srgbClr val="10B981"/>
+                </a:solidFill>
+                <a:latin typeface="NanumSquare"/>
+                <a:ea typeface="NanumSquare"/>
+                <a:cs typeface="NanumSquare"/>
+              </a:rPr>
+              <a:t>4</a:t>
+            </a:r>
+          </a:p>
+        </p:txBody>
+      </p:sp>
+      <p:sp>
+        <p:nvSpPr>
+          <p:cNvPr id="30" name="TextBox 29"/>
+          <p:cNvSpPr txBox="1"/>
+          <p:nvPr/>
+        </p:nvSpPr>
+        <p:spPr>
+          <a:xfrm>
+            <a:off x="7525512" y="3310128"/>
+            <a:ext cx="1700784" cy="548640"/>
+          </a:xfrm>
+          <a:prstGeom prst="rect">
+            <a:avLst/>
+          </a:prstGeom>
+          <a:noFill/>
+        </p:spPr>
+        <p:txBody>
+          <a:bodyPr wrap="square" anchor="t" lIns="0" rIns="0" tIns="0" bIns="0">
+            <a:spAutoFit/>
+          </a:bodyPr>
+          <a:lstStyle/>
+          <a:p>
+            <a:pPr algn="l">
+              <a:lnSpc>
+                <a:spcPct val="100000"/>
+              </a:lnSpc>
+              <a:spcBef>
+                <a:spcPts val="0"/>
+              </a:spcBef>
+              <a:spcAft>
+                <a:spcPts val="600"/>
+              </a:spcAft>
+            </a:pPr>
+            <a:r>
+              <a:rPr sz="1500" b="1">
+                <a:solidFill>
+                  <a:srgbClr val="0F172A"/>
+                </a:solidFill>
+                <a:latin typeface="NanumGothic"/>
+                <a:ea typeface="NanumGothic"/>
+                <a:cs typeface="NanumGothic"/>
+              </a:rPr>
+              <a:t>가설 수립</a:t>
+            </a:r>
+          </a:p>
+        </p:txBody>
+      </p:sp>
+      <p:sp>
+        <p:nvSpPr>
+          <p:cNvPr id="31" name="TextBox 30"/>
+          <p:cNvSpPr txBox="1"/>
+          <p:nvPr/>
+        </p:nvSpPr>
+        <p:spPr>
+          <a:xfrm>
+            <a:off x="7525512" y="3822192"/>
+            <a:ext cx="1700784" cy="457200"/>
+          </a:xfrm>
+          <a:prstGeom prst="rect">
+            <a:avLst/>
+          </a:prstGeom>
+          <a:noFill/>
+        </p:spPr>
+        <p:txBody>
+          <a:bodyPr wrap="square" anchor="t" lIns="0" rIns="0" tIns="0" bIns="0">
+            <a:spAutoFit/>
+          </a:bodyPr>
+          <a:lstStyle/>
+          <a:p>
+            <a:pPr algn="l">
+              <a:lnSpc>
+                <a:spcPct val="100000"/>
+              </a:lnSpc>
+              <a:spcBef>
+                <a:spcPts val="0"/>
+              </a:spcBef>
+              <a:spcAft>
+                <a:spcPts val="600"/>
+              </a:spcAft>
+            </a:pPr>
+            <a:r>
+              <a:rPr sz="1100" b="0">
+                <a:solidFill>
+                  <a:srgbClr val="64748B"/>
+                </a:solidFill>
+                <a:latin typeface="NanumGothic"/>
+                <a:ea typeface="NanumGothic"/>
+                <a:cs typeface="NanumGothic"/>
+              </a:rPr>
+              <a:t>gap·보완</a:t>
+            </a:r>
+          </a:p>
+        </p:txBody>
+      </p:sp>
+      <p:sp>
+        <p:nvSpPr>
+          <p:cNvPr id="32" name="TextBox 31"/>
+          <p:cNvSpPr txBox="1"/>
+          <p:nvPr/>
+        </p:nvSpPr>
+        <p:spPr>
+          <a:xfrm>
+            <a:off x="9409176" y="3154680"/>
+            <a:ext cx="274320" cy="548640"/>
+          </a:xfrm>
+          <a:prstGeom prst="rect">
+            <a:avLst/>
+          </a:prstGeom>
+          <a:noFill/>
+        </p:spPr>
+        <p:txBody>
+          <a:bodyPr wrap="square" anchor="ctr" lIns="0" rIns="0" tIns="0" bIns="0">
+            <a:spAutoFit/>
+          </a:bodyPr>
+          <a:lstStyle/>
+          <a:p>
+            <a:pPr algn="ctr">
+              <a:lnSpc>
+                <a:spcPct val="100000"/>
+              </a:lnSpc>
+              <a:spcBef>
+                <a:spcPts val="0"/>
+              </a:spcBef>
+              <a:spcAft>
+                <a:spcPts val="600"/>
+              </a:spcAft>
+            </a:pPr>
+            <a:r>
+              <a:rPr sz="2200" b="1">
+                <a:solidFill>
+                  <a:srgbClr val="10B981"/>
+                </a:solidFill>
+                <a:latin typeface="NanumSquare"/>
+                <a:ea typeface="NanumSquare"/>
+                <a:cs typeface="NanumSquare"/>
+              </a:rPr>
+              <a:t>→</a:t>
+            </a:r>
+          </a:p>
+        </p:txBody>
+      </p:sp>
+      <p:sp>
+        <p:nvSpPr>
+          <p:cNvPr id="33" name="Rounded Rectangle 32"/>
+          <p:cNvSpPr/>
+          <p:nvPr/>
+        </p:nvSpPr>
+        <p:spPr>
+          <a:xfrm>
+            <a:off x="9683496" y="2651760"/>
+            <a:ext cx="1975104" cy="1737360"/>
+          </a:xfrm>
+          <a:prstGeom prst="roundRect">
+            <a:avLst/>
+          </a:prstGeom>
+          <a:solidFill>
+            <a:srgbClr val="F8FAFC"/>
+          </a:solidFill>
+          <a:ln w="12700">
+            <a:solidFill>
+              <a:srgbClr val="E2E8F0"/>
+            </a:solidFill>
+          </a:ln>
+          <a:effectLst/>
+        </p:spPr>
+        <p:style>
+          <a:lnRef idx="1">
+            <a:schemeClr val="accent1"/>
+          </a:lnRef>
+          <a:fillRef idx="3">
+            <a:schemeClr val="accent1"/>
+          </a:fillRef>
+          <a:effectRef idx="2">
+            <a:schemeClr val="accent1"/>
+          </a:effectRef>
+          <a:fontRef idx="minor">
+            <a:schemeClr val="lt1"/>
+          </a:fontRef>
+        </p:style>
+        <p:txBody>
+          <a:bodyPr rtlCol="0" anchor="ctr"/>
+          <a:lstStyle/>
+          <a:p>
+            <a:pPr algn="ctr"/>
+          </a:p>
+        </p:txBody>
+      </p:sp>
+      <p:sp>
+        <p:nvSpPr>
+          <p:cNvPr id="34" name="Rectangle 33"/>
+          <p:cNvSpPr/>
+          <p:nvPr/>
+        </p:nvSpPr>
+        <p:spPr>
+          <a:xfrm>
+            <a:off x="9683496" y="2651760"/>
+            <a:ext cx="1975104" cy="109728"/>
+          </a:xfrm>
+          <a:prstGeom prst="rect">
+            <a:avLst/>
+          </a:prstGeom>
+          <a:solidFill>
+            <a:srgbClr val="10B981"/>
+          </a:solidFill>
+          <a:ln>
+            <a:noFill/>
+          </a:ln>
+          <a:effectLst/>
+        </p:spPr>
+        <p:style>
+          <a:lnRef idx="1">
+            <a:schemeClr val="accent1"/>
+          </a:lnRef>
+          <a:fillRef idx="3">
+            <a:schemeClr val="accent1"/>
+          </a:fillRef>
+          <a:effectRef idx="2">
+            <a:schemeClr val="accent1"/>
+          </a:effectRef>
+          <a:fontRef idx="minor">
+            <a:schemeClr val="lt1"/>
+          </a:fontRef>
+        </p:style>
+        <p:txBody>
+          <a:bodyPr rtlCol="0" anchor="ctr"/>
+          <a:lstStyle/>
+          <a:p>
+            <a:pPr algn="ctr"/>
+          </a:p>
+        </p:txBody>
+      </p:sp>
+      <p:sp>
+        <p:nvSpPr>
+          <p:cNvPr id="35" name="TextBox 34"/>
+          <p:cNvSpPr txBox="1"/>
+          <p:nvPr/>
+        </p:nvSpPr>
+        <p:spPr>
+          <a:xfrm>
+            <a:off x="9820656" y="2944368"/>
+            <a:ext cx="1700784" cy="365760"/>
+          </a:xfrm>
+          <a:prstGeom prst="rect">
+            <a:avLst/>
+          </a:prstGeom>
+          <a:noFill/>
+        </p:spPr>
+        <p:txBody>
+          <a:bodyPr wrap="square" anchor="t" lIns="0" rIns="0" tIns="0" bIns="0">
+            <a:spAutoFit/>
+          </a:bodyPr>
+          <a:lstStyle/>
+          <a:p>
+            <a:pPr algn="l">
+              <a:lnSpc>
+                <a:spcPct val="100000"/>
+              </a:lnSpc>
+              <a:spcBef>
+                <a:spcPts val="0"/>
+              </a:spcBef>
+              <a:spcAft>
+                <a:spcPts val="600"/>
+              </a:spcAft>
+            </a:pPr>
+            <a:r>
+              <a:rPr sz="1300" b="1">
+                <a:solidFill>
+                  <a:srgbClr val="10B981"/>
+                </a:solidFill>
+                <a:latin typeface="NanumSquare"/>
+                <a:ea typeface="NanumSquare"/>
+                <a:cs typeface="NanumSquare"/>
+              </a:rPr>
+              <a:t>5</a:t>
+            </a:r>
+          </a:p>
+        </p:txBody>
+      </p:sp>
+      <p:sp>
+        <p:nvSpPr>
+          <p:cNvPr id="36" name="TextBox 35"/>
+          <p:cNvSpPr txBox="1"/>
+          <p:nvPr/>
+        </p:nvSpPr>
+        <p:spPr>
+          <a:xfrm>
+            <a:off x="9820656" y="3310128"/>
+            <a:ext cx="1700784" cy="548640"/>
+          </a:xfrm>
+          <a:prstGeom prst="rect">
+            <a:avLst/>
+          </a:prstGeom>
+          <a:noFill/>
+        </p:spPr>
+        <p:txBody>
+          <a:bodyPr wrap="square" anchor="t" lIns="0" rIns="0" tIns="0" bIns="0">
+            <a:spAutoFit/>
+          </a:bodyPr>
+          <a:lstStyle/>
+          <a:p>
+            <a:pPr algn="l">
+              <a:lnSpc>
+                <a:spcPct val="100000"/>
+              </a:lnSpc>
+              <a:spcBef>
+                <a:spcPts val="0"/>
+              </a:spcBef>
+              <a:spcAft>
+                <a:spcPts val="600"/>
+              </a:spcAft>
+            </a:pPr>
+            <a:r>
+              <a:rPr sz="1500" b="1">
+                <a:solidFill>
+                  <a:srgbClr val="0F172A"/>
+                </a:solidFill>
+                <a:latin typeface="NanumGothic"/>
+                <a:ea typeface="NanumGothic"/>
+                <a:cs typeface="NanumGothic"/>
+              </a:rPr>
+              <a:t>우선순위·검증</a:t>
+            </a:r>
+          </a:p>
+        </p:txBody>
+      </p:sp>
+      <p:sp>
+        <p:nvSpPr>
+          <p:cNvPr id="37" name="TextBox 36"/>
+          <p:cNvSpPr txBox="1"/>
+          <p:nvPr/>
+        </p:nvSpPr>
+        <p:spPr>
+          <a:xfrm>
+            <a:off x="9820656" y="3822192"/>
+            <a:ext cx="1700784" cy="457200"/>
+          </a:xfrm>
+          <a:prstGeom prst="rect">
+            <a:avLst/>
+          </a:prstGeom>
+          <a:noFill/>
+        </p:spPr>
+        <p:txBody>
+          <a:bodyPr wrap="square" anchor="t" lIns="0" rIns="0" tIns="0" bIns="0">
+            <a:spAutoFit/>
+          </a:bodyPr>
+          <a:lstStyle/>
+          <a:p>
+            <a:pPr algn="l">
+              <a:lnSpc>
+                <a:spcPct val="100000"/>
+              </a:lnSpc>
+              <a:spcBef>
+                <a:spcPts val="0"/>
+              </a:spcBef>
+              <a:spcAft>
+                <a:spcPts val="600"/>
+              </a:spcAft>
+            </a:pPr>
+            <a:r>
+              <a:rPr sz="1100" b="0">
+                <a:solidFill>
+                  <a:srgbClr val="64748B"/>
+                </a:solidFill>
+                <a:latin typeface="NanumGothic"/>
+                <a:ea typeface="NanumGothic"/>
+                <a:cs typeface="NanumGothic"/>
+              </a:rPr>
+              <a:t>높은 것부터</a:t>
+            </a:r>
+          </a:p>
+        </p:txBody>
+      </p:sp>
+      <p:sp>
+        <p:nvSpPr>
+          <p:cNvPr id="38" name="Rounded Rectangle 37"/>
+          <p:cNvSpPr/>
+          <p:nvPr/>
+        </p:nvSpPr>
+        <p:spPr>
+          <a:xfrm>
+            <a:off x="502920" y="5029200"/>
+            <a:ext cx="11155680" cy="658368"/>
+          </a:xfrm>
+          <a:prstGeom prst="roundRect">
+            <a:avLst/>
+          </a:prstGeom>
+          <a:solidFill>
+            <a:srgbClr val="F1F5F9"/>
+          </a:solidFill>
+          <a:ln w="12700">
+            <a:solidFill>
+              <a:srgbClr val="E2E8F0"/>
+            </a:solidFill>
+          </a:ln>
+          <a:effectLst/>
+        </p:spPr>
+        <p:style>
+          <a:lnRef idx="1">
+            <a:schemeClr val="accent1"/>
+          </a:lnRef>
+          <a:fillRef idx="3">
+            <a:schemeClr val="accent1"/>
+          </a:fillRef>
+          <a:effectRef idx="2">
+            <a:schemeClr val="accent1"/>
+          </a:effectRef>
+          <a:fontRef idx="minor">
+            <a:schemeClr val="lt1"/>
+          </a:fontRef>
+        </p:style>
+        <p:txBody>
+          <a:bodyPr rtlCol="0" anchor="ctr"/>
+          <a:lstStyle/>
+          <a:p>
+            <a:pPr algn="ctr"/>
+          </a:p>
+        </p:txBody>
+      </p:sp>
+      <p:sp>
+        <p:nvSpPr>
+          <p:cNvPr id="39" name="TextBox 38"/>
+          <p:cNvSpPr txBox="1"/>
+          <p:nvPr/>
+        </p:nvSpPr>
+        <p:spPr>
+          <a:xfrm>
+            <a:off x="777240" y="5029200"/>
+            <a:ext cx="10607040" cy="658368"/>
+          </a:xfrm>
+          <a:prstGeom prst="rect">
+            <a:avLst/>
+          </a:prstGeom>
+          <a:noFill/>
+        </p:spPr>
+        <p:txBody>
+          <a:bodyPr wrap="square" anchor="ctr" lIns="0" rIns="0" tIns="0" bIns="0">
+            <a:spAutoFit/>
+          </a:bodyPr>
+          <a:lstStyle/>
+          <a:p>
+            <a:pPr algn="l">
+              <a:lnSpc>
+                <a:spcPct val="100000"/>
+              </a:lnSpc>
+              <a:spcBef>
+                <a:spcPts val="0"/>
+              </a:spcBef>
+              <a:spcAft>
+                <a:spcPts val="600"/>
+              </a:spcAft>
+            </a:pPr>
+            <a:r>
+              <a:rPr sz="1200" b="1">
+                <a:solidFill>
+                  <a:srgbClr val="10B981"/>
+                </a:solidFill>
+                <a:latin typeface="NanumGothic"/>
+                <a:ea typeface="NanumGothic"/>
+                <a:cs typeface="NanumGothic"/>
+              </a:rPr>
+              <a:t>NOTE   </a:t>
+            </a:r>
+            <a:r>
+              <a:rPr sz="1300" b="0">
+                <a:solidFill>
+                  <a:srgbClr val="0F172A"/>
+                </a:solidFill>
+                <a:latin typeface="NanumGothic"/>
+                <a:ea typeface="NanumGothic"/>
+                <a:cs typeface="NanumGothic"/>
+              </a:rPr>
+              <a:t>현실은 선형이 아니라 반복 — '재현'은 비싸서 보통 '검증'에 가깝다</a:t>
             </a:r>
           </a:p>
         </p:txBody>
@@ -12452,7 +12930,7 @@
                 <a:ea typeface="NanumGothic"/>
                 <a:cs typeface="NanumGothic"/>
               </a:rPr>
-              <a:t>아키텍처</a:t>
+              <a:t>agentic</a:t>
             </a:r>
           </a:p>
         </p:txBody>
@@ -12499,7 +12977,7 @@
                 <a:ea typeface="NanumSquare"/>
                 <a:cs typeface="NanumSquare"/>
               </a:rPr>
-              <a:t>리서치 에이전트 전체 구조</a:t>
+              <a:t>각 단계를 agent로 — 5개 질문</a:t>
             </a:r>
           </a:p>
         </p:txBody>
@@ -12644,22 +13122,436 @@
       </p:sp>
       <p:sp>
         <p:nvSpPr>
-          <p:cNvPr id="9" name="Rounded Rectangle 8"/>
+          <p:cNvPr id="9" name="Oval 8"/>
           <p:cNvSpPr/>
           <p:nvPr/>
         </p:nvSpPr>
         <p:spPr>
           <a:xfrm>
-            <a:off x="502920" y="1828800"/>
-            <a:ext cx="11155680" cy="3383280"/>
+            <a:off x="548640" y="1911096"/>
+            <a:ext cx="146304" cy="146304"/>
+          </a:xfrm>
+          <a:prstGeom prst="ellipse">
+            <a:avLst/>
+          </a:prstGeom>
+          <a:solidFill>
+            <a:srgbClr val="10B981"/>
+          </a:solidFill>
+          <a:ln>
+            <a:noFill/>
+          </a:ln>
+          <a:effectLst/>
+        </p:spPr>
+        <p:style>
+          <a:lnRef idx="1">
+            <a:schemeClr val="accent1"/>
+          </a:lnRef>
+          <a:fillRef idx="3">
+            <a:schemeClr val="accent1"/>
+          </a:fillRef>
+          <a:effectRef idx="2">
+            <a:schemeClr val="accent1"/>
+          </a:effectRef>
+          <a:fontRef idx="minor">
+            <a:schemeClr val="lt1"/>
+          </a:fontRef>
+        </p:style>
+        <p:txBody>
+          <a:bodyPr rtlCol="0" anchor="ctr"/>
+          <a:lstStyle/>
+          <a:p>
+            <a:pPr algn="ctr"/>
+          </a:p>
+        </p:txBody>
+      </p:sp>
+      <p:sp>
+        <p:nvSpPr>
+          <p:cNvPr id="10" name="TextBox 9"/>
+          <p:cNvSpPr txBox="1"/>
+          <p:nvPr/>
+        </p:nvSpPr>
+        <p:spPr>
+          <a:xfrm>
+            <a:off x="868680" y="1828800"/>
+            <a:ext cx="10607040" cy="457200"/>
+          </a:xfrm>
+          <a:prstGeom prst="rect">
+            <a:avLst/>
+          </a:prstGeom>
+          <a:noFill/>
+        </p:spPr>
+        <p:txBody>
+          <a:bodyPr wrap="square" anchor="t" lIns="0" rIns="0" tIns="0" bIns="0">
+            <a:spAutoFit/>
+          </a:bodyPr>
+          <a:lstStyle/>
+          <a:p>
+            <a:pPr algn="l">
+              <a:lnSpc>
+                <a:spcPct val="100000"/>
+              </a:lnSpc>
+              <a:spcBef>
+                <a:spcPts val="0"/>
+              </a:spcBef>
+              <a:spcAft>
+                <a:spcPts val="600"/>
+              </a:spcAft>
+            </a:pPr>
+            <a:r>
+              <a:rPr sz="1600" b="1">
+                <a:solidFill>
+                  <a:srgbClr val="0F172A"/>
+                </a:solidFill>
+                <a:latin typeface="NanumGothic"/>
+                <a:ea typeface="NanumGothic"/>
+                <a:cs typeface="NanumGothic"/>
+              </a:rPr>
+              <a:t>① 분야 파악 / ② 논문 선별</a:t>
+            </a:r>
+          </a:p>
+        </p:txBody>
+      </p:sp>
+      <p:sp>
+        <p:nvSpPr>
+          <p:cNvPr id="11" name="TextBox 10"/>
+          <p:cNvSpPr txBox="1"/>
+          <p:nvPr/>
+        </p:nvSpPr>
+        <p:spPr>
+          <a:xfrm>
+            <a:off x="868680" y="2212848"/>
+            <a:ext cx="10607040" cy="457200"/>
+          </a:xfrm>
+          <a:prstGeom prst="rect">
+            <a:avLst/>
+          </a:prstGeom>
+          <a:noFill/>
+        </p:spPr>
+        <p:txBody>
+          <a:bodyPr wrap="square" anchor="t" lIns="0" rIns="0" tIns="0" bIns="0">
+            <a:spAutoFit/>
+          </a:bodyPr>
+          <a:lstStyle/>
+          <a:p>
+            <a:pPr algn="l">
+              <a:lnSpc>
+                <a:spcPct val="100000"/>
+              </a:lnSpc>
+              <a:spcBef>
+                <a:spcPts val="0"/>
+              </a:spcBef>
+              <a:spcAft>
+                <a:spcPts val="600"/>
+              </a:spcAft>
+            </a:pPr>
+            <a:r>
+              <a:rPr sz="1300" b="0">
+                <a:solidFill>
+                  <a:srgbClr val="64748B"/>
+                </a:solidFill>
+                <a:latin typeface="NanumGothic"/>
+                <a:ea typeface="NanumGothic"/>
+                <a:cs typeface="NanumGothic"/>
+              </a:rPr>
+              <a:t>맵·taxonomy 만들기 / funnel 랭킹(다양성 포함)</a:t>
+            </a:r>
+          </a:p>
+        </p:txBody>
+      </p:sp>
+      <p:sp>
+        <p:nvSpPr>
+          <p:cNvPr id="12" name="Oval 11"/>
+          <p:cNvSpPr/>
+          <p:nvPr/>
+        </p:nvSpPr>
+        <p:spPr>
+          <a:xfrm>
+            <a:off x="548640" y="2779776"/>
+            <a:ext cx="146304" cy="146304"/>
+          </a:xfrm>
+          <a:prstGeom prst="ellipse">
+            <a:avLst/>
+          </a:prstGeom>
+          <a:solidFill>
+            <a:srgbClr val="10B981"/>
+          </a:solidFill>
+          <a:ln>
+            <a:noFill/>
+          </a:ln>
+          <a:effectLst/>
+        </p:spPr>
+        <p:style>
+          <a:lnRef idx="1">
+            <a:schemeClr val="accent1"/>
+          </a:lnRef>
+          <a:fillRef idx="3">
+            <a:schemeClr val="accent1"/>
+          </a:fillRef>
+          <a:effectRef idx="2">
+            <a:schemeClr val="accent1"/>
+          </a:effectRef>
+          <a:fontRef idx="minor">
+            <a:schemeClr val="lt1"/>
+          </a:fontRef>
+        </p:style>
+        <p:txBody>
+          <a:bodyPr rtlCol="0" anchor="ctr"/>
+          <a:lstStyle/>
+          <a:p>
+            <a:pPr algn="ctr"/>
+          </a:p>
+        </p:txBody>
+      </p:sp>
+      <p:sp>
+        <p:nvSpPr>
+          <p:cNvPr id="13" name="TextBox 12"/>
+          <p:cNvSpPr txBox="1"/>
+          <p:nvPr/>
+        </p:nvSpPr>
+        <p:spPr>
+          <a:xfrm>
+            <a:off x="868680" y="2697480"/>
+            <a:ext cx="10607040" cy="457200"/>
+          </a:xfrm>
+          <a:prstGeom prst="rect">
+            <a:avLst/>
+          </a:prstGeom>
+          <a:noFill/>
+        </p:spPr>
+        <p:txBody>
+          <a:bodyPr wrap="square" anchor="t" lIns="0" rIns="0" tIns="0" bIns="0">
+            <a:spAutoFit/>
+          </a:bodyPr>
+          <a:lstStyle/>
+          <a:p>
+            <a:pPr algn="l">
+              <a:lnSpc>
+                <a:spcPct val="100000"/>
+              </a:lnSpc>
+              <a:spcBef>
+                <a:spcPts val="0"/>
+              </a:spcBef>
+              <a:spcAft>
+                <a:spcPts val="600"/>
+              </a:spcAft>
+            </a:pPr>
+            <a:r>
+              <a:rPr sz="1600" b="1">
+                <a:solidFill>
+                  <a:srgbClr val="0F172A"/>
+                </a:solidFill>
+                <a:latin typeface="NanumGothic"/>
+                <a:ea typeface="NanumGothic"/>
+                <a:cs typeface="NanumGothic"/>
+              </a:rPr>
+              <a:t>③ 논문 학습 / ④ 가설 생성</a:t>
+            </a:r>
+          </a:p>
+        </p:txBody>
+      </p:sp>
+      <p:sp>
+        <p:nvSpPr>
+          <p:cNvPr id="14" name="TextBox 13"/>
+          <p:cNvSpPr txBox="1"/>
+          <p:nvPr/>
+        </p:nvSpPr>
+        <p:spPr>
+          <a:xfrm>
+            <a:off x="868680" y="3081528"/>
+            <a:ext cx="10607040" cy="457200"/>
+          </a:xfrm>
+          <a:prstGeom prst="rect">
+            <a:avLst/>
+          </a:prstGeom>
+          <a:noFill/>
+        </p:spPr>
+        <p:txBody>
+          <a:bodyPr wrap="square" anchor="t" lIns="0" rIns="0" tIns="0" bIns="0">
+            <a:spAutoFit/>
+          </a:bodyPr>
+          <a:lstStyle/>
+          <a:p>
+            <a:pPr algn="l">
+              <a:lnSpc>
+                <a:spcPct val="100000"/>
+              </a:lnSpc>
+              <a:spcBef>
+                <a:spcPts val="0"/>
+              </a:spcBef>
+              <a:spcAft>
+                <a:spcPts val="600"/>
+              </a:spcAft>
+            </a:pPr>
+            <a:r>
+              <a:rPr sz="1300" b="0">
+                <a:solidFill>
+                  <a:srgbClr val="64748B"/>
+                </a:solidFill>
+                <a:latin typeface="NanumGothic"/>
+                <a:ea typeface="NanumGothic"/>
+                <a:cs typeface="NanumGothic"/>
+              </a:rPr>
+              <a:t>구조화 추출·모순 그래프 / gap·조합 기반</a:t>
+            </a:r>
+          </a:p>
+        </p:txBody>
+      </p:sp>
+      <p:sp>
+        <p:nvSpPr>
+          <p:cNvPr id="15" name="Oval 14"/>
+          <p:cNvSpPr/>
+          <p:nvPr/>
+        </p:nvSpPr>
+        <p:spPr>
+          <a:xfrm>
+            <a:off x="548640" y="3648456"/>
+            <a:ext cx="146304" cy="146304"/>
+          </a:xfrm>
+          <a:prstGeom prst="ellipse">
+            <a:avLst/>
+          </a:prstGeom>
+          <a:solidFill>
+            <a:srgbClr val="10B981"/>
+          </a:solidFill>
+          <a:ln>
+            <a:noFill/>
+          </a:ln>
+          <a:effectLst/>
+        </p:spPr>
+        <p:style>
+          <a:lnRef idx="1">
+            <a:schemeClr val="accent1"/>
+          </a:lnRef>
+          <a:fillRef idx="3">
+            <a:schemeClr val="accent1"/>
+          </a:fillRef>
+          <a:effectRef idx="2">
+            <a:schemeClr val="accent1"/>
+          </a:effectRef>
+          <a:fontRef idx="minor">
+            <a:schemeClr val="lt1"/>
+          </a:fontRef>
+        </p:style>
+        <p:txBody>
+          <a:bodyPr rtlCol="0" anchor="ctr"/>
+          <a:lstStyle/>
+          <a:p>
+            <a:pPr algn="ctr"/>
+          </a:p>
+        </p:txBody>
+      </p:sp>
+      <p:sp>
+        <p:nvSpPr>
+          <p:cNvPr id="16" name="TextBox 15"/>
+          <p:cNvSpPr txBox="1"/>
+          <p:nvPr/>
+        </p:nvSpPr>
+        <p:spPr>
+          <a:xfrm>
+            <a:off x="868680" y="3566160"/>
+            <a:ext cx="10607040" cy="457200"/>
+          </a:xfrm>
+          <a:prstGeom prst="rect">
+            <a:avLst/>
+          </a:prstGeom>
+          <a:noFill/>
+        </p:spPr>
+        <p:txBody>
+          <a:bodyPr wrap="square" anchor="t" lIns="0" rIns="0" tIns="0" bIns="0">
+            <a:spAutoFit/>
+          </a:bodyPr>
+          <a:lstStyle/>
+          <a:p>
+            <a:pPr algn="l">
+              <a:lnSpc>
+                <a:spcPct val="100000"/>
+              </a:lnSpc>
+              <a:spcBef>
+                <a:spcPts val="0"/>
+              </a:spcBef>
+              <a:spcAft>
+                <a:spcPts val="600"/>
+              </a:spcAft>
+            </a:pPr>
+            <a:r>
+              <a:rPr sz="1600" b="1">
+                <a:solidFill>
+                  <a:srgbClr val="0F172A"/>
+                </a:solidFill>
+                <a:latin typeface="NanumGothic"/>
+                <a:ea typeface="NanumGothic"/>
+                <a:cs typeface="NanumGothic"/>
+              </a:rPr>
+              <a:t>⑤ 가설 우선순위</a:t>
+            </a:r>
+          </a:p>
+        </p:txBody>
+      </p:sp>
+      <p:sp>
+        <p:nvSpPr>
+          <p:cNvPr id="17" name="TextBox 16"/>
+          <p:cNvSpPr txBox="1"/>
+          <p:nvPr/>
+        </p:nvSpPr>
+        <p:spPr>
+          <a:xfrm>
+            <a:off x="868680" y="3950208"/>
+            <a:ext cx="10607040" cy="457200"/>
+          </a:xfrm>
+          <a:prstGeom prst="rect">
+            <a:avLst/>
+          </a:prstGeom>
+          <a:noFill/>
+        </p:spPr>
+        <p:txBody>
+          <a:bodyPr wrap="square" anchor="t" lIns="0" rIns="0" tIns="0" bIns="0">
+            <a:spAutoFit/>
+          </a:bodyPr>
+          <a:lstStyle/>
+          <a:p>
+            <a:pPr algn="l">
+              <a:lnSpc>
+                <a:spcPct val="100000"/>
+              </a:lnSpc>
+              <a:spcBef>
+                <a:spcPts val="0"/>
+              </a:spcBef>
+              <a:spcAft>
+                <a:spcPts val="600"/>
+              </a:spcAft>
+            </a:pPr>
+            <a:r>
+              <a:rPr sz="1300" b="0">
+                <a:solidFill>
+                  <a:srgbClr val="64748B"/>
+                </a:solidFill>
+                <a:latin typeface="NanumGothic"/>
+                <a:ea typeface="NanumGothic"/>
+                <a:cs typeface="NanumGothic"/>
+              </a:rPr>
+              <a:t>스코어링·랭킹 (impact × plausibility ÷ 비용)</a:t>
+            </a:r>
+          </a:p>
+        </p:txBody>
+      </p:sp>
+      <p:sp>
+        <p:nvSpPr>
+          <p:cNvPr id="18" name="Rounded Rectangle 17"/>
+          <p:cNvSpPr/>
+          <p:nvPr/>
+        </p:nvSpPr>
+        <p:spPr>
+          <a:xfrm>
+            <a:off x="502920" y="5532120"/>
+            <a:ext cx="11155680" cy="658368"/>
           </a:xfrm>
           <a:prstGeom prst="roundRect">
             <a:avLst/>
           </a:prstGeom>
           <a:solidFill>
-            <a:srgbClr val="F8FAFC"/>
+            <a:srgbClr val="F1F5F9"/>
           </a:solidFill>
-          <a:ln w="19050">
+          <a:ln w="12700">
             <a:solidFill>
               <a:srgbClr val="E2E8F0"/>
             </a:solidFill>
@@ -12690,14 +13582,14 @@
       </p:sp>
       <p:sp>
         <p:nvSpPr>
-          <p:cNvPr id="10" name="TextBox 9"/>
-          <p:cNvSpPr txBox="1"/>
-          <p:nvPr/>
-        </p:nvSpPr>
-        <p:spPr>
-          <a:xfrm>
-            <a:off x="502920" y="3154680"/>
-            <a:ext cx="11155680" cy="640080"/>
+          <p:cNvPr id="19" name="TextBox 18"/>
+          <p:cNvSpPr txBox="1"/>
+          <p:nvPr/>
+        </p:nvSpPr>
+        <p:spPr>
+          <a:xfrm>
+            <a:off x="777240" y="5532120"/>
+            <a:ext cx="10607040" cy="658368"/>
           </a:xfrm>
           <a:prstGeom prst="rect">
             <a:avLst/>
@@ -12710,85 +13602,38 @@
           </a:bodyPr>
           <a:lstStyle/>
           <a:p>
-            <a:pPr algn="ctr">
-              <a:lnSpc>
-                <a:spcPct val="100000"/>
-              </a:lnSpc>
-              <a:spcBef>
-                <a:spcPts val="0"/>
-              </a:spcBef>
-              <a:spcAft>
-                <a:spcPts val="600"/>
-              </a:spcAft>
-            </a:pPr>
-            <a:r>
-              <a:rPr sz="1800" b="1">
-                <a:solidFill>
-                  <a:srgbClr val="64748B"/>
+            <a:pPr algn="l">
+              <a:lnSpc>
+                <a:spcPct val="100000"/>
+              </a:lnSpc>
+              <a:spcBef>
+                <a:spcPts val="0"/>
+              </a:spcBef>
+              <a:spcAft>
+                <a:spcPts val="600"/>
+              </a:spcAft>
+            </a:pPr>
+            <a:r>
+              <a:rPr sz="1200" b="1">
+                <a:solidFill>
+                  <a:srgbClr val="10B981"/>
                 </a:solidFill>
                 <a:latin typeface="NanumGothic"/>
                 <a:ea typeface="NanumGothic"/>
                 <a:cs typeface="NanumGothic"/>
               </a:rPr>
-              <a:t>［ 도식 / 다이어그램 placeholder ］</a:t>
-            </a:r>
-          </a:p>
-        </p:txBody>
-      </p:sp>
-      <p:sp>
-        <p:nvSpPr>
-          <p:cNvPr id="11" name="TextBox 10"/>
-          <p:cNvSpPr txBox="1"/>
-          <p:nvPr/>
-        </p:nvSpPr>
-        <p:spPr>
-          <a:xfrm>
-            <a:off x="548640" y="5440680"/>
-            <a:ext cx="11155680" cy="548640"/>
-          </a:xfrm>
-          <a:prstGeom prst="rect">
-            <a:avLst/>
-          </a:prstGeom>
-          <a:noFill/>
-        </p:spPr>
-        <p:txBody>
-          <a:bodyPr wrap="square" anchor="t" lIns="0" rIns="0" tIns="0" bIns="0">
-            <a:spAutoFit/>
-          </a:bodyPr>
-          <a:lstStyle/>
-          <a:p>
-            <a:pPr algn="l">
-              <a:lnSpc>
-                <a:spcPct val="100000"/>
-              </a:lnSpc>
-              <a:spcBef>
-                <a:spcPts val="0"/>
-              </a:spcBef>
-              <a:spcAft>
-                <a:spcPts val="600"/>
-              </a:spcAft>
-            </a:pPr>
-            <a:r>
-              <a:rPr sz="1300" b="1">
-                <a:solidFill>
-                  <a:srgbClr val="10B981"/>
+              <a:t>NOTE   </a:t>
+            </a:r>
+            <a:r>
+              <a:rPr sz="1300" b="0">
+                <a:solidFill>
+                  <a:srgbClr val="0F172A"/>
                 </a:solidFill>
                 <a:latin typeface="NanumGothic"/>
                 <a:ea typeface="NanumGothic"/>
                 <a:cs typeface="NanumGothic"/>
               </a:rPr>
-              <a:t>설명: </a:t>
-            </a:r>
-            <a:r>
-              <a:rPr sz="1300" b="0">
-                <a:solidFill>
-                  <a:srgbClr val="0F172A"/>
-                </a:solidFill>
-                <a:latin typeface="NanumGothic"/>
-                <a:ea typeface="NanumGothic"/>
-                <a:cs typeface="NanumGothic"/>
-              </a:rPr>
-              <a:t>질문 분해 → 다중 검색 → 검증/교차확인 → 종합 → 보고서 생성의 흐름 (placeholder)</a:t>
+              <a:t>이 단계들이 곧 리서치 에이전트가 다루는 부분</a:t>
             </a:r>
           </a:p>
         </p:txBody>
@@ -14202,7 +15047,7 @@
                 <a:ea typeface="NanumGothic"/>
                 <a:cs typeface="NanumGothic"/>
               </a:rPr>
-              <a:t>단계 ①</a:t>
+              <a:t>핵심 쟁점</a:t>
             </a:r>
           </a:p>
         </p:txBody>
@@ -14249,7 +15094,7 @@
                 <a:ea typeface="NanumSquare"/>
                 <a:cs typeface="NanumSquare"/>
               </a:rPr>
-              <a:t>검색 (Search)</a:t>
+              <a:t>가설: '다수 생성' vs '선별'</a:t>
             </a:r>
           </a:p>
         </p:txBody>
@@ -14394,16 +15239,62 @@
       </p:sp>
       <p:sp>
         <p:nvSpPr>
-          <p:cNvPr id="9" name="Oval 8"/>
+          <p:cNvPr id="9" name="Rounded Rectangle 8"/>
           <p:cNvSpPr/>
           <p:nvPr/>
         </p:nvSpPr>
         <p:spPr>
           <a:xfrm>
-            <a:off x="548640" y="1911096"/>
-            <a:ext cx="146304" cy="146304"/>
-          </a:xfrm>
-          <a:prstGeom prst="ellipse">
+            <a:off x="502920" y="1828800"/>
+            <a:ext cx="5440680" cy="4023360"/>
+          </a:xfrm>
+          <a:prstGeom prst="roundRect">
+            <a:avLst/>
+          </a:prstGeom>
+          <a:solidFill>
+            <a:srgbClr val="F8FAFC"/>
+          </a:solidFill>
+          <a:ln w="12700">
+            <a:solidFill>
+              <a:srgbClr val="E2E8F0"/>
+            </a:solidFill>
+          </a:ln>
+          <a:effectLst/>
+        </p:spPr>
+        <p:style>
+          <a:lnRef idx="1">
+            <a:schemeClr val="accent1"/>
+          </a:lnRef>
+          <a:fillRef idx="3">
+            <a:schemeClr val="accent1"/>
+          </a:fillRef>
+          <a:effectRef idx="2">
+            <a:schemeClr val="accent1"/>
+          </a:effectRef>
+          <a:fontRef idx="minor">
+            <a:schemeClr val="lt1"/>
+          </a:fontRef>
+        </p:style>
+        <p:txBody>
+          <a:bodyPr rtlCol="0" anchor="ctr"/>
+          <a:lstStyle/>
+          <a:p>
+            <a:pPr algn="ctr"/>
+          </a:p>
+        </p:txBody>
+      </p:sp>
+      <p:sp>
+        <p:nvSpPr>
+          <p:cNvPr id="10" name="Rounded Rectangle 9"/>
+          <p:cNvSpPr/>
+          <p:nvPr/>
+        </p:nvSpPr>
+        <p:spPr>
+          <a:xfrm>
+            <a:off x="502920" y="1828800"/>
+            <a:ext cx="5440680" cy="640080"/>
+          </a:xfrm>
+          <a:prstGeom prst="roundRect">
             <a:avLst/>
           </a:prstGeom>
           <a:solidFill>
@@ -14438,14 +15329,61 @@
       </p:sp>
       <p:sp>
         <p:nvSpPr>
-          <p:cNvPr id="10" name="TextBox 9"/>
-          <p:cNvSpPr txBox="1"/>
-          <p:nvPr/>
-        </p:nvSpPr>
-        <p:spPr>
-          <a:xfrm>
-            <a:off x="868680" y="1828800"/>
-            <a:ext cx="10607040" cy="457200"/>
+          <p:cNvPr id="11" name="TextBox 10"/>
+          <p:cNvSpPr txBox="1"/>
+          <p:nvPr/>
+        </p:nvSpPr>
+        <p:spPr>
+          <a:xfrm>
+            <a:off x="777240" y="1828800"/>
+            <a:ext cx="4937760" cy="640080"/>
+          </a:xfrm>
+          <a:prstGeom prst="rect">
+            <a:avLst/>
+          </a:prstGeom>
+          <a:noFill/>
+        </p:spPr>
+        <p:txBody>
+          <a:bodyPr wrap="square" anchor="ctr" lIns="0" rIns="0" tIns="0" bIns="0">
+            <a:spAutoFit/>
+          </a:bodyPr>
+          <a:lstStyle/>
+          <a:p>
+            <a:pPr algn="l">
+              <a:lnSpc>
+                <a:spcPct val="100000"/>
+              </a:lnSpc>
+              <a:spcBef>
+                <a:spcPts val="0"/>
+              </a:spcBef>
+              <a:spcAft>
+                <a:spcPts val="600"/>
+              </a:spcAft>
+            </a:pPr>
+            <a:r>
+              <a:rPr sz="1600" b="1">
+                <a:solidFill>
+                  <a:srgbClr val="FFFFFF"/>
+                </a:solidFill>
+                <a:latin typeface="NanumSquare"/>
+                <a:ea typeface="NanumSquare"/>
+                <a:cs typeface="NanumSquare"/>
+              </a:rPr>
+              <a:t>다수 생성 (breadth)</a:t>
+            </a:r>
+          </a:p>
+        </p:txBody>
+      </p:sp>
+      <p:sp>
+        <p:nvSpPr>
+          <p:cNvPr id="12" name="TextBox 11"/>
+          <p:cNvSpPr txBox="1"/>
+          <p:nvPr/>
+        </p:nvSpPr>
+        <p:spPr>
+          <a:xfrm>
+            <a:off x="822960" y="2697480"/>
+            <a:ext cx="4846320" cy="548640"/>
           </a:xfrm>
           <a:prstGeom prst="rect">
             <a:avLst/>
@@ -14470,82 +15408,208 @@
               </a:spcAft>
             </a:pPr>
             <a:r>
-              <a:rPr sz="1600" b="1">
-                <a:solidFill>
-                  <a:srgbClr val="0F172A"/>
+              <a:rPr sz="1400" b="1">
+                <a:solidFill>
+                  <a:srgbClr val="10B981"/>
                 </a:solidFill>
                 <a:latin typeface="NanumGothic"/>
                 <a:ea typeface="NanumGothic"/>
                 <a:cs typeface="NanumGothic"/>
               </a:rPr>
-              <a:t>어디서 정보를 모으나</a:t>
-            </a:r>
-          </a:p>
-        </p:txBody>
-      </p:sp>
-      <p:sp>
-        <p:nvSpPr>
-          <p:cNvPr id="11" name="TextBox 10"/>
-          <p:cNvSpPr txBox="1"/>
-          <p:nvPr/>
-        </p:nvSpPr>
-        <p:spPr>
-          <a:xfrm>
-            <a:off x="868680" y="2212848"/>
-            <a:ext cx="10607040" cy="457200"/>
-          </a:xfrm>
-          <a:prstGeom prst="rect">
-            <a:avLst/>
-          </a:prstGeom>
-          <a:noFill/>
-        </p:spPr>
-        <p:txBody>
-          <a:bodyPr wrap="square" anchor="t" lIns="0" rIns="0" tIns="0" bIns="0">
-            <a:spAutoFit/>
-          </a:bodyPr>
-          <a:lstStyle/>
-          <a:p>
-            <a:pPr algn="l">
-              <a:lnSpc>
-                <a:spcPct val="100000"/>
-              </a:lnSpc>
-              <a:spcBef>
-                <a:spcPts val="0"/>
-              </a:spcBef>
-              <a:spcAft>
-                <a:spcPts val="600"/>
-              </a:spcAft>
-            </a:pPr>
-            <a:r>
-              <a:rPr sz="1300" b="0">
-                <a:solidFill>
-                  <a:srgbClr val="64748B"/>
+              <a:t>•  </a:t>
+            </a:r>
+            <a:r>
+              <a:rPr sz="1400" b="0">
+                <a:solidFill>
+                  <a:srgbClr val="0F172A"/>
                 </a:solidFill>
                 <a:latin typeface="NanumGothic"/>
                 <a:ea typeface="NanumGothic"/>
                 <a:cs typeface="NanumGothic"/>
               </a:rPr>
-              <a:t>웹·문헌·DB (placeholder)</a:t>
-            </a:r>
-          </a:p>
-        </p:txBody>
-      </p:sp>
-      <p:sp>
-        <p:nvSpPr>
-          <p:cNvPr id="12" name="Oval 11"/>
+              <a:t>가용 데이터/도구로 제약</a:t>
+            </a:r>
+          </a:p>
+        </p:txBody>
+      </p:sp>
+      <p:sp>
+        <p:nvSpPr>
+          <p:cNvPr id="13" name="TextBox 12"/>
+          <p:cNvSpPr txBox="1"/>
+          <p:nvPr/>
+        </p:nvSpPr>
+        <p:spPr>
+          <a:xfrm>
+            <a:off x="822960" y="3264408"/>
+            <a:ext cx="4846320" cy="548640"/>
+          </a:xfrm>
+          <a:prstGeom prst="rect">
+            <a:avLst/>
+          </a:prstGeom>
+          <a:noFill/>
+        </p:spPr>
+        <p:txBody>
+          <a:bodyPr wrap="square" anchor="t" lIns="0" rIns="0" tIns="0" bIns="0">
+            <a:spAutoFit/>
+          </a:bodyPr>
+          <a:lstStyle/>
+          <a:p>
+            <a:pPr algn="l">
+              <a:lnSpc>
+                <a:spcPct val="100000"/>
+              </a:lnSpc>
+              <a:spcBef>
+                <a:spcPts val="0"/>
+              </a:spcBef>
+              <a:spcAft>
+                <a:spcPts val="600"/>
+              </a:spcAft>
+            </a:pPr>
+            <a:r>
+              <a:rPr sz="1400" b="1">
+                <a:solidFill>
+                  <a:srgbClr val="10B981"/>
+                </a:solidFill>
+                <a:latin typeface="NanumGothic"/>
+                <a:ea typeface="NanumGothic"/>
+                <a:cs typeface="NanumGothic"/>
+              </a:rPr>
+              <a:t>•  </a:t>
+            </a:r>
+            <a:r>
+              <a:rPr sz="1400" b="0">
+                <a:solidFill>
+                  <a:srgbClr val="0F172A"/>
+                </a:solidFill>
+                <a:latin typeface="NanumGothic"/>
+                <a:ea typeface="NanumGothic"/>
+                <a:cs typeface="NanumGothic"/>
+              </a:rPr>
+              <a:t>싼 테스트로 거르기</a:t>
+            </a:r>
+          </a:p>
+        </p:txBody>
+      </p:sp>
+      <p:sp>
+        <p:nvSpPr>
+          <p:cNvPr id="14" name="TextBox 13"/>
+          <p:cNvSpPr txBox="1"/>
+          <p:nvPr/>
+        </p:nvSpPr>
+        <p:spPr>
+          <a:xfrm>
+            <a:off x="822960" y="3831336"/>
+            <a:ext cx="4846320" cy="548640"/>
+          </a:xfrm>
+          <a:prstGeom prst="rect">
+            <a:avLst/>
+          </a:prstGeom>
+          <a:noFill/>
+        </p:spPr>
+        <p:txBody>
+          <a:bodyPr wrap="square" anchor="t" lIns="0" rIns="0" tIns="0" bIns="0">
+            <a:spAutoFit/>
+          </a:bodyPr>
+          <a:lstStyle/>
+          <a:p>
+            <a:pPr algn="l">
+              <a:lnSpc>
+                <a:spcPct val="100000"/>
+              </a:lnSpc>
+              <a:spcBef>
+                <a:spcPts val="0"/>
+              </a:spcBef>
+              <a:spcAft>
+                <a:spcPts val="600"/>
+              </a:spcAft>
+            </a:pPr>
+            <a:r>
+              <a:rPr sz="1400" b="1">
+                <a:solidFill>
+                  <a:srgbClr val="10B981"/>
+                </a:solidFill>
+                <a:latin typeface="NanumGothic"/>
+                <a:ea typeface="NanumGothic"/>
+                <a:cs typeface="NanumGothic"/>
+              </a:rPr>
+              <a:t>•  </a:t>
+            </a:r>
+            <a:r>
+              <a:rPr sz="1400" b="0">
+                <a:solidFill>
+                  <a:srgbClr val="0F172A"/>
+                </a:solidFill>
+                <a:latin typeface="NanumGothic"/>
+                <a:ea typeface="NanumGothic"/>
+                <a:cs typeface="NanumGothic"/>
+              </a:rPr>
+              <a:t>다양성↑ · LLM 판단 의존↓</a:t>
+            </a:r>
+          </a:p>
+        </p:txBody>
+      </p:sp>
+      <p:sp>
+        <p:nvSpPr>
+          <p:cNvPr id="15" name="Rounded Rectangle 14"/>
           <p:cNvSpPr/>
           <p:nvPr/>
         </p:nvSpPr>
         <p:spPr>
           <a:xfrm>
-            <a:off x="548640" y="2779776"/>
-            <a:ext cx="146304" cy="146304"/>
-          </a:xfrm>
-          <a:prstGeom prst="ellipse">
+            <a:off x="6172200" y="1828800"/>
+            <a:ext cx="5440680" cy="4023360"/>
+          </a:xfrm>
+          <a:prstGeom prst="roundRect">
             <a:avLst/>
           </a:prstGeom>
           <a:solidFill>
-            <a:srgbClr val="10B981"/>
+            <a:srgbClr val="F8FAFC"/>
+          </a:solidFill>
+          <a:ln w="12700">
+            <a:solidFill>
+              <a:srgbClr val="E2E8F0"/>
+            </a:solidFill>
+          </a:ln>
+          <a:effectLst/>
+        </p:spPr>
+        <p:style>
+          <a:lnRef idx="1">
+            <a:schemeClr val="accent1"/>
+          </a:lnRef>
+          <a:fillRef idx="3">
+            <a:schemeClr val="accent1"/>
+          </a:fillRef>
+          <a:effectRef idx="2">
+            <a:schemeClr val="accent1"/>
+          </a:effectRef>
+          <a:fontRef idx="minor">
+            <a:schemeClr val="lt1"/>
+          </a:fontRef>
+        </p:style>
+        <p:txBody>
+          <a:bodyPr rtlCol="0" anchor="ctr"/>
+          <a:lstStyle/>
+          <a:p>
+            <a:pPr algn="ctr"/>
+          </a:p>
+        </p:txBody>
+      </p:sp>
+      <p:sp>
+        <p:nvSpPr>
+          <p:cNvPr id="16" name="Rounded Rectangle 15"/>
+          <p:cNvSpPr/>
+          <p:nvPr/>
+        </p:nvSpPr>
+        <p:spPr>
+          <a:xfrm>
+            <a:off x="6172200" y="1828800"/>
+            <a:ext cx="5440680" cy="640080"/>
+          </a:xfrm>
+          <a:prstGeom prst="roundRect">
+            <a:avLst/>
+          </a:prstGeom>
+          <a:solidFill>
+            <a:srgbClr val="12203C"/>
           </a:solidFill>
           <a:ln>
             <a:noFill/>
@@ -14576,14 +15640,61 @@
       </p:sp>
       <p:sp>
         <p:nvSpPr>
-          <p:cNvPr id="13" name="TextBox 12"/>
-          <p:cNvSpPr txBox="1"/>
-          <p:nvPr/>
-        </p:nvSpPr>
-        <p:spPr>
-          <a:xfrm>
-            <a:off x="868680" y="2697480"/>
-            <a:ext cx="10607040" cy="457200"/>
+          <p:cNvPr id="17" name="TextBox 16"/>
+          <p:cNvSpPr txBox="1"/>
+          <p:nvPr/>
+        </p:nvSpPr>
+        <p:spPr>
+          <a:xfrm>
+            <a:off x="6446520" y="1828800"/>
+            <a:ext cx="4937760" cy="640080"/>
+          </a:xfrm>
+          <a:prstGeom prst="rect">
+            <a:avLst/>
+          </a:prstGeom>
+          <a:noFill/>
+        </p:spPr>
+        <p:txBody>
+          <a:bodyPr wrap="square" anchor="ctr" lIns="0" rIns="0" tIns="0" bIns="0">
+            <a:spAutoFit/>
+          </a:bodyPr>
+          <a:lstStyle/>
+          <a:p>
+            <a:pPr algn="l">
+              <a:lnSpc>
+                <a:spcPct val="100000"/>
+              </a:lnSpc>
+              <a:spcBef>
+                <a:spcPts val="0"/>
+              </a:spcBef>
+              <a:spcAft>
+                <a:spcPts val="600"/>
+              </a:spcAft>
+            </a:pPr>
+            <a:r>
+              <a:rPr sz="1600" b="1">
+                <a:solidFill>
+                  <a:srgbClr val="FFFFFF"/>
+                </a:solidFill>
+                <a:latin typeface="NanumSquare"/>
+                <a:ea typeface="NanumSquare"/>
+                <a:cs typeface="NanumSquare"/>
+              </a:rPr>
+              <a:t>사전 선별 (selection)</a:t>
+            </a:r>
+          </a:p>
+        </p:txBody>
+      </p:sp>
+      <p:sp>
+        <p:nvSpPr>
+          <p:cNvPr id="18" name="TextBox 17"/>
+          <p:cNvSpPr txBox="1"/>
+          <p:nvPr/>
+        </p:nvSpPr>
+        <p:spPr>
+          <a:xfrm>
+            <a:off x="6492240" y="2697480"/>
+            <a:ext cx="4846320" cy="548640"/>
           </a:xfrm>
           <a:prstGeom prst="rect">
             <a:avLst/>
@@ -14608,120 +15719,40 @@
               </a:spcAft>
             </a:pPr>
             <a:r>
-              <a:rPr sz="1600" b="1">
-                <a:solidFill>
-                  <a:srgbClr val="0F172A"/>
+              <a:rPr sz="1400" b="1">
+                <a:solidFill>
+                  <a:srgbClr val="12203C"/>
                 </a:solidFill>
                 <a:latin typeface="NanumGothic"/>
                 <a:ea typeface="NanumGothic"/>
                 <a:cs typeface="NanumGothic"/>
               </a:rPr>
-              <a:t>질문 분해</a:t>
-            </a:r>
-          </a:p>
-        </p:txBody>
-      </p:sp>
-      <p:sp>
-        <p:nvSpPr>
-          <p:cNvPr id="14" name="TextBox 13"/>
-          <p:cNvSpPr txBox="1"/>
-          <p:nvPr/>
-        </p:nvSpPr>
-        <p:spPr>
-          <a:xfrm>
-            <a:off x="868680" y="3081528"/>
-            <a:ext cx="10607040" cy="457200"/>
-          </a:xfrm>
-          <a:prstGeom prst="rect">
-            <a:avLst/>
-          </a:prstGeom>
-          <a:noFill/>
-        </p:spPr>
-        <p:txBody>
-          <a:bodyPr wrap="square" anchor="t" lIns="0" rIns="0" tIns="0" bIns="0">
-            <a:spAutoFit/>
-          </a:bodyPr>
-          <a:lstStyle/>
-          <a:p>
-            <a:pPr algn="l">
-              <a:lnSpc>
-                <a:spcPct val="100000"/>
-              </a:lnSpc>
-              <a:spcBef>
-                <a:spcPts val="0"/>
-              </a:spcBef>
-              <a:spcAft>
-                <a:spcPts val="600"/>
-              </a:spcAft>
-            </a:pPr>
-            <a:r>
-              <a:rPr sz="1300" b="0">
-                <a:solidFill>
-                  <a:srgbClr val="64748B"/>
+              <a:t>•  </a:t>
+            </a:r>
+            <a:r>
+              <a:rPr sz="1400" b="0">
+                <a:solidFill>
+                  <a:srgbClr val="0F172A"/>
                 </a:solidFill>
                 <a:latin typeface="NanumGothic"/>
                 <a:ea typeface="NanumGothic"/>
                 <a:cs typeface="NanumGothic"/>
               </a:rPr>
-              <a:t>큰 질문을 작은 질의로</a:t>
-            </a:r>
-          </a:p>
-        </p:txBody>
-      </p:sp>
-      <p:sp>
-        <p:nvSpPr>
-          <p:cNvPr id="15" name="Oval 14"/>
-          <p:cNvSpPr/>
-          <p:nvPr/>
-        </p:nvSpPr>
-        <p:spPr>
-          <a:xfrm>
-            <a:off x="548640" y="3648456"/>
-            <a:ext cx="146304" cy="146304"/>
-          </a:xfrm>
-          <a:prstGeom prst="ellipse">
-            <a:avLst/>
-          </a:prstGeom>
-          <a:solidFill>
-            <a:srgbClr val="10B981"/>
-          </a:solidFill>
-          <a:ln>
-            <a:noFill/>
-          </a:ln>
-          <a:effectLst/>
-        </p:spPr>
-        <p:style>
-          <a:lnRef idx="1">
-            <a:schemeClr val="accent1"/>
-          </a:lnRef>
-          <a:fillRef idx="3">
-            <a:schemeClr val="accent1"/>
-          </a:fillRef>
-          <a:effectRef idx="2">
-            <a:schemeClr val="accent1"/>
-          </a:effectRef>
-          <a:fontRef idx="minor">
-            <a:schemeClr val="lt1"/>
-          </a:fontRef>
-        </p:style>
-        <p:txBody>
-          <a:bodyPr rtlCol="0" anchor="ctr"/>
-          <a:lstStyle/>
-          <a:p>
-            <a:pPr algn="ctr"/>
-          </a:p>
-        </p:txBody>
-      </p:sp>
-      <p:sp>
-        <p:nvSpPr>
-          <p:cNvPr id="16" name="TextBox 15"/>
-          <p:cNvSpPr txBox="1"/>
-          <p:nvPr/>
-        </p:nvSpPr>
-        <p:spPr>
-          <a:xfrm>
-            <a:off x="868680" y="3566160"/>
-            <a:ext cx="10607040" cy="457200"/>
+              <a:t>비싼 테스트 전에 추리기</a:t>
+            </a:r>
+          </a:p>
+        </p:txBody>
+      </p:sp>
+      <p:sp>
+        <p:nvSpPr>
+          <p:cNvPr id="19" name="TextBox 18"/>
+          <p:cNvSpPr txBox="1"/>
+          <p:nvPr/>
+        </p:nvSpPr>
+        <p:spPr>
+          <a:xfrm>
+            <a:off x="6492240" y="3264408"/>
+            <a:ext cx="4846320" cy="548640"/>
           </a:xfrm>
           <a:prstGeom prst="rect">
             <a:avLst/>
@@ -14746,62 +15777,84 @@
               </a:spcAft>
             </a:pPr>
             <a:r>
-              <a:rPr sz="1600" b="1">
-                <a:solidFill>
-                  <a:srgbClr val="0F172A"/>
+              <a:rPr sz="1400" b="1">
+                <a:solidFill>
+                  <a:srgbClr val="12203C"/>
                 </a:solidFill>
                 <a:latin typeface="NanumGothic"/>
                 <a:ea typeface="NanumGothic"/>
                 <a:cs typeface="NanumGothic"/>
               </a:rPr>
-              <a:t>수집 결과 정리</a:t>
-            </a:r>
-          </a:p>
-        </p:txBody>
-      </p:sp>
-      <p:sp>
-        <p:nvSpPr>
-          <p:cNvPr id="17" name="TextBox 16"/>
-          <p:cNvSpPr txBox="1"/>
-          <p:nvPr/>
-        </p:nvSpPr>
-        <p:spPr>
-          <a:xfrm>
-            <a:off x="868680" y="3950208"/>
-            <a:ext cx="10607040" cy="457200"/>
-          </a:xfrm>
-          <a:prstGeom prst="rect">
-            <a:avLst/>
-          </a:prstGeom>
-          <a:noFill/>
-        </p:spPr>
-        <p:txBody>
-          <a:bodyPr wrap="square" anchor="t" lIns="0" rIns="0" tIns="0" bIns="0">
-            <a:spAutoFit/>
-          </a:bodyPr>
-          <a:lstStyle/>
-          <a:p>
-            <a:pPr algn="l">
-              <a:lnSpc>
-                <a:spcPct val="100000"/>
-              </a:lnSpc>
-              <a:spcBef>
-                <a:spcPts val="0"/>
-              </a:spcBef>
-              <a:spcAft>
-                <a:spcPts val="600"/>
-              </a:spcAft>
-            </a:pPr>
-            <a:r>
-              <a:rPr sz="1300" b="0">
-                <a:solidFill>
-                  <a:srgbClr val="64748B"/>
+              <a:t>•  </a:t>
+            </a:r>
+            <a:r>
+              <a:rPr sz="1400" b="0">
+                <a:solidFill>
+                  <a:srgbClr val="0F172A"/>
                 </a:solidFill>
                 <a:latin typeface="NanumGothic"/>
                 <a:ea typeface="NanumGothic"/>
                 <a:cs typeface="NanumGothic"/>
               </a:rPr>
-              <a:t>원본·출처 보관</a:t>
+              <a:t>LLM 판단에 의존</a:t>
+            </a:r>
+          </a:p>
+        </p:txBody>
+      </p:sp>
+      <p:sp>
+        <p:nvSpPr>
+          <p:cNvPr id="20" name="TextBox 19"/>
+          <p:cNvSpPr txBox="1"/>
+          <p:nvPr/>
+        </p:nvSpPr>
+        <p:spPr>
+          <a:xfrm>
+            <a:off x="6492240" y="3831336"/>
+            <a:ext cx="4846320" cy="548640"/>
+          </a:xfrm>
+          <a:prstGeom prst="rect">
+            <a:avLst/>
+          </a:prstGeom>
+          <a:noFill/>
+        </p:spPr>
+        <p:txBody>
+          <a:bodyPr wrap="square" anchor="t" lIns="0" rIns="0" tIns="0" bIns="0">
+            <a:spAutoFit/>
+          </a:bodyPr>
+          <a:lstStyle/>
+          <a:p>
+            <a:pPr algn="l">
+              <a:lnSpc>
+                <a:spcPct val="100000"/>
+              </a:lnSpc>
+              <a:spcBef>
+                <a:spcPts val="0"/>
+              </a:spcBef>
+              <a:spcAft>
+                <a:spcPts val="600"/>
+              </a:spcAft>
+            </a:pPr>
+            <a:r>
+              <a:rPr sz="1400" b="1">
+                <a:solidFill>
+                  <a:srgbClr val="12203C"/>
+                </a:solidFill>
+                <a:latin typeface="NanumGothic"/>
+                <a:ea typeface="NanumGothic"/>
+                <a:cs typeface="NanumGothic"/>
+              </a:rPr>
+              <a:t>•  </a:t>
+            </a:r>
+            <a:r>
+              <a:rPr sz="1400" b="0">
+                <a:solidFill>
+                  <a:srgbClr val="0F172A"/>
+                </a:solidFill>
+                <a:latin typeface="NanumGothic"/>
+                <a:ea typeface="NanumGothic"/>
+                <a:cs typeface="NanumGothic"/>
+              </a:rPr>
+              <a:t>위양성↓ · 놓칠 위험</a:t>
             </a:r>
           </a:p>
         </p:txBody>
@@ -14954,7 +16007,7 @@
                 <a:ea typeface="NanumGothic"/>
                 <a:cs typeface="NanumGothic"/>
               </a:rPr>
-              <a:t>단계 ①+</a:t>
+              <a:t>쟁점 정리</a:t>
             </a:r>
           </a:p>
         </p:txBody>
@@ -15001,7 +16054,7 @@
                 <a:ea typeface="NanumSquare"/>
                 <a:cs typeface="NanumSquare"/>
               </a:rPr>
-              <a:t>검색 전략 — 넓게·병렬로</a:t>
+              <a:t>테스트가 싸지면 무게중심이 이동</a:t>
             </a:r>
           </a:p>
         </p:txBody>
@@ -15230,7 +16283,7 @@
                 <a:ea typeface="NanumGothic"/>
                 <a:cs typeface="NanumGothic"/>
               </a:rPr>
-              <a:t>다중 소스 탐색</a:t>
+              <a:t>agent의 강점/약점</a:t>
             </a:r>
           </a:p>
         </p:txBody>
@@ -15277,7 +16330,7 @@
                 <a:ea typeface="NanumGothic"/>
                 <a:cs typeface="NanumGothic"/>
               </a:rPr>
-              <a:t>한 출처에 의존하지 않기</a:t>
+              <a:t>생성·싼 테스트 throughput ↑ / 새 가설 품질 판단은 약함</a:t>
             </a:r>
           </a:p>
         </p:txBody>
@@ -15368,7 +16421,7 @@
                 <a:ea typeface="NanumGothic"/>
                 <a:cs typeface="NanumGothic"/>
               </a:rPr>
-              <a:t>병렬 검색</a:t>
+              <a:t>권고</a:t>
             </a:r>
           </a:p>
         </p:txBody>
@@ -15415,7 +16468,7 @@
                 <a:ea typeface="NanumGothic"/>
                 <a:cs typeface="NanumGothic"/>
               </a:rPr>
-              <a:t>여러 각도에서 동시에</a:t>
+              <a:t>제약된 다수 생성 → 싼 경험적 필터 → 비싼 검증은 소수만</a:t>
             </a:r>
           </a:p>
         </p:txBody>
@@ -15506,7 +16559,7 @@
                 <a:ea typeface="NanumGothic"/>
                 <a:cs typeface="NanumGothic"/>
               </a:rPr>
-              <a:t>커버리지 점검</a:t>
+              <a:t>주의</a:t>
             </a:r>
           </a:p>
         </p:txBody>
@@ -15553,7 +16606,111 @@
                 <a:ea typeface="NanumGothic"/>
                 <a:cs typeface="NanumGothic"/>
               </a:rPr>
-              <a:t>빠진 관점 찾기</a:t>
+              <a:t>다중검정 위양성 · 싼 테스트는 proxy (특히 wet-lab/임상)</a:t>
+            </a:r>
+          </a:p>
+        </p:txBody>
+      </p:sp>
+      <p:sp>
+        <p:nvSpPr>
+          <p:cNvPr id="18" name="Rounded Rectangle 17"/>
+          <p:cNvSpPr/>
+          <p:nvPr/>
+        </p:nvSpPr>
+        <p:spPr>
+          <a:xfrm>
+            <a:off x="502920" y="5532120"/>
+            <a:ext cx="11155680" cy="658368"/>
+          </a:xfrm>
+          <a:prstGeom prst="roundRect">
+            <a:avLst/>
+          </a:prstGeom>
+          <a:solidFill>
+            <a:srgbClr val="F1F5F9"/>
+          </a:solidFill>
+          <a:ln w="12700">
+            <a:solidFill>
+              <a:srgbClr val="E2E8F0"/>
+            </a:solidFill>
+          </a:ln>
+          <a:effectLst/>
+        </p:spPr>
+        <p:style>
+          <a:lnRef idx="1">
+            <a:schemeClr val="accent1"/>
+          </a:lnRef>
+          <a:fillRef idx="3">
+            <a:schemeClr val="accent1"/>
+          </a:fillRef>
+          <a:effectRef idx="2">
+            <a:schemeClr val="accent1"/>
+          </a:effectRef>
+          <a:fontRef idx="minor">
+            <a:schemeClr val="lt1"/>
+          </a:fontRef>
+        </p:style>
+        <p:txBody>
+          <a:bodyPr rtlCol="0" anchor="ctr"/>
+          <a:lstStyle/>
+          <a:p>
+            <a:pPr algn="ctr"/>
+          </a:p>
+        </p:txBody>
+      </p:sp>
+      <p:sp>
+        <p:nvSpPr>
+          <p:cNvPr id="19" name="TextBox 18"/>
+          <p:cNvSpPr txBox="1"/>
+          <p:nvPr/>
+        </p:nvSpPr>
+        <p:spPr>
+          <a:xfrm>
+            <a:off x="777240" y="5532120"/>
+            <a:ext cx="10607040" cy="658368"/>
+          </a:xfrm>
+          <a:prstGeom prst="rect">
+            <a:avLst/>
+          </a:prstGeom>
+          <a:noFill/>
+        </p:spPr>
+        <p:txBody>
+          <a:bodyPr wrap="square" anchor="ctr" lIns="0" rIns="0" tIns="0" bIns="0">
+            <a:spAutoFit/>
+          </a:bodyPr>
+          <a:lstStyle/>
+          <a:p>
+            <a:pPr algn="l">
+              <a:lnSpc>
+                <a:spcPct val="100000"/>
+              </a:lnSpc>
+              <a:spcBef>
+                <a:spcPts val="0"/>
+              </a:spcBef>
+              <a:spcAft>
+                <a:spcPts val="600"/>
+              </a:spcAft>
+            </a:pPr>
+            <a:r>
+              <a:rPr sz="1200" b="1">
+                <a:solidFill>
+                  <a:srgbClr val="10B981"/>
+                </a:solidFill>
+                <a:latin typeface="NanumGothic"/>
+                <a:ea typeface="NanumGothic"/>
+                <a:cs typeface="NanumGothic"/>
+              </a:rPr>
+              <a:t>NOTE   </a:t>
+            </a:r>
+            <a:r>
+              <a:rPr sz="1300" b="0">
+                <a:solidFill>
+                  <a:srgbClr val="0F172A"/>
+                </a:solidFill>
+                <a:latin typeface="NanumGothic"/>
+                <a:ea typeface="NanumGothic"/>
+                <a:cs typeface="NanumGothic"/>
+              </a:rPr>
+              <a:t>토론: 우리 주제에선 어디에 무게를 둘까?</a:t>
             </a:r>
           </a:p>
         </p:txBody>
@@ -15706,7 +16863,7 @@
                 <a:ea typeface="NanumGothic"/>
                 <a:cs typeface="NanumGothic"/>
               </a:rPr>
-              <a:t>단계 ②</a:t>
+              <a:t>프로젝트</a:t>
             </a:r>
           </a:p>
         </p:txBody>
@@ -15753,7 +16910,7 @@
                 <a:ea typeface="NanumSquare"/>
                 <a:cs typeface="NanumSquare"/>
               </a:rPr>
-              <a:t>검증 (Verify) — 환각을 막는다</a:t>
+              <a:t>프로젝트 형식 + 3세션 스코프</a:t>
             </a:r>
           </a:p>
         </p:txBody>
@@ -15982,7 +17139,7 @@
                 <a:ea typeface="NanumGothic"/>
                 <a:cs typeface="NanumGothic"/>
               </a:rPr>
-              <a:t>출처 확인</a:t>
+              <a:t>무엇</a:t>
             </a:r>
           </a:p>
         </p:txBody>
@@ -16029,7 +17186,7 @@
                 <a:ea typeface="NanumGothic"/>
                 <a:cs typeface="NanumGothic"/>
               </a:rPr>
-              <a:t>주장마다 근거</a:t>
+              <a:t>팀별 '풀 리서치 에이전트' 구현 (자기 관심 주제)</a:t>
             </a:r>
           </a:p>
         </p:txBody>
@@ -16120,7 +17277,7 @@
                 <a:ea typeface="NanumGothic"/>
                 <a:cs typeface="NanumGothic"/>
               </a:rPr>
-              <a:t>신뢰도 평가</a:t>
+              <a:t>스코프</a:t>
             </a:r>
           </a:p>
         </p:txBody>
@@ -16167,7 +17324,7 @@
                 <a:ea typeface="NanumGothic"/>
                 <a:cs typeface="NanumGothic"/>
               </a:rPr>
-              <a:t>출처의 질</a:t>
+              <a:t>corpus 기반 · 질문→검색→검증→종합→보고 · Day 4 안에 완주</a:t>
             </a:r>
           </a:p>
         </p:txBody>
@@ -16258,7 +17415,7 @@
                 <a:ea typeface="NanumGothic"/>
                 <a:cs typeface="NanumGothic"/>
               </a:rPr>
-              <a:t>왜 핵심인가</a:t>
+              <a:t>산출물</a:t>
             </a:r>
           </a:p>
         </p:txBody>
@@ -16305,7 +17462,7 @@
                 <a:ea typeface="NanumGothic"/>
                 <a:cs typeface="NanumGothic"/>
               </a:rPr>
-              <a:t>LLM 환각 대응의 핵심</a:t>
+              <a:t>핵심 질문에 답하는 1~2장 인용 보고서</a:t>
             </a:r>
           </a:p>
         </p:txBody>
@@ -16458,7 +17615,7 @@
                 <a:ea typeface="NanumGothic"/>
                 <a:cs typeface="NanumGothic"/>
               </a:rPr>
-              <a:t>단계 ②+</a:t>
+              <a:t>파이프라인</a:t>
             </a:r>
           </a:p>
         </p:txBody>
@@ -16505,7 +17662,7 @@
                 <a:ea typeface="NanumSquare"/>
                 <a:cs typeface="NanumSquare"/>
               </a:rPr>
-              <a:t>교차검증과 출처관리</a:t>
+              <a:t>리서치 에이전트 파이프라인 (만들 것)</a:t>
             </a:r>
           </a:p>
         </p:txBody>
@@ -16650,16 +17807,62 @@
       </p:sp>
       <p:sp>
         <p:nvSpPr>
-          <p:cNvPr id="9" name="Oval 8"/>
+          <p:cNvPr id="9" name="Rounded Rectangle 8"/>
           <p:cNvSpPr/>
           <p:nvPr/>
         </p:nvSpPr>
         <p:spPr>
           <a:xfrm>
-            <a:off x="548640" y="1911096"/>
-            <a:ext cx="146304" cy="146304"/>
-          </a:xfrm>
-          <a:prstGeom prst="ellipse">
+            <a:off x="502920" y="2651760"/>
+            <a:ext cx="1975104" cy="1737360"/>
+          </a:xfrm>
+          <a:prstGeom prst="roundRect">
+            <a:avLst/>
+          </a:prstGeom>
+          <a:solidFill>
+            <a:srgbClr val="F8FAFC"/>
+          </a:solidFill>
+          <a:ln w="12700">
+            <a:solidFill>
+              <a:srgbClr val="E2E8F0"/>
+            </a:solidFill>
+          </a:ln>
+          <a:effectLst/>
+        </p:spPr>
+        <p:style>
+          <a:lnRef idx="1">
+            <a:schemeClr val="accent1"/>
+          </a:lnRef>
+          <a:fillRef idx="3">
+            <a:schemeClr val="accent1"/>
+          </a:fillRef>
+          <a:effectRef idx="2">
+            <a:schemeClr val="accent1"/>
+          </a:effectRef>
+          <a:fontRef idx="minor">
+            <a:schemeClr val="lt1"/>
+          </a:fontRef>
+        </p:style>
+        <p:txBody>
+          <a:bodyPr rtlCol="0" anchor="ctr"/>
+          <a:lstStyle/>
+          <a:p>
+            <a:pPr algn="ctr"/>
+          </a:p>
+        </p:txBody>
+      </p:sp>
+      <p:sp>
+        <p:nvSpPr>
+          <p:cNvPr id="10" name="Rectangle 9"/>
+          <p:cNvSpPr/>
+          <p:nvPr/>
+        </p:nvSpPr>
+        <p:spPr>
+          <a:xfrm>
+            <a:off x="502920" y="2651760"/>
+            <a:ext cx="1975104" cy="109728"/>
+          </a:xfrm>
+          <a:prstGeom prst="rect">
             <a:avLst/>
           </a:prstGeom>
           <a:solidFill>
@@ -16694,14 +17897,14 @@
       </p:sp>
       <p:sp>
         <p:nvSpPr>
-          <p:cNvPr id="10" name="TextBox 9"/>
-          <p:cNvSpPr txBox="1"/>
-          <p:nvPr/>
-        </p:nvSpPr>
-        <p:spPr>
-          <a:xfrm>
-            <a:off x="868680" y="1828800"/>
-            <a:ext cx="10607040" cy="457200"/>
+          <p:cNvPr id="11" name="TextBox 10"/>
+          <p:cNvSpPr txBox="1"/>
+          <p:nvPr/>
+        </p:nvSpPr>
+        <p:spPr>
+          <a:xfrm>
+            <a:off x="640080" y="2944368"/>
+            <a:ext cx="1700784" cy="365760"/>
           </a:xfrm>
           <a:prstGeom prst="rect">
             <a:avLst/>
@@ -16726,7 +17929,54 @@
               </a:spcAft>
             </a:pPr>
             <a:r>
-              <a:rPr sz="1600" b="1">
+              <a:rPr sz="1300" b="1">
+                <a:solidFill>
+                  <a:srgbClr val="10B981"/>
+                </a:solidFill>
+                <a:latin typeface="NanumSquare"/>
+                <a:ea typeface="NanumSquare"/>
+                <a:cs typeface="NanumSquare"/>
+              </a:rPr>
+              <a:t>1</a:t>
+            </a:r>
+          </a:p>
+        </p:txBody>
+      </p:sp>
+      <p:sp>
+        <p:nvSpPr>
+          <p:cNvPr id="12" name="TextBox 11"/>
+          <p:cNvSpPr txBox="1"/>
+          <p:nvPr/>
+        </p:nvSpPr>
+        <p:spPr>
+          <a:xfrm>
+            <a:off x="640080" y="3310128"/>
+            <a:ext cx="1700784" cy="548640"/>
+          </a:xfrm>
+          <a:prstGeom prst="rect">
+            <a:avLst/>
+          </a:prstGeom>
+          <a:noFill/>
+        </p:spPr>
+        <p:txBody>
+          <a:bodyPr wrap="square" anchor="t" lIns="0" rIns="0" tIns="0" bIns="0">
+            <a:spAutoFit/>
+          </a:bodyPr>
+          <a:lstStyle/>
+          <a:p>
+            <a:pPr algn="l">
+              <a:lnSpc>
+                <a:spcPct val="100000"/>
+              </a:lnSpc>
+              <a:spcBef>
+                <a:spcPts val="0"/>
+              </a:spcBef>
+              <a:spcAft>
+                <a:spcPts val="600"/>
+              </a:spcAft>
+            </a:pPr>
+            <a:r>
+              <a:rPr sz="1500" b="1">
                 <a:solidFill>
                   <a:srgbClr val="0F172A"/>
                 </a:solidFill>
@@ -16734,21 +17984,21 @@
                 <a:ea typeface="NanumGothic"/>
                 <a:cs typeface="NanumGothic"/>
               </a:rPr>
-              <a:t>여러 출처로 교차확인</a:t>
-            </a:r>
-          </a:p>
-        </p:txBody>
-      </p:sp>
-      <p:sp>
-        <p:nvSpPr>
-          <p:cNvPr id="11" name="TextBox 10"/>
-          <p:cNvSpPr txBox="1"/>
-          <p:nvPr/>
-        </p:nvSpPr>
-        <p:spPr>
-          <a:xfrm>
-            <a:off x="868680" y="2212848"/>
-            <a:ext cx="10607040" cy="457200"/>
+              <a:t>질문</a:t>
+            </a:r>
+          </a:p>
+        </p:txBody>
+      </p:sp>
+      <p:sp>
+        <p:nvSpPr>
+          <p:cNvPr id="13" name="TextBox 12"/>
+          <p:cNvSpPr txBox="1"/>
+          <p:nvPr/>
+        </p:nvSpPr>
+        <p:spPr>
+          <a:xfrm>
+            <a:off x="640080" y="3822192"/>
+            <a:ext cx="1700784" cy="457200"/>
           </a:xfrm>
           <a:prstGeom prst="rect">
             <a:avLst/>
@@ -16773,7 +18023,7 @@
               </a:spcAft>
             </a:pPr>
             <a:r>
-              <a:rPr sz="1300" b="0">
+              <a:rPr sz="1100" b="0">
                 <a:solidFill>
                   <a:srgbClr val="64748B"/>
                 </a:solidFill>
@@ -16781,23 +18031,116 @@
                 <a:ea typeface="NanumGothic"/>
                 <a:cs typeface="NanumGothic"/>
               </a:rPr>
-              <a:t>상충 정보 식별</a:t>
-            </a:r>
-          </a:p>
-        </p:txBody>
-      </p:sp>
-      <p:sp>
-        <p:nvSpPr>
-          <p:cNvPr id="12" name="Oval 11"/>
+              <a:t>핵심 질문·분해</a:t>
+            </a:r>
+          </a:p>
+        </p:txBody>
+      </p:sp>
+      <p:sp>
+        <p:nvSpPr>
+          <p:cNvPr id="14" name="TextBox 13"/>
+          <p:cNvSpPr txBox="1"/>
+          <p:nvPr/>
+        </p:nvSpPr>
+        <p:spPr>
+          <a:xfrm>
+            <a:off x="2523744" y="3154680"/>
+            <a:ext cx="274320" cy="548640"/>
+          </a:xfrm>
+          <a:prstGeom prst="rect">
+            <a:avLst/>
+          </a:prstGeom>
+          <a:noFill/>
+        </p:spPr>
+        <p:txBody>
+          <a:bodyPr wrap="square" anchor="ctr" lIns="0" rIns="0" tIns="0" bIns="0">
+            <a:spAutoFit/>
+          </a:bodyPr>
+          <a:lstStyle/>
+          <a:p>
+            <a:pPr algn="ctr">
+              <a:lnSpc>
+                <a:spcPct val="100000"/>
+              </a:lnSpc>
+              <a:spcBef>
+                <a:spcPts val="0"/>
+              </a:spcBef>
+              <a:spcAft>
+                <a:spcPts val="600"/>
+              </a:spcAft>
+            </a:pPr>
+            <a:r>
+              <a:rPr sz="2200" b="1">
+                <a:solidFill>
+                  <a:srgbClr val="10B981"/>
+                </a:solidFill>
+                <a:latin typeface="NanumSquare"/>
+                <a:ea typeface="NanumSquare"/>
+                <a:cs typeface="NanumSquare"/>
+              </a:rPr>
+              <a:t>→</a:t>
+            </a:r>
+          </a:p>
+        </p:txBody>
+      </p:sp>
+      <p:sp>
+        <p:nvSpPr>
+          <p:cNvPr id="15" name="Rounded Rectangle 14"/>
           <p:cNvSpPr/>
           <p:nvPr/>
         </p:nvSpPr>
         <p:spPr>
           <a:xfrm>
-            <a:off x="548640" y="2779776"/>
-            <a:ext cx="146304" cy="146304"/>
-          </a:xfrm>
-          <a:prstGeom prst="ellipse">
+            <a:off x="2798064" y="2651760"/>
+            <a:ext cx="1975104" cy="1737360"/>
+          </a:xfrm>
+          <a:prstGeom prst="roundRect">
+            <a:avLst/>
+          </a:prstGeom>
+          <a:solidFill>
+            <a:srgbClr val="F8FAFC"/>
+          </a:solidFill>
+          <a:ln w="12700">
+            <a:solidFill>
+              <a:srgbClr val="E2E8F0"/>
+            </a:solidFill>
+          </a:ln>
+          <a:effectLst/>
+        </p:spPr>
+        <p:style>
+          <a:lnRef idx="1">
+            <a:schemeClr val="accent1"/>
+          </a:lnRef>
+          <a:fillRef idx="3">
+            <a:schemeClr val="accent1"/>
+          </a:fillRef>
+          <a:effectRef idx="2">
+            <a:schemeClr val="accent1"/>
+          </a:effectRef>
+          <a:fontRef idx="minor">
+            <a:schemeClr val="lt1"/>
+          </a:fontRef>
+        </p:style>
+        <p:txBody>
+          <a:bodyPr rtlCol="0" anchor="ctr"/>
+          <a:lstStyle/>
+          <a:p>
+            <a:pPr algn="ctr"/>
+          </a:p>
+        </p:txBody>
+      </p:sp>
+      <p:sp>
+        <p:nvSpPr>
+          <p:cNvPr id="16" name="Rectangle 15"/>
+          <p:cNvSpPr/>
+          <p:nvPr/>
+        </p:nvSpPr>
+        <p:spPr>
+          <a:xfrm>
+            <a:off x="2798064" y="2651760"/>
+            <a:ext cx="1975104" cy="109728"/>
+          </a:xfrm>
+          <a:prstGeom prst="rect">
             <a:avLst/>
           </a:prstGeom>
           <a:solidFill>
@@ -16832,14 +18175,14 @@
       </p:sp>
       <p:sp>
         <p:nvSpPr>
-          <p:cNvPr id="13" name="TextBox 12"/>
-          <p:cNvSpPr txBox="1"/>
-          <p:nvPr/>
-        </p:nvSpPr>
-        <p:spPr>
-          <a:xfrm>
-            <a:off x="868680" y="2697480"/>
-            <a:ext cx="10607040" cy="457200"/>
+          <p:cNvPr id="17" name="TextBox 16"/>
+          <p:cNvSpPr txBox="1"/>
+          <p:nvPr/>
+        </p:nvSpPr>
+        <p:spPr>
+          <a:xfrm>
+            <a:off x="2935224" y="2944368"/>
+            <a:ext cx="1700784" cy="365760"/>
           </a:xfrm>
           <a:prstGeom prst="rect">
             <a:avLst/>
@@ -16864,7 +18207,54 @@
               </a:spcAft>
             </a:pPr>
             <a:r>
-              <a:rPr sz="1600" b="1">
+              <a:rPr sz="1300" b="1">
+                <a:solidFill>
+                  <a:srgbClr val="10B981"/>
+                </a:solidFill>
+                <a:latin typeface="NanumSquare"/>
+                <a:ea typeface="NanumSquare"/>
+                <a:cs typeface="NanumSquare"/>
+              </a:rPr>
+              <a:t>2</a:t>
+            </a:r>
+          </a:p>
+        </p:txBody>
+      </p:sp>
+      <p:sp>
+        <p:nvSpPr>
+          <p:cNvPr id="18" name="TextBox 17"/>
+          <p:cNvSpPr txBox="1"/>
+          <p:nvPr/>
+        </p:nvSpPr>
+        <p:spPr>
+          <a:xfrm>
+            <a:off x="2935224" y="3310128"/>
+            <a:ext cx="1700784" cy="548640"/>
+          </a:xfrm>
+          <a:prstGeom prst="rect">
+            <a:avLst/>
+          </a:prstGeom>
+          <a:noFill/>
+        </p:spPr>
+        <p:txBody>
+          <a:bodyPr wrap="square" anchor="t" lIns="0" rIns="0" tIns="0" bIns="0">
+            <a:spAutoFit/>
+          </a:bodyPr>
+          <a:lstStyle/>
+          <a:p>
+            <a:pPr algn="l">
+              <a:lnSpc>
+                <a:spcPct val="100000"/>
+              </a:lnSpc>
+              <a:spcBef>
+                <a:spcPts val="0"/>
+              </a:spcBef>
+              <a:spcAft>
+                <a:spcPts val="600"/>
+              </a:spcAft>
+            </a:pPr>
+            <a:r>
+              <a:rPr sz="1500" b="1">
                 <a:solidFill>
                   <a:srgbClr val="0F172A"/>
                 </a:solidFill>
@@ -16872,21 +18262,21 @@
                 <a:ea typeface="NanumGothic"/>
                 <a:cs typeface="NanumGothic"/>
               </a:rPr>
-              <a:t>출처 추적성</a:t>
-            </a:r>
-          </a:p>
-        </p:txBody>
-      </p:sp>
-      <p:sp>
-        <p:nvSpPr>
-          <p:cNvPr id="14" name="TextBox 13"/>
-          <p:cNvSpPr txBox="1"/>
-          <p:nvPr/>
-        </p:nvSpPr>
-        <p:spPr>
-          <a:xfrm>
-            <a:off x="868680" y="3081528"/>
-            <a:ext cx="10607040" cy="457200"/>
+              <a:t>검색</a:t>
+            </a:r>
+          </a:p>
+        </p:txBody>
+      </p:sp>
+      <p:sp>
+        <p:nvSpPr>
+          <p:cNvPr id="19" name="TextBox 18"/>
+          <p:cNvSpPr txBox="1"/>
+          <p:nvPr/>
+        </p:nvSpPr>
+        <p:spPr>
+          <a:xfrm>
+            <a:off x="2935224" y="3822192"/>
+            <a:ext cx="1700784" cy="457200"/>
           </a:xfrm>
           <a:prstGeom prst="rect">
             <a:avLst/>
@@ -16911,7 +18301,7 @@
               </a:spcAft>
             </a:pPr>
             <a:r>
-              <a:rPr sz="1300" b="0">
+              <a:rPr sz="1100" b="0">
                 <a:solidFill>
                   <a:srgbClr val="64748B"/>
                 </a:solidFill>
@@ -16919,23 +18309,116 @@
                 <a:ea typeface="NanumGothic"/>
                 <a:cs typeface="NanumGothic"/>
               </a:rPr>
-              <a:t>어디서 왔는지 기록</a:t>
-            </a:r>
-          </a:p>
-        </p:txBody>
-      </p:sp>
-      <p:sp>
-        <p:nvSpPr>
-          <p:cNvPr id="15" name="Oval 14"/>
+              <a:t>로컬 corpus</a:t>
+            </a:r>
+          </a:p>
+        </p:txBody>
+      </p:sp>
+      <p:sp>
+        <p:nvSpPr>
+          <p:cNvPr id="20" name="TextBox 19"/>
+          <p:cNvSpPr txBox="1"/>
+          <p:nvPr/>
+        </p:nvSpPr>
+        <p:spPr>
+          <a:xfrm>
+            <a:off x="4818888" y="3154680"/>
+            <a:ext cx="274320" cy="548640"/>
+          </a:xfrm>
+          <a:prstGeom prst="rect">
+            <a:avLst/>
+          </a:prstGeom>
+          <a:noFill/>
+        </p:spPr>
+        <p:txBody>
+          <a:bodyPr wrap="square" anchor="ctr" lIns="0" rIns="0" tIns="0" bIns="0">
+            <a:spAutoFit/>
+          </a:bodyPr>
+          <a:lstStyle/>
+          <a:p>
+            <a:pPr algn="ctr">
+              <a:lnSpc>
+                <a:spcPct val="100000"/>
+              </a:lnSpc>
+              <a:spcBef>
+                <a:spcPts val="0"/>
+              </a:spcBef>
+              <a:spcAft>
+                <a:spcPts val="600"/>
+              </a:spcAft>
+            </a:pPr>
+            <a:r>
+              <a:rPr sz="2200" b="1">
+                <a:solidFill>
+                  <a:srgbClr val="10B981"/>
+                </a:solidFill>
+                <a:latin typeface="NanumSquare"/>
+                <a:ea typeface="NanumSquare"/>
+                <a:cs typeface="NanumSquare"/>
+              </a:rPr>
+              <a:t>→</a:t>
+            </a:r>
+          </a:p>
+        </p:txBody>
+      </p:sp>
+      <p:sp>
+        <p:nvSpPr>
+          <p:cNvPr id="21" name="Rounded Rectangle 20"/>
           <p:cNvSpPr/>
           <p:nvPr/>
         </p:nvSpPr>
         <p:spPr>
           <a:xfrm>
-            <a:off x="548640" y="3648456"/>
-            <a:ext cx="146304" cy="146304"/>
-          </a:xfrm>
-          <a:prstGeom prst="ellipse">
+            <a:off x="5093208" y="2651760"/>
+            <a:ext cx="1975104" cy="1737360"/>
+          </a:xfrm>
+          <a:prstGeom prst="roundRect">
+            <a:avLst/>
+          </a:prstGeom>
+          <a:solidFill>
+            <a:srgbClr val="F8FAFC"/>
+          </a:solidFill>
+          <a:ln w="12700">
+            <a:solidFill>
+              <a:srgbClr val="E2E8F0"/>
+            </a:solidFill>
+          </a:ln>
+          <a:effectLst/>
+        </p:spPr>
+        <p:style>
+          <a:lnRef idx="1">
+            <a:schemeClr val="accent1"/>
+          </a:lnRef>
+          <a:fillRef idx="3">
+            <a:schemeClr val="accent1"/>
+          </a:fillRef>
+          <a:effectRef idx="2">
+            <a:schemeClr val="accent1"/>
+          </a:effectRef>
+          <a:fontRef idx="minor">
+            <a:schemeClr val="lt1"/>
+          </a:fontRef>
+        </p:style>
+        <p:txBody>
+          <a:bodyPr rtlCol="0" anchor="ctr"/>
+          <a:lstStyle/>
+          <a:p>
+            <a:pPr algn="ctr"/>
+          </a:p>
+        </p:txBody>
+      </p:sp>
+      <p:sp>
+        <p:nvSpPr>
+          <p:cNvPr id="22" name="Rectangle 21"/>
+          <p:cNvSpPr/>
+          <p:nvPr/>
+        </p:nvSpPr>
+        <p:spPr>
+          <a:xfrm>
+            <a:off x="5093208" y="2651760"/>
+            <a:ext cx="1975104" cy="109728"/>
+          </a:xfrm>
+          <a:prstGeom prst="rect">
             <a:avLst/>
           </a:prstGeom>
           <a:solidFill>
@@ -16970,14 +18453,14 @@
       </p:sp>
       <p:sp>
         <p:nvSpPr>
-          <p:cNvPr id="16" name="TextBox 15"/>
-          <p:cNvSpPr txBox="1"/>
-          <p:nvPr/>
-        </p:nvSpPr>
-        <p:spPr>
-          <a:xfrm>
-            <a:off x="868680" y="3566160"/>
-            <a:ext cx="10607040" cy="457200"/>
+          <p:cNvPr id="23" name="TextBox 22"/>
+          <p:cNvSpPr txBox="1"/>
+          <p:nvPr/>
+        </p:nvSpPr>
+        <p:spPr>
+          <a:xfrm>
+            <a:off x="5230368" y="2944368"/>
+            <a:ext cx="1700784" cy="365760"/>
           </a:xfrm>
           <a:prstGeom prst="rect">
             <a:avLst/>
@@ -17002,7 +18485,54 @@
               </a:spcAft>
             </a:pPr>
             <a:r>
-              <a:rPr sz="1600" b="1">
+              <a:rPr sz="1300" b="1">
+                <a:solidFill>
+                  <a:srgbClr val="10B981"/>
+                </a:solidFill>
+                <a:latin typeface="NanumSquare"/>
+                <a:ea typeface="NanumSquare"/>
+                <a:cs typeface="NanumSquare"/>
+              </a:rPr>
+              <a:t>3</a:t>
+            </a:r>
+          </a:p>
+        </p:txBody>
+      </p:sp>
+      <p:sp>
+        <p:nvSpPr>
+          <p:cNvPr id="24" name="TextBox 23"/>
+          <p:cNvSpPr txBox="1"/>
+          <p:nvPr/>
+        </p:nvSpPr>
+        <p:spPr>
+          <a:xfrm>
+            <a:off x="5230368" y="3310128"/>
+            <a:ext cx="1700784" cy="548640"/>
+          </a:xfrm>
+          <a:prstGeom prst="rect">
+            <a:avLst/>
+          </a:prstGeom>
+          <a:noFill/>
+        </p:spPr>
+        <p:txBody>
+          <a:bodyPr wrap="square" anchor="t" lIns="0" rIns="0" tIns="0" bIns="0">
+            <a:spAutoFit/>
+          </a:bodyPr>
+          <a:lstStyle/>
+          <a:p>
+            <a:pPr algn="l">
+              <a:lnSpc>
+                <a:spcPct val="100000"/>
+              </a:lnSpc>
+              <a:spcBef>
+                <a:spcPts val="0"/>
+              </a:spcBef>
+              <a:spcAft>
+                <a:spcPts val="600"/>
+              </a:spcAft>
+            </a:pPr>
+            <a:r>
+              <a:rPr sz="1500" b="1">
                 <a:solidFill>
                   <a:srgbClr val="0F172A"/>
                 </a:solidFill>
@@ -17010,21 +18540,21 @@
                 <a:ea typeface="NanumGothic"/>
                 <a:cs typeface="NanumGothic"/>
               </a:rPr>
-              <a:t>재현성</a:t>
-            </a:r>
-          </a:p>
-        </p:txBody>
-      </p:sp>
-      <p:sp>
-        <p:nvSpPr>
-          <p:cNvPr id="17" name="TextBox 16"/>
-          <p:cNvSpPr txBox="1"/>
-          <p:nvPr/>
-        </p:nvSpPr>
-        <p:spPr>
-          <a:xfrm>
-            <a:off x="868680" y="3950208"/>
-            <a:ext cx="10607040" cy="457200"/>
+              <a:t>검증</a:t>
+            </a:r>
+          </a:p>
+        </p:txBody>
+      </p:sp>
+      <p:sp>
+        <p:nvSpPr>
+          <p:cNvPr id="25" name="TextBox 24"/>
+          <p:cNvSpPr txBox="1"/>
+          <p:nvPr/>
+        </p:nvSpPr>
+        <p:spPr>
+          <a:xfrm>
+            <a:off x="5230368" y="3822192"/>
+            <a:ext cx="1700784" cy="457200"/>
           </a:xfrm>
           <a:prstGeom prst="rect">
             <a:avLst/>
@@ -17049,7 +18579,7 @@
               </a:spcAft>
             </a:pPr>
             <a:r>
-              <a:rPr sz="1300" b="0">
+              <a:rPr sz="1100" b="0">
                 <a:solidFill>
                   <a:srgbClr val="64748B"/>
                 </a:solidFill>
@@ -17057,7 +18587,667 @@
                 <a:ea typeface="NanumGothic"/>
                 <a:cs typeface="NanumGothic"/>
               </a:rPr>
-              <a:t>같은 조건 → 같은 결과 지향</a:t>
+              <a:t>출처·교차확인</a:t>
+            </a:r>
+          </a:p>
+        </p:txBody>
+      </p:sp>
+      <p:sp>
+        <p:nvSpPr>
+          <p:cNvPr id="26" name="TextBox 25"/>
+          <p:cNvSpPr txBox="1"/>
+          <p:nvPr/>
+        </p:nvSpPr>
+        <p:spPr>
+          <a:xfrm>
+            <a:off x="7114032" y="3154680"/>
+            <a:ext cx="274320" cy="548640"/>
+          </a:xfrm>
+          <a:prstGeom prst="rect">
+            <a:avLst/>
+          </a:prstGeom>
+          <a:noFill/>
+        </p:spPr>
+        <p:txBody>
+          <a:bodyPr wrap="square" anchor="ctr" lIns="0" rIns="0" tIns="0" bIns="0">
+            <a:spAutoFit/>
+          </a:bodyPr>
+          <a:lstStyle/>
+          <a:p>
+            <a:pPr algn="ctr">
+              <a:lnSpc>
+                <a:spcPct val="100000"/>
+              </a:lnSpc>
+              <a:spcBef>
+                <a:spcPts val="0"/>
+              </a:spcBef>
+              <a:spcAft>
+                <a:spcPts val="600"/>
+              </a:spcAft>
+            </a:pPr>
+            <a:r>
+              <a:rPr sz="2200" b="1">
+                <a:solidFill>
+                  <a:srgbClr val="10B981"/>
+                </a:solidFill>
+                <a:latin typeface="NanumSquare"/>
+                <a:ea typeface="NanumSquare"/>
+                <a:cs typeface="NanumSquare"/>
+              </a:rPr>
+              <a:t>→</a:t>
+            </a:r>
+          </a:p>
+        </p:txBody>
+      </p:sp>
+      <p:sp>
+        <p:nvSpPr>
+          <p:cNvPr id="27" name="Rounded Rectangle 26"/>
+          <p:cNvSpPr/>
+          <p:nvPr/>
+        </p:nvSpPr>
+        <p:spPr>
+          <a:xfrm>
+            <a:off x="7388352" y="2651760"/>
+            <a:ext cx="1975104" cy="1737360"/>
+          </a:xfrm>
+          <a:prstGeom prst="roundRect">
+            <a:avLst/>
+          </a:prstGeom>
+          <a:solidFill>
+            <a:srgbClr val="F8FAFC"/>
+          </a:solidFill>
+          <a:ln w="12700">
+            <a:solidFill>
+              <a:srgbClr val="E2E8F0"/>
+            </a:solidFill>
+          </a:ln>
+          <a:effectLst/>
+        </p:spPr>
+        <p:style>
+          <a:lnRef idx="1">
+            <a:schemeClr val="accent1"/>
+          </a:lnRef>
+          <a:fillRef idx="3">
+            <a:schemeClr val="accent1"/>
+          </a:fillRef>
+          <a:effectRef idx="2">
+            <a:schemeClr val="accent1"/>
+          </a:effectRef>
+          <a:fontRef idx="minor">
+            <a:schemeClr val="lt1"/>
+          </a:fontRef>
+        </p:style>
+        <p:txBody>
+          <a:bodyPr rtlCol="0" anchor="ctr"/>
+          <a:lstStyle/>
+          <a:p>
+            <a:pPr algn="ctr"/>
+          </a:p>
+        </p:txBody>
+      </p:sp>
+      <p:sp>
+        <p:nvSpPr>
+          <p:cNvPr id="28" name="Rectangle 27"/>
+          <p:cNvSpPr/>
+          <p:nvPr/>
+        </p:nvSpPr>
+        <p:spPr>
+          <a:xfrm>
+            <a:off x="7388352" y="2651760"/>
+            <a:ext cx="1975104" cy="109728"/>
+          </a:xfrm>
+          <a:prstGeom prst="rect">
+            <a:avLst/>
+          </a:prstGeom>
+          <a:solidFill>
+            <a:srgbClr val="10B981"/>
+          </a:solidFill>
+          <a:ln>
+            <a:noFill/>
+          </a:ln>
+          <a:effectLst/>
+        </p:spPr>
+        <p:style>
+          <a:lnRef idx="1">
+            <a:schemeClr val="accent1"/>
+          </a:lnRef>
+          <a:fillRef idx="3">
+            <a:schemeClr val="accent1"/>
+          </a:fillRef>
+          <a:effectRef idx="2">
+            <a:schemeClr val="accent1"/>
+          </a:effectRef>
+          <a:fontRef idx="minor">
+            <a:schemeClr val="lt1"/>
+          </a:fontRef>
+        </p:style>
+        <p:txBody>
+          <a:bodyPr rtlCol="0" anchor="ctr"/>
+          <a:lstStyle/>
+          <a:p>
+            <a:pPr algn="ctr"/>
+          </a:p>
+        </p:txBody>
+      </p:sp>
+      <p:sp>
+        <p:nvSpPr>
+          <p:cNvPr id="29" name="TextBox 28"/>
+          <p:cNvSpPr txBox="1"/>
+          <p:nvPr/>
+        </p:nvSpPr>
+        <p:spPr>
+          <a:xfrm>
+            <a:off x="7525512" y="2944368"/>
+            <a:ext cx="1700784" cy="365760"/>
+          </a:xfrm>
+          <a:prstGeom prst="rect">
+            <a:avLst/>
+          </a:prstGeom>
+          <a:noFill/>
+        </p:spPr>
+        <p:txBody>
+          <a:bodyPr wrap="square" anchor="t" lIns="0" rIns="0" tIns="0" bIns="0">
+            <a:spAutoFit/>
+          </a:bodyPr>
+          <a:lstStyle/>
+          <a:p>
+            <a:pPr algn="l">
+              <a:lnSpc>
+                <a:spcPct val="100000"/>
+              </a:lnSpc>
+              <a:spcBef>
+                <a:spcPts val="0"/>
+              </a:spcBef>
+              <a:spcAft>
+                <a:spcPts val="600"/>
+              </a:spcAft>
+            </a:pPr>
+            <a:r>
+              <a:rPr sz="1300" b="1">
+                <a:solidFill>
+                  <a:srgbClr val="10B981"/>
+                </a:solidFill>
+                <a:latin typeface="NanumSquare"/>
+                <a:ea typeface="NanumSquare"/>
+                <a:cs typeface="NanumSquare"/>
+              </a:rPr>
+              <a:t>4</a:t>
+            </a:r>
+          </a:p>
+        </p:txBody>
+      </p:sp>
+      <p:sp>
+        <p:nvSpPr>
+          <p:cNvPr id="30" name="TextBox 29"/>
+          <p:cNvSpPr txBox="1"/>
+          <p:nvPr/>
+        </p:nvSpPr>
+        <p:spPr>
+          <a:xfrm>
+            <a:off x="7525512" y="3310128"/>
+            <a:ext cx="1700784" cy="548640"/>
+          </a:xfrm>
+          <a:prstGeom prst="rect">
+            <a:avLst/>
+          </a:prstGeom>
+          <a:noFill/>
+        </p:spPr>
+        <p:txBody>
+          <a:bodyPr wrap="square" anchor="t" lIns="0" rIns="0" tIns="0" bIns="0">
+            <a:spAutoFit/>
+          </a:bodyPr>
+          <a:lstStyle/>
+          <a:p>
+            <a:pPr algn="l">
+              <a:lnSpc>
+                <a:spcPct val="100000"/>
+              </a:lnSpc>
+              <a:spcBef>
+                <a:spcPts val="0"/>
+              </a:spcBef>
+              <a:spcAft>
+                <a:spcPts val="600"/>
+              </a:spcAft>
+            </a:pPr>
+            <a:r>
+              <a:rPr sz="1500" b="1">
+                <a:solidFill>
+                  <a:srgbClr val="0F172A"/>
+                </a:solidFill>
+                <a:latin typeface="NanumGothic"/>
+                <a:ea typeface="NanumGothic"/>
+                <a:cs typeface="NanumGothic"/>
+              </a:rPr>
+              <a:t>종합</a:t>
+            </a:r>
+          </a:p>
+        </p:txBody>
+      </p:sp>
+      <p:sp>
+        <p:nvSpPr>
+          <p:cNvPr id="31" name="TextBox 30"/>
+          <p:cNvSpPr txBox="1"/>
+          <p:nvPr/>
+        </p:nvSpPr>
+        <p:spPr>
+          <a:xfrm>
+            <a:off x="7525512" y="3822192"/>
+            <a:ext cx="1700784" cy="457200"/>
+          </a:xfrm>
+          <a:prstGeom prst="rect">
+            <a:avLst/>
+          </a:prstGeom>
+          <a:noFill/>
+        </p:spPr>
+        <p:txBody>
+          <a:bodyPr wrap="square" anchor="t" lIns="0" rIns="0" tIns="0" bIns="0">
+            <a:spAutoFit/>
+          </a:bodyPr>
+          <a:lstStyle/>
+          <a:p>
+            <a:pPr algn="l">
+              <a:lnSpc>
+                <a:spcPct val="100000"/>
+              </a:lnSpc>
+              <a:spcBef>
+                <a:spcPts val="0"/>
+              </a:spcBef>
+              <a:spcAft>
+                <a:spcPts val="600"/>
+              </a:spcAft>
+            </a:pPr>
+            <a:r>
+              <a:rPr sz="1100" b="0">
+                <a:solidFill>
+                  <a:srgbClr val="64748B"/>
+                </a:solidFill>
+                <a:latin typeface="NanumGothic"/>
+                <a:ea typeface="NanumGothic"/>
+                <a:cs typeface="NanumGothic"/>
+              </a:rPr>
+              <a:t>근거→답</a:t>
+            </a:r>
+          </a:p>
+        </p:txBody>
+      </p:sp>
+      <p:sp>
+        <p:nvSpPr>
+          <p:cNvPr id="32" name="TextBox 31"/>
+          <p:cNvSpPr txBox="1"/>
+          <p:nvPr/>
+        </p:nvSpPr>
+        <p:spPr>
+          <a:xfrm>
+            <a:off x="9409176" y="3154680"/>
+            <a:ext cx="274320" cy="548640"/>
+          </a:xfrm>
+          <a:prstGeom prst="rect">
+            <a:avLst/>
+          </a:prstGeom>
+          <a:noFill/>
+        </p:spPr>
+        <p:txBody>
+          <a:bodyPr wrap="square" anchor="ctr" lIns="0" rIns="0" tIns="0" bIns="0">
+            <a:spAutoFit/>
+          </a:bodyPr>
+          <a:lstStyle/>
+          <a:p>
+            <a:pPr algn="ctr">
+              <a:lnSpc>
+                <a:spcPct val="100000"/>
+              </a:lnSpc>
+              <a:spcBef>
+                <a:spcPts val="0"/>
+              </a:spcBef>
+              <a:spcAft>
+                <a:spcPts val="600"/>
+              </a:spcAft>
+            </a:pPr>
+            <a:r>
+              <a:rPr sz="2200" b="1">
+                <a:solidFill>
+                  <a:srgbClr val="10B981"/>
+                </a:solidFill>
+                <a:latin typeface="NanumSquare"/>
+                <a:ea typeface="NanumSquare"/>
+                <a:cs typeface="NanumSquare"/>
+              </a:rPr>
+              <a:t>→</a:t>
+            </a:r>
+          </a:p>
+        </p:txBody>
+      </p:sp>
+      <p:sp>
+        <p:nvSpPr>
+          <p:cNvPr id="33" name="Rounded Rectangle 32"/>
+          <p:cNvSpPr/>
+          <p:nvPr/>
+        </p:nvSpPr>
+        <p:spPr>
+          <a:xfrm>
+            <a:off x="9683496" y="2651760"/>
+            <a:ext cx="1975104" cy="1737360"/>
+          </a:xfrm>
+          <a:prstGeom prst="roundRect">
+            <a:avLst/>
+          </a:prstGeom>
+          <a:solidFill>
+            <a:srgbClr val="F8FAFC"/>
+          </a:solidFill>
+          <a:ln w="12700">
+            <a:solidFill>
+              <a:srgbClr val="E2E8F0"/>
+            </a:solidFill>
+          </a:ln>
+          <a:effectLst/>
+        </p:spPr>
+        <p:style>
+          <a:lnRef idx="1">
+            <a:schemeClr val="accent1"/>
+          </a:lnRef>
+          <a:fillRef idx="3">
+            <a:schemeClr val="accent1"/>
+          </a:fillRef>
+          <a:effectRef idx="2">
+            <a:schemeClr val="accent1"/>
+          </a:effectRef>
+          <a:fontRef idx="minor">
+            <a:schemeClr val="lt1"/>
+          </a:fontRef>
+        </p:style>
+        <p:txBody>
+          <a:bodyPr rtlCol="0" anchor="ctr"/>
+          <a:lstStyle/>
+          <a:p>
+            <a:pPr algn="ctr"/>
+          </a:p>
+        </p:txBody>
+      </p:sp>
+      <p:sp>
+        <p:nvSpPr>
+          <p:cNvPr id="34" name="Rectangle 33"/>
+          <p:cNvSpPr/>
+          <p:nvPr/>
+        </p:nvSpPr>
+        <p:spPr>
+          <a:xfrm>
+            <a:off x="9683496" y="2651760"/>
+            <a:ext cx="1975104" cy="109728"/>
+          </a:xfrm>
+          <a:prstGeom prst="rect">
+            <a:avLst/>
+          </a:prstGeom>
+          <a:solidFill>
+            <a:srgbClr val="10B981"/>
+          </a:solidFill>
+          <a:ln>
+            <a:noFill/>
+          </a:ln>
+          <a:effectLst/>
+        </p:spPr>
+        <p:style>
+          <a:lnRef idx="1">
+            <a:schemeClr val="accent1"/>
+          </a:lnRef>
+          <a:fillRef idx="3">
+            <a:schemeClr val="accent1"/>
+          </a:fillRef>
+          <a:effectRef idx="2">
+            <a:schemeClr val="accent1"/>
+          </a:effectRef>
+          <a:fontRef idx="minor">
+            <a:schemeClr val="lt1"/>
+          </a:fontRef>
+        </p:style>
+        <p:txBody>
+          <a:bodyPr rtlCol="0" anchor="ctr"/>
+          <a:lstStyle/>
+          <a:p>
+            <a:pPr algn="ctr"/>
+          </a:p>
+        </p:txBody>
+      </p:sp>
+      <p:sp>
+        <p:nvSpPr>
+          <p:cNvPr id="35" name="TextBox 34"/>
+          <p:cNvSpPr txBox="1"/>
+          <p:nvPr/>
+        </p:nvSpPr>
+        <p:spPr>
+          <a:xfrm>
+            <a:off x="9820656" y="2944368"/>
+            <a:ext cx="1700784" cy="365760"/>
+          </a:xfrm>
+          <a:prstGeom prst="rect">
+            <a:avLst/>
+          </a:prstGeom>
+          <a:noFill/>
+        </p:spPr>
+        <p:txBody>
+          <a:bodyPr wrap="square" anchor="t" lIns="0" rIns="0" tIns="0" bIns="0">
+            <a:spAutoFit/>
+          </a:bodyPr>
+          <a:lstStyle/>
+          <a:p>
+            <a:pPr algn="l">
+              <a:lnSpc>
+                <a:spcPct val="100000"/>
+              </a:lnSpc>
+              <a:spcBef>
+                <a:spcPts val="0"/>
+              </a:spcBef>
+              <a:spcAft>
+                <a:spcPts val="600"/>
+              </a:spcAft>
+            </a:pPr>
+            <a:r>
+              <a:rPr sz="1300" b="1">
+                <a:solidFill>
+                  <a:srgbClr val="10B981"/>
+                </a:solidFill>
+                <a:latin typeface="NanumSquare"/>
+                <a:ea typeface="NanumSquare"/>
+                <a:cs typeface="NanumSquare"/>
+              </a:rPr>
+              <a:t>5</a:t>
+            </a:r>
+          </a:p>
+        </p:txBody>
+      </p:sp>
+      <p:sp>
+        <p:nvSpPr>
+          <p:cNvPr id="36" name="TextBox 35"/>
+          <p:cNvSpPr txBox="1"/>
+          <p:nvPr/>
+        </p:nvSpPr>
+        <p:spPr>
+          <a:xfrm>
+            <a:off x="9820656" y="3310128"/>
+            <a:ext cx="1700784" cy="548640"/>
+          </a:xfrm>
+          <a:prstGeom prst="rect">
+            <a:avLst/>
+          </a:prstGeom>
+          <a:noFill/>
+        </p:spPr>
+        <p:txBody>
+          <a:bodyPr wrap="square" anchor="t" lIns="0" rIns="0" tIns="0" bIns="0">
+            <a:spAutoFit/>
+          </a:bodyPr>
+          <a:lstStyle/>
+          <a:p>
+            <a:pPr algn="l">
+              <a:lnSpc>
+                <a:spcPct val="100000"/>
+              </a:lnSpc>
+              <a:spcBef>
+                <a:spcPts val="0"/>
+              </a:spcBef>
+              <a:spcAft>
+                <a:spcPts val="600"/>
+              </a:spcAft>
+            </a:pPr>
+            <a:r>
+              <a:rPr sz="1500" b="1">
+                <a:solidFill>
+                  <a:srgbClr val="0F172A"/>
+                </a:solidFill>
+                <a:latin typeface="NanumGothic"/>
+                <a:ea typeface="NanumGothic"/>
+                <a:cs typeface="NanumGothic"/>
+              </a:rPr>
+              <a:t>보고</a:t>
+            </a:r>
+          </a:p>
+        </p:txBody>
+      </p:sp>
+      <p:sp>
+        <p:nvSpPr>
+          <p:cNvPr id="37" name="TextBox 36"/>
+          <p:cNvSpPr txBox="1"/>
+          <p:nvPr/>
+        </p:nvSpPr>
+        <p:spPr>
+          <a:xfrm>
+            <a:off x="9820656" y="3822192"/>
+            <a:ext cx="1700784" cy="457200"/>
+          </a:xfrm>
+          <a:prstGeom prst="rect">
+            <a:avLst/>
+          </a:prstGeom>
+          <a:noFill/>
+        </p:spPr>
+        <p:txBody>
+          <a:bodyPr wrap="square" anchor="t" lIns="0" rIns="0" tIns="0" bIns="0">
+            <a:spAutoFit/>
+          </a:bodyPr>
+          <a:lstStyle/>
+          <a:p>
+            <a:pPr algn="l">
+              <a:lnSpc>
+                <a:spcPct val="100000"/>
+              </a:lnSpc>
+              <a:spcBef>
+                <a:spcPts val="0"/>
+              </a:spcBef>
+              <a:spcAft>
+                <a:spcPts val="600"/>
+              </a:spcAft>
+            </a:pPr>
+            <a:r>
+              <a:rPr sz="1100" b="0">
+                <a:solidFill>
+                  <a:srgbClr val="64748B"/>
+                </a:solidFill>
+                <a:latin typeface="NanumGothic"/>
+                <a:ea typeface="NanumGothic"/>
+                <a:cs typeface="NanumGothic"/>
+              </a:rPr>
+              <a:t>인용 보고서</a:t>
+            </a:r>
+          </a:p>
+        </p:txBody>
+      </p:sp>
+      <p:sp>
+        <p:nvSpPr>
+          <p:cNvPr id="38" name="Rounded Rectangle 37"/>
+          <p:cNvSpPr/>
+          <p:nvPr/>
+        </p:nvSpPr>
+        <p:spPr>
+          <a:xfrm>
+            <a:off x="502920" y="5029200"/>
+            <a:ext cx="11155680" cy="658368"/>
+          </a:xfrm>
+          <a:prstGeom prst="roundRect">
+            <a:avLst/>
+          </a:prstGeom>
+          <a:solidFill>
+            <a:srgbClr val="F1F5F9"/>
+          </a:solidFill>
+          <a:ln w="12700">
+            <a:solidFill>
+              <a:srgbClr val="E2E8F0"/>
+            </a:solidFill>
+          </a:ln>
+          <a:effectLst/>
+        </p:spPr>
+        <p:style>
+          <a:lnRef idx="1">
+            <a:schemeClr val="accent1"/>
+          </a:lnRef>
+          <a:fillRef idx="3">
+            <a:schemeClr val="accent1"/>
+          </a:fillRef>
+          <a:effectRef idx="2">
+            <a:schemeClr val="accent1"/>
+          </a:effectRef>
+          <a:fontRef idx="minor">
+            <a:schemeClr val="lt1"/>
+          </a:fontRef>
+        </p:style>
+        <p:txBody>
+          <a:bodyPr rtlCol="0" anchor="ctr"/>
+          <a:lstStyle/>
+          <a:p>
+            <a:pPr algn="ctr"/>
+          </a:p>
+        </p:txBody>
+      </p:sp>
+      <p:sp>
+        <p:nvSpPr>
+          <p:cNvPr id="39" name="TextBox 38"/>
+          <p:cNvSpPr txBox="1"/>
+          <p:nvPr/>
+        </p:nvSpPr>
+        <p:spPr>
+          <a:xfrm>
+            <a:off x="777240" y="5029200"/>
+            <a:ext cx="10607040" cy="658368"/>
+          </a:xfrm>
+          <a:prstGeom prst="rect">
+            <a:avLst/>
+          </a:prstGeom>
+          <a:noFill/>
+        </p:spPr>
+        <p:txBody>
+          <a:bodyPr wrap="square" anchor="ctr" lIns="0" rIns="0" tIns="0" bIns="0">
+            <a:spAutoFit/>
+          </a:bodyPr>
+          <a:lstStyle/>
+          <a:p>
+            <a:pPr algn="l">
+              <a:lnSpc>
+                <a:spcPct val="100000"/>
+              </a:lnSpc>
+              <a:spcBef>
+                <a:spcPts val="0"/>
+              </a:spcBef>
+              <a:spcAft>
+                <a:spcPts val="600"/>
+              </a:spcAft>
+            </a:pPr>
+            <a:r>
+              <a:rPr sz="1200" b="1">
+                <a:solidFill>
+                  <a:srgbClr val="10B981"/>
+                </a:solidFill>
+                <a:latin typeface="NanumGothic"/>
+                <a:ea typeface="NanumGothic"/>
+                <a:cs typeface="NanumGothic"/>
+              </a:rPr>
+              <a:t>NOTE   </a:t>
+            </a:r>
+            <a:r>
+              <a:rPr sz="1300" b="0">
+                <a:solidFill>
+                  <a:srgbClr val="0F172A"/>
+                </a:solidFill>
+                <a:latin typeface="NanumGothic"/>
+                <a:ea typeface="NanumGothic"/>
+                <a:cs typeface="NanumGothic"/>
+              </a:rPr>
+              <a:t>Day 4에 이 흐름을 직접 구현·실행한다</a:t>
             </a:r>
           </a:p>
         </p:txBody>
@@ -17210,7 +19400,7 @@
                 <a:ea typeface="NanumGothic"/>
                 <a:cs typeface="NanumGothic"/>
               </a:rPr>
-              <a:t>단계 ③</a:t>
+              <a:t>LAB · 실습</a:t>
             </a:r>
           </a:p>
         </p:txBody>
@@ -17257,7 +19447,7 @@
                 <a:ea typeface="NanumSquare"/>
                 <a:cs typeface="NanumSquare"/>
               </a:rPr>
-              <a:t>종합 (Synthesize) — 근거를 답으로</a:t>
+              <a:t>팀 구성 &amp; 주제·기획</a:t>
             </a:r>
           </a:p>
         </p:txBody>
@@ -17402,14 +19592,107 @@
       </p:sp>
       <p:sp>
         <p:nvSpPr>
-          <p:cNvPr id="9" name="Oval 8"/>
+          <p:cNvPr id="9" name="Rounded Rectangle 8"/>
           <p:cNvSpPr/>
           <p:nvPr/>
         </p:nvSpPr>
         <p:spPr>
           <a:xfrm>
-            <a:off x="548640" y="1911096"/>
-            <a:ext cx="146304" cy="146304"/>
+            <a:off x="502920" y="1783080"/>
+            <a:ext cx="7315200" cy="4160520"/>
+          </a:xfrm>
+          <a:prstGeom prst="roundRect">
+            <a:avLst/>
+          </a:prstGeom>
+          <a:solidFill>
+            <a:srgbClr val="F8FAFC"/>
+          </a:solidFill>
+          <a:ln w="12700">
+            <a:solidFill>
+              <a:srgbClr val="E2E8F0"/>
+            </a:solidFill>
+          </a:ln>
+          <a:effectLst/>
+        </p:spPr>
+        <p:style>
+          <a:lnRef idx="1">
+            <a:schemeClr val="accent1"/>
+          </a:lnRef>
+          <a:fillRef idx="3">
+            <a:schemeClr val="accent1"/>
+          </a:fillRef>
+          <a:effectRef idx="2">
+            <a:schemeClr val="accent1"/>
+          </a:effectRef>
+          <a:fontRef idx="minor">
+            <a:schemeClr val="lt1"/>
+          </a:fontRef>
+        </p:style>
+        <p:txBody>
+          <a:bodyPr rtlCol="0" anchor="ctr"/>
+          <a:lstStyle/>
+          <a:p>
+            <a:pPr algn="ctr"/>
+          </a:p>
+        </p:txBody>
+      </p:sp>
+      <p:sp>
+        <p:nvSpPr>
+          <p:cNvPr id="10" name="TextBox 9"/>
+          <p:cNvSpPr txBox="1"/>
+          <p:nvPr/>
+        </p:nvSpPr>
+        <p:spPr>
+          <a:xfrm>
+            <a:off x="777240" y="1965960"/>
+            <a:ext cx="6766560" cy="365760"/>
+          </a:xfrm>
+          <a:prstGeom prst="rect">
+            <a:avLst/>
+          </a:prstGeom>
+          <a:noFill/>
+        </p:spPr>
+        <p:txBody>
+          <a:bodyPr wrap="square" anchor="t" lIns="0" rIns="0" tIns="0" bIns="0">
+            <a:spAutoFit/>
+          </a:bodyPr>
+          <a:lstStyle/>
+          <a:p>
+            <a:pPr algn="l">
+              <a:lnSpc>
+                <a:spcPct val="100000"/>
+              </a:lnSpc>
+              <a:spcBef>
+                <a:spcPts val="0"/>
+              </a:spcBef>
+              <a:spcAft>
+                <a:spcPts val="600"/>
+              </a:spcAft>
+            </a:pPr>
+            <a:r>
+              <a:rPr sz="1300" b="1">
+                <a:solidFill>
+                  <a:srgbClr val="10B981"/>
+                </a:solidFill>
+                <a:latin typeface="NanumGothic"/>
+                <a:ea typeface="NanumGothic"/>
+                <a:cs typeface="NanumGothic"/>
+              </a:rPr>
+              <a:t>실습 단계 (placeholder)</a:t>
+            </a:r>
+          </a:p>
+        </p:txBody>
+      </p:sp>
+      <p:sp>
+        <p:nvSpPr>
+          <p:cNvPr id="11" name="Oval 10"/>
+          <p:cNvSpPr/>
+          <p:nvPr/>
+        </p:nvSpPr>
+        <p:spPr>
+          <a:xfrm>
+            <a:off x="777240" y="2468880"/>
+            <a:ext cx="411480" cy="411480"/>
           </a:xfrm>
           <a:prstGeom prst="ellipse">
             <a:avLst/>
@@ -17446,22 +19729,69 @@
       </p:sp>
       <p:sp>
         <p:nvSpPr>
-          <p:cNvPr id="10" name="TextBox 9"/>
-          <p:cNvSpPr txBox="1"/>
-          <p:nvPr/>
-        </p:nvSpPr>
-        <p:spPr>
-          <a:xfrm>
-            <a:off x="868680" y="1828800"/>
-            <a:ext cx="10607040" cy="457200"/>
-          </a:xfrm>
-          <a:prstGeom prst="rect">
-            <a:avLst/>
-          </a:prstGeom>
-          <a:noFill/>
-        </p:spPr>
-        <p:txBody>
-          <a:bodyPr wrap="square" anchor="t" lIns="0" rIns="0" tIns="0" bIns="0">
+          <p:cNvPr id="12" name="TextBox 11"/>
+          <p:cNvSpPr txBox="1"/>
+          <p:nvPr/>
+        </p:nvSpPr>
+        <p:spPr>
+          <a:xfrm>
+            <a:off x="777240" y="2468880"/>
+            <a:ext cx="411480" cy="411480"/>
+          </a:xfrm>
+          <a:prstGeom prst="rect">
+            <a:avLst/>
+          </a:prstGeom>
+          <a:noFill/>
+        </p:spPr>
+        <p:txBody>
+          <a:bodyPr wrap="square" anchor="ctr" lIns="0" rIns="0" tIns="0" bIns="0">
+            <a:spAutoFit/>
+          </a:bodyPr>
+          <a:lstStyle/>
+          <a:p>
+            <a:pPr algn="ctr">
+              <a:lnSpc>
+                <a:spcPct val="100000"/>
+              </a:lnSpc>
+              <a:spcBef>
+                <a:spcPts val="0"/>
+              </a:spcBef>
+              <a:spcAft>
+                <a:spcPts val="600"/>
+              </a:spcAft>
+            </a:pPr>
+            <a:r>
+              <a:rPr sz="1300" b="1">
+                <a:solidFill>
+                  <a:srgbClr val="FFFFFF"/>
+                </a:solidFill>
+                <a:latin typeface="NanumSquare"/>
+                <a:ea typeface="NanumSquare"/>
+                <a:cs typeface="NanumSquare"/>
+              </a:rPr>
+              <a:t>1</a:t>
+            </a:r>
+          </a:p>
+        </p:txBody>
+      </p:sp>
+      <p:sp>
+        <p:nvSpPr>
+          <p:cNvPr id="13" name="TextBox 12"/>
+          <p:cNvSpPr txBox="1"/>
+          <p:nvPr/>
+        </p:nvSpPr>
+        <p:spPr>
+          <a:xfrm>
+            <a:off x="1371600" y="2487168"/>
+            <a:ext cx="6309360" cy="457200"/>
+          </a:xfrm>
+          <a:prstGeom prst="rect">
+            <a:avLst/>
+          </a:prstGeom>
+          <a:noFill/>
+        </p:spPr>
+        <p:txBody>
+          <a:bodyPr wrap="square" anchor="ctr" lIns="0" rIns="0" tIns="0" bIns="0">
             <a:spAutoFit/>
           </a:bodyPr>
           <a:lstStyle/>
@@ -17478,7 +19808,7 @@
               </a:spcAft>
             </a:pPr>
             <a:r>
-              <a:rPr sz="1600" b="1">
+              <a:rPr sz="1400" b="0">
                 <a:solidFill>
                   <a:srgbClr val="0F172A"/>
                 </a:solidFill>
@@ -17486,68 +19816,21 @@
                 <a:ea typeface="NanumGothic"/>
                 <a:cs typeface="NanumGothic"/>
               </a:rPr>
-              <a:t>수집·검증된 근거 통합</a:t>
-            </a:r>
-          </a:p>
-        </p:txBody>
-      </p:sp>
-      <p:sp>
-        <p:nvSpPr>
-          <p:cNvPr id="11" name="TextBox 10"/>
-          <p:cNvSpPr txBox="1"/>
-          <p:nvPr/>
-        </p:nvSpPr>
-        <p:spPr>
-          <a:xfrm>
-            <a:off x="868680" y="2212848"/>
-            <a:ext cx="10607040" cy="457200"/>
-          </a:xfrm>
-          <a:prstGeom prst="rect">
-            <a:avLst/>
-          </a:prstGeom>
-          <a:noFill/>
-        </p:spPr>
-        <p:txBody>
-          <a:bodyPr wrap="square" anchor="t" lIns="0" rIns="0" tIns="0" bIns="0">
-            <a:spAutoFit/>
-          </a:bodyPr>
-          <a:lstStyle/>
-          <a:p>
-            <a:pPr algn="l">
-              <a:lnSpc>
-                <a:spcPct val="100000"/>
-              </a:lnSpc>
-              <a:spcBef>
-                <a:spcPts val="0"/>
-              </a:spcBef>
-              <a:spcAft>
-                <a:spcPts val="600"/>
-              </a:spcAft>
-            </a:pPr>
-            <a:r>
-              <a:rPr sz="1300" b="0">
-                <a:solidFill>
-                  <a:srgbClr val="64748B"/>
-                </a:solidFill>
-                <a:latin typeface="NanumGothic"/>
-                <a:ea typeface="NanumGothic"/>
-                <a:cs typeface="NanumGothic"/>
-              </a:rPr>
-              <a:t>흩어진 정보를 하나로</a:t>
-            </a:r>
-          </a:p>
-        </p:txBody>
-      </p:sp>
-      <p:sp>
-        <p:nvSpPr>
-          <p:cNvPr id="12" name="Oval 11"/>
+              <a:t>팀 편성·역할 분담</a:t>
+            </a:r>
+          </a:p>
+        </p:txBody>
+      </p:sp>
+      <p:sp>
+        <p:nvSpPr>
+          <p:cNvPr id="14" name="Oval 13"/>
           <p:cNvSpPr/>
           <p:nvPr/>
         </p:nvSpPr>
         <p:spPr>
           <a:xfrm>
-            <a:off x="548640" y="2779776"/>
-            <a:ext cx="146304" cy="146304"/>
+            <a:off x="777240" y="3035808"/>
+            <a:ext cx="411480" cy="411480"/>
           </a:xfrm>
           <a:prstGeom prst="ellipse">
             <a:avLst/>
@@ -17584,22 +19867,69 @@
       </p:sp>
       <p:sp>
         <p:nvSpPr>
-          <p:cNvPr id="13" name="TextBox 12"/>
-          <p:cNvSpPr txBox="1"/>
-          <p:nvPr/>
-        </p:nvSpPr>
-        <p:spPr>
-          <a:xfrm>
-            <a:off x="868680" y="2697480"/>
-            <a:ext cx="10607040" cy="457200"/>
-          </a:xfrm>
-          <a:prstGeom prst="rect">
-            <a:avLst/>
-          </a:prstGeom>
-          <a:noFill/>
-        </p:spPr>
-        <p:txBody>
-          <a:bodyPr wrap="square" anchor="t" lIns="0" rIns="0" tIns="0" bIns="0">
+          <p:cNvPr id="15" name="TextBox 14"/>
+          <p:cNvSpPr txBox="1"/>
+          <p:nvPr/>
+        </p:nvSpPr>
+        <p:spPr>
+          <a:xfrm>
+            <a:off x="777240" y="3035808"/>
+            <a:ext cx="411480" cy="411480"/>
+          </a:xfrm>
+          <a:prstGeom prst="rect">
+            <a:avLst/>
+          </a:prstGeom>
+          <a:noFill/>
+        </p:spPr>
+        <p:txBody>
+          <a:bodyPr wrap="square" anchor="ctr" lIns="0" rIns="0" tIns="0" bIns="0">
+            <a:spAutoFit/>
+          </a:bodyPr>
+          <a:lstStyle/>
+          <a:p>
+            <a:pPr algn="ctr">
+              <a:lnSpc>
+                <a:spcPct val="100000"/>
+              </a:lnSpc>
+              <a:spcBef>
+                <a:spcPts val="0"/>
+              </a:spcBef>
+              <a:spcAft>
+                <a:spcPts val="600"/>
+              </a:spcAft>
+            </a:pPr>
+            <a:r>
+              <a:rPr sz="1300" b="1">
+                <a:solidFill>
+                  <a:srgbClr val="FFFFFF"/>
+                </a:solidFill>
+                <a:latin typeface="NanumSquare"/>
+                <a:ea typeface="NanumSquare"/>
+                <a:cs typeface="NanumSquare"/>
+              </a:rPr>
+              <a:t>2</a:t>
+            </a:r>
+          </a:p>
+        </p:txBody>
+      </p:sp>
+      <p:sp>
+        <p:nvSpPr>
+          <p:cNvPr id="16" name="TextBox 15"/>
+          <p:cNvSpPr txBox="1"/>
+          <p:nvPr/>
+        </p:nvSpPr>
+        <p:spPr>
+          <a:xfrm>
+            <a:off x="1371600" y="3054096"/>
+            <a:ext cx="6309360" cy="457200"/>
+          </a:xfrm>
+          <a:prstGeom prst="rect">
+            <a:avLst/>
+          </a:prstGeom>
+          <a:noFill/>
+        </p:spPr>
+        <p:txBody>
+          <a:bodyPr wrap="square" anchor="ctr" lIns="0" rIns="0" tIns="0" bIns="0">
             <a:spAutoFit/>
           </a:bodyPr>
           <a:lstStyle/>
@@ -17616,7 +19946,7 @@
               </a:spcAft>
             </a:pPr>
             <a:r>
-              <a:rPr sz="1600" b="1">
+              <a:rPr sz="1400" b="0">
                 <a:solidFill>
                   <a:srgbClr val="0F172A"/>
                 </a:solidFill>
@@ -17624,68 +19954,21 @@
                 <a:ea typeface="NanumGothic"/>
                 <a:cs typeface="NanumGothic"/>
               </a:rPr>
-              <a:t>구조화된 결과</a:t>
-            </a:r>
-          </a:p>
-        </p:txBody>
-      </p:sp>
-      <p:sp>
-        <p:nvSpPr>
-          <p:cNvPr id="14" name="TextBox 13"/>
-          <p:cNvSpPr txBox="1"/>
-          <p:nvPr/>
-        </p:nvSpPr>
-        <p:spPr>
-          <a:xfrm>
-            <a:off x="868680" y="3081528"/>
-            <a:ext cx="10607040" cy="457200"/>
-          </a:xfrm>
-          <a:prstGeom prst="rect">
-            <a:avLst/>
-          </a:prstGeom>
-          <a:noFill/>
-        </p:spPr>
-        <p:txBody>
-          <a:bodyPr wrap="square" anchor="t" lIns="0" rIns="0" tIns="0" bIns="0">
-            <a:spAutoFit/>
-          </a:bodyPr>
-          <a:lstStyle/>
-          <a:p>
-            <a:pPr algn="l">
-              <a:lnSpc>
-                <a:spcPct val="100000"/>
-              </a:lnSpc>
-              <a:spcBef>
-                <a:spcPts val="0"/>
-              </a:spcBef>
-              <a:spcAft>
-                <a:spcPts val="600"/>
-              </a:spcAft>
-            </a:pPr>
-            <a:r>
-              <a:rPr sz="1300" b="0">
-                <a:solidFill>
-                  <a:srgbClr val="64748B"/>
-                </a:solidFill>
-                <a:latin typeface="NanumGothic"/>
-                <a:ea typeface="NanumGothic"/>
-                <a:cs typeface="NanumGothic"/>
-              </a:rPr>
-              <a:t>질문에 답하는 형태</a:t>
-            </a:r>
-          </a:p>
-        </p:txBody>
-      </p:sp>
-      <p:sp>
-        <p:nvSpPr>
-          <p:cNvPr id="15" name="Oval 14"/>
+              <a:t>관심 주제 확정 + 핵심 질문</a:t>
+            </a:r>
+          </a:p>
+        </p:txBody>
+      </p:sp>
+      <p:sp>
+        <p:nvSpPr>
+          <p:cNvPr id="17" name="Oval 16"/>
           <p:cNvSpPr/>
           <p:nvPr/>
         </p:nvSpPr>
         <p:spPr>
           <a:xfrm>
-            <a:off x="548640" y="3648456"/>
-            <a:ext cx="146304" cy="146304"/>
+            <a:off x="777240" y="3602736"/>
+            <a:ext cx="411480" cy="411480"/>
           </a:xfrm>
           <a:prstGeom prst="ellipse">
             <a:avLst/>
@@ -17722,22 +20005,69 @@
       </p:sp>
       <p:sp>
         <p:nvSpPr>
-          <p:cNvPr id="16" name="TextBox 15"/>
-          <p:cNvSpPr txBox="1"/>
-          <p:nvPr/>
-        </p:nvSpPr>
-        <p:spPr>
-          <a:xfrm>
-            <a:off x="868680" y="3566160"/>
-            <a:ext cx="10607040" cy="457200"/>
-          </a:xfrm>
-          <a:prstGeom prst="rect">
-            <a:avLst/>
-          </a:prstGeom>
-          <a:noFill/>
-        </p:spPr>
-        <p:txBody>
-          <a:bodyPr wrap="square" anchor="t" lIns="0" rIns="0" tIns="0" bIns="0">
+          <p:cNvPr id="18" name="TextBox 17"/>
+          <p:cNvSpPr txBox="1"/>
+          <p:nvPr/>
+        </p:nvSpPr>
+        <p:spPr>
+          <a:xfrm>
+            <a:off x="777240" y="3602736"/>
+            <a:ext cx="411480" cy="411480"/>
+          </a:xfrm>
+          <a:prstGeom prst="rect">
+            <a:avLst/>
+          </a:prstGeom>
+          <a:noFill/>
+        </p:spPr>
+        <p:txBody>
+          <a:bodyPr wrap="square" anchor="ctr" lIns="0" rIns="0" tIns="0" bIns="0">
+            <a:spAutoFit/>
+          </a:bodyPr>
+          <a:lstStyle/>
+          <a:p>
+            <a:pPr algn="ctr">
+              <a:lnSpc>
+                <a:spcPct val="100000"/>
+              </a:lnSpc>
+              <a:spcBef>
+                <a:spcPts val="0"/>
+              </a:spcBef>
+              <a:spcAft>
+                <a:spcPts val="600"/>
+              </a:spcAft>
+            </a:pPr>
+            <a:r>
+              <a:rPr sz="1300" b="1">
+                <a:solidFill>
+                  <a:srgbClr val="FFFFFF"/>
+                </a:solidFill>
+                <a:latin typeface="NanumSquare"/>
+                <a:ea typeface="NanumSquare"/>
+                <a:cs typeface="NanumSquare"/>
+              </a:rPr>
+              <a:t>3</a:t>
+            </a:r>
+          </a:p>
+        </p:txBody>
+      </p:sp>
+      <p:sp>
+        <p:nvSpPr>
+          <p:cNvPr id="19" name="TextBox 18"/>
+          <p:cNvSpPr txBox="1"/>
+          <p:nvPr/>
+        </p:nvSpPr>
+        <p:spPr>
+          <a:xfrm>
+            <a:off x="1371600" y="3621024"/>
+            <a:ext cx="6309360" cy="457200"/>
+          </a:xfrm>
+          <a:prstGeom prst="rect">
+            <a:avLst/>
+          </a:prstGeom>
+          <a:noFill/>
+        </p:spPr>
+        <p:txBody>
+          <a:bodyPr wrap="square" anchor="ctr" lIns="0" rIns="0" tIns="0" bIns="0">
             <a:spAutoFit/>
           </a:bodyPr>
           <a:lstStyle/>
@@ -17754,7 +20084,7 @@
               </a:spcAft>
             </a:pPr>
             <a:r>
-              <a:rPr sz="1600" b="1">
+              <a:rPr sz="1400" b="0">
                 <a:solidFill>
                   <a:srgbClr val="0F172A"/>
                 </a:solidFill>
@@ -17762,29 +20092,120 @@
                 <a:ea typeface="NanumGothic"/>
                 <a:cs typeface="NanumGothic"/>
               </a:rPr>
-              <a:t>한계·불확실성 명시</a:t>
-            </a:r>
-          </a:p>
-        </p:txBody>
-      </p:sp>
-      <p:sp>
-        <p:nvSpPr>
-          <p:cNvPr id="17" name="TextBox 16"/>
-          <p:cNvSpPr txBox="1"/>
-          <p:nvPr/>
-        </p:nvSpPr>
-        <p:spPr>
-          <a:xfrm>
-            <a:off x="868680" y="3950208"/>
-            <a:ext cx="10607040" cy="457200"/>
-          </a:xfrm>
-          <a:prstGeom prst="rect">
-            <a:avLst/>
-          </a:prstGeom>
-          <a:noFill/>
-        </p:spPr>
-        <p:txBody>
-          <a:bodyPr wrap="square" anchor="t" lIns="0" rIns="0" tIns="0" bIns="0">
+              <a:t>자료(corpus) 확보 계획</a:t>
+            </a:r>
+          </a:p>
+        </p:txBody>
+      </p:sp>
+      <p:sp>
+        <p:nvSpPr>
+          <p:cNvPr id="20" name="Oval 19"/>
+          <p:cNvSpPr/>
+          <p:nvPr/>
+        </p:nvSpPr>
+        <p:spPr>
+          <a:xfrm>
+            <a:off x="777240" y="4169664"/>
+            <a:ext cx="411480" cy="411480"/>
+          </a:xfrm>
+          <a:prstGeom prst="ellipse">
+            <a:avLst/>
+          </a:prstGeom>
+          <a:solidFill>
+            <a:srgbClr val="10B981"/>
+          </a:solidFill>
+          <a:ln>
+            <a:noFill/>
+          </a:ln>
+          <a:effectLst/>
+        </p:spPr>
+        <p:style>
+          <a:lnRef idx="1">
+            <a:schemeClr val="accent1"/>
+          </a:lnRef>
+          <a:fillRef idx="3">
+            <a:schemeClr val="accent1"/>
+          </a:fillRef>
+          <a:effectRef idx="2">
+            <a:schemeClr val="accent1"/>
+          </a:effectRef>
+          <a:fontRef idx="minor">
+            <a:schemeClr val="lt1"/>
+          </a:fontRef>
+        </p:style>
+        <p:txBody>
+          <a:bodyPr rtlCol="0" anchor="ctr"/>
+          <a:lstStyle/>
+          <a:p>
+            <a:pPr algn="ctr"/>
+          </a:p>
+        </p:txBody>
+      </p:sp>
+      <p:sp>
+        <p:nvSpPr>
+          <p:cNvPr id="21" name="TextBox 20"/>
+          <p:cNvSpPr txBox="1"/>
+          <p:nvPr/>
+        </p:nvSpPr>
+        <p:spPr>
+          <a:xfrm>
+            <a:off x="777240" y="4169664"/>
+            <a:ext cx="411480" cy="411480"/>
+          </a:xfrm>
+          <a:prstGeom prst="rect">
+            <a:avLst/>
+          </a:prstGeom>
+          <a:noFill/>
+        </p:spPr>
+        <p:txBody>
+          <a:bodyPr wrap="square" anchor="ctr" lIns="0" rIns="0" tIns="0" bIns="0">
+            <a:spAutoFit/>
+          </a:bodyPr>
+          <a:lstStyle/>
+          <a:p>
+            <a:pPr algn="ctr">
+              <a:lnSpc>
+                <a:spcPct val="100000"/>
+              </a:lnSpc>
+              <a:spcBef>
+                <a:spcPts val="0"/>
+              </a:spcBef>
+              <a:spcAft>
+                <a:spcPts val="600"/>
+              </a:spcAft>
+            </a:pPr>
+            <a:r>
+              <a:rPr sz="1300" b="1">
+                <a:solidFill>
+                  <a:srgbClr val="FFFFFF"/>
+                </a:solidFill>
+                <a:latin typeface="NanumSquare"/>
+                <a:ea typeface="NanumSquare"/>
+                <a:cs typeface="NanumSquare"/>
+              </a:rPr>
+              <a:t>4</a:t>
+            </a:r>
+          </a:p>
+        </p:txBody>
+      </p:sp>
+      <p:sp>
+        <p:nvSpPr>
+          <p:cNvPr id="22" name="TextBox 21"/>
+          <p:cNvSpPr txBox="1"/>
+          <p:nvPr/>
+        </p:nvSpPr>
+        <p:spPr>
+          <a:xfrm>
+            <a:off x="1371600" y="4187952"/>
+            <a:ext cx="6309360" cy="457200"/>
+          </a:xfrm>
+          <a:prstGeom prst="rect">
+            <a:avLst/>
+          </a:prstGeom>
+          <a:noFill/>
+        </p:spPr>
+        <p:txBody>
+          <a:bodyPr wrap="square" anchor="ctr" lIns="0" rIns="0" tIns="0" bIns="0">
             <a:spAutoFit/>
           </a:bodyPr>
           <a:lstStyle/>
@@ -17801,15 +20222,155 @@
               </a:spcAft>
             </a:pPr>
             <a:r>
-              <a:rPr sz="1300" b="0">
-                <a:solidFill>
-                  <a:srgbClr val="64748B"/>
+              <a:rPr sz="1400" b="0">
+                <a:solidFill>
+                  <a:srgbClr val="0F172A"/>
                 </a:solidFill>
                 <a:latin typeface="NanumGothic"/>
                 <a:ea typeface="NanumGothic"/>
                 <a:cs typeface="NanumGothic"/>
               </a:rPr>
-              <a:t>모르는 것은 모른다고</a:t>
+              <a:t>팀 기획서 작성</a:t>
+            </a:r>
+          </a:p>
+        </p:txBody>
+      </p:sp>
+      <p:sp>
+        <p:nvSpPr>
+          <p:cNvPr id="23" name="Rounded Rectangle 22"/>
+          <p:cNvSpPr/>
+          <p:nvPr/>
+        </p:nvSpPr>
+        <p:spPr>
+          <a:xfrm>
+            <a:off x="8001000" y="1783080"/>
+            <a:ext cx="3657600" cy="4160520"/>
+          </a:xfrm>
+          <a:prstGeom prst="roundRect">
+            <a:avLst/>
+          </a:prstGeom>
+          <a:solidFill>
+            <a:srgbClr val="12203C"/>
+          </a:solidFill>
+          <a:ln>
+            <a:noFill/>
+          </a:ln>
+          <a:effectLst/>
+        </p:spPr>
+        <p:style>
+          <a:lnRef idx="1">
+            <a:schemeClr val="accent1"/>
+          </a:lnRef>
+          <a:fillRef idx="3">
+            <a:schemeClr val="accent1"/>
+          </a:fillRef>
+          <a:effectRef idx="2">
+            <a:schemeClr val="accent1"/>
+          </a:effectRef>
+          <a:fontRef idx="minor">
+            <a:schemeClr val="lt1"/>
+          </a:fontRef>
+        </p:style>
+        <p:txBody>
+          <a:bodyPr rtlCol="0" anchor="ctr"/>
+          <a:lstStyle/>
+          <a:p>
+            <a:pPr algn="ctr"/>
+          </a:p>
+        </p:txBody>
+      </p:sp>
+      <p:sp>
+        <p:nvSpPr>
+          <p:cNvPr id="24" name="TextBox 23"/>
+          <p:cNvSpPr txBox="1"/>
+          <p:nvPr/>
+        </p:nvSpPr>
+        <p:spPr>
+          <a:xfrm>
+            <a:off x="8275320" y="2011680"/>
+            <a:ext cx="3108960" cy="457200"/>
+          </a:xfrm>
+          <a:prstGeom prst="rect">
+            <a:avLst/>
+          </a:prstGeom>
+          <a:noFill/>
+        </p:spPr>
+        <p:txBody>
+          <a:bodyPr wrap="square" anchor="t" lIns="0" rIns="0" tIns="0" bIns="0">
+            <a:spAutoFit/>
+          </a:bodyPr>
+          <a:lstStyle/>
+          <a:p>
+            <a:pPr algn="l">
+              <a:lnSpc>
+                <a:spcPct val="100000"/>
+              </a:lnSpc>
+              <a:spcBef>
+                <a:spcPts val="0"/>
+              </a:spcBef>
+              <a:spcAft>
+                <a:spcPts val="600"/>
+              </a:spcAft>
+            </a:pPr>
+            <a:r>
+              <a:rPr sz="1500" b="1">
+                <a:solidFill>
+                  <a:srgbClr val="10B981"/>
+                </a:solidFill>
+                <a:latin typeface="NanumSquare"/>
+                <a:ea typeface="NanumSquare"/>
+                <a:cs typeface="NanumSquare"/>
+              </a:rPr>
+              <a:t>산출물</a:t>
+            </a:r>
+          </a:p>
+        </p:txBody>
+      </p:sp>
+      <p:sp>
+        <p:nvSpPr>
+          <p:cNvPr id="25" name="TextBox 24"/>
+          <p:cNvSpPr txBox="1"/>
+          <p:nvPr/>
+        </p:nvSpPr>
+        <p:spPr>
+          <a:xfrm>
+            <a:off x="8275320" y="2560320"/>
+            <a:ext cx="3154680" cy="3108960"/>
+          </a:xfrm>
+          <a:prstGeom prst="rect">
+            <a:avLst/>
+          </a:prstGeom>
+          <a:noFill/>
+        </p:spPr>
+        <p:txBody>
+          <a:bodyPr wrap="square" anchor="t" lIns="0" rIns="0" tIns="0" bIns="0">
+            <a:spAutoFit/>
+          </a:bodyPr>
+          <a:lstStyle/>
+          <a:p>
+            <a:pPr algn="l">
+              <a:lnSpc>
+                <a:spcPct val="120000"/>
+              </a:lnSpc>
+              <a:spcBef>
+                <a:spcPts val="0"/>
+              </a:spcBef>
+              <a:spcAft>
+                <a:spcPts val="600"/>
+              </a:spcAft>
+            </a:pPr>
+            <a:r>
+              <a:rPr sz="1400" b="0">
+                <a:solidFill>
+                  <a:srgbClr val="FFFFFF"/>
+                </a:solidFill>
+                <a:latin typeface="NanumGothic"/>
+                <a:ea typeface="NanumGothic"/>
+                <a:cs typeface="NanumGothic"/>
+              </a:rPr>
+              <a:t>팀 기획서
+(주제 · 핵심질문 · corpus · 산출물 · 스코프)
+예: 신약/바이오 등 (placeholder)</a:t>
             </a:r>
           </a:p>
         </p:txBody>
@@ -17962,7 +20523,7 @@
                 <a:ea typeface="NanumGothic"/>
                 <a:cs typeface="NanumGothic"/>
               </a:rPr>
-              <a:t>설계</a:t>
+              <a:t>SUMMARY</a:t>
             </a:r>
           </a:p>
         </p:txBody>
@@ -18009,7 +20570,7 @@
                 <a:ea typeface="NanumSquare"/>
                 <a:cs typeface="NanumSquare"/>
               </a:rPr>
-              <a:t>좋은 리서치 에이전트의 조건</a:t>
+              <a:t>핵심 정리 및 다음 과정</a:t>
             </a:r>
           </a:p>
         </p:txBody>
@@ -18154,14 +20715,334 @@
       </p:sp>
       <p:sp>
         <p:nvSpPr>
-          <p:cNvPr id="9" name="Rounded Rectangle 8"/>
+          <p:cNvPr id="9" name="TextBox 8"/>
+          <p:cNvSpPr txBox="1"/>
+          <p:nvPr/>
+        </p:nvSpPr>
+        <p:spPr>
+          <a:xfrm>
+            <a:off x="548640" y="1783080"/>
+            <a:ext cx="6400800" cy="365760"/>
+          </a:xfrm>
+          <a:prstGeom prst="rect">
+            <a:avLst/>
+          </a:prstGeom>
+          <a:noFill/>
+        </p:spPr>
+        <p:txBody>
+          <a:bodyPr wrap="square" anchor="t" lIns="0" rIns="0" tIns="0" bIns="0">
+            <a:spAutoFit/>
+          </a:bodyPr>
+          <a:lstStyle/>
+          <a:p>
+            <a:pPr algn="l">
+              <a:lnSpc>
+                <a:spcPct val="100000"/>
+              </a:lnSpc>
+              <a:spcBef>
+                <a:spcPts val="0"/>
+              </a:spcBef>
+              <a:spcAft>
+                <a:spcPts val="600"/>
+              </a:spcAft>
+            </a:pPr>
+            <a:r>
+              <a:rPr sz="1500" b="1">
+                <a:solidFill>
+                  <a:srgbClr val="10B981"/>
+                </a:solidFill>
+                <a:latin typeface="NanumSquare"/>
+                <a:ea typeface="NanumSquare"/>
+                <a:cs typeface="NanumSquare"/>
+              </a:rPr>
+              <a:t>핵심 정리</a:t>
+            </a:r>
+          </a:p>
+        </p:txBody>
+      </p:sp>
+      <p:sp>
+        <p:nvSpPr>
+          <p:cNvPr id="10" name="Oval 9"/>
           <p:cNvSpPr/>
           <p:nvPr/>
         </p:nvSpPr>
         <p:spPr>
           <a:xfrm>
-            <a:off x="502920" y="1828800"/>
-            <a:ext cx="5440680" cy="4023360"/>
+            <a:off x="566928" y="2359152"/>
+            <a:ext cx="146304" cy="146304"/>
+          </a:xfrm>
+          <a:prstGeom prst="ellipse">
+            <a:avLst/>
+          </a:prstGeom>
+          <a:solidFill>
+            <a:srgbClr val="10B981"/>
+          </a:solidFill>
+          <a:ln>
+            <a:noFill/>
+          </a:ln>
+          <a:effectLst/>
+        </p:spPr>
+        <p:style>
+          <a:lnRef idx="1">
+            <a:schemeClr val="accent1"/>
+          </a:lnRef>
+          <a:fillRef idx="3">
+            <a:schemeClr val="accent1"/>
+          </a:fillRef>
+          <a:effectRef idx="2">
+            <a:schemeClr val="accent1"/>
+          </a:effectRef>
+          <a:fontRef idx="minor">
+            <a:schemeClr val="lt1"/>
+          </a:fontRef>
+        </p:style>
+        <p:txBody>
+          <a:bodyPr rtlCol="0" anchor="ctr"/>
+          <a:lstStyle/>
+          <a:p>
+            <a:pPr algn="ctr"/>
+          </a:p>
+        </p:txBody>
+      </p:sp>
+      <p:sp>
+        <p:nvSpPr>
+          <p:cNvPr id="11" name="TextBox 10"/>
+          <p:cNvSpPr txBox="1"/>
+          <p:nvPr/>
+        </p:nvSpPr>
+        <p:spPr>
+          <a:xfrm>
+            <a:off x="868680" y="2286000"/>
+            <a:ext cx="6400800" cy="548640"/>
+          </a:xfrm>
+          <a:prstGeom prst="rect">
+            <a:avLst/>
+          </a:prstGeom>
+          <a:noFill/>
+        </p:spPr>
+        <p:txBody>
+          <a:bodyPr wrap="square" anchor="t" lIns="0" rIns="0" tIns="0" bIns="0">
+            <a:spAutoFit/>
+          </a:bodyPr>
+          <a:lstStyle/>
+          <a:p>
+            <a:pPr algn="l">
+              <a:lnSpc>
+                <a:spcPct val="105000"/>
+              </a:lnSpc>
+              <a:spcBef>
+                <a:spcPts val="0"/>
+              </a:spcBef>
+              <a:spcAft>
+                <a:spcPts val="600"/>
+              </a:spcAft>
+            </a:pPr>
+            <a:r>
+              <a:rPr sz="1500" b="0">
+                <a:solidFill>
+                  <a:srgbClr val="0F172A"/>
+                </a:solidFill>
+                <a:latin typeface="NanumGothic"/>
+                <a:ea typeface="NanumGothic"/>
+                <a:cs typeface="NanumGothic"/>
+              </a:rPr>
+              <a:t>리서치 = 분야→문헌→가설→검증의 반복 루프, agent로 각 단계를 도울 수 있다</a:t>
+            </a:r>
+          </a:p>
+        </p:txBody>
+      </p:sp>
+      <p:sp>
+        <p:nvSpPr>
+          <p:cNvPr id="12" name="Oval 11"/>
+          <p:cNvSpPr/>
+          <p:nvPr/>
+        </p:nvSpPr>
+        <p:spPr>
+          <a:xfrm>
+            <a:off x="566928" y="2999232"/>
+            <a:ext cx="146304" cy="146304"/>
+          </a:xfrm>
+          <a:prstGeom prst="ellipse">
+            <a:avLst/>
+          </a:prstGeom>
+          <a:solidFill>
+            <a:srgbClr val="10B981"/>
+          </a:solidFill>
+          <a:ln>
+            <a:noFill/>
+          </a:ln>
+          <a:effectLst/>
+        </p:spPr>
+        <p:style>
+          <a:lnRef idx="1">
+            <a:schemeClr val="accent1"/>
+          </a:lnRef>
+          <a:fillRef idx="3">
+            <a:schemeClr val="accent1"/>
+          </a:fillRef>
+          <a:effectRef idx="2">
+            <a:schemeClr val="accent1"/>
+          </a:effectRef>
+          <a:fontRef idx="minor">
+            <a:schemeClr val="lt1"/>
+          </a:fontRef>
+        </p:style>
+        <p:txBody>
+          <a:bodyPr rtlCol="0" anchor="ctr"/>
+          <a:lstStyle/>
+          <a:p>
+            <a:pPr algn="ctr"/>
+          </a:p>
+        </p:txBody>
+      </p:sp>
+      <p:sp>
+        <p:nvSpPr>
+          <p:cNvPr id="13" name="TextBox 12"/>
+          <p:cNvSpPr txBox="1"/>
+          <p:nvPr/>
+        </p:nvSpPr>
+        <p:spPr>
+          <a:xfrm>
+            <a:off x="868680" y="2926080"/>
+            <a:ext cx="6400800" cy="548640"/>
+          </a:xfrm>
+          <a:prstGeom prst="rect">
+            <a:avLst/>
+          </a:prstGeom>
+          <a:noFill/>
+        </p:spPr>
+        <p:txBody>
+          <a:bodyPr wrap="square" anchor="t" lIns="0" rIns="0" tIns="0" bIns="0">
+            <a:spAutoFit/>
+          </a:bodyPr>
+          <a:lstStyle/>
+          <a:p>
+            <a:pPr algn="l">
+              <a:lnSpc>
+                <a:spcPct val="105000"/>
+              </a:lnSpc>
+              <a:spcBef>
+                <a:spcPts val="0"/>
+              </a:spcBef>
+              <a:spcAft>
+                <a:spcPts val="600"/>
+              </a:spcAft>
+            </a:pPr>
+            <a:r>
+              <a:rPr sz="1500" b="0">
+                <a:solidFill>
+                  <a:srgbClr val="0F172A"/>
+                </a:solidFill>
+                <a:latin typeface="NanumGothic"/>
+                <a:ea typeface="NanumGothic"/>
+                <a:cs typeface="NanumGothic"/>
+              </a:rPr>
+              <a:t>가설: 테스트가 싸지면 '제약된 다수 생성 + 싼 필터'가 유리 — 단 proxy·위양성 주의</a:t>
+            </a:r>
+          </a:p>
+        </p:txBody>
+      </p:sp>
+      <p:sp>
+        <p:nvSpPr>
+          <p:cNvPr id="14" name="Oval 13"/>
+          <p:cNvSpPr/>
+          <p:nvPr/>
+        </p:nvSpPr>
+        <p:spPr>
+          <a:xfrm>
+            <a:off x="566928" y="3639312"/>
+            <a:ext cx="146304" cy="146304"/>
+          </a:xfrm>
+          <a:prstGeom prst="ellipse">
+            <a:avLst/>
+          </a:prstGeom>
+          <a:solidFill>
+            <a:srgbClr val="10B981"/>
+          </a:solidFill>
+          <a:ln>
+            <a:noFill/>
+          </a:ln>
+          <a:effectLst/>
+        </p:spPr>
+        <p:style>
+          <a:lnRef idx="1">
+            <a:schemeClr val="accent1"/>
+          </a:lnRef>
+          <a:fillRef idx="3">
+            <a:schemeClr val="accent1"/>
+          </a:fillRef>
+          <a:effectRef idx="2">
+            <a:schemeClr val="accent1"/>
+          </a:effectRef>
+          <a:fontRef idx="minor">
+            <a:schemeClr val="lt1"/>
+          </a:fontRef>
+        </p:style>
+        <p:txBody>
+          <a:bodyPr rtlCol="0" anchor="ctr"/>
+          <a:lstStyle/>
+          <a:p>
+            <a:pPr algn="ctr"/>
+          </a:p>
+        </p:txBody>
+      </p:sp>
+      <p:sp>
+        <p:nvSpPr>
+          <p:cNvPr id="15" name="TextBox 14"/>
+          <p:cNvSpPr txBox="1"/>
+          <p:nvPr/>
+        </p:nvSpPr>
+        <p:spPr>
+          <a:xfrm>
+            <a:off x="868680" y="3566160"/>
+            <a:ext cx="6400800" cy="548640"/>
+          </a:xfrm>
+          <a:prstGeom prst="rect">
+            <a:avLst/>
+          </a:prstGeom>
+          <a:noFill/>
+        </p:spPr>
+        <p:txBody>
+          <a:bodyPr wrap="square" anchor="t" lIns="0" rIns="0" tIns="0" bIns="0">
+            <a:spAutoFit/>
+          </a:bodyPr>
+          <a:lstStyle/>
+          <a:p>
+            <a:pPr algn="l">
+              <a:lnSpc>
+                <a:spcPct val="105000"/>
+              </a:lnSpc>
+              <a:spcBef>
+                <a:spcPts val="0"/>
+              </a:spcBef>
+              <a:spcAft>
+                <a:spcPts val="600"/>
+              </a:spcAft>
+            </a:pPr>
+            <a:r>
+              <a:rPr sz="1500" b="0">
+                <a:solidFill>
+                  <a:srgbClr val="0F172A"/>
+                </a:solidFill>
+                <a:latin typeface="NanumGothic"/>
+                <a:ea typeface="NanumGothic"/>
+                <a:cs typeface="NanumGothic"/>
+              </a:rPr>
+              <a:t>팀·주제·핵심 질문·corpus 계획 확정 — Day 4에 풀 에이전트(스코프) 구현</a:t>
+            </a:r>
+          </a:p>
+        </p:txBody>
+      </p:sp>
+      <p:sp>
+        <p:nvSpPr>
+          <p:cNvPr id="16" name="Rounded Rectangle 15"/>
+          <p:cNvSpPr/>
+          <p:nvPr/>
+        </p:nvSpPr>
+        <p:spPr>
+          <a:xfrm>
+            <a:off x="7589520" y="1783080"/>
+            <a:ext cx="4069080" cy="4023360"/>
           </a:xfrm>
           <a:prstGeom prst="roundRect">
             <a:avLst/>
@@ -18200,66 +21081,22 @@
       </p:sp>
       <p:sp>
         <p:nvSpPr>
-          <p:cNvPr id="10" name="Rounded Rectangle 9"/>
-          <p:cNvSpPr/>
-          <p:nvPr/>
-        </p:nvSpPr>
-        <p:spPr>
-          <a:xfrm>
-            <a:off x="502920" y="1828800"/>
-            <a:ext cx="5440680" cy="640080"/>
-          </a:xfrm>
-          <a:prstGeom prst="roundRect">
-            <a:avLst/>
-          </a:prstGeom>
-          <a:solidFill>
-            <a:srgbClr val="10B981"/>
-          </a:solidFill>
-          <a:ln>
-            <a:noFill/>
-          </a:ln>
-          <a:effectLst/>
-        </p:spPr>
-        <p:style>
-          <a:lnRef idx="1">
-            <a:schemeClr val="accent1"/>
-          </a:lnRef>
-          <a:fillRef idx="3">
-            <a:schemeClr val="accent1"/>
-          </a:fillRef>
-          <a:effectRef idx="2">
-            <a:schemeClr val="accent1"/>
-          </a:effectRef>
-          <a:fontRef idx="minor">
-            <a:schemeClr val="lt1"/>
-          </a:fontRef>
-        </p:style>
-        <p:txBody>
-          <a:bodyPr rtlCol="0" anchor="ctr"/>
-          <a:lstStyle/>
-          <a:p>
-            <a:pPr algn="ctr"/>
-          </a:p>
-        </p:txBody>
-      </p:sp>
-      <p:sp>
-        <p:nvSpPr>
-          <p:cNvPr id="11" name="TextBox 10"/>
-          <p:cNvSpPr txBox="1"/>
-          <p:nvPr/>
-        </p:nvSpPr>
-        <p:spPr>
-          <a:xfrm>
-            <a:off x="777240" y="1828800"/>
-            <a:ext cx="4937760" cy="640080"/>
-          </a:xfrm>
-          <a:prstGeom prst="rect">
-            <a:avLst/>
-          </a:prstGeom>
-          <a:noFill/>
-        </p:spPr>
-        <p:txBody>
-          <a:bodyPr wrap="square" anchor="ctr" lIns="0" rIns="0" tIns="0" bIns="0">
+          <p:cNvPr id="17" name="TextBox 16"/>
+          <p:cNvSpPr txBox="1"/>
+          <p:nvPr/>
+        </p:nvSpPr>
+        <p:spPr>
+          <a:xfrm>
+            <a:off x="7863840" y="2011680"/>
+            <a:ext cx="3566160" cy="457200"/>
+          </a:xfrm>
+          <a:prstGeom prst="rect">
+            <a:avLst/>
+          </a:prstGeom>
+          <a:noFill/>
+        </p:spPr>
+        <p:txBody>
+          <a:bodyPr wrap="square" anchor="t" lIns="0" rIns="0" tIns="0" bIns="0">
             <a:spAutoFit/>
           </a:bodyPr>
           <a:lstStyle/>
@@ -18276,29 +21113,29 @@
               </a:spcAft>
             </a:pPr>
             <a:r>
-              <a:rPr sz="1600" b="1">
-                <a:solidFill>
-                  <a:srgbClr val="FFFFFF"/>
+              <a:rPr sz="1500" b="1">
+                <a:solidFill>
+                  <a:srgbClr val="F59E0B"/>
                 </a:solidFill>
                 <a:latin typeface="NanumSquare"/>
                 <a:ea typeface="NanumSquare"/>
                 <a:cs typeface="NanumSquare"/>
               </a:rPr>
-              <a:t>품질</a:t>
-            </a:r>
-          </a:p>
-        </p:txBody>
-      </p:sp>
-      <p:sp>
-        <p:nvSpPr>
-          <p:cNvPr id="12" name="TextBox 11"/>
-          <p:cNvSpPr txBox="1"/>
-          <p:nvPr/>
-        </p:nvSpPr>
-        <p:spPr>
-          <a:xfrm>
-            <a:off x="822960" y="2697480"/>
-            <a:ext cx="4846320" cy="548640"/>
+              <a:t>다음 과정 — Day 4</a:t>
+            </a:r>
+          </a:p>
+        </p:txBody>
+      </p:sp>
+      <p:sp>
+        <p:nvSpPr>
+          <p:cNvPr id="18" name="TextBox 17"/>
+          <p:cNvSpPr txBox="1"/>
+          <p:nvPr/>
+        </p:nvSpPr>
+        <p:spPr>
+          <a:xfrm>
+            <a:off x="7863840" y="2606040"/>
+            <a:ext cx="3520440" cy="3017520"/>
           </a:xfrm>
           <a:prstGeom prst="rect">
             <a:avLst/>
@@ -18313,3252 +21150,25 @@
           <a:p>
             <a:pPr algn="l">
               <a:lnSpc>
-                <a:spcPct val="100000"/>
-              </a:lnSpc>
-              <a:spcBef>
-                <a:spcPts val="0"/>
-              </a:spcBef>
-              <a:spcAft>
-                <a:spcPts val="600"/>
-              </a:spcAft>
-            </a:pPr>
-            <a:r>
-              <a:rPr sz="1400" b="1">
-                <a:solidFill>
-                  <a:srgbClr val="10B981"/>
+                <a:spcPct val="125000"/>
+              </a:lnSpc>
+              <a:spcBef>
+                <a:spcPts val="0"/>
+              </a:spcBef>
+              <a:spcAft>
+                <a:spcPts val="600"/>
+              </a:spcAft>
+            </a:pPr>
+            <a:r>
+              <a:rPr sz="1400" b="0">
+                <a:solidFill>
+                  <a:srgbClr val="0F172A"/>
                 </a:solidFill>
                 <a:latin typeface="NanumGothic"/>
                 <a:ea typeface="NanumGothic"/>
                 <a:cs typeface="NanumGothic"/>
               </a:rPr>
-              <a:t>•  </a:t>
-            </a:r>
-            <a:r>
-              <a:rPr sz="1400" b="0">
-                <a:solidFill>
-                  <a:srgbClr val="0F172A"/>
-                </a:solidFill>
-                <a:latin typeface="NanumGothic"/>
-                <a:ea typeface="NanumGothic"/>
-                <a:cs typeface="NanumGothic"/>
-              </a:rPr>
-              <a:t>출처 추적</a:t>
-            </a:r>
-          </a:p>
-        </p:txBody>
-      </p:sp>
-      <p:sp>
-        <p:nvSpPr>
-          <p:cNvPr id="13" name="TextBox 12"/>
-          <p:cNvSpPr txBox="1"/>
-          <p:nvPr/>
-        </p:nvSpPr>
-        <p:spPr>
-          <a:xfrm>
-            <a:off x="822960" y="3264408"/>
-            <a:ext cx="4846320" cy="548640"/>
-          </a:xfrm>
-          <a:prstGeom prst="rect">
-            <a:avLst/>
-          </a:prstGeom>
-          <a:noFill/>
-        </p:spPr>
-        <p:txBody>
-          <a:bodyPr wrap="square" anchor="t" lIns="0" rIns="0" tIns="0" bIns="0">
-            <a:spAutoFit/>
-          </a:bodyPr>
-          <a:lstStyle/>
-          <a:p>
-            <a:pPr algn="l">
-              <a:lnSpc>
-                <a:spcPct val="100000"/>
-              </a:lnSpc>
-              <a:spcBef>
-                <a:spcPts val="0"/>
-              </a:spcBef>
-              <a:spcAft>
-                <a:spcPts val="600"/>
-              </a:spcAft>
-            </a:pPr>
-            <a:r>
-              <a:rPr sz="1400" b="1">
-                <a:solidFill>
-                  <a:srgbClr val="10B981"/>
-                </a:solidFill>
-                <a:latin typeface="NanumGothic"/>
-                <a:ea typeface="NanumGothic"/>
-                <a:cs typeface="NanumGothic"/>
-              </a:rPr>
-              <a:t>•  </a:t>
-            </a:r>
-            <a:r>
-              <a:rPr sz="1400" b="0">
-                <a:solidFill>
-                  <a:srgbClr val="0F172A"/>
-                </a:solidFill>
-                <a:latin typeface="NanumGothic"/>
-                <a:ea typeface="NanumGothic"/>
-                <a:cs typeface="NanumGothic"/>
-              </a:rPr>
-              <a:t>교차 검증</a:t>
-            </a:r>
-          </a:p>
-        </p:txBody>
-      </p:sp>
-      <p:sp>
-        <p:nvSpPr>
-          <p:cNvPr id="14" name="TextBox 13"/>
-          <p:cNvSpPr txBox="1"/>
-          <p:nvPr/>
-        </p:nvSpPr>
-        <p:spPr>
-          <a:xfrm>
-            <a:off x="822960" y="3831336"/>
-            <a:ext cx="4846320" cy="548640"/>
-          </a:xfrm>
-          <a:prstGeom prst="rect">
-            <a:avLst/>
-          </a:prstGeom>
-          <a:noFill/>
-        </p:spPr>
-        <p:txBody>
-          <a:bodyPr wrap="square" anchor="t" lIns="0" rIns="0" tIns="0" bIns="0">
-            <a:spAutoFit/>
-          </a:bodyPr>
-          <a:lstStyle/>
-          <a:p>
-            <a:pPr algn="l">
-              <a:lnSpc>
-                <a:spcPct val="100000"/>
-              </a:lnSpc>
-              <a:spcBef>
-                <a:spcPts val="0"/>
-              </a:spcBef>
-              <a:spcAft>
-                <a:spcPts val="600"/>
-              </a:spcAft>
-            </a:pPr>
-            <a:r>
-              <a:rPr sz="1400" b="1">
-                <a:solidFill>
-                  <a:srgbClr val="10B981"/>
-                </a:solidFill>
-                <a:latin typeface="NanumGothic"/>
-                <a:ea typeface="NanumGothic"/>
-                <a:cs typeface="NanumGothic"/>
-              </a:rPr>
-              <a:t>•  </a:t>
-            </a:r>
-            <a:r>
-              <a:rPr sz="1400" b="0">
-                <a:solidFill>
-                  <a:srgbClr val="0F172A"/>
-                </a:solidFill>
-                <a:latin typeface="NanumGothic"/>
-                <a:ea typeface="NanumGothic"/>
-                <a:cs typeface="NanumGothic"/>
-              </a:rPr>
-              <a:t>재현성</a:t>
-            </a:r>
-          </a:p>
-        </p:txBody>
-      </p:sp>
-      <p:sp>
-        <p:nvSpPr>
-          <p:cNvPr id="15" name="TextBox 14"/>
-          <p:cNvSpPr txBox="1"/>
-          <p:nvPr/>
-        </p:nvSpPr>
-        <p:spPr>
-          <a:xfrm>
-            <a:off x="822960" y="4398264"/>
-            <a:ext cx="4846320" cy="548640"/>
-          </a:xfrm>
-          <a:prstGeom prst="rect">
-            <a:avLst/>
-          </a:prstGeom>
-          <a:noFill/>
-        </p:spPr>
-        <p:txBody>
-          <a:bodyPr wrap="square" anchor="t" lIns="0" rIns="0" tIns="0" bIns="0">
-            <a:spAutoFit/>
-          </a:bodyPr>
-          <a:lstStyle/>
-          <a:p>
-            <a:pPr algn="l">
-              <a:lnSpc>
-                <a:spcPct val="100000"/>
-              </a:lnSpc>
-              <a:spcBef>
-                <a:spcPts val="0"/>
-              </a:spcBef>
-              <a:spcAft>
-                <a:spcPts val="600"/>
-              </a:spcAft>
-            </a:pPr>
-            <a:r>
-              <a:rPr sz="1400" b="1">
-                <a:solidFill>
-                  <a:srgbClr val="10B981"/>
-                </a:solidFill>
-                <a:latin typeface="NanumGothic"/>
-                <a:ea typeface="NanumGothic"/>
-                <a:cs typeface="NanumGothic"/>
-              </a:rPr>
-              <a:t>•  </a:t>
-            </a:r>
-            <a:r>
-              <a:rPr sz="1400" b="0">
-                <a:solidFill>
-                  <a:srgbClr val="0F172A"/>
-                </a:solidFill>
-                <a:latin typeface="NanumGothic"/>
-                <a:ea typeface="NanumGothic"/>
-                <a:cs typeface="NanumGothic"/>
-              </a:rPr>
-              <a:t>불확실성 표기</a:t>
-            </a:r>
-          </a:p>
-        </p:txBody>
-      </p:sp>
-      <p:sp>
-        <p:nvSpPr>
-          <p:cNvPr id="16" name="Rounded Rectangle 15"/>
-          <p:cNvSpPr/>
-          <p:nvPr/>
-        </p:nvSpPr>
-        <p:spPr>
-          <a:xfrm>
-            <a:off x="6172200" y="1828800"/>
-            <a:ext cx="5440680" cy="4023360"/>
-          </a:xfrm>
-          <a:prstGeom prst="roundRect">
-            <a:avLst/>
-          </a:prstGeom>
-          <a:solidFill>
-            <a:srgbClr val="F8FAFC"/>
-          </a:solidFill>
-          <a:ln w="12700">
-            <a:solidFill>
-              <a:srgbClr val="E2E8F0"/>
-            </a:solidFill>
-          </a:ln>
-          <a:effectLst/>
-        </p:spPr>
-        <p:style>
-          <a:lnRef idx="1">
-            <a:schemeClr val="accent1"/>
-          </a:lnRef>
-          <a:fillRef idx="3">
-            <a:schemeClr val="accent1"/>
-          </a:fillRef>
-          <a:effectRef idx="2">
-            <a:schemeClr val="accent1"/>
-          </a:effectRef>
-          <a:fontRef idx="minor">
-            <a:schemeClr val="lt1"/>
-          </a:fontRef>
-        </p:style>
-        <p:txBody>
-          <a:bodyPr rtlCol="0" anchor="ctr"/>
-          <a:lstStyle/>
-          <a:p>
-            <a:pPr algn="ctr"/>
-          </a:p>
-        </p:txBody>
-      </p:sp>
-      <p:sp>
-        <p:nvSpPr>
-          <p:cNvPr id="17" name="Rounded Rectangle 16"/>
-          <p:cNvSpPr/>
-          <p:nvPr/>
-        </p:nvSpPr>
-        <p:spPr>
-          <a:xfrm>
-            <a:off x="6172200" y="1828800"/>
-            <a:ext cx="5440680" cy="640080"/>
-          </a:xfrm>
-          <a:prstGeom prst="roundRect">
-            <a:avLst/>
-          </a:prstGeom>
-          <a:solidFill>
-            <a:srgbClr val="12203C"/>
-          </a:solidFill>
-          <a:ln>
-            <a:noFill/>
-          </a:ln>
-          <a:effectLst/>
-        </p:spPr>
-        <p:style>
-          <a:lnRef idx="1">
-            <a:schemeClr val="accent1"/>
-          </a:lnRef>
-          <a:fillRef idx="3">
-            <a:schemeClr val="accent1"/>
-          </a:fillRef>
-          <a:effectRef idx="2">
-            <a:schemeClr val="accent1"/>
-          </a:effectRef>
-          <a:fontRef idx="minor">
-            <a:schemeClr val="lt1"/>
-          </a:fontRef>
-        </p:style>
-        <p:txBody>
-          <a:bodyPr rtlCol="0" anchor="ctr"/>
-          <a:lstStyle/>
-          <a:p>
-            <a:pPr algn="ctr"/>
-          </a:p>
-        </p:txBody>
-      </p:sp>
-      <p:sp>
-        <p:nvSpPr>
-          <p:cNvPr id="18" name="TextBox 17"/>
-          <p:cNvSpPr txBox="1"/>
-          <p:nvPr/>
-        </p:nvSpPr>
-        <p:spPr>
-          <a:xfrm>
-            <a:off x="6446520" y="1828800"/>
-            <a:ext cx="4937760" cy="640080"/>
-          </a:xfrm>
-          <a:prstGeom prst="rect">
-            <a:avLst/>
-          </a:prstGeom>
-          <a:noFill/>
-        </p:spPr>
-        <p:txBody>
-          <a:bodyPr wrap="square" anchor="ctr" lIns="0" rIns="0" tIns="0" bIns="0">
-            <a:spAutoFit/>
-          </a:bodyPr>
-          <a:lstStyle/>
-          <a:p>
-            <a:pPr algn="l">
-              <a:lnSpc>
-                <a:spcPct val="100000"/>
-              </a:lnSpc>
-              <a:spcBef>
-                <a:spcPts val="0"/>
-              </a:spcBef>
-              <a:spcAft>
-                <a:spcPts val="600"/>
-              </a:spcAft>
-            </a:pPr>
-            <a:r>
-              <a:rPr sz="1600" b="1">
-                <a:solidFill>
-                  <a:srgbClr val="FFFFFF"/>
-                </a:solidFill>
-                <a:latin typeface="NanumSquare"/>
-                <a:ea typeface="NanumSquare"/>
-                <a:cs typeface="NanumSquare"/>
-              </a:rPr>
-              <a:t>구조</a:t>
-            </a:r>
-          </a:p>
-        </p:txBody>
-      </p:sp>
-      <p:sp>
-        <p:nvSpPr>
-          <p:cNvPr id="19" name="TextBox 18"/>
-          <p:cNvSpPr txBox="1"/>
-          <p:nvPr/>
-        </p:nvSpPr>
-        <p:spPr>
-          <a:xfrm>
-            <a:off x="6492240" y="2697480"/>
-            <a:ext cx="4846320" cy="548640"/>
-          </a:xfrm>
-          <a:prstGeom prst="rect">
-            <a:avLst/>
-          </a:prstGeom>
-          <a:noFill/>
-        </p:spPr>
-        <p:txBody>
-          <a:bodyPr wrap="square" anchor="t" lIns="0" rIns="0" tIns="0" bIns="0">
-            <a:spAutoFit/>
-          </a:bodyPr>
-          <a:lstStyle/>
-          <a:p>
-            <a:pPr algn="l">
-              <a:lnSpc>
-                <a:spcPct val="100000"/>
-              </a:lnSpc>
-              <a:spcBef>
-                <a:spcPts val="0"/>
-              </a:spcBef>
-              <a:spcAft>
-                <a:spcPts val="600"/>
-              </a:spcAft>
-            </a:pPr>
-            <a:r>
-              <a:rPr sz="1400" b="1">
-                <a:solidFill>
-                  <a:srgbClr val="12203C"/>
-                </a:solidFill>
-                <a:latin typeface="NanumGothic"/>
-                <a:ea typeface="NanumGothic"/>
-                <a:cs typeface="NanumGothic"/>
-              </a:rPr>
-              <a:t>•  </a:t>
-            </a:r>
-            <a:r>
-              <a:rPr sz="1400" b="0">
-                <a:solidFill>
-                  <a:srgbClr val="0F172A"/>
-                </a:solidFill>
-                <a:latin typeface="NanumGothic"/>
-                <a:ea typeface="NanumGothic"/>
-                <a:cs typeface="NanumGothic"/>
-              </a:rPr>
-              <a:t>질문 분해</a:t>
-            </a:r>
-          </a:p>
-        </p:txBody>
-      </p:sp>
-      <p:sp>
-        <p:nvSpPr>
-          <p:cNvPr id="20" name="TextBox 19"/>
-          <p:cNvSpPr txBox="1"/>
-          <p:nvPr/>
-        </p:nvSpPr>
-        <p:spPr>
-          <a:xfrm>
-            <a:off x="6492240" y="3264408"/>
-            <a:ext cx="4846320" cy="548640"/>
-          </a:xfrm>
-          <a:prstGeom prst="rect">
-            <a:avLst/>
-          </a:prstGeom>
-          <a:noFill/>
-        </p:spPr>
-        <p:txBody>
-          <a:bodyPr wrap="square" anchor="t" lIns="0" rIns="0" tIns="0" bIns="0">
-            <a:spAutoFit/>
-          </a:bodyPr>
-          <a:lstStyle/>
-          <a:p>
-            <a:pPr algn="l">
-              <a:lnSpc>
-                <a:spcPct val="100000"/>
-              </a:lnSpc>
-              <a:spcBef>
-                <a:spcPts val="0"/>
-              </a:spcBef>
-              <a:spcAft>
-                <a:spcPts val="600"/>
-              </a:spcAft>
-            </a:pPr>
-            <a:r>
-              <a:rPr sz="1400" b="1">
-                <a:solidFill>
-                  <a:srgbClr val="12203C"/>
-                </a:solidFill>
-                <a:latin typeface="NanumGothic"/>
-                <a:ea typeface="NanumGothic"/>
-                <a:cs typeface="NanumGothic"/>
-              </a:rPr>
-              <a:t>•  </a:t>
-            </a:r>
-            <a:r>
-              <a:rPr sz="1400" b="0">
-                <a:solidFill>
-                  <a:srgbClr val="0F172A"/>
-                </a:solidFill>
-                <a:latin typeface="NanumGothic"/>
-                <a:ea typeface="NanumGothic"/>
-                <a:cs typeface="NanumGothic"/>
-              </a:rPr>
-              <a:t>병렬화</a:t>
-            </a:r>
-          </a:p>
-        </p:txBody>
-      </p:sp>
-      <p:sp>
-        <p:nvSpPr>
-          <p:cNvPr id="21" name="TextBox 20"/>
-          <p:cNvSpPr txBox="1"/>
-          <p:nvPr/>
-        </p:nvSpPr>
-        <p:spPr>
-          <a:xfrm>
-            <a:off x="6492240" y="3831336"/>
-            <a:ext cx="4846320" cy="548640"/>
-          </a:xfrm>
-          <a:prstGeom prst="rect">
-            <a:avLst/>
-          </a:prstGeom>
-          <a:noFill/>
-        </p:spPr>
-        <p:txBody>
-          <a:bodyPr wrap="square" anchor="t" lIns="0" rIns="0" tIns="0" bIns="0">
-            <a:spAutoFit/>
-          </a:bodyPr>
-          <a:lstStyle/>
-          <a:p>
-            <a:pPr algn="l">
-              <a:lnSpc>
-                <a:spcPct val="100000"/>
-              </a:lnSpc>
-              <a:spcBef>
-                <a:spcPts val="0"/>
-              </a:spcBef>
-              <a:spcAft>
-                <a:spcPts val="600"/>
-              </a:spcAft>
-            </a:pPr>
-            <a:r>
-              <a:rPr sz="1400" b="1">
-                <a:solidFill>
-                  <a:srgbClr val="12203C"/>
-                </a:solidFill>
-                <a:latin typeface="NanumGothic"/>
-                <a:ea typeface="NanumGothic"/>
-                <a:cs typeface="NanumGothic"/>
-              </a:rPr>
-              <a:t>•  </a:t>
-            </a:r>
-            <a:r>
-              <a:rPr sz="1400" b="0">
-                <a:solidFill>
-                  <a:srgbClr val="0F172A"/>
-                </a:solidFill>
-                <a:latin typeface="NanumGothic"/>
-                <a:ea typeface="NanumGothic"/>
-                <a:cs typeface="NanumGothic"/>
-              </a:rPr>
-              <a:t>반복 루프</a:t>
-            </a:r>
-          </a:p>
-        </p:txBody>
-      </p:sp>
-      <p:sp>
-        <p:nvSpPr>
-          <p:cNvPr id="22" name="TextBox 21"/>
-          <p:cNvSpPr txBox="1"/>
-          <p:nvPr/>
-        </p:nvSpPr>
-        <p:spPr>
-          <a:xfrm>
-            <a:off x="6492240" y="4398264"/>
-            <a:ext cx="4846320" cy="548640"/>
-          </a:xfrm>
-          <a:prstGeom prst="rect">
-            <a:avLst/>
-          </a:prstGeom>
-          <a:noFill/>
-        </p:spPr>
-        <p:txBody>
-          <a:bodyPr wrap="square" anchor="t" lIns="0" rIns="0" tIns="0" bIns="0">
-            <a:spAutoFit/>
-          </a:bodyPr>
-          <a:lstStyle/>
-          <a:p>
-            <a:pPr algn="l">
-              <a:lnSpc>
-                <a:spcPct val="100000"/>
-              </a:lnSpc>
-              <a:spcBef>
-                <a:spcPts val="0"/>
-              </a:spcBef>
-              <a:spcAft>
-                <a:spcPts val="600"/>
-              </a:spcAft>
-            </a:pPr>
-            <a:r>
-              <a:rPr sz="1400" b="1">
-                <a:solidFill>
-                  <a:srgbClr val="12203C"/>
-                </a:solidFill>
-                <a:latin typeface="NanumGothic"/>
-                <a:ea typeface="NanumGothic"/>
-                <a:cs typeface="NanumGothic"/>
-              </a:rPr>
-              <a:t>•  </a:t>
-            </a:r>
-            <a:r>
-              <a:rPr sz="1400" b="0">
-                <a:solidFill>
-                  <a:srgbClr val="0F172A"/>
-                </a:solidFill>
-                <a:latin typeface="NanumGothic"/>
-                <a:ea typeface="NanumGothic"/>
-                <a:cs typeface="NanumGothic"/>
-              </a:rPr>
-              <a:t>결과 평가</a:t>
-            </a:r>
-          </a:p>
-        </p:txBody>
-      </p:sp>
-    </p:spTree>
-  </p:cSld>
-  <p:clrMapOvr>
-    <a:masterClrMapping/>
-  </p:clrMapOvr>
-</p:sld>
-</file>
-
-<file path=ppt/slides/slide26.xml><?xml version="1.0" encoding="utf-8"?>
-<p:sld xmlns:a="http://schemas.openxmlformats.org/drawingml/2006/main" xmlns:p="http://schemas.openxmlformats.org/presentationml/2006/main" xmlns:r="http://schemas.openxmlformats.org/officeDocument/2006/relationships">
-  <p:cSld>
-    <p:spTree>
-      <p:nvGrpSpPr>
-        <p:cNvPr id="1" name=""/>
-        <p:cNvGrpSpPr/>
-        <p:nvPr/>
-      </p:nvGrpSpPr>
-      <p:grpSpPr/>
-      <p:sp>
-        <p:nvSpPr>
-          <p:cNvPr id="2" name="Rectangle 1"/>
-          <p:cNvSpPr/>
-          <p:nvPr/>
-        </p:nvSpPr>
-        <p:spPr>
-          <a:xfrm>
-            <a:off x="0" y="0"/>
-            <a:ext cx="12191695" cy="6858000"/>
-          </a:xfrm>
-          <a:prstGeom prst="rect">
-            <a:avLst/>
-          </a:prstGeom>
-          <a:solidFill>
-            <a:srgbClr val="FFFFFF"/>
-          </a:solidFill>
-          <a:ln>
-            <a:noFill/>
-          </a:ln>
-          <a:effectLst/>
-        </p:spPr>
-        <p:style>
-          <a:lnRef idx="1">
-            <a:schemeClr val="accent1"/>
-          </a:lnRef>
-          <a:fillRef idx="3">
-            <a:schemeClr val="accent1"/>
-          </a:fillRef>
-          <a:effectRef idx="2">
-            <a:schemeClr val="accent1"/>
-          </a:effectRef>
-          <a:fontRef idx="minor">
-            <a:schemeClr val="lt1"/>
-          </a:fontRef>
-        </p:style>
-        <p:txBody>
-          <a:bodyPr rtlCol="0" anchor="ctr"/>
-          <a:lstStyle/>
-          <a:p>
-            <a:pPr algn="ctr"/>
-          </a:p>
-        </p:txBody>
-      </p:sp>
-      <p:sp>
-        <p:nvSpPr>
-          <p:cNvPr id="3" name="Rectangle 2"/>
-          <p:cNvSpPr/>
-          <p:nvPr/>
-        </p:nvSpPr>
-        <p:spPr>
-          <a:xfrm>
-            <a:off x="0" y="0"/>
-            <a:ext cx="164592" cy="6858000"/>
-          </a:xfrm>
-          <a:prstGeom prst="rect">
-            <a:avLst/>
-          </a:prstGeom>
-          <a:solidFill>
-            <a:srgbClr val="10B981"/>
-          </a:solidFill>
-          <a:ln>
-            <a:noFill/>
-          </a:ln>
-          <a:effectLst/>
-        </p:spPr>
-        <p:style>
-          <a:lnRef idx="1">
-            <a:schemeClr val="accent1"/>
-          </a:lnRef>
-          <a:fillRef idx="3">
-            <a:schemeClr val="accent1"/>
-          </a:fillRef>
-          <a:effectRef idx="2">
-            <a:schemeClr val="accent1"/>
-          </a:effectRef>
-          <a:fontRef idx="minor">
-            <a:schemeClr val="lt1"/>
-          </a:fontRef>
-        </p:style>
-        <p:txBody>
-          <a:bodyPr rtlCol="0" anchor="ctr"/>
-          <a:lstStyle/>
-          <a:p>
-            <a:pPr algn="ctr"/>
-          </a:p>
-        </p:txBody>
-      </p:sp>
-      <p:sp>
-        <p:nvSpPr>
-          <p:cNvPr id="4" name="TextBox 3"/>
-          <p:cNvSpPr txBox="1"/>
-          <p:nvPr/>
-        </p:nvSpPr>
-        <p:spPr>
-          <a:xfrm>
-            <a:off x="502920" y="384048"/>
-            <a:ext cx="10058400" cy="320040"/>
-          </a:xfrm>
-          <a:prstGeom prst="rect">
-            <a:avLst/>
-          </a:prstGeom>
-          <a:noFill/>
-        </p:spPr>
-        <p:txBody>
-          <a:bodyPr wrap="square" anchor="t" lIns="0" rIns="0" tIns="0" bIns="0">
-            <a:spAutoFit/>
-          </a:bodyPr>
-          <a:lstStyle/>
-          <a:p>
-            <a:pPr algn="l">
-              <a:lnSpc>
-                <a:spcPct val="100000"/>
-              </a:lnSpc>
-              <a:spcBef>
-                <a:spcPts val="0"/>
-              </a:spcBef>
-              <a:spcAft>
-                <a:spcPts val="600"/>
-              </a:spcAft>
-            </a:pPr>
-            <a:r>
-              <a:rPr sz="1200" b="1">
-                <a:solidFill>
-                  <a:srgbClr val="10B981"/>
-                </a:solidFill>
-                <a:latin typeface="NanumGothic"/>
-                <a:ea typeface="NanumGothic"/>
-                <a:cs typeface="NanumGothic"/>
-              </a:rPr>
-              <a:t>구조</a:t>
-            </a:r>
-          </a:p>
-        </p:txBody>
-      </p:sp>
-      <p:sp>
-        <p:nvSpPr>
-          <p:cNvPr id="5" name="TextBox 4"/>
-          <p:cNvSpPr txBox="1"/>
-          <p:nvPr/>
-        </p:nvSpPr>
-        <p:spPr>
-          <a:xfrm>
-            <a:off x="502920" y="713232"/>
-            <a:ext cx="11155680" cy="731520"/>
-          </a:xfrm>
-          <a:prstGeom prst="rect">
-            <a:avLst/>
-          </a:prstGeom>
-          <a:noFill/>
-        </p:spPr>
-        <p:txBody>
-          <a:bodyPr wrap="square" anchor="t" lIns="0" rIns="0" tIns="0" bIns="0">
-            <a:spAutoFit/>
-          </a:bodyPr>
-          <a:lstStyle/>
-          <a:p>
-            <a:pPr algn="l">
-              <a:lnSpc>
-                <a:spcPct val="100000"/>
-              </a:lnSpc>
-              <a:spcBef>
-                <a:spcPts val="0"/>
-              </a:spcBef>
-              <a:spcAft>
-                <a:spcPts val="600"/>
-              </a:spcAft>
-            </a:pPr>
-            <a:r>
-              <a:rPr sz="2700" b="1">
-                <a:solidFill>
-                  <a:srgbClr val="0F172A"/>
-                </a:solidFill>
-                <a:latin typeface="NanumSquare"/>
-                <a:ea typeface="NanumSquare"/>
-                <a:cs typeface="NanumSquare"/>
-              </a:rPr>
-              <a:t>오케스트레이션과 반복 루프</a:t>
-            </a:r>
-          </a:p>
-        </p:txBody>
-      </p:sp>
-      <p:sp>
-        <p:nvSpPr>
-          <p:cNvPr id="6" name="Rectangle 5"/>
-          <p:cNvSpPr/>
-          <p:nvPr/>
-        </p:nvSpPr>
-        <p:spPr>
-          <a:xfrm>
-            <a:off x="521207" y="1417320"/>
-            <a:ext cx="1005840" cy="45720"/>
-          </a:xfrm>
-          <a:prstGeom prst="rect">
-            <a:avLst/>
-          </a:prstGeom>
-          <a:solidFill>
-            <a:srgbClr val="10B981"/>
-          </a:solidFill>
-          <a:ln>
-            <a:noFill/>
-          </a:ln>
-          <a:effectLst/>
-        </p:spPr>
-        <p:style>
-          <a:lnRef idx="1">
-            <a:schemeClr val="accent1"/>
-          </a:lnRef>
-          <a:fillRef idx="3">
-            <a:schemeClr val="accent1"/>
-          </a:fillRef>
-          <a:effectRef idx="2">
-            <a:schemeClr val="accent1"/>
-          </a:effectRef>
-          <a:fontRef idx="minor">
-            <a:schemeClr val="lt1"/>
-          </a:fontRef>
-        </p:style>
-        <p:txBody>
-          <a:bodyPr rtlCol="0" anchor="ctr"/>
-          <a:lstStyle/>
-          <a:p>
-            <a:pPr algn="ctr"/>
-          </a:p>
-        </p:txBody>
-      </p:sp>
-      <p:sp>
-        <p:nvSpPr>
-          <p:cNvPr id="7" name="TextBox 6"/>
-          <p:cNvSpPr txBox="1"/>
-          <p:nvPr/>
-        </p:nvSpPr>
-        <p:spPr>
-          <a:xfrm>
-            <a:off x="502920" y="6419088"/>
-            <a:ext cx="7315200" cy="365760"/>
-          </a:xfrm>
-          <a:prstGeom prst="rect">
-            <a:avLst/>
-          </a:prstGeom>
-          <a:noFill/>
-        </p:spPr>
-        <p:txBody>
-          <a:bodyPr wrap="square" anchor="ctr" lIns="0" rIns="0" tIns="0" bIns="0">
-            <a:spAutoFit/>
-          </a:bodyPr>
-          <a:lstStyle/>
-          <a:p>
-            <a:pPr algn="l">
-              <a:lnSpc>
-                <a:spcPct val="100000"/>
-              </a:lnSpc>
-              <a:spcBef>
-                <a:spcPts val="0"/>
-              </a:spcBef>
-              <a:spcAft>
-                <a:spcPts val="600"/>
-              </a:spcAft>
-            </a:pPr>
-            <a:r>
-              <a:rPr sz="900" b="0">
-                <a:solidFill>
-                  <a:srgbClr val="64748B"/>
-                </a:solidFill>
-                <a:latin typeface="NanumGothic"/>
-                <a:ea typeface="NanumGothic"/>
-                <a:cs typeface="NanumGothic"/>
-              </a:rPr>
-              <a:t>AI 에이전트와 응용  ·  원광대학교 5일 교육</a:t>
-            </a:r>
-          </a:p>
-        </p:txBody>
-      </p:sp>
-      <p:sp>
-        <p:nvSpPr>
-          <p:cNvPr id="8" name="TextBox 7"/>
-          <p:cNvSpPr txBox="1"/>
-          <p:nvPr/>
-        </p:nvSpPr>
-        <p:spPr>
-          <a:xfrm>
-            <a:off x="10241280" y="6419088"/>
-            <a:ext cx="1463040" cy="365760"/>
-          </a:xfrm>
-          <a:prstGeom prst="rect">
-            <a:avLst/>
-          </a:prstGeom>
-          <a:noFill/>
-        </p:spPr>
-        <p:txBody>
-          <a:bodyPr wrap="square" anchor="ctr" lIns="0" rIns="0" tIns="0" bIns="0">
-            <a:spAutoFit/>
-          </a:bodyPr>
-          <a:lstStyle/>
-          <a:p>
-            <a:pPr algn="r">
-              <a:lnSpc>
-                <a:spcPct val="100000"/>
-              </a:lnSpc>
-              <a:spcBef>
-                <a:spcPts val="0"/>
-              </a:spcBef>
-              <a:spcAft>
-                <a:spcPts val="600"/>
-              </a:spcAft>
-            </a:pPr>
-            <a:r>
-              <a:rPr sz="900" b="1">
-                <a:solidFill>
-                  <a:srgbClr val="10B981"/>
-                </a:solidFill>
-                <a:latin typeface="NanumGothic"/>
-                <a:ea typeface="NanumGothic"/>
-                <a:cs typeface="NanumGothic"/>
-              </a:rPr>
-              <a:t>Day 3 · 수</a:t>
-            </a:r>
-          </a:p>
-        </p:txBody>
-      </p:sp>
-      <p:sp>
-        <p:nvSpPr>
-          <p:cNvPr id="9" name="Oval 8"/>
-          <p:cNvSpPr/>
-          <p:nvPr/>
-        </p:nvSpPr>
-        <p:spPr>
-          <a:xfrm>
-            <a:off x="548640" y="1911096"/>
-            <a:ext cx="146304" cy="146304"/>
-          </a:xfrm>
-          <a:prstGeom prst="ellipse">
-            <a:avLst/>
-          </a:prstGeom>
-          <a:solidFill>
-            <a:srgbClr val="10B981"/>
-          </a:solidFill>
-          <a:ln>
-            <a:noFill/>
-          </a:ln>
-          <a:effectLst/>
-        </p:spPr>
-        <p:style>
-          <a:lnRef idx="1">
-            <a:schemeClr val="accent1"/>
-          </a:lnRef>
-          <a:fillRef idx="3">
-            <a:schemeClr val="accent1"/>
-          </a:fillRef>
-          <a:effectRef idx="2">
-            <a:schemeClr val="accent1"/>
-          </a:effectRef>
-          <a:fontRef idx="minor">
-            <a:schemeClr val="lt1"/>
-          </a:fontRef>
-        </p:style>
-        <p:txBody>
-          <a:bodyPr rtlCol="0" anchor="ctr"/>
-          <a:lstStyle/>
-          <a:p>
-            <a:pPr algn="ctr"/>
-          </a:p>
-        </p:txBody>
-      </p:sp>
-      <p:sp>
-        <p:nvSpPr>
-          <p:cNvPr id="10" name="TextBox 9"/>
-          <p:cNvSpPr txBox="1"/>
-          <p:nvPr/>
-        </p:nvSpPr>
-        <p:spPr>
-          <a:xfrm>
-            <a:off x="868680" y="1828800"/>
-            <a:ext cx="10607040" cy="457200"/>
-          </a:xfrm>
-          <a:prstGeom prst="rect">
-            <a:avLst/>
-          </a:prstGeom>
-          <a:noFill/>
-        </p:spPr>
-        <p:txBody>
-          <a:bodyPr wrap="square" anchor="t" lIns="0" rIns="0" tIns="0" bIns="0">
-            <a:spAutoFit/>
-          </a:bodyPr>
-          <a:lstStyle/>
-          <a:p>
-            <a:pPr algn="l">
-              <a:lnSpc>
-                <a:spcPct val="100000"/>
-              </a:lnSpc>
-              <a:spcBef>
-                <a:spcPts val="0"/>
-              </a:spcBef>
-              <a:spcAft>
-                <a:spcPts val="600"/>
-              </a:spcAft>
-            </a:pPr>
-            <a:r>
-              <a:rPr sz="1600" b="1">
-                <a:solidFill>
-                  <a:srgbClr val="0F172A"/>
-                </a:solidFill>
-                <a:latin typeface="NanumGothic"/>
-                <a:ea typeface="NanumGothic"/>
-                <a:cs typeface="NanumGothic"/>
-              </a:rPr>
-              <a:t>작업 분해·조율</a:t>
-            </a:r>
-          </a:p>
-        </p:txBody>
-      </p:sp>
-      <p:sp>
-        <p:nvSpPr>
-          <p:cNvPr id="11" name="TextBox 10"/>
-          <p:cNvSpPr txBox="1"/>
-          <p:nvPr/>
-        </p:nvSpPr>
-        <p:spPr>
-          <a:xfrm>
-            <a:off x="868680" y="2212848"/>
-            <a:ext cx="10607040" cy="457200"/>
-          </a:xfrm>
-          <a:prstGeom prst="rect">
-            <a:avLst/>
-          </a:prstGeom>
-          <a:noFill/>
-        </p:spPr>
-        <p:txBody>
-          <a:bodyPr wrap="square" anchor="t" lIns="0" rIns="0" tIns="0" bIns="0">
-            <a:spAutoFit/>
-          </a:bodyPr>
-          <a:lstStyle/>
-          <a:p>
-            <a:pPr algn="l">
-              <a:lnSpc>
-                <a:spcPct val="100000"/>
-              </a:lnSpc>
-              <a:spcBef>
-                <a:spcPts val="0"/>
-              </a:spcBef>
-              <a:spcAft>
-                <a:spcPts val="600"/>
-              </a:spcAft>
-            </a:pPr>
-            <a:r>
-              <a:rPr sz="1300" b="0">
-                <a:solidFill>
-                  <a:srgbClr val="64748B"/>
-                </a:solidFill>
-                <a:latin typeface="NanumGothic"/>
-                <a:ea typeface="NanumGothic"/>
-                <a:cs typeface="NanumGothic"/>
-              </a:rPr>
-              <a:t>여러 단계·도구의 조합</a:t>
-            </a:r>
-          </a:p>
-        </p:txBody>
-      </p:sp>
-      <p:sp>
-        <p:nvSpPr>
-          <p:cNvPr id="12" name="Oval 11"/>
-          <p:cNvSpPr/>
-          <p:nvPr/>
-        </p:nvSpPr>
-        <p:spPr>
-          <a:xfrm>
-            <a:off x="548640" y="2779776"/>
-            <a:ext cx="146304" cy="146304"/>
-          </a:xfrm>
-          <a:prstGeom prst="ellipse">
-            <a:avLst/>
-          </a:prstGeom>
-          <a:solidFill>
-            <a:srgbClr val="10B981"/>
-          </a:solidFill>
-          <a:ln>
-            <a:noFill/>
-          </a:ln>
-          <a:effectLst/>
-        </p:spPr>
-        <p:style>
-          <a:lnRef idx="1">
-            <a:schemeClr val="accent1"/>
-          </a:lnRef>
-          <a:fillRef idx="3">
-            <a:schemeClr val="accent1"/>
-          </a:fillRef>
-          <a:effectRef idx="2">
-            <a:schemeClr val="accent1"/>
-          </a:effectRef>
-          <a:fontRef idx="minor">
-            <a:schemeClr val="lt1"/>
-          </a:fontRef>
-        </p:style>
-        <p:txBody>
-          <a:bodyPr rtlCol="0" anchor="ctr"/>
-          <a:lstStyle/>
-          <a:p>
-            <a:pPr algn="ctr"/>
-          </a:p>
-        </p:txBody>
-      </p:sp>
-      <p:sp>
-        <p:nvSpPr>
-          <p:cNvPr id="13" name="TextBox 12"/>
-          <p:cNvSpPr txBox="1"/>
-          <p:nvPr/>
-        </p:nvSpPr>
-        <p:spPr>
-          <a:xfrm>
-            <a:off x="868680" y="2697480"/>
-            <a:ext cx="10607040" cy="457200"/>
-          </a:xfrm>
-          <a:prstGeom prst="rect">
-            <a:avLst/>
-          </a:prstGeom>
-          <a:noFill/>
-        </p:spPr>
-        <p:txBody>
-          <a:bodyPr wrap="square" anchor="t" lIns="0" rIns="0" tIns="0" bIns="0">
-            <a:spAutoFit/>
-          </a:bodyPr>
-          <a:lstStyle/>
-          <a:p>
-            <a:pPr algn="l">
-              <a:lnSpc>
-                <a:spcPct val="100000"/>
-              </a:lnSpc>
-              <a:spcBef>
-                <a:spcPts val="0"/>
-              </a:spcBef>
-              <a:spcAft>
-                <a:spcPts val="600"/>
-              </a:spcAft>
-            </a:pPr>
-            <a:r>
-              <a:rPr sz="1600" b="1">
-                <a:solidFill>
-                  <a:srgbClr val="0F172A"/>
-                </a:solidFill>
-                <a:latin typeface="NanumGothic"/>
-                <a:ea typeface="NanumGothic"/>
-                <a:cs typeface="NanumGothic"/>
-              </a:rPr>
-              <a:t>반복(iteration)</a:t>
-            </a:r>
-          </a:p>
-        </p:txBody>
-      </p:sp>
-      <p:sp>
-        <p:nvSpPr>
-          <p:cNvPr id="14" name="TextBox 13"/>
-          <p:cNvSpPr txBox="1"/>
-          <p:nvPr/>
-        </p:nvSpPr>
-        <p:spPr>
-          <a:xfrm>
-            <a:off x="868680" y="3081528"/>
-            <a:ext cx="10607040" cy="457200"/>
-          </a:xfrm>
-          <a:prstGeom prst="rect">
-            <a:avLst/>
-          </a:prstGeom>
-          <a:noFill/>
-        </p:spPr>
-        <p:txBody>
-          <a:bodyPr wrap="square" anchor="t" lIns="0" rIns="0" tIns="0" bIns="0">
-            <a:spAutoFit/>
-          </a:bodyPr>
-          <a:lstStyle/>
-          <a:p>
-            <a:pPr algn="l">
-              <a:lnSpc>
-                <a:spcPct val="100000"/>
-              </a:lnSpc>
-              <a:spcBef>
-                <a:spcPts val="0"/>
-              </a:spcBef>
-              <a:spcAft>
-                <a:spcPts val="600"/>
-              </a:spcAft>
-            </a:pPr>
-            <a:r>
-              <a:rPr sz="1300" b="0">
-                <a:solidFill>
-                  <a:srgbClr val="64748B"/>
-                </a:solidFill>
-                <a:latin typeface="NanumGothic"/>
-                <a:ea typeface="NanumGothic"/>
-                <a:cs typeface="NanumGothic"/>
-              </a:rPr>
-              <a:t>부족하면 다시 검색·검증</a:t>
-            </a:r>
-          </a:p>
-        </p:txBody>
-      </p:sp>
-      <p:sp>
-        <p:nvSpPr>
-          <p:cNvPr id="15" name="Oval 14"/>
-          <p:cNvSpPr/>
-          <p:nvPr/>
-        </p:nvSpPr>
-        <p:spPr>
-          <a:xfrm>
-            <a:off x="548640" y="3648456"/>
-            <a:ext cx="146304" cy="146304"/>
-          </a:xfrm>
-          <a:prstGeom prst="ellipse">
-            <a:avLst/>
-          </a:prstGeom>
-          <a:solidFill>
-            <a:srgbClr val="10B981"/>
-          </a:solidFill>
-          <a:ln>
-            <a:noFill/>
-          </a:ln>
-          <a:effectLst/>
-        </p:spPr>
-        <p:style>
-          <a:lnRef idx="1">
-            <a:schemeClr val="accent1"/>
-          </a:lnRef>
-          <a:fillRef idx="3">
-            <a:schemeClr val="accent1"/>
-          </a:fillRef>
-          <a:effectRef idx="2">
-            <a:schemeClr val="accent1"/>
-          </a:effectRef>
-          <a:fontRef idx="minor">
-            <a:schemeClr val="lt1"/>
-          </a:fontRef>
-        </p:style>
-        <p:txBody>
-          <a:bodyPr rtlCol="0" anchor="ctr"/>
-          <a:lstStyle/>
-          <a:p>
-            <a:pPr algn="ctr"/>
-          </a:p>
-        </p:txBody>
-      </p:sp>
-      <p:sp>
-        <p:nvSpPr>
-          <p:cNvPr id="16" name="TextBox 15"/>
-          <p:cNvSpPr txBox="1"/>
-          <p:nvPr/>
-        </p:nvSpPr>
-        <p:spPr>
-          <a:xfrm>
-            <a:off x="868680" y="3566160"/>
-            <a:ext cx="10607040" cy="457200"/>
-          </a:xfrm>
-          <a:prstGeom prst="rect">
-            <a:avLst/>
-          </a:prstGeom>
-          <a:noFill/>
-        </p:spPr>
-        <p:txBody>
-          <a:bodyPr wrap="square" anchor="t" lIns="0" rIns="0" tIns="0" bIns="0">
-            <a:spAutoFit/>
-          </a:bodyPr>
-          <a:lstStyle/>
-          <a:p>
-            <a:pPr algn="l">
-              <a:lnSpc>
-                <a:spcPct val="100000"/>
-              </a:lnSpc>
-              <a:spcBef>
-                <a:spcPts val="0"/>
-              </a:spcBef>
-              <a:spcAft>
-                <a:spcPts val="600"/>
-              </a:spcAft>
-            </a:pPr>
-            <a:r>
-              <a:rPr sz="1600" b="1">
-                <a:solidFill>
-                  <a:srgbClr val="0F172A"/>
-                </a:solidFill>
-                <a:latin typeface="NanumGothic"/>
-                <a:ea typeface="NanumGothic"/>
-                <a:cs typeface="NanumGothic"/>
-              </a:rPr>
-              <a:t>멈춤 기준</a:t>
-            </a:r>
-          </a:p>
-        </p:txBody>
-      </p:sp>
-      <p:sp>
-        <p:nvSpPr>
-          <p:cNvPr id="17" name="TextBox 16"/>
-          <p:cNvSpPr txBox="1"/>
-          <p:nvPr/>
-        </p:nvSpPr>
-        <p:spPr>
-          <a:xfrm>
-            <a:off x="868680" y="3950208"/>
-            <a:ext cx="10607040" cy="457200"/>
-          </a:xfrm>
-          <a:prstGeom prst="rect">
-            <a:avLst/>
-          </a:prstGeom>
-          <a:noFill/>
-        </p:spPr>
-        <p:txBody>
-          <a:bodyPr wrap="square" anchor="t" lIns="0" rIns="0" tIns="0" bIns="0">
-            <a:spAutoFit/>
-          </a:bodyPr>
-          <a:lstStyle/>
-          <a:p>
-            <a:pPr algn="l">
-              <a:lnSpc>
-                <a:spcPct val="100000"/>
-              </a:lnSpc>
-              <a:spcBef>
-                <a:spcPts val="0"/>
-              </a:spcBef>
-              <a:spcAft>
-                <a:spcPts val="600"/>
-              </a:spcAft>
-            </a:pPr>
-            <a:r>
-              <a:rPr sz="1300" b="0">
-                <a:solidFill>
-                  <a:srgbClr val="64748B"/>
-                </a:solidFill>
-                <a:latin typeface="NanumGothic"/>
-                <a:ea typeface="NanumGothic"/>
-                <a:cs typeface="NanumGothic"/>
-              </a:rPr>
-              <a:t>언제 충분한가 (placeholder)</a:t>
-            </a:r>
-          </a:p>
-        </p:txBody>
-      </p:sp>
-    </p:spTree>
-  </p:cSld>
-  <p:clrMapOvr>
-    <a:masterClrMapping/>
-  </p:clrMapOvr>
-</p:sld>
-</file>
-
-<file path=ppt/slides/slide27.xml><?xml version="1.0" encoding="utf-8"?>
-<p:sld xmlns:a="http://schemas.openxmlformats.org/drawingml/2006/main" xmlns:p="http://schemas.openxmlformats.org/presentationml/2006/main" xmlns:r="http://schemas.openxmlformats.org/officeDocument/2006/relationships">
-  <p:cSld>
-    <p:spTree>
-      <p:nvGrpSpPr>
-        <p:cNvPr id="1" name=""/>
-        <p:cNvGrpSpPr/>
-        <p:nvPr/>
-      </p:nvGrpSpPr>
-      <p:grpSpPr/>
-      <p:sp>
-        <p:nvSpPr>
-          <p:cNvPr id="2" name="Rectangle 1"/>
-          <p:cNvSpPr/>
-          <p:nvPr/>
-        </p:nvSpPr>
-        <p:spPr>
-          <a:xfrm>
-            <a:off x="0" y="0"/>
-            <a:ext cx="12191695" cy="6858000"/>
-          </a:xfrm>
-          <a:prstGeom prst="rect">
-            <a:avLst/>
-          </a:prstGeom>
-          <a:solidFill>
-            <a:srgbClr val="FFFFFF"/>
-          </a:solidFill>
-          <a:ln>
-            <a:noFill/>
-          </a:ln>
-          <a:effectLst/>
-        </p:spPr>
-        <p:style>
-          <a:lnRef idx="1">
-            <a:schemeClr val="accent1"/>
-          </a:lnRef>
-          <a:fillRef idx="3">
-            <a:schemeClr val="accent1"/>
-          </a:fillRef>
-          <a:effectRef idx="2">
-            <a:schemeClr val="accent1"/>
-          </a:effectRef>
-          <a:fontRef idx="minor">
-            <a:schemeClr val="lt1"/>
-          </a:fontRef>
-        </p:style>
-        <p:txBody>
-          <a:bodyPr rtlCol="0" anchor="ctr"/>
-          <a:lstStyle/>
-          <a:p>
-            <a:pPr algn="ctr"/>
-          </a:p>
-        </p:txBody>
-      </p:sp>
-      <p:sp>
-        <p:nvSpPr>
-          <p:cNvPr id="3" name="Rectangle 2"/>
-          <p:cNvSpPr/>
-          <p:nvPr/>
-        </p:nvSpPr>
-        <p:spPr>
-          <a:xfrm>
-            <a:off x="0" y="0"/>
-            <a:ext cx="164592" cy="6858000"/>
-          </a:xfrm>
-          <a:prstGeom prst="rect">
-            <a:avLst/>
-          </a:prstGeom>
-          <a:solidFill>
-            <a:srgbClr val="10B981"/>
-          </a:solidFill>
-          <a:ln>
-            <a:noFill/>
-          </a:ln>
-          <a:effectLst/>
-        </p:spPr>
-        <p:style>
-          <a:lnRef idx="1">
-            <a:schemeClr val="accent1"/>
-          </a:lnRef>
-          <a:fillRef idx="3">
-            <a:schemeClr val="accent1"/>
-          </a:fillRef>
-          <a:effectRef idx="2">
-            <a:schemeClr val="accent1"/>
-          </a:effectRef>
-          <a:fontRef idx="minor">
-            <a:schemeClr val="lt1"/>
-          </a:fontRef>
-        </p:style>
-        <p:txBody>
-          <a:bodyPr rtlCol="0" anchor="ctr"/>
-          <a:lstStyle/>
-          <a:p>
-            <a:pPr algn="ctr"/>
-          </a:p>
-        </p:txBody>
-      </p:sp>
-      <p:sp>
-        <p:nvSpPr>
-          <p:cNvPr id="4" name="TextBox 3"/>
-          <p:cNvSpPr txBox="1"/>
-          <p:nvPr/>
-        </p:nvSpPr>
-        <p:spPr>
-          <a:xfrm>
-            <a:off x="502920" y="384048"/>
-            <a:ext cx="10058400" cy="320040"/>
-          </a:xfrm>
-          <a:prstGeom prst="rect">
-            <a:avLst/>
-          </a:prstGeom>
-          <a:noFill/>
-        </p:spPr>
-        <p:txBody>
-          <a:bodyPr wrap="square" anchor="t" lIns="0" rIns="0" tIns="0" bIns="0">
-            <a:spAutoFit/>
-          </a:bodyPr>
-          <a:lstStyle/>
-          <a:p>
-            <a:pPr algn="l">
-              <a:lnSpc>
-                <a:spcPct val="100000"/>
-              </a:lnSpc>
-              <a:spcBef>
-                <a:spcPts val="0"/>
-              </a:spcBef>
-              <a:spcAft>
-                <a:spcPts val="600"/>
-              </a:spcAft>
-            </a:pPr>
-            <a:r>
-              <a:rPr sz="1200" b="1">
-                <a:solidFill>
-                  <a:srgbClr val="10B981"/>
-                </a:solidFill>
-                <a:latin typeface="NanumGothic"/>
-                <a:ea typeface="NanumGothic"/>
-                <a:cs typeface="NanumGothic"/>
-              </a:rPr>
-              <a:t>LAB · 실습</a:t>
-            </a:r>
-          </a:p>
-        </p:txBody>
-      </p:sp>
-      <p:sp>
-        <p:nvSpPr>
-          <p:cNvPr id="5" name="TextBox 4"/>
-          <p:cNvSpPr txBox="1"/>
-          <p:nvPr/>
-        </p:nvSpPr>
-        <p:spPr>
-          <a:xfrm>
-            <a:off x="502920" y="713232"/>
-            <a:ext cx="11155680" cy="731520"/>
-          </a:xfrm>
-          <a:prstGeom prst="rect">
-            <a:avLst/>
-          </a:prstGeom>
-          <a:noFill/>
-        </p:spPr>
-        <p:txBody>
-          <a:bodyPr wrap="square" anchor="t" lIns="0" rIns="0" tIns="0" bIns="0">
-            <a:spAutoFit/>
-          </a:bodyPr>
-          <a:lstStyle/>
-          <a:p>
-            <a:pPr algn="l">
-              <a:lnSpc>
-                <a:spcPct val="100000"/>
-              </a:lnSpc>
-              <a:spcBef>
-                <a:spcPts val="0"/>
-              </a:spcBef>
-              <a:spcAft>
-                <a:spcPts val="600"/>
-              </a:spcAft>
-            </a:pPr>
-            <a:r>
-              <a:rPr sz="2700" b="1">
-                <a:solidFill>
-                  <a:srgbClr val="0F172A"/>
-                </a:solidFill>
-                <a:latin typeface="NanumSquare"/>
-                <a:ea typeface="NanumSquare"/>
-                <a:cs typeface="NanumSquare"/>
-              </a:rPr>
-              <a:t>팀 구성 &amp; 주제 설정</a:t>
-            </a:r>
-          </a:p>
-        </p:txBody>
-      </p:sp>
-      <p:sp>
-        <p:nvSpPr>
-          <p:cNvPr id="6" name="Rectangle 5"/>
-          <p:cNvSpPr/>
-          <p:nvPr/>
-        </p:nvSpPr>
-        <p:spPr>
-          <a:xfrm>
-            <a:off x="521207" y="1417320"/>
-            <a:ext cx="1005840" cy="45720"/>
-          </a:xfrm>
-          <a:prstGeom prst="rect">
-            <a:avLst/>
-          </a:prstGeom>
-          <a:solidFill>
-            <a:srgbClr val="10B981"/>
-          </a:solidFill>
-          <a:ln>
-            <a:noFill/>
-          </a:ln>
-          <a:effectLst/>
-        </p:spPr>
-        <p:style>
-          <a:lnRef idx="1">
-            <a:schemeClr val="accent1"/>
-          </a:lnRef>
-          <a:fillRef idx="3">
-            <a:schemeClr val="accent1"/>
-          </a:fillRef>
-          <a:effectRef idx="2">
-            <a:schemeClr val="accent1"/>
-          </a:effectRef>
-          <a:fontRef idx="minor">
-            <a:schemeClr val="lt1"/>
-          </a:fontRef>
-        </p:style>
-        <p:txBody>
-          <a:bodyPr rtlCol="0" anchor="ctr"/>
-          <a:lstStyle/>
-          <a:p>
-            <a:pPr algn="ctr"/>
-          </a:p>
-        </p:txBody>
-      </p:sp>
-      <p:sp>
-        <p:nvSpPr>
-          <p:cNvPr id="7" name="TextBox 6"/>
-          <p:cNvSpPr txBox="1"/>
-          <p:nvPr/>
-        </p:nvSpPr>
-        <p:spPr>
-          <a:xfrm>
-            <a:off x="502920" y="6419088"/>
-            <a:ext cx="7315200" cy="365760"/>
-          </a:xfrm>
-          <a:prstGeom prst="rect">
-            <a:avLst/>
-          </a:prstGeom>
-          <a:noFill/>
-        </p:spPr>
-        <p:txBody>
-          <a:bodyPr wrap="square" anchor="ctr" lIns="0" rIns="0" tIns="0" bIns="0">
-            <a:spAutoFit/>
-          </a:bodyPr>
-          <a:lstStyle/>
-          <a:p>
-            <a:pPr algn="l">
-              <a:lnSpc>
-                <a:spcPct val="100000"/>
-              </a:lnSpc>
-              <a:spcBef>
-                <a:spcPts val="0"/>
-              </a:spcBef>
-              <a:spcAft>
-                <a:spcPts val="600"/>
-              </a:spcAft>
-            </a:pPr>
-            <a:r>
-              <a:rPr sz="900" b="0">
-                <a:solidFill>
-                  <a:srgbClr val="64748B"/>
-                </a:solidFill>
-                <a:latin typeface="NanumGothic"/>
-                <a:ea typeface="NanumGothic"/>
-                <a:cs typeface="NanumGothic"/>
-              </a:rPr>
-              <a:t>AI 에이전트와 응용  ·  원광대학교 5일 교육</a:t>
-            </a:r>
-          </a:p>
-        </p:txBody>
-      </p:sp>
-      <p:sp>
-        <p:nvSpPr>
-          <p:cNvPr id="8" name="TextBox 7"/>
-          <p:cNvSpPr txBox="1"/>
-          <p:nvPr/>
-        </p:nvSpPr>
-        <p:spPr>
-          <a:xfrm>
-            <a:off x="10241280" y="6419088"/>
-            <a:ext cx="1463040" cy="365760"/>
-          </a:xfrm>
-          <a:prstGeom prst="rect">
-            <a:avLst/>
-          </a:prstGeom>
-          <a:noFill/>
-        </p:spPr>
-        <p:txBody>
-          <a:bodyPr wrap="square" anchor="ctr" lIns="0" rIns="0" tIns="0" bIns="0">
-            <a:spAutoFit/>
-          </a:bodyPr>
-          <a:lstStyle/>
-          <a:p>
-            <a:pPr algn="r">
-              <a:lnSpc>
-                <a:spcPct val="100000"/>
-              </a:lnSpc>
-              <a:spcBef>
-                <a:spcPts val="0"/>
-              </a:spcBef>
-              <a:spcAft>
-                <a:spcPts val="600"/>
-              </a:spcAft>
-            </a:pPr>
-            <a:r>
-              <a:rPr sz="900" b="1">
-                <a:solidFill>
-                  <a:srgbClr val="10B981"/>
-                </a:solidFill>
-                <a:latin typeface="NanumGothic"/>
-                <a:ea typeface="NanumGothic"/>
-                <a:cs typeface="NanumGothic"/>
-              </a:rPr>
-              <a:t>Day 3 · 수</a:t>
-            </a:r>
-          </a:p>
-        </p:txBody>
-      </p:sp>
-      <p:sp>
-        <p:nvSpPr>
-          <p:cNvPr id="9" name="Rounded Rectangle 8"/>
-          <p:cNvSpPr/>
-          <p:nvPr/>
-        </p:nvSpPr>
-        <p:spPr>
-          <a:xfrm>
-            <a:off x="502920" y="1783080"/>
-            <a:ext cx="7315200" cy="4160520"/>
-          </a:xfrm>
-          <a:prstGeom prst="roundRect">
-            <a:avLst/>
-          </a:prstGeom>
-          <a:solidFill>
-            <a:srgbClr val="F8FAFC"/>
-          </a:solidFill>
-          <a:ln w="12700">
-            <a:solidFill>
-              <a:srgbClr val="E2E8F0"/>
-            </a:solidFill>
-          </a:ln>
-          <a:effectLst/>
-        </p:spPr>
-        <p:style>
-          <a:lnRef idx="1">
-            <a:schemeClr val="accent1"/>
-          </a:lnRef>
-          <a:fillRef idx="3">
-            <a:schemeClr val="accent1"/>
-          </a:fillRef>
-          <a:effectRef idx="2">
-            <a:schemeClr val="accent1"/>
-          </a:effectRef>
-          <a:fontRef idx="minor">
-            <a:schemeClr val="lt1"/>
-          </a:fontRef>
-        </p:style>
-        <p:txBody>
-          <a:bodyPr rtlCol="0" anchor="ctr"/>
-          <a:lstStyle/>
-          <a:p>
-            <a:pPr algn="ctr"/>
-          </a:p>
-        </p:txBody>
-      </p:sp>
-      <p:sp>
-        <p:nvSpPr>
-          <p:cNvPr id="10" name="TextBox 9"/>
-          <p:cNvSpPr txBox="1"/>
-          <p:nvPr/>
-        </p:nvSpPr>
-        <p:spPr>
-          <a:xfrm>
-            <a:off x="777240" y="1965960"/>
-            <a:ext cx="6766560" cy="365760"/>
-          </a:xfrm>
-          <a:prstGeom prst="rect">
-            <a:avLst/>
-          </a:prstGeom>
-          <a:noFill/>
-        </p:spPr>
-        <p:txBody>
-          <a:bodyPr wrap="square" anchor="t" lIns="0" rIns="0" tIns="0" bIns="0">
-            <a:spAutoFit/>
-          </a:bodyPr>
-          <a:lstStyle/>
-          <a:p>
-            <a:pPr algn="l">
-              <a:lnSpc>
-                <a:spcPct val="100000"/>
-              </a:lnSpc>
-              <a:spcBef>
-                <a:spcPts val="0"/>
-              </a:spcBef>
-              <a:spcAft>
-                <a:spcPts val="600"/>
-              </a:spcAft>
-            </a:pPr>
-            <a:r>
-              <a:rPr sz="1300" b="1">
-                <a:solidFill>
-                  <a:srgbClr val="10B981"/>
-                </a:solidFill>
-                <a:latin typeface="NanumGothic"/>
-                <a:ea typeface="NanumGothic"/>
-                <a:cs typeface="NanumGothic"/>
-              </a:rPr>
-              <a:t>실습 단계 (placeholder)</a:t>
-            </a:r>
-          </a:p>
-        </p:txBody>
-      </p:sp>
-      <p:sp>
-        <p:nvSpPr>
-          <p:cNvPr id="11" name="Oval 10"/>
-          <p:cNvSpPr/>
-          <p:nvPr/>
-        </p:nvSpPr>
-        <p:spPr>
-          <a:xfrm>
-            <a:off x="777240" y="2468880"/>
-            <a:ext cx="411480" cy="411480"/>
-          </a:xfrm>
-          <a:prstGeom prst="ellipse">
-            <a:avLst/>
-          </a:prstGeom>
-          <a:solidFill>
-            <a:srgbClr val="10B981"/>
-          </a:solidFill>
-          <a:ln>
-            <a:noFill/>
-          </a:ln>
-          <a:effectLst/>
-        </p:spPr>
-        <p:style>
-          <a:lnRef idx="1">
-            <a:schemeClr val="accent1"/>
-          </a:lnRef>
-          <a:fillRef idx="3">
-            <a:schemeClr val="accent1"/>
-          </a:fillRef>
-          <a:effectRef idx="2">
-            <a:schemeClr val="accent1"/>
-          </a:effectRef>
-          <a:fontRef idx="minor">
-            <a:schemeClr val="lt1"/>
-          </a:fontRef>
-        </p:style>
-        <p:txBody>
-          <a:bodyPr rtlCol="0" anchor="ctr"/>
-          <a:lstStyle/>
-          <a:p>
-            <a:pPr algn="ctr"/>
-          </a:p>
-        </p:txBody>
-      </p:sp>
-      <p:sp>
-        <p:nvSpPr>
-          <p:cNvPr id="12" name="TextBox 11"/>
-          <p:cNvSpPr txBox="1"/>
-          <p:nvPr/>
-        </p:nvSpPr>
-        <p:spPr>
-          <a:xfrm>
-            <a:off x="777240" y="2468880"/>
-            <a:ext cx="411480" cy="411480"/>
-          </a:xfrm>
-          <a:prstGeom prst="rect">
-            <a:avLst/>
-          </a:prstGeom>
-          <a:noFill/>
-        </p:spPr>
-        <p:txBody>
-          <a:bodyPr wrap="square" anchor="ctr" lIns="0" rIns="0" tIns="0" bIns="0">
-            <a:spAutoFit/>
-          </a:bodyPr>
-          <a:lstStyle/>
-          <a:p>
-            <a:pPr algn="ctr">
-              <a:lnSpc>
-                <a:spcPct val="100000"/>
-              </a:lnSpc>
-              <a:spcBef>
-                <a:spcPts val="0"/>
-              </a:spcBef>
-              <a:spcAft>
-                <a:spcPts val="600"/>
-              </a:spcAft>
-            </a:pPr>
-            <a:r>
-              <a:rPr sz="1300" b="1">
-                <a:solidFill>
-                  <a:srgbClr val="FFFFFF"/>
-                </a:solidFill>
-                <a:latin typeface="NanumSquare"/>
-                <a:ea typeface="NanumSquare"/>
-                <a:cs typeface="NanumSquare"/>
-              </a:rPr>
-              <a:t>1</a:t>
-            </a:r>
-          </a:p>
-        </p:txBody>
-      </p:sp>
-      <p:sp>
-        <p:nvSpPr>
-          <p:cNvPr id="13" name="TextBox 12"/>
-          <p:cNvSpPr txBox="1"/>
-          <p:nvPr/>
-        </p:nvSpPr>
-        <p:spPr>
-          <a:xfrm>
-            <a:off x="1371600" y="2487168"/>
-            <a:ext cx="6309360" cy="457200"/>
-          </a:xfrm>
-          <a:prstGeom prst="rect">
-            <a:avLst/>
-          </a:prstGeom>
-          <a:noFill/>
-        </p:spPr>
-        <p:txBody>
-          <a:bodyPr wrap="square" anchor="ctr" lIns="0" rIns="0" tIns="0" bIns="0">
-            <a:spAutoFit/>
-          </a:bodyPr>
-          <a:lstStyle/>
-          <a:p>
-            <a:pPr algn="l">
-              <a:lnSpc>
-                <a:spcPct val="100000"/>
-              </a:lnSpc>
-              <a:spcBef>
-                <a:spcPts val="0"/>
-              </a:spcBef>
-              <a:spcAft>
-                <a:spcPts val="600"/>
-              </a:spcAft>
-            </a:pPr>
-            <a:r>
-              <a:rPr sz="1400" b="0">
-                <a:solidFill>
-                  <a:srgbClr val="0F172A"/>
-                </a:solidFill>
-                <a:latin typeface="NanumGothic"/>
-                <a:ea typeface="NanumGothic"/>
-                <a:cs typeface="NanumGothic"/>
-              </a:rPr>
-              <a:t>팀 편성·역할 분담</a:t>
-            </a:r>
-          </a:p>
-        </p:txBody>
-      </p:sp>
-      <p:sp>
-        <p:nvSpPr>
-          <p:cNvPr id="14" name="Oval 13"/>
-          <p:cNvSpPr/>
-          <p:nvPr/>
-        </p:nvSpPr>
-        <p:spPr>
-          <a:xfrm>
-            <a:off x="777240" y="3035808"/>
-            <a:ext cx="411480" cy="411480"/>
-          </a:xfrm>
-          <a:prstGeom prst="ellipse">
-            <a:avLst/>
-          </a:prstGeom>
-          <a:solidFill>
-            <a:srgbClr val="10B981"/>
-          </a:solidFill>
-          <a:ln>
-            <a:noFill/>
-          </a:ln>
-          <a:effectLst/>
-        </p:spPr>
-        <p:style>
-          <a:lnRef idx="1">
-            <a:schemeClr val="accent1"/>
-          </a:lnRef>
-          <a:fillRef idx="3">
-            <a:schemeClr val="accent1"/>
-          </a:fillRef>
-          <a:effectRef idx="2">
-            <a:schemeClr val="accent1"/>
-          </a:effectRef>
-          <a:fontRef idx="minor">
-            <a:schemeClr val="lt1"/>
-          </a:fontRef>
-        </p:style>
-        <p:txBody>
-          <a:bodyPr rtlCol="0" anchor="ctr"/>
-          <a:lstStyle/>
-          <a:p>
-            <a:pPr algn="ctr"/>
-          </a:p>
-        </p:txBody>
-      </p:sp>
-      <p:sp>
-        <p:nvSpPr>
-          <p:cNvPr id="15" name="TextBox 14"/>
-          <p:cNvSpPr txBox="1"/>
-          <p:nvPr/>
-        </p:nvSpPr>
-        <p:spPr>
-          <a:xfrm>
-            <a:off x="777240" y="3035808"/>
-            <a:ext cx="411480" cy="411480"/>
-          </a:xfrm>
-          <a:prstGeom prst="rect">
-            <a:avLst/>
-          </a:prstGeom>
-          <a:noFill/>
-        </p:spPr>
-        <p:txBody>
-          <a:bodyPr wrap="square" anchor="ctr" lIns="0" rIns="0" tIns="0" bIns="0">
-            <a:spAutoFit/>
-          </a:bodyPr>
-          <a:lstStyle/>
-          <a:p>
-            <a:pPr algn="ctr">
-              <a:lnSpc>
-                <a:spcPct val="100000"/>
-              </a:lnSpc>
-              <a:spcBef>
-                <a:spcPts val="0"/>
-              </a:spcBef>
-              <a:spcAft>
-                <a:spcPts val="600"/>
-              </a:spcAft>
-            </a:pPr>
-            <a:r>
-              <a:rPr sz="1300" b="1">
-                <a:solidFill>
-                  <a:srgbClr val="FFFFFF"/>
-                </a:solidFill>
-                <a:latin typeface="NanumSquare"/>
-                <a:ea typeface="NanumSquare"/>
-                <a:cs typeface="NanumSquare"/>
-              </a:rPr>
-              <a:t>2</a:t>
-            </a:r>
-          </a:p>
-        </p:txBody>
-      </p:sp>
-      <p:sp>
-        <p:nvSpPr>
-          <p:cNvPr id="16" name="TextBox 15"/>
-          <p:cNvSpPr txBox="1"/>
-          <p:nvPr/>
-        </p:nvSpPr>
-        <p:spPr>
-          <a:xfrm>
-            <a:off x="1371600" y="3054096"/>
-            <a:ext cx="6309360" cy="457200"/>
-          </a:xfrm>
-          <a:prstGeom prst="rect">
-            <a:avLst/>
-          </a:prstGeom>
-          <a:noFill/>
-        </p:spPr>
-        <p:txBody>
-          <a:bodyPr wrap="square" anchor="ctr" lIns="0" rIns="0" tIns="0" bIns="0">
-            <a:spAutoFit/>
-          </a:bodyPr>
-          <a:lstStyle/>
-          <a:p>
-            <a:pPr algn="l">
-              <a:lnSpc>
-                <a:spcPct val="100000"/>
-              </a:lnSpc>
-              <a:spcBef>
-                <a:spcPts val="0"/>
-              </a:spcBef>
-              <a:spcAft>
-                <a:spcPts val="600"/>
-              </a:spcAft>
-            </a:pPr>
-            <a:r>
-              <a:rPr sz="1400" b="0">
-                <a:solidFill>
-                  <a:srgbClr val="0F172A"/>
-                </a:solidFill>
-                <a:latin typeface="NanumGothic"/>
-                <a:ea typeface="NanumGothic"/>
-                <a:cs typeface="NanumGothic"/>
-              </a:rPr>
-              <a:t>리서치 주제 후보 brainstorming</a:t>
-            </a:r>
-          </a:p>
-        </p:txBody>
-      </p:sp>
-      <p:sp>
-        <p:nvSpPr>
-          <p:cNvPr id="17" name="Oval 16"/>
-          <p:cNvSpPr/>
-          <p:nvPr/>
-        </p:nvSpPr>
-        <p:spPr>
-          <a:xfrm>
-            <a:off x="777240" y="3602736"/>
-            <a:ext cx="411480" cy="411480"/>
-          </a:xfrm>
-          <a:prstGeom prst="ellipse">
-            <a:avLst/>
-          </a:prstGeom>
-          <a:solidFill>
-            <a:srgbClr val="10B981"/>
-          </a:solidFill>
-          <a:ln>
-            <a:noFill/>
-          </a:ln>
-          <a:effectLst/>
-        </p:spPr>
-        <p:style>
-          <a:lnRef idx="1">
-            <a:schemeClr val="accent1"/>
-          </a:lnRef>
-          <a:fillRef idx="3">
-            <a:schemeClr val="accent1"/>
-          </a:fillRef>
-          <a:effectRef idx="2">
-            <a:schemeClr val="accent1"/>
-          </a:effectRef>
-          <a:fontRef idx="minor">
-            <a:schemeClr val="lt1"/>
-          </a:fontRef>
-        </p:style>
-        <p:txBody>
-          <a:bodyPr rtlCol="0" anchor="ctr"/>
-          <a:lstStyle/>
-          <a:p>
-            <a:pPr algn="ctr"/>
-          </a:p>
-        </p:txBody>
-      </p:sp>
-      <p:sp>
-        <p:nvSpPr>
-          <p:cNvPr id="18" name="TextBox 17"/>
-          <p:cNvSpPr txBox="1"/>
-          <p:nvPr/>
-        </p:nvSpPr>
-        <p:spPr>
-          <a:xfrm>
-            <a:off x="777240" y="3602736"/>
-            <a:ext cx="411480" cy="411480"/>
-          </a:xfrm>
-          <a:prstGeom prst="rect">
-            <a:avLst/>
-          </a:prstGeom>
-          <a:noFill/>
-        </p:spPr>
-        <p:txBody>
-          <a:bodyPr wrap="square" anchor="ctr" lIns="0" rIns="0" tIns="0" bIns="0">
-            <a:spAutoFit/>
-          </a:bodyPr>
-          <a:lstStyle/>
-          <a:p>
-            <a:pPr algn="ctr">
-              <a:lnSpc>
-                <a:spcPct val="100000"/>
-              </a:lnSpc>
-              <a:spcBef>
-                <a:spcPts val="0"/>
-              </a:spcBef>
-              <a:spcAft>
-                <a:spcPts val="600"/>
-              </a:spcAft>
-            </a:pPr>
-            <a:r>
-              <a:rPr sz="1300" b="1">
-                <a:solidFill>
-                  <a:srgbClr val="FFFFFF"/>
-                </a:solidFill>
-                <a:latin typeface="NanumSquare"/>
-                <a:ea typeface="NanumSquare"/>
-                <a:cs typeface="NanumSquare"/>
-              </a:rPr>
-              <a:t>3</a:t>
-            </a:r>
-          </a:p>
-        </p:txBody>
-      </p:sp>
-      <p:sp>
-        <p:nvSpPr>
-          <p:cNvPr id="19" name="TextBox 18"/>
-          <p:cNvSpPr txBox="1"/>
-          <p:nvPr/>
-        </p:nvSpPr>
-        <p:spPr>
-          <a:xfrm>
-            <a:off x="1371600" y="3621024"/>
-            <a:ext cx="6309360" cy="457200"/>
-          </a:xfrm>
-          <a:prstGeom prst="rect">
-            <a:avLst/>
-          </a:prstGeom>
-          <a:noFill/>
-        </p:spPr>
-        <p:txBody>
-          <a:bodyPr wrap="square" anchor="ctr" lIns="0" rIns="0" tIns="0" bIns="0">
-            <a:spAutoFit/>
-          </a:bodyPr>
-          <a:lstStyle/>
-          <a:p>
-            <a:pPr algn="l">
-              <a:lnSpc>
-                <a:spcPct val="100000"/>
-              </a:lnSpc>
-              <a:spcBef>
-                <a:spcPts val="0"/>
-              </a:spcBef>
-              <a:spcAft>
-                <a:spcPts val="600"/>
-              </a:spcAft>
-            </a:pPr>
-            <a:r>
-              <a:rPr sz="1400" b="0">
-                <a:solidFill>
-                  <a:srgbClr val="0F172A"/>
-                </a:solidFill>
-                <a:latin typeface="NanumGothic"/>
-                <a:ea typeface="NanumGothic"/>
-                <a:cs typeface="NanumGothic"/>
-              </a:rPr>
-              <a:t>주제 1개 확정</a:t>
-            </a:r>
-          </a:p>
-        </p:txBody>
-      </p:sp>
-      <p:sp>
-        <p:nvSpPr>
-          <p:cNvPr id="20" name="Oval 19"/>
-          <p:cNvSpPr/>
-          <p:nvPr/>
-        </p:nvSpPr>
-        <p:spPr>
-          <a:xfrm>
-            <a:off x="777240" y="4169664"/>
-            <a:ext cx="411480" cy="411480"/>
-          </a:xfrm>
-          <a:prstGeom prst="ellipse">
-            <a:avLst/>
-          </a:prstGeom>
-          <a:solidFill>
-            <a:srgbClr val="10B981"/>
-          </a:solidFill>
-          <a:ln>
-            <a:noFill/>
-          </a:ln>
-          <a:effectLst/>
-        </p:spPr>
-        <p:style>
-          <a:lnRef idx="1">
-            <a:schemeClr val="accent1"/>
-          </a:lnRef>
-          <a:fillRef idx="3">
-            <a:schemeClr val="accent1"/>
-          </a:fillRef>
-          <a:effectRef idx="2">
-            <a:schemeClr val="accent1"/>
-          </a:effectRef>
-          <a:fontRef idx="minor">
-            <a:schemeClr val="lt1"/>
-          </a:fontRef>
-        </p:style>
-        <p:txBody>
-          <a:bodyPr rtlCol="0" anchor="ctr"/>
-          <a:lstStyle/>
-          <a:p>
-            <a:pPr algn="ctr"/>
-          </a:p>
-        </p:txBody>
-      </p:sp>
-      <p:sp>
-        <p:nvSpPr>
-          <p:cNvPr id="21" name="TextBox 20"/>
-          <p:cNvSpPr txBox="1"/>
-          <p:nvPr/>
-        </p:nvSpPr>
-        <p:spPr>
-          <a:xfrm>
-            <a:off x="777240" y="4169664"/>
-            <a:ext cx="411480" cy="411480"/>
-          </a:xfrm>
-          <a:prstGeom prst="rect">
-            <a:avLst/>
-          </a:prstGeom>
-          <a:noFill/>
-        </p:spPr>
-        <p:txBody>
-          <a:bodyPr wrap="square" anchor="ctr" lIns="0" rIns="0" tIns="0" bIns="0">
-            <a:spAutoFit/>
-          </a:bodyPr>
-          <a:lstStyle/>
-          <a:p>
-            <a:pPr algn="ctr">
-              <a:lnSpc>
-                <a:spcPct val="100000"/>
-              </a:lnSpc>
-              <a:spcBef>
-                <a:spcPts val="0"/>
-              </a:spcBef>
-              <a:spcAft>
-                <a:spcPts val="600"/>
-              </a:spcAft>
-            </a:pPr>
-            <a:r>
-              <a:rPr sz="1300" b="1">
-                <a:solidFill>
-                  <a:srgbClr val="FFFFFF"/>
-                </a:solidFill>
-                <a:latin typeface="NanumSquare"/>
-                <a:ea typeface="NanumSquare"/>
-                <a:cs typeface="NanumSquare"/>
-              </a:rPr>
-              <a:t>4</a:t>
-            </a:r>
-          </a:p>
-        </p:txBody>
-      </p:sp>
-      <p:sp>
-        <p:nvSpPr>
-          <p:cNvPr id="22" name="TextBox 21"/>
-          <p:cNvSpPr txBox="1"/>
-          <p:nvPr/>
-        </p:nvSpPr>
-        <p:spPr>
-          <a:xfrm>
-            <a:off x="1371600" y="4187952"/>
-            <a:ext cx="6309360" cy="457200"/>
-          </a:xfrm>
-          <a:prstGeom prst="rect">
-            <a:avLst/>
-          </a:prstGeom>
-          <a:noFill/>
-        </p:spPr>
-        <p:txBody>
-          <a:bodyPr wrap="square" anchor="ctr" lIns="0" rIns="0" tIns="0" bIns="0">
-            <a:spAutoFit/>
-          </a:bodyPr>
-          <a:lstStyle/>
-          <a:p>
-            <a:pPr algn="l">
-              <a:lnSpc>
-                <a:spcPct val="100000"/>
-              </a:lnSpc>
-              <a:spcBef>
-                <a:spcPts val="0"/>
-              </a:spcBef>
-              <a:spcAft>
-                <a:spcPts val="600"/>
-              </a:spcAft>
-            </a:pPr>
-            <a:r>
-              <a:rPr sz="1400" b="0">
-                <a:solidFill>
-                  <a:srgbClr val="0F172A"/>
-                </a:solidFill>
-                <a:latin typeface="NanumGothic"/>
-                <a:ea typeface="NanumGothic"/>
-                <a:cs typeface="NanumGothic"/>
-              </a:rPr>
-              <a:t>핵심 질문·범위 기획</a:t>
-            </a:r>
-          </a:p>
-        </p:txBody>
-      </p:sp>
-      <p:sp>
-        <p:nvSpPr>
-          <p:cNvPr id="23" name="Rounded Rectangle 22"/>
-          <p:cNvSpPr/>
-          <p:nvPr/>
-        </p:nvSpPr>
-        <p:spPr>
-          <a:xfrm>
-            <a:off x="8001000" y="1783080"/>
-            <a:ext cx="3657600" cy="4160520"/>
-          </a:xfrm>
-          <a:prstGeom prst="roundRect">
-            <a:avLst/>
-          </a:prstGeom>
-          <a:solidFill>
-            <a:srgbClr val="12203C"/>
-          </a:solidFill>
-          <a:ln>
-            <a:noFill/>
-          </a:ln>
-          <a:effectLst/>
-        </p:spPr>
-        <p:style>
-          <a:lnRef idx="1">
-            <a:schemeClr val="accent1"/>
-          </a:lnRef>
-          <a:fillRef idx="3">
-            <a:schemeClr val="accent1"/>
-          </a:fillRef>
-          <a:effectRef idx="2">
-            <a:schemeClr val="accent1"/>
-          </a:effectRef>
-          <a:fontRef idx="minor">
-            <a:schemeClr val="lt1"/>
-          </a:fontRef>
-        </p:style>
-        <p:txBody>
-          <a:bodyPr rtlCol="0" anchor="ctr"/>
-          <a:lstStyle/>
-          <a:p>
-            <a:pPr algn="ctr"/>
-          </a:p>
-        </p:txBody>
-      </p:sp>
-      <p:sp>
-        <p:nvSpPr>
-          <p:cNvPr id="24" name="TextBox 23"/>
-          <p:cNvSpPr txBox="1"/>
-          <p:nvPr/>
-        </p:nvSpPr>
-        <p:spPr>
-          <a:xfrm>
-            <a:off x="8275320" y="2011680"/>
-            <a:ext cx="3108960" cy="457200"/>
-          </a:xfrm>
-          <a:prstGeom prst="rect">
-            <a:avLst/>
-          </a:prstGeom>
-          <a:noFill/>
-        </p:spPr>
-        <p:txBody>
-          <a:bodyPr wrap="square" anchor="t" lIns="0" rIns="0" tIns="0" bIns="0">
-            <a:spAutoFit/>
-          </a:bodyPr>
-          <a:lstStyle/>
-          <a:p>
-            <a:pPr algn="l">
-              <a:lnSpc>
-                <a:spcPct val="100000"/>
-              </a:lnSpc>
-              <a:spcBef>
-                <a:spcPts val="0"/>
-              </a:spcBef>
-              <a:spcAft>
-                <a:spcPts val="600"/>
-              </a:spcAft>
-            </a:pPr>
-            <a:r>
-              <a:rPr sz="1500" b="1">
-                <a:solidFill>
-                  <a:srgbClr val="10B981"/>
-                </a:solidFill>
-                <a:latin typeface="NanumSquare"/>
-                <a:ea typeface="NanumSquare"/>
-                <a:cs typeface="NanumSquare"/>
-              </a:rPr>
-              <a:t>산출물</a:t>
-            </a:r>
-          </a:p>
-        </p:txBody>
-      </p:sp>
-      <p:sp>
-        <p:nvSpPr>
-          <p:cNvPr id="25" name="TextBox 24"/>
-          <p:cNvSpPr txBox="1"/>
-          <p:nvPr/>
-        </p:nvSpPr>
-        <p:spPr>
-          <a:xfrm>
-            <a:off x="8275320" y="2560320"/>
-            <a:ext cx="3154680" cy="3108960"/>
-          </a:xfrm>
-          <a:prstGeom prst="rect">
-            <a:avLst/>
-          </a:prstGeom>
-          <a:noFill/>
-        </p:spPr>
-        <p:txBody>
-          <a:bodyPr wrap="square" anchor="t" lIns="0" rIns="0" tIns="0" bIns="0">
-            <a:spAutoFit/>
-          </a:bodyPr>
-          <a:lstStyle/>
-          <a:p>
-            <a:pPr algn="l">
-              <a:lnSpc>
-                <a:spcPct val="120000"/>
-              </a:lnSpc>
-              <a:spcBef>
-                <a:spcPts val="0"/>
-              </a:spcBef>
-              <a:spcAft>
-                <a:spcPts val="600"/>
-              </a:spcAft>
-            </a:pPr>
-            <a:r>
-              <a:rPr sz="1400" b="0">
-                <a:solidFill>
-                  <a:srgbClr val="FFFFFF"/>
-                </a:solidFill>
-                <a:latin typeface="NanumGothic"/>
-                <a:ea typeface="NanumGothic"/>
-                <a:cs typeface="NanumGothic"/>
-              </a:rPr>
-              <a:t>팀별 리서치 기획서
-(주제 · 핵심질문 · 산출물)
-예: 신약/바이오 리서치 등 (placeholder)</a:t>
-            </a:r>
-          </a:p>
-        </p:txBody>
-      </p:sp>
-    </p:spTree>
-  </p:cSld>
-  <p:clrMapOvr>
-    <a:masterClrMapping/>
-  </p:clrMapOvr>
-</p:sld>
-</file>
-
-<file path=ppt/slides/slide28.xml><?xml version="1.0" encoding="utf-8"?>
-<p:sld xmlns:a="http://schemas.openxmlformats.org/drawingml/2006/main" xmlns:p="http://schemas.openxmlformats.org/presentationml/2006/main" xmlns:r="http://schemas.openxmlformats.org/officeDocument/2006/relationships">
-  <p:cSld>
-    <p:spTree>
-      <p:nvGrpSpPr>
-        <p:cNvPr id="1" name=""/>
-        <p:cNvGrpSpPr/>
-        <p:nvPr/>
-      </p:nvGrpSpPr>
-      <p:grpSpPr/>
-      <p:sp>
-        <p:nvSpPr>
-          <p:cNvPr id="2" name="Rectangle 1"/>
-          <p:cNvSpPr/>
-          <p:nvPr/>
-        </p:nvSpPr>
-        <p:spPr>
-          <a:xfrm>
-            <a:off x="0" y="0"/>
-            <a:ext cx="12191695" cy="6858000"/>
-          </a:xfrm>
-          <a:prstGeom prst="rect">
-            <a:avLst/>
-          </a:prstGeom>
-          <a:solidFill>
-            <a:srgbClr val="FFFFFF"/>
-          </a:solidFill>
-          <a:ln>
-            <a:noFill/>
-          </a:ln>
-          <a:effectLst/>
-        </p:spPr>
-        <p:style>
-          <a:lnRef idx="1">
-            <a:schemeClr val="accent1"/>
-          </a:lnRef>
-          <a:fillRef idx="3">
-            <a:schemeClr val="accent1"/>
-          </a:fillRef>
-          <a:effectRef idx="2">
-            <a:schemeClr val="accent1"/>
-          </a:effectRef>
-          <a:fontRef idx="minor">
-            <a:schemeClr val="lt1"/>
-          </a:fontRef>
-        </p:style>
-        <p:txBody>
-          <a:bodyPr rtlCol="0" anchor="ctr"/>
-          <a:lstStyle/>
-          <a:p>
-            <a:pPr algn="ctr"/>
-          </a:p>
-        </p:txBody>
-      </p:sp>
-      <p:sp>
-        <p:nvSpPr>
-          <p:cNvPr id="3" name="Rectangle 2"/>
-          <p:cNvSpPr/>
-          <p:nvPr/>
-        </p:nvSpPr>
-        <p:spPr>
-          <a:xfrm>
-            <a:off x="0" y="0"/>
-            <a:ext cx="164592" cy="6858000"/>
-          </a:xfrm>
-          <a:prstGeom prst="rect">
-            <a:avLst/>
-          </a:prstGeom>
-          <a:solidFill>
-            <a:srgbClr val="10B981"/>
-          </a:solidFill>
-          <a:ln>
-            <a:noFill/>
-          </a:ln>
-          <a:effectLst/>
-        </p:spPr>
-        <p:style>
-          <a:lnRef idx="1">
-            <a:schemeClr val="accent1"/>
-          </a:lnRef>
-          <a:fillRef idx="3">
-            <a:schemeClr val="accent1"/>
-          </a:fillRef>
-          <a:effectRef idx="2">
-            <a:schemeClr val="accent1"/>
-          </a:effectRef>
-          <a:fontRef idx="minor">
-            <a:schemeClr val="lt1"/>
-          </a:fontRef>
-        </p:style>
-        <p:txBody>
-          <a:bodyPr rtlCol="0" anchor="ctr"/>
-          <a:lstStyle/>
-          <a:p>
-            <a:pPr algn="ctr"/>
-          </a:p>
-        </p:txBody>
-      </p:sp>
-      <p:sp>
-        <p:nvSpPr>
-          <p:cNvPr id="4" name="TextBox 3"/>
-          <p:cNvSpPr txBox="1"/>
-          <p:nvPr/>
-        </p:nvSpPr>
-        <p:spPr>
-          <a:xfrm>
-            <a:off x="502920" y="384048"/>
-            <a:ext cx="10058400" cy="320040"/>
-          </a:xfrm>
-          <a:prstGeom prst="rect">
-            <a:avLst/>
-          </a:prstGeom>
-          <a:noFill/>
-        </p:spPr>
-        <p:txBody>
-          <a:bodyPr wrap="square" anchor="t" lIns="0" rIns="0" tIns="0" bIns="0">
-            <a:spAutoFit/>
-          </a:bodyPr>
-          <a:lstStyle/>
-          <a:p>
-            <a:pPr algn="l">
-              <a:lnSpc>
-                <a:spcPct val="100000"/>
-              </a:lnSpc>
-              <a:spcBef>
-                <a:spcPts val="0"/>
-              </a:spcBef>
-              <a:spcAft>
-                <a:spcPts val="600"/>
-              </a:spcAft>
-            </a:pPr>
-            <a:r>
-              <a:rPr sz="1200" b="1">
-                <a:solidFill>
-                  <a:srgbClr val="10B981"/>
-                </a:solidFill>
-                <a:latin typeface="NanumGothic"/>
-                <a:ea typeface="NanumGothic"/>
-                <a:cs typeface="NanumGothic"/>
-              </a:rPr>
-              <a:t>SUMMARY</a:t>
-            </a:r>
-          </a:p>
-        </p:txBody>
-      </p:sp>
-      <p:sp>
-        <p:nvSpPr>
-          <p:cNvPr id="5" name="TextBox 4"/>
-          <p:cNvSpPr txBox="1"/>
-          <p:nvPr/>
-        </p:nvSpPr>
-        <p:spPr>
-          <a:xfrm>
-            <a:off x="502920" y="713232"/>
-            <a:ext cx="11155680" cy="731520"/>
-          </a:xfrm>
-          <a:prstGeom prst="rect">
-            <a:avLst/>
-          </a:prstGeom>
-          <a:noFill/>
-        </p:spPr>
-        <p:txBody>
-          <a:bodyPr wrap="square" anchor="t" lIns="0" rIns="0" tIns="0" bIns="0">
-            <a:spAutoFit/>
-          </a:bodyPr>
-          <a:lstStyle/>
-          <a:p>
-            <a:pPr algn="l">
-              <a:lnSpc>
-                <a:spcPct val="100000"/>
-              </a:lnSpc>
-              <a:spcBef>
-                <a:spcPts val="0"/>
-              </a:spcBef>
-              <a:spcAft>
-                <a:spcPts val="600"/>
-              </a:spcAft>
-            </a:pPr>
-            <a:r>
-              <a:rPr sz="2700" b="1">
-                <a:solidFill>
-                  <a:srgbClr val="0F172A"/>
-                </a:solidFill>
-                <a:latin typeface="NanumSquare"/>
-                <a:ea typeface="NanumSquare"/>
-                <a:cs typeface="NanumSquare"/>
-              </a:rPr>
-              <a:t>핵심 정리 및 다음 과정</a:t>
-            </a:r>
-          </a:p>
-        </p:txBody>
-      </p:sp>
-      <p:sp>
-        <p:nvSpPr>
-          <p:cNvPr id="6" name="Rectangle 5"/>
-          <p:cNvSpPr/>
-          <p:nvPr/>
-        </p:nvSpPr>
-        <p:spPr>
-          <a:xfrm>
-            <a:off x="521207" y="1417320"/>
-            <a:ext cx="1005840" cy="45720"/>
-          </a:xfrm>
-          <a:prstGeom prst="rect">
-            <a:avLst/>
-          </a:prstGeom>
-          <a:solidFill>
-            <a:srgbClr val="10B981"/>
-          </a:solidFill>
-          <a:ln>
-            <a:noFill/>
-          </a:ln>
-          <a:effectLst/>
-        </p:spPr>
-        <p:style>
-          <a:lnRef idx="1">
-            <a:schemeClr val="accent1"/>
-          </a:lnRef>
-          <a:fillRef idx="3">
-            <a:schemeClr val="accent1"/>
-          </a:fillRef>
-          <a:effectRef idx="2">
-            <a:schemeClr val="accent1"/>
-          </a:effectRef>
-          <a:fontRef idx="minor">
-            <a:schemeClr val="lt1"/>
-          </a:fontRef>
-        </p:style>
-        <p:txBody>
-          <a:bodyPr rtlCol="0" anchor="ctr"/>
-          <a:lstStyle/>
-          <a:p>
-            <a:pPr algn="ctr"/>
-          </a:p>
-        </p:txBody>
-      </p:sp>
-      <p:sp>
-        <p:nvSpPr>
-          <p:cNvPr id="7" name="TextBox 6"/>
-          <p:cNvSpPr txBox="1"/>
-          <p:nvPr/>
-        </p:nvSpPr>
-        <p:spPr>
-          <a:xfrm>
-            <a:off x="502920" y="6419088"/>
-            <a:ext cx="7315200" cy="365760"/>
-          </a:xfrm>
-          <a:prstGeom prst="rect">
-            <a:avLst/>
-          </a:prstGeom>
-          <a:noFill/>
-        </p:spPr>
-        <p:txBody>
-          <a:bodyPr wrap="square" anchor="ctr" lIns="0" rIns="0" tIns="0" bIns="0">
-            <a:spAutoFit/>
-          </a:bodyPr>
-          <a:lstStyle/>
-          <a:p>
-            <a:pPr algn="l">
-              <a:lnSpc>
-                <a:spcPct val="100000"/>
-              </a:lnSpc>
-              <a:spcBef>
-                <a:spcPts val="0"/>
-              </a:spcBef>
-              <a:spcAft>
-                <a:spcPts val="600"/>
-              </a:spcAft>
-            </a:pPr>
-            <a:r>
-              <a:rPr sz="900" b="0">
-                <a:solidFill>
-                  <a:srgbClr val="64748B"/>
-                </a:solidFill>
-                <a:latin typeface="NanumGothic"/>
-                <a:ea typeface="NanumGothic"/>
-                <a:cs typeface="NanumGothic"/>
-              </a:rPr>
-              <a:t>AI 에이전트와 응용  ·  원광대학교 5일 교육</a:t>
-            </a:r>
-          </a:p>
-        </p:txBody>
-      </p:sp>
-      <p:sp>
-        <p:nvSpPr>
-          <p:cNvPr id="8" name="TextBox 7"/>
-          <p:cNvSpPr txBox="1"/>
-          <p:nvPr/>
-        </p:nvSpPr>
-        <p:spPr>
-          <a:xfrm>
-            <a:off x="10241280" y="6419088"/>
-            <a:ext cx="1463040" cy="365760"/>
-          </a:xfrm>
-          <a:prstGeom prst="rect">
-            <a:avLst/>
-          </a:prstGeom>
-          <a:noFill/>
-        </p:spPr>
-        <p:txBody>
-          <a:bodyPr wrap="square" anchor="ctr" lIns="0" rIns="0" tIns="0" bIns="0">
-            <a:spAutoFit/>
-          </a:bodyPr>
-          <a:lstStyle/>
-          <a:p>
-            <a:pPr algn="r">
-              <a:lnSpc>
-                <a:spcPct val="100000"/>
-              </a:lnSpc>
-              <a:spcBef>
-                <a:spcPts val="0"/>
-              </a:spcBef>
-              <a:spcAft>
-                <a:spcPts val="600"/>
-              </a:spcAft>
-            </a:pPr>
-            <a:r>
-              <a:rPr sz="900" b="1">
-                <a:solidFill>
-                  <a:srgbClr val="10B981"/>
-                </a:solidFill>
-                <a:latin typeface="NanumGothic"/>
-                <a:ea typeface="NanumGothic"/>
-                <a:cs typeface="NanumGothic"/>
-              </a:rPr>
-              <a:t>Day 3 · 수</a:t>
-            </a:r>
-          </a:p>
-        </p:txBody>
-      </p:sp>
-      <p:sp>
-        <p:nvSpPr>
-          <p:cNvPr id="9" name="TextBox 8"/>
-          <p:cNvSpPr txBox="1"/>
-          <p:nvPr/>
-        </p:nvSpPr>
-        <p:spPr>
-          <a:xfrm>
-            <a:off x="548640" y="1783080"/>
-            <a:ext cx="6400800" cy="365760"/>
-          </a:xfrm>
-          <a:prstGeom prst="rect">
-            <a:avLst/>
-          </a:prstGeom>
-          <a:noFill/>
-        </p:spPr>
-        <p:txBody>
-          <a:bodyPr wrap="square" anchor="t" lIns="0" rIns="0" tIns="0" bIns="0">
-            <a:spAutoFit/>
-          </a:bodyPr>
-          <a:lstStyle/>
-          <a:p>
-            <a:pPr algn="l">
-              <a:lnSpc>
-                <a:spcPct val="100000"/>
-              </a:lnSpc>
-              <a:spcBef>
-                <a:spcPts val="0"/>
-              </a:spcBef>
-              <a:spcAft>
-                <a:spcPts val="600"/>
-              </a:spcAft>
-            </a:pPr>
-            <a:r>
-              <a:rPr sz="1500" b="1">
-                <a:solidFill>
-                  <a:srgbClr val="10B981"/>
-                </a:solidFill>
-                <a:latin typeface="NanumSquare"/>
-                <a:ea typeface="NanumSquare"/>
-                <a:cs typeface="NanumSquare"/>
-              </a:rPr>
-              <a:t>핵심 정리</a:t>
-            </a:r>
-          </a:p>
-        </p:txBody>
-      </p:sp>
-      <p:sp>
-        <p:nvSpPr>
-          <p:cNvPr id="10" name="Oval 9"/>
-          <p:cNvSpPr/>
-          <p:nvPr/>
-        </p:nvSpPr>
-        <p:spPr>
-          <a:xfrm>
-            <a:off x="566928" y="2359152"/>
-            <a:ext cx="146304" cy="146304"/>
-          </a:xfrm>
-          <a:prstGeom prst="ellipse">
-            <a:avLst/>
-          </a:prstGeom>
-          <a:solidFill>
-            <a:srgbClr val="10B981"/>
-          </a:solidFill>
-          <a:ln>
-            <a:noFill/>
-          </a:ln>
-          <a:effectLst/>
-        </p:spPr>
-        <p:style>
-          <a:lnRef idx="1">
-            <a:schemeClr val="accent1"/>
-          </a:lnRef>
-          <a:fillRef idx="3">
-            <a:schemeClr val="accent1"/>
-          </a:fillRef>
-          <a:effectRef idx="2">
-            <a:schemeClr val="accent1"/>
-          </a:effectRef>
-          <a:fontRef idx="minor">
-            <a:schemeClr val="lt1"/>
-          </a:fontRef>
-        </p:style>
-        <p:txBody>
-          <a:bodyPr rtlCol="0" anchor="ctr"/>
-          <a:lstStyle/>
-          <a:p>
-            <a:pPr algn="ctr"/>
-          </a:p>
-        </p:txBody>
-      </p:sp>
-      <p:sp>
-        <p:nvSpPr>
-          <p:cNvPr id="11" name="TextBox 10"/>
-          <p:cNvSpPr txBox="1"/>
-          <p:nvPr/>
-        </p:nvSpPr>
-        <p:spPr>
-          <a:xfrm>
-            <a:off x="868680" y="2286000"/>
-            <a:ext cx="6400800" cy="548640"/>
-          </a:xfrm>
-          <a:prstGeom prst="rect">
-            <a:avLst/>
-          </a:prstGeom>
-          <a:noFill/>
-        </p:spPr>
-        <p:txBody>
-          <a:bodyPr wrap="square" anchor="t" lIns="0" rIns="0" tIns="0" bIns="0">
-            <a:spAutoFit/>
-          </a:bodyPr>
-          <a:lstStyle/>
-          <a:p>
-            <a:pPr algn="l">
-              <a:lnSpc>
-                <a:spcPct val="105000"/>
-              </a:lnSpc>
-              <a:spcBef>
-                <a:spcPts val="0"/>
-              </a:spcBef>
-              <a:spcAft>
-                <a:spcPts val="600"/>
-              </a:spcAft>
-            </a:pPr>
-            <a:r>
-              <a:rPr sz="1500" b="0">
-                <a:solidFill>
-                  <a:srgbClr val="0F172A"/>
-                </a:solidFill>
-                <a:latin typeface="NanumGothic"/>
-                <a:ea typeface="NanumGothic"/>
-                <a:cs typeface="NanumGothic"/>
-              </a:rPr>
-              <a:t>명확하고 구체적인 산출물 정의가 기획의 핵심이다</a:t>
-            </a:r>
-          </a:p>
-        </p:txBody>
-      </p:sp>
-      <p:sp>
-        <p:nvSpPr>
-          <p:cNvPr id="12" name="Oval 11"/>
-          <p:cNvSpPr/>
-          <p:nvPr/>
-        </p:nvSpPr>
-        <p:spPr>
-          <a:xfrm>
-            <a:off x="566928" y="2999232"/>
-            <a:ext cx="146304" cy="146304"/>
-          </a:xfrm>
-          <a:prstGeom prst="ellipse">
-            <a:avLst/>
-          </a:prstGeom>
-          <a:solidFill>
-            <a:srgbClr val="10B981"/>
-          </a:solidFill>
-          <a:ln>
-            <a:noFill/>
-          </a:ln>
-          <a:effectLst/>
-        </p:spPr>
-        <p:style>
-          <a:lnRef idx="1">
-            <a:schemeClr val="accent1"/>
-          </a:lnRef>
-          <a:fillRef idx="3">
-            <a:schemeClr val="accent1"/>
-          </a:fillRef>
-          <a:effectRef idx="2">
-            <a:schemeClr val="accent1"/>
-          </a:effectRef>
-          <a:fontRef idx="minor">
-            <a:schemeClr val="lt1"/>
-          </a:fontRef>
-        </p:style>
-        <p:txBody>
-          <a:bodyPr rtlCol="0" anchor="ctr"/>
-          <a:lstStyle/>
-          <a:p>
-            <a:pPr algn="ctr"/>
-          </a:p>
-        </p:txBody>
-      </p:sp>
-      <p:sp>
-        <p:nvSpPr>
-          <p:cNvPr id="13" name="TextBox 12"/>
-          <p:cNvSpPr txBox="1"/>
-          <p:nvPr/>
-        </p:nvSpPr>
-        <p:spPr>
-          <a:xfrm>
-            <a:off x="868680" y="2926080"/>
-            <a:ext cx="6400800" cy="548640"/>
-          </a:xfrm>
-          <a:prstGeom prst="rect">
-            <a:avLst/>
-          </a:prstGeom>
-          <a:noFill/>
-        </p:spPr>
-        <p:txBody>
-          <a:bodyPr wrap="square" anchor="t" lIns="0" rIns="0" tIns="0" bIns="0">
-            <a:spAutoFit/>
-          </a:bodyPr>
-          <a:lstStyle/>
-          <a:p>
-            <a:pPr algn="l">
-              <a:lnSpc>
-                <a:spcPct val="105000"/>
-              </a:lnSpc>
-              <a:spcBef>
-                <a:spcPts val="0"/>
-              </a:spcBef>
-              <a:spcAft>
-                <a:spcPts val="600"/>
-              </a:spcAft>
-            </a:pPr>
-            <a:r>
-              <a:rPr sz="1500" b="0">
-                <a:solidFill>
-                  <a:srgbClr val="0F172A"/>
-                </a:solidFill>
-                <a:latin typeface="NanumGothic"/>
-                <a:ea typeface="NanumGothic"/>
-                <a:cs typeface="NanumGothic"/>
-              </a:rPr>
-              <a:t>리서치 에이전트 = 검색 + 검증 + 종합</a:t>
-            </a:r>
-          </a:p>
-        </p:txBody>
-      </p:sp>
-      <p:sp>
-        <p:nvSpPr>
-          <p:cNvPr id="14" name="Oval 13"/>
-          <p:cNvSpPr/>
-          <p:nvPr/>
-        </p:nvSpPr>
-        <p:spPr>
-          <a:xfrm>
-            <a:off x="566928" y="3639312"/>
-            <a:ext cx="146304" cy="146304"/>
-          </a:xfrm>
-          <a:prstGeom prst="ellipse">
-            <a:avLst/>
-          </a:prstGeom>
-          <a:solidFill>
-            <a:srgbClr val="10B981"/>
-          </a:solidFill>
-          <a:ln>
-            <a:noFill/>
-          </a:ln>
-          <a:effectLst/>
-        </p:spPr>
-        <p:style>
-          <a:lnRef idx="1">
-            <a:schemeClr val="accent1"/>
-          </a:lnRef>
-          <a:fillRef idx="3">
-            <a:schemeClr val="accent1"/>
-          </a:fillRef>
-          <a:effectRef idx="2">
-            <a:schemeClr val="accent1"/>
-          </a:effectRef>
-          <a:fontRef idx="minor">
-            <a:schemeClr val="lt1"/>
-          </a:fontRef>
-        </p:style>
-        <p:txBody>
-          <a:bodyPr rtlCol="0" anchor="ctr"/>
-          <a:lstStyle/>
-          <a:p>
-            <a:pPr algn="ctr"/>
-          </a:p>
-        </p:txBody>
-      </p:sp>
-      <p:sp>
-        <p:nvSpPr>
-          <p:cNvPr id="15" name="TextBox 14"/>
-          <p:cNvSpPr txBox="1"/>
-          <p:nvPr/>
-        </p:nvSpPr>
-        <p:spPr>
-          <a:xfrm>
-            <a:off x="868680" y="3566160"/>
-            <a:ext cx="6400800" cy="548640"/>
-          </a:xfrm>
-          <a:prstGeom prst="rect">
-            <a:avLst/>
-          </a:prstGeom>
-          <a:noFill/>
-        </p:spPr>
-        <p:txBody>
-          <a:bodyPr wrap="square" anchor="t" lIns="0" rIns="0" tIns="0" bIns="0">
-            <a:spAutoFit/>
-          </a:bodyPr>
-          <a:lstStyle/>
-          <a:p>
-            <a:pPr algn="l">
-              <a:lnSpc>
-                <a:spcPct val="105000"/>
-              </a:lnSpc>
-              <a:spcBef>
-                <a:spcPts val="0"/>
-              </a:spcBef>
-              <a:spcAft>
-                <a:spcPts val="600"/>
-              </a:spcAft>
-            </a:pPr>
-            <a:r>
-              <a:rPr sz="1500" b="0">
-                <a:solidFill>
-                  <a:srgbClr val="0F172A"/>
-                </a:solidFill>
-                <a:latin typeface="NanumGothic"/>
-                <a:ea typeface="NanumGothic"/>
-                <a:cs typeface="NanumGothic"/>
-              </a:rPr>
-              <a:t>팀·주제·핵심 질문 확정 — 내일 구현 준비 완료</a:t>
-            </a:r>
-          </a:p>
-        </p:txBody>
-      </p:sp>
-      <p:sp>
-        <p:nvSpPr>
-          <p:cNvPr id="16" name="Rounded Rectangle 15"/>
-          <p:cNvSpPr/>
-          <p:nvPr/>
-        </p:nvSpPr>
-        <p:spPr>
-          <a:xfrm>
-            <a:off x="7589520" y="1783080"/>
-            <a:ext cx="4069080" cy="4023360"/>
-          </a:xfrm>
-          <a:prstGeom prst="roundRect">
-            <a:avLst/>
-          </a:prstGeom>
-          <a:solidFill>
-            <a:srgbClr val="F8FAFC"/>
-          </a:solidFill>
-          <a:ln w="12700">
-            <a:solidFill>
-              <a:srgbClr val="E2E8F0"/>
-            </a:solidFill>
-          </a:ln>
-          <a:effectLst/>
-        </p:spPr>
-        <p:style>
-          <a:lnRef idx="1">
-            <a:schemeClr val="accent1"/>
-          </a:lnRef>
-          <a:fillRef idx="3">
-            <a:schemeClr val="accent1"/>
-          </a:fillRef>
-          <a:effectRef idx="2">
-            <a:schemeClr val="accent1"/>
-          </a:effectRef>
-          <a:fontRef idx="minor">
-            <a:schemeClr val="lt1"/>
-          </a:fontRef>
-        </p:style>
-        <p:txBody>
-          <a:bodyPr rtlCol="0" anchor="ctr"/>
-          <a:lstStyle/>
-          <a:p>
-            <a:pPr algn="ctr"/>
-          </a:p>
-        </p:txBody>
-      </p:sp>
-      <p:sp>
-        <p:nvSpPr>
-          <p:cNvPr id="17" name="TextBox 16"/>
-          <p:cNvSpPr txBox="1"/>
-          <p:nvPr/>
-        </p:nvSpPr>
-        <p:spPr>
-          <a:xfrm>
-            <a:off x="7863840" y="2011680"/>
-            <a:ext cx="3566160" cy="457200"/>
-          </a:xfrm>
-          <a:prstGeom prst="rect">
-            <a:avLst/>
-          </a:prstGeom>
-          <a:noFill/>
-        </p:spPr>
-        <p:txBody>
-          <a:bodyPr wrap="square" anchor="t" lIns="0" rIns="0" tIns="0" bIns="0">
-            <a:spAutoFit/>
-          </a:bodyPr>
-          <a:lstStyle/>
-          <a:p>
-            <a:pPr algn="l">
-              <a:lnSpc>
-                <a:spcPct val="100000"/>
-              </a:lnSpc>
-              <a:spcBef>
-                <a:spcPts val="0"/>
-              </a:spcBef>
-              <a:spcAft>
-                <a:spcPts val="600"/>
-              </a:spcAft>
-            </a:pPr>
-            <a:r>
-              <a:rPr sz="1500" b="1">
-                <a:solidFill>
-                  <a:srgbClr val="F59E0B"/>
-                </a:solidFill>
-                <a:latin typeface="NanumSquare"/>
-                <a:ea typeface="NanumSquare"/>
-                <a:cs typeface="NanumSquare"/>
-              </a:rPr>
-              <a:t>다음 과정 — Day 4</a:t>
-            </a:r>
-          </a:p>
-        </p:txBody>
-      </p:sp>
-      <p:sp>
-        <p:nvSpPr>
-          <p:cNvPr id="18" name="TextBox 17"/>
-          <p:cNvSpPr txBox="1"/>
-          <p:nvPr/>
-        </p:nvSpPr>
-        <p:spPr>
-          <a:xfrm>
-            <a:off x="7863840" y="2606040"/>
-            <a:ext cx="3520440" cy="3017520"/>
-          </a:xfrm>
-          <a:prstGeom prst="rect">
-            <a:avLst/>
-          </a:prstGeom>
-          <a:noFill/>
-        </p:spPr>
-        <p:txBody>
-          <a:bodyPr wrap="square" anchor="t" lIns="0" rIns="0" tIns="0" bIns="0">
-            <a:spAutoFit/>
-          </a:bodyPr>
-          <a:lstStyle/>
-          <a:p>
-            <a:pPr algn="l">
-              <a:lnSpc>
-                <a:spcPct val="125000"/>
-              </a:lnSpc>
-              <a:spcBef>
-                <a:spcPts val="0"/>
-              </a:spcBef>
-              <a:spcAft>
-                <a:spcPts val="600"/>
-              </a:spcAft>
-            </a:pPr>
-            <a:r>
-              <a:rPr sz="1400" b="0">
-                <a:solidFill>
-                  <a:srgbClr val="0F172A"/>
-                </a:solidFill>
-                <a:latin typeface="NanumGothic"/>
-                <a:ea typeface="NanumGothic"/>
-                <a:cs typeface="NanumGothic"/>
-              </a:rPr>
-              <a:t>확정한 팀 주제로 리서치 AI Agent를 기획·구현하고, 실행해 결과를 분석합니다.</a:t>
+              <a:t>확정한 주제로 corpus 기반 리서치 에이전트를 Day 4 3세션 안에 구현·실행·분석합니다.</a:t>
             </a:r>
           </a:p>
         </p:txBody>
@@ -22884,7 +22494,7 @@
                 <a:ea typeface="NanumSquare"/>
                 <a:cs typeface="NanumSquare"/>
               </a:rPr>
-              <a:t>리서치 프로세스 이론 + 팀 구성·주제 설정</a:t>
+              <a:t>리서치 프로세스(기존·agentic) + 쟁점 + 팀·주제</a:t>
             </a:r>
           </a:p>
         </p:txBody>
@@ -22942,7 +22552,7 @@
                 <a:ea typeface="NanumGothic"/>
                 <a:cs typeface="NanumGothic"/>
               </a:rPr>
-              <a:t>검색·검증·종합 + 팀/주제 확정</a:t>
+              <a:t>생성 vs 선별 토론 + 팀·주제·corpus 확정</a:t>
             </a:r>
           </a:p>
         </p:txBody>

--- a/slides/day3.pptx
+++ b/slides/day3.pptx
@@ -5104,7 +5104,7 @@
                 <a:cs typeface="NanumGothic"/>
               </a:rPr>
               <a:t>한 장짜리 기획서
-(템플릿 placeholder)</a:t>
+템플릿: examples/mini-project/project-plan-template.md</a:t>
             </a:r>
           </a:p>
         </p:txBody>
@@ -8310,7 +8310,7 @@
                 <a:cs typeface="NanumGothic"/>
               </a:rPr>
               <a:t>동작하는 미니 프로젝트
-(데모 placeholder)</a:t>
+(완성 시 1분 데모)</a:t>
             </a:r>
           </a:p>
         </p:txBody>
@@ -20370,7 +20370,8 @@
               </a:rPr>
               <a:t>팀 기획서
 (주제 · 핵심질문 · corpus · 산출물 · 스코프)
-예: 신약/바이오 등 (placeholder)</a:t>
+예: 신약/바이오 리서치 등
+템플릿: examples/research-agent/research-plan-template.md</a:t>
             </a:r>
           </a:p>
         </p:txBody>
@@ -26464,7 +26465,7 @@
                 <a:ea typeface="NanumGothic"/>
                 <a:cs typeface="NanumGothic"/>
               </a:rPr>
-              <a:t>[ placeholder — 강사 보강 ]</a:t>
+              <a:t>지금 불편이 크거나 자주 생기나</a:t>
             </a:r>
           </a:p>
         </p:txBody>
@@ -26602,7 +26603,7 @@
                 <a:ea typeface="NanumGothic"/>
                 <a:cs typeface="NanumGothic"/>
               </a:rPr>
-              <a:t>[ placeholder ]</a:t>
+              <a:t>전·후 차이를 한 줄로</a:t>
             </a:r>
           </a:p>
         </p:txBody>

--- a/slides/day3.pptx
+++ b/slides/day3.pptx
@@ -4413,7 +4413,7 @@
                 <a:ea typeface="NanumGothic"/>
                 <a:cs typeface="NanumGothic"/>
               </a:rPr>
-              <a:t>실습 단계 (placeholder)</a:t>
+              <a:t>실습 단계</a:t>
             </a:r>
           </a:p>
         </p:txBody>
@@ -7619,7 +7619,7 @@
                 <a:ea typeface="NanumGothic"/>
                 <a:cs typeface="NanumGothic"/>
               </a:rPr>
-              <a:t>실습 단계 (placeholder)</a:t>
+              <a:t>실습 단계</a:t>
             </a:r>
           </a:p>
         </p:txBody>
@@ -19678,7 +19678,7 @@
                 <a:ea typeface="NanumGothic"/>
                 <a:cs typeface="NanumGothic"/>
               </a:rPr>
-              <a:t>실습 단계 (placeholder)</a:t>
+              <a:t>실습 단계</a:t>
             </a:r>
           </a:p>
         </p:txBody>
@@ -25713,7 +25713,7 @@
                 <a:ea typeface="NanumGothic"/>
                 <a:cs typeface="NanumGothic"/>
               </a:rPr>
-              <a:t>후보 예시 placeholder</a:t>
+              <a:t>예: 가계부 요약 · 일정 정리 · 자료 검색 도우미</a:t>
             </a:r>
           </a:p>
         </p:txBody>

--- a/slides/day3.pptx
+++ b/slides/day3.pptx
@@ -10808,7 +10808,7 @@
                 <a:ea typeface="NanumGothic"/>
                 <a:cs typeface="NanumGothic"/>
               </a:rPr>
-              <a:t>리서치 에이전트 파이프라인</a:t>
+              <a:t>가설 생성 파이프라인</a:t>
             </a:r>
           </a:p>
         </p:txBody>
@@ -17186,7 +17186,7 @@
                 <a:ea typeface="NanumGothic"/>
                 <a:cs typeface="NanumGothic"/>
               </a:rPr>
-              <a:t>팀별 '풀 리서치 에이전트' 구현 (자기 관심 주제)</a:t>
+              <a:t>자기 관심 분야에서 'rationale 갖춘 새 가설'을 발견·제안하는 에이전트</a:t>
             </a:r>
           </a:p>
         </p:txBody>
@@ -17324,7 +17324,7 @@
                 <a:ea typeface="NanumGothic"/>
                 <a:cs typeface="NanumGothic"/>
               </a:rPr>
-              <a:t>corpus 기반 · 질문→검색→검증→종합→보고 · Day 4 안에 완주</a:t>
+              <a:t>corpus 기반 · 자료파악→gap발견→가설생성→평가·제안 · Day 4 안에 완주</a:t>
             </a:r>
           </a:p>
         </p:txBody>
@@ -17462,7 +17462,7 @@
                 <a:ea typeface="NanumGothic"/>
                 <a:cs typeface="NanumGothic"/>
               </a:rPr>
-              <a:t>핵심 질문에 답하는 1~2장 인용 보고서</a:t>
+              <a:t>rationale 갖춘 새 연구 가설 제안서 (Q&amp;A 보고서 아님)</a:t>
             </a:r>
           </a:p>
         </p:txBody>
@@ -17662,7 +17662,7 @@
                 <a:ea typeface="NanumSquare"/>
                 <a:cs typeface="NanumSquare"/>
               </a:rPr>
-              <a:t>리서치 에이전트 파이프라인 (만들 것)</a:t>
+              <a:t>가설 생성 파이프라인 (만들 것)</a:t>
             </a:r>
           </a:p>
         </p:txBody>
@@ -17984,7 +17984,7 @@
                 <a:ea typeface="NanumGothic"/>
                 <a:cs typeface="NanumGothic"/>
               </a:rPr>
-              <a:t>질문</a:t>
+              <a:t>주제 설정</a:t>
             </a:r>
           </a:p>
         </p:txBody>
@@ -18031,7 +18031,7 @@
                 <a:ea typeface="NanumGothic"/>
                 <a:cs typeface="NanumGothic"/>
               </a:rPr>
-              <a:t>핵심 질문·분해</a:t>
+              <a:t>관심 분야·발견 목표</a:t>
             </a:r>
           </a:p>
         </p:txBody>
@@ -18262,7 +18262,7 @@
                 <a:ea typeface="NanumGothic"/>
                 <a:cs typeface="NanumGothic"/>
               </a:rPr>
-              <a:t>검색</a:t>
+              <a:t>자료 파악</a:t>
             </a:r>
           </a:p>
         </p:txBody>
@@ -18309,7 +18309,7 @@
                 <a:ea typeface="NanumGothic"/>
                 <a:cs typeface="NanumGothic"/>
               </a:rPr>
-              <a:t>로컬 corpus</a:t>
+              <a:t>로컬 corpus 정리</a:t>
             </a:r>
           </a:p>
         </p:txBody>
@@ -18540,7 +18540,7 @@
                 <a:ea typeface="NanumGothic"/>
                 <a:cs typeface="NanumGothic"/>
               </a:rPr>
-              <a:t>검증</a:t>
+              <a:t>gap 발견</a:t>
             </a:r>
           </a:p>
         </p:txBody>
@@ -18587,7 +18587,7 @@
                 <a:ea typeface="NanumGothic"/>
                 <a:cs typeface="NanumGothic"/>
               </a:rPr>
-              <a:t>출처·교차확인</a:t>
+              <a:t>모순·공백·미검증</a:t>
             </a:r>
           </a:p>
         </p:txBody>
@@ -18818,7 +18818,7 @@
                 <a:ea typeface="NanumGothic"/>
                 <a:cs typeface="NanumGothic"/>
               </a:rPr>
-              <a:t>종합</a:t>
+              <a:t>가설 생성</a:t>
             </a:r>
           </a:p>
         </p:txBody>
@@ -18865,7 +18865,7 @@
                 <a:ea typeface="NanumGothic"/>
                 <a:cs typeface="NanumGothic"/>
               </a:rPr>
-              <a:t>근거→답</a:t>
+              <a:t>gap·조합 기반 다수</a:t>
             </a:r>
           </a:p>
         </p:txBody>
@@ -19096,7 +19096,7 @@
                 <a:ea typeface="NanumGothic"/>
                 <a:cs typeface="NanumGothic"/>
               </a:rPr>
-              <a:t>보고</a:t>
+              <a:t>평가·제안</a:t>
             </a:r>
           </a:p>
         </p:txBody>
@@ -19143,7 +19143,7 @@
                 <a:ea typeface="NanumGothic"/>
                 <a:cs typeface="NanumGothic"/>
               </a:rPr>
-              <a:t>인용 보고서</a:t>
+              <a:t>rationale·우선순위</a:t>
             </a:r>
           </a:p>
         </p:txBody>
@@ -19247,7 +19247,7 @@
                 <a:ea typeface="NanumGothic"/>
                 <a:cs typeface="NanumGothic"/>
               </a:rPr>
-              <a:t>Day 4에 이 흐름을 직접 구현·실행한다</a:t>
+              <a:t>agentic 5단계와 동일 — Day 4에 직접 구현·실행한다</a:t>
             </a:r>
           </a:p>
         </p:txBody>
@@ -19447,7 +19447,7 @@
                 <a:ea typeface="NanumSquare"/>
                 <a:cs typeface="NanumSquare"/>
               </a:rPr>
-              <a:t>팀 구성 &amp; 주제·기획</a:t>
+              <a:t>팀 구성 &amp; 분야·기획</a:t>
             </a:r>
           </a:p>
         </p:txBody>
@@ -19954,7 +19954,7 @@
                 <a:ea typeface="NanumGothic"/>
                 <a:cs typeface="NanumGothic"/>
               </a:rPr>
-              <a:t>관심 주제 확정 + 핵심 질문</a:t>
+              <a:t>관심 분야 + 발견 목표(무엇을 제안하고 싶나)</a:t>
             </a:r>
           </a:p>
         </p:txBody>
@@ -20369,7 +20369,7 @@
                 <a:cs typeface="NanumGothic"/>
               </a:rPr>
               <a:t>팀 기획서
-(주제 · 핵심질문 · corpus · 산출물 · 스코프)
+(분야 · 발견 목표 · corpus · 산출물=가설 제안 · 스코프)
 예: 신약/바이오 리서치 등
 템플릿: examples/research-agent/research-plan-template.md</a:t>
             </a:r>
@@ -20847,7 +20847,7 @@
                 <a:ea typeface="NanumGothic"/>
                 <a:cs typeface="NanumGothic"/>
               </a:rPr>
-              <a:t>리서치 = 분야→문헌→가설→검증의 반복 루프, agent로 각 단계를 도울 수 있다</a:t>
+              <a:t>우리 목표 = corpus의 gap에서 'rationale 갖춘 새 가설'을 발견·제안 (질문 답변이 아님)</a:t>
             </a:r>
           </a:p>
         </p:txBody>
@@ -21029,7 +21029,7 @@
                 <a:ea typeface="NanumGothic"/>
                 <a:cs typeface="NanumGothic"/>
               </a:rPr>
-              <a:t>팀·주제·핵심 질문·corpus 계획 확정 — Day 4에 풀 에이전트(스코프) 구현</a:t>
+              <a:t>팀·분야·발견 목표·corpus 계획 확정 — Day 4에 가설 생성 에이전트 구현</a:t>
             </a:r>
           </a:p>
         </p:txBody>
@@ -21169,7 +21169,7 @@
                 <a:ea typeface="NanumGothic"/>
                 <a:cs typeface="NanumGothic"/>
               </a:rPr>
-              <a:t>확정한 주제로 corpus 기반 리서치 에이전트를 Day 4 3세션 안에 구현·실행·분석합니다.</a:t>
+              <a:t>확정한 분야로 corpus 기반 가설 생성 에이전트를 Day 4 3세션 안에 구현·실행해 새 가설을 제안합니다.</a:t>
             </a:r>
           </a:p>
         </p:txBody>

--- a/slides/day3.pptx
+++ b/slides/day3.pptx
@@ -3987,6 +3987,64 @@
           </a:p>
         </p:txBody>
       </p:sp>
+      <p:sp>
+        <p:nvSpPr>
+          <p:cNvPr id="21" name="TextBox 20"/>
+          <p:cNvSpPr txBox="1"/>
+          <p:nvPr/>
+        </p:nvSpPr>
+        <p:spPr>
+          <a:xfrm>
+            <a:off x="8988552" y="6419088"/>
+            <a:ext cx="2697480" cy="365760"/>
+          </a:xfrm>
+          <a:prstGeom prst="rect">
+            <a:avLst/>
+          </a:prstGeom>
+          <a:noFill/>
+        </p:spPr>
+        <p:txBody>
+          <a:bodyPr wrap="square" anchor="ctr" lIns="0" rIns="0" tIns="0" bIns="0">
+            <a:spAutoFit/>
+          </a:bodyPr>
+          <a:lstStyle/>
+          <a:p>
+            <a:pPr algn="r">
+              <a:lnSpc>
+                <a:spcPct val="100000"/>
+              </a:lnSpc>
+              <a:spcBef>
+                <a:spcPts val="0"/>
+              </a:spcBef>
+              <a:spcAft>
+                <a:spcPts val="600"/>
+              </a:spcAft>
+            </a:pPr>
+            <a:r>
+              <a:rPr sz="900" b="1">
+                <a:solidFill>
+                  <a:srgbClr val="10B981"/>
+                </a:solidFill>
+                <a:latin typeface="NanumGothic"/>
+                <a:ea typeface="NanumGothic"/>
+                <a:cs typeface="NanumGothic"/>
+              </a:rPr>
+              <a:t>Day 3 · 수</a:t>
+            </a:r>
+            <a:r>
+              <a:rPr sz="900" b="1">
+                <a:solidFill>
+                  <a:srgbClr val="CBD5E1"/>
+                </a:solidFill>
+                <a:latin typeface="NanumGothic"/>
+                <a:ea typeface="NanumGothic"/>
+                <a:cs typeface="NanumGothic"/>
+              </a:rPr>
+              <a:t>   ·   1 / 25</a:t>
+            </a:r>
+          </a:p>
+        </p:txBody>
+      </p:sp>
     </p:spTree>
   </p:cSld>
   <p:clrMapOvr>
@@ -4280,54 +4338,7 @@
       </p:sp>
       <p:sp>
         <p:nvSpPr>
-          <p:cNvPr id="8" name="TextBox 7"/>
-          <p:cNvSpPr txBox="1"/>
-          <p:nvPr/>
-        </p:nvSpPr>
-        <p:spPr>
-          <a:xfrm>
-            <a:off x="10241280" y="6419088"/>
-            <a:ext cx="1463040" cy="365760"/>
-          </a:xfrm>
-          <a:prstGeom prst="rect">
-            <a:avLst/>
-          </a:prstGeom>
-          <a:noFill/>
-        </p:spPr>
-        <p:txBody>
-          <a:bodyPr wrap="square" anchor="ctr" lIns="0" rIns="0" tIns="0" bIns="0">
-            <a:spAutoFit/>
-          </a:bodyPr>
-          <a:lstStyle/>
-          <a:p>
-            <a:pPr algn="r">
-              <a:lnSpc>
-                <a:spcPct val="100000"/>
-              </a:lnSpc>
-              <a:spcBef>
-                <a:spcPts val="0"/>
-              </a:spcBef>
-              <a:spcAft>
-                <a:spcPts val="600"/>
-              </a:spcAft>
-            </a:pPr>
-            <a:r>
-              <a:rPr sz="900" b="1">
-                <a:solidFill>
-                  <a:srgbClr val="10B981"/>
-                </a:solidFill>
-                <a:latin typeface="NanumGothic"/>
-                <a:ea typeface="NanumGothic"/>
-                <a:cs typeface="NanumGothic"/>
-              </a:rPr>
-              <a:t>Day 3 · 수</a:t>
-            </a:r>
-          </a:p>
-        </p:txBody>
-      </p:sp>
-      <p:sp>
-        <p:nvSpPr>
-          <p:cNvPr id="9" name="Rounded Rectangle 8"/>
+          <p:cNvPr id="8" name="Rounded Rectangle 7"/>
           <p:cNvSpPr/>
           <p:nvPr/>
         </p:nvSpPr>
@@ -4373,7 +4384,7 @@
       </p:sp>
       <p:sp>
         <p:nvSpPr>
-          <p:cNvPr id="10" name="TextBox 9"/>
+          <p:cNvPr id="9" name="TextBox 8"/>
           <p:cNvSpPr txBox="1"/>
           <p:nvPr/>
         </p:nvSpPr>
@@ -4420,7 +4431,7 @@
       </p:sp>
       <p:sp>
         <p:nvSpPr>
-          <p:cNvPr id="11" name="Oval 10"/>
+          <p:cNvPr id="10" name="Oval 9"/>
           <p:cNvSpPr/>
           <p:nvPr/>
         </p:nvSpPr>
@@ -4464,7 +4475,7 @@
       </p:sp>
       <p:sp>
         <p:nvSpPr>
-          <p:cNvPr id="12" name="TextBox 11"/>
+          <p:cNvPr id="11" name="TextBox 10"/>
           <p:cNvSpPr txBox="1"/>
           <p:nvPr/>
         </p:nvSpPr>
@@ -4511,7 +4522,7 @@
       </p:sp>
       <p:sp>
         <p:nvSpPr>
-          <p:cNvPr id="13" name="TextBox 12"/>
+          <p:cNvPr id="12" name="TextBox 11"/>
           <p:cNvSpPr txBox="1"/>
           <p:nvPr/>
         </p:nvSpPr>
@@ -4558,7 +4569,7 @@
       </p:sp>
       <p:sp>
         <p:nvSpPr>
-          <p:cNvPr id="14" name="Oval 13"/>
+          <p:cNvPr id="13" name="Oval 12"/>
           <p:cNvSpPr/>
           <p:nvPr/>
         </p:nvSpPr>
@@ -4602,7 +4613,7 @@
       </p:sp>
       <p:sp>
         <p:nvSpPr>
-          <p:cNvPr id="15" name="TextBox 14"/>
+          <p:cNvPr id="14" name="TextBox 13"/>
           <p:cNvSpPr txBox="1"/>
           <p:nvPr/>
         </p:nvSpPr>
@@ -4649,7 +4660,7 @@
       </p:sp>
       <p:sp>
         <p:nvSpPr>
-          <p:cNvPr id="16" name="TextBox 15"/>
+          <p:cNvPr id="15" name="TextBox 14"/>
           <p:cNvSpPr txBox="1"/>
           <p:nvPr/>
         </p:nvSpPr>
@@ -4696,7 +4707,7 @@
       </p:sp>
       <p:sp>
         <p:nvSpPr>
-          <p:cNvPr id="17" name="Oval 16"/>
+          <p:cNvPr id="16" name="Oval 15"/>
           <p:cNvSpPr/>
           <p:nvPr/>
         </p:nvSpPr>
@@ -4740,7 +4751,7 @@
       </p:sp>
       <p:sp>
         <p:nvSpPr>
-          <p:cNvPr id="18" name="TextBox 17"/>
+          <p:cNvPr id="17" name="TextBox 16"/>
           <p:cNvSpPr txBox="1"/>
           <p:nvPr/>
         </p:nvSpPr>
@@ -4787,7 +4798,7 @@
       </p:sp>
       <p:sp>
         <p:nvSpPr>
-          <p:cNvPr id="19" name="TextBox 18"/>
+          <p:cNvPr id="18" name="TextBox 17"/>
           <p:cNvSpPr txBox="1"/>
           <p:nvPr/>
         </p:nvSpPr>
@@ -4834,7 +4845,7 @@
       </p:sp>
       <p:sp>
         <p:nvSpPr>
-          <p:cNvPr id="20" name="Oval 19"/>
+          <p:cNvPr id="19" name="Oval 18"/>
           <p:cNvSpPr/>
           <p:nvPr/>
         </p:nvSpPr>
@@ -4878,7 +4889,7 @@
       </p:sp>
       <p:sp>
         <p:nvSpPr>
-          <p:cNvPr id="21" name="TextBox 20"/>
+          <p:cNvPr id="20" name="TextBox 19"/>
           <p:cNvSpPr txBox="1"/>
           <p:nvPr/>
         </p:nvSpPr>
@@ -4925,7 +4936,7 @@
       </p:sp>
       <p:sp>
         <p:nvSpPr>
-          <p:cNvPr id="22" name="TextBox 21"/>
+          <p:cNvPr id="21" name="TextBox 20"/>
           <p:cNvSpPr txBox="1"/>
           <p:nvPr/>
         </p:nvSpPr>
@@ -4972,7 +4983,7 @@
       </p:sp>
       <p:sp>
         <p:nvSpPr>
-          <p:cNvPr id="23" name="Rounded Rectangle 22"/>
+          <p:cNvPr id="22" name="Rounded Rectangle 21"/>
           <p:cNvSpPr/>
           <p:nvPr/>
         </p:nvSpPr>
@@ -5016,7 +5027,7 @@
       </p:sp>
       <p:sp>
         <p:nvSpPr>
-          <p:cNvPr id="24" name="TextBox 23"/>
+          <p:cNvPr id="23" name="TextBox 22"/>
           <p:cNvSpPr txBox="1"/>
           <p:nvPr/>
         </p:nvSpPr>
@@ -5063,7 +5074,7 @@
       </p:sp>
       <p:sp>
         <p:nvSpPr>
-          <p:cNvPr id="25" name="TextBox 24"/>
+          <p:cNvPr id="24" name="TextBox 23"/>
           <p:cNvSpPr txBox="1"/>
           <p:nvPr/>
         </p:nvSpPr>
@@ -5105,6 +5116,64 @@
               </a:rPr>
               <a:t>한 장짜리 기획서
 템플릿: examples/mini-project/project-plan-template.md</a:t>
+            </a:r>
+          </a:p>
+        </p:txBody>
+      </p:sp>
+      <p:sp>
+        <p:nvSpPr>
+          <p:cNvPr id="25" name="TextBox 24"/>
+          <p:cNvSpPr txBox="1"/>
+          <p:nvPr/>
+        </p:nvSpPr>
+        <p:spPr>
+          <a:xfrm>
+            <a:off x="8988552" y="6419088"/>
+            <a:ext cx="2697480" cy="365760"/>
+          </a:xfrm>
+          <a:prstGeom prst="rect">
+            <a:avLst/>
+          </a:prstGeom>
+          <a:noFill/>
+        </p:spPr>
+        <p:txBody>
+          <a:bodyPr wrap="square" anchor="ctr" lIns="0" rIns="0" tIns="0" bIns="0">
+            <a:spAutoFit/>
+          </a:bodyPr>
+          <a:lstStyle/>
+          <a:p>
+            <a:pPr algn="r">
+              <a:lnSpc>
+                <a:spcPct val="100000"/>
+              </a:lnSpc>
+              <a:spcBef>
+                <a:spcPts val="0"/>
+              </a:spcBef>
+              <a:spcAft>
+                <a:spcPts val="600"/>
+              </a:spcAft>
+            </a:pPr>
+            <a:r>
+              <a:rPr sz="900" b="1">
+                <a:solidFill>
+                  <a:srgbClr val="10B981"/>
+                </a:solidFill>
+                <a:latin typeface="NanumGothic"/>
+                <a:ea typeface="NanumGothic"/>
+                <a:cs typeface="NanumGothic"/>
+              </a:rPr>
+              <a:t>Day 3 · 수</a:t>
+            </a:r>
+            <a:r>
+              <a:rPr sz="900" b="1">
+                <a:solidFill>
+                  <a:srgbClr val="64748B"/>
+                </a:solidFill>
+                <a:latin typeface="NanumGothic"/>
+                <a:ea typeface="NanumGothic"/>
+                <a:cs typeface="NanumGothic"/>
+              </a:rPr>
+              <a:t>   ·   10 / 25</a:t>
             </a:r>
           </a:p>
         </p:txBody>
@@ -5411,6 +5480,64 @@
           </a:p>
         </p:txBody>
       </p:sp>
+      <p:sp>
+        <p:nvSpPr>
+          <p:cNvPr id="8" name="TextBox 7"/>
+          <p:cNvSpPr txBox="1"/>
+          <p:nvPr/>
+        </p:nvSpPr>
+        <p:spPr>
+          <a:xfrm>
+            <a:off x="8988552" y="6419088"/>
+            <a:ext cx="2697480" cy="365760"/>
+          </a:xfrm>
+          <a:prstGeom prst="rect">
+            <a:avLst/>
+          </a:prstGeom>
+          <a:noFill/>
+        </p:spPr>
+        <p:txBody>
+          <a:bodyPr wrap="square" anchor="ctr" lIns="0" rIns="0" tIns="0" bIns="0">
+            <a:spAutoFit/>
+          </a:bodyPr>
+          <a:lstStyle/>
+          <a:p>
+            <a:pPr algn="r">
+              <a:lnSpc>
+                <a:spcPct val="100000"/>
+              </a:lnSpc>
+              <a:spcBef>
+                <a:spcPts val="0"/>
+              </a:spcBef>
+              <a:spcAft>
+                <a:spcPts val="600"/>
+              </a:spcAft>
+            </a:pPr>
+            <a:r>
+              <a:rPr sz="900" b="1">
+                <a:solidFill>
+                  <a:srgbClr val="10B981"/>
+                </a:solidFill>
+                <a:latin typeface="NanumGothic"/>
+                <a:ea typeface="NanumGothic"/>
+                <a:cs typeface="NanumGothic"/>
+              </a:rPr>
+              <a:t>Day 3 · 수</a:t>
+            </a:r>
+            <a:r>
+              <a:rPr sz="900" b="1">
+                <a:solidFill>
+                  <a:srgbClr val="CBD5E1"/>
+                </a:solidFill>
+                <a:latin typeface="NanumGothic"/>
+                <a:ea typeface="NanumGothic"/>
+                <a:cs typeface="NanumGothic"/>
+              </a:rPr>
+              <a:t>   ·   11 / 25</a:t>
+            </a:r>
+          </a:p>
+        </p:txBody>
+      </p:sp>
     </p:spTree>
   </p:cSld>
   <p:clrMapOvr>
@@ -5704,54 +5831,7 @@
       </p:sp>
       <p:sp>
         <p:nvSpPr>
-          <p:cNvPr id="8" name="TextBox 7"/>
-          <p:cNvSpPr txBox="1"/>
-          <p:nvPr/>
-        </p:nvSpPr>
-        <p:spPr>
-          <a:xfrm>
-            <a:off x="10241280" y="6419088"/>
-            <a:ext cx="1463040" cy="365760"/>
-          </a:xfrm>
-          <a:prstGeom prst="rect">
-            <a:avLst/>
-          </a:prstGeom>
-          <a:noFill/>
-        </p:spPr>
-        <p:txBody>
-          <a:bodyPr wrap="square" anchor="ctr" lIns="0" rIns="0" tIns="0" bIns="0">
-            <a:spAutoFit/>
-          </a:bodyPr>
-          <a:lstStyle/>
-          <a:p>
-            <a:pPr algn="r">
-              <a:lnSpc>
-                <a:spcPct val="100000"/>
-              </a:lnSpc>
-              <a:spcBef>
-                <a:spcPts val="0"/>
-              </a:spcBef>
-              <a:spcAft>
-                <a:spcPts val="600"/>
-              </a:spcAft>
-            </a:pPr>
-            <a:r>
-              <a:rPr sz="900" b="1">
-                <a:solidFill>
-                  <a:srgbClr val="10B981"/>
-                </a:solidFill>
-                <a:latin typeface="NanumGothic"/>
-                <a:ea typeface="NanumGothic"/>
-                <a:cs typeface="NanumGothic"/>
-              </a:rPr>
-              <a:t>Day 3 · 수</a:t>
-            </a:r>
-          </a:p>
-        </p:txBody>
-      </p:sp>
-      <p:sp>
-        <p:nvSpPr>
-          <p:cNvPr id="9" name="Rounded Rectangle 8"/>
+          <p:cNvPr id="8" name="Rounded Rectangle 7"/>
           <p:cNvSpPr/>
           <p:nvPr/>
         </p:nvSpPr>
@@ -5797,7 +5877,7 @@
       </p:sp>
       <p:sp>
         <p:nvSpPr>
-          <p:cNvPr id="10" name="TextBox 9"/>
+          <p:cNvPr id="9" name="TextBox 8"/>
           <p:cNvSpPr txBox="1"/>
           <p:nvPr/>
         </p:nvSpPr>
@@ -5844,7 +5924,7 @@
       </p:sp>
       <p:sp>
         <p:nvSpPr>
-          <p:cNvPr id="11" name="TextBox 10"/>
+          <p:cNvPr id="10" name="TextBox 9"/>
           <p:cNvSpPr txBox="1"/>
           <p:nvPr/>
         </p:nvSpPr>
@@ -5891,7 +5971,7 @@
       </p:sp>
       <p:sp>
         <p:nvSpPr>
-          <p:cNvPr id="12" name="Rounded Rectangle 11"/>
+          <p:cNvPr id="11" name="Rounded Rectangle 10"/>
           <p:cNvSpPr/>
           <p:nvPr/>
         </p:nvSpPr>
@@ -5937,7 +6017,7 @@
       </p:sp>
       <p:sp>
         <p:nvSpPr>
-          <p:cNvPr id="13" name="Oval 12"/>
+          <p:cNvPr id="12" name="Oval 11"/>
           <p:cNvSpPr/>
           <p:nvPr/>
         </p:nvSpPr>
@@ -5981,7 +6061,7 @@
       </p:sp>
       <p:sp>
         <p:nvSpPr>
-          <p:cNvPr id="14" name="TextBox 13"/>
+          <p:cNvPr id="13" name="TextBox 12"/>
           <p:cNvSpPr txBox="1"/>
           <p:nvPr/>
         </p:nvSpPr>
@@ -6028,7 +6108,7 @@
       </p:sp>
       <p:sp>
         <p:nvSpPr>
-          <p:cNvPr id="15" name="TextBox 14"/>
+          <p:cNvPr id="14" name="TextBox 13"/>
           <p:cNvSpPr txBox="1"/>
           <p:nvPr/>
         </p:nvSpPr>
@@ -6075,7 +6155,7 @@
       </p:sp>
       <p:sp>
         <p:nvSpPr>
-          <p:cNvPr id="16" name="Rounded Rectangle 15"/>
+          <p:cNvPr id="15" name="Rounded Rectangle 14"/>
           <p:cNvSpPr/>
           <p:nvPr/>
         </p:nvSpPr>
@@ -6121,7 +6201,7 @@
       </p:sp>
       <p:sp>
         <p:nvSpPr>
-          <p:cNvPr id="17" name="Oval 16"/>
+          <p:cNvPr id="16" name="Oval 15"/>
           <p:cNvSpPr/>
           <p:nvPr/>
         </p:nvSpPr>
@@ -6165,7 +6245,7 @@
       </p:sp>
       <p:sp>
         <p:nvSpPr>
-          <p:cNvPr id="18" name="TextBox 17"/>
+          <p:cNvPr id="17" name="TextBox 16"/>
           <p:cNvSpPr txBox="1"/>
           <p:nvPr/>
         </p:nvSpPr>
@@ -6212,7 +6292,7 @@
       </p:sp>
       <p:sp>
         <p:nvSpPr>
-          <p:cNvPr id="19" name="TextBox 18"/>
+          <p:cNvPr id="18" name="TextBox 17"/>
           <p:cNvSpPr txBox="1"/>
           <p:nvPr/>
         </p:nvSpPr>
@@ -6259,7 +6339,7 @@
       </p:sp>
       <p:sp>
         <p:nvSpPr>
-          <p:cNvPr id="20" name="Rounded Rectangle 19"/>
+          <p:cNvPr id="19" name="Rounded Rectangle 18"/>
           <p:cNvSpPr/>
           <p:nvPr/>
         </p:nvSpPr>
@@ -6305,7 +6385,7 @@
       </p:sp>
       <p:sp>
         <p:nvSpPr>
-          <p:cNvPr id="21" name="Oval 20"/>
+          <p:cNvPr id="20" name="Oval 19"/>
           <p:cNvSpPr/>
           <p:nvPr/>
         </p:nvSpPr>
@@ -6349,7 +6429,7 @@
       </p:sp>
       <p:sp>
         <p:nvSpPr>
-          <p:cNvPr id="22" name="TextBox 21"/>
+          <p:cNvPr id="21" name="TextBox 20"/>
           <p:cNvSpPr txBox="1"/>
           <p:nvPr/>
         </p:nvSpPr>
@@ -6396,7 +6476,7 @@
       </p:sp>
       <p:sp>
         <p:nvSpPr>
-          <p:cNvPr id="23" name="TextBox 22"/>
+          <p:cNvPr id="22" name="TextBox 21"/>
           <p:cNvSpPr txBox="1"/>
           <p:nvPr/>
         </p:nvSpPr>
@@ -6437,6 +6517,64 @@
                 <a:cs typeface="NanumGothic"/>
               </a:rPr>
               <a:t>회고</a:t>
+            </a:r>
+          </a:p>
+        </p:txBody>
+      </p:sp>
+      <p:sp>
+        <p:nvSpPr>
+          <p:cNvPr id="23" name="TextBox 22"/>
+          <p:cNvSpPr txBox="1"/>
+          <p:nvPr/>
+        </p:nvSpPr>
+        <p:spPr>
+          <a:xfrm>
+            <a:off x="8988552" y="6419088"/>
+            <a:ext cx="2697480" cy="365760"/>
+          </a:xfrm>
+          <a:prstGeom prst="rect">
+            <a:avLst/>
+          </a:prstGeom>
+          <a:noFill/>
+        </p:spPr>
+        <p:txBody>
+          <a:bodyPr wrap="square" anchor="ctr" lIns="0" rIns="0" tIns="0" bIns="0">
+            <a:spAutoFit/>
+          </a:bodyPr>
+          <a:lstStyle/>
+          <a:p>
+            <a:pPr algn="r">
+              <a:lnSpc>
+                <a:spcPct val="100000"/>
+              </a:lnSpc>
+              <a:spcBef>
+                <a:spcPts val="0"/>
+              </a:spcBef>
+              <a:spcAft>
+                <a:spcPts val="600"/>
+              </a:spcAft>
+            </a:pPr>
+            <a:r>
+              <a:rPr sz="900" b="1">
+                <a:solidFill>
+                  <a:srgbClr val="10B981"/>
+                </a:solidFill>
+                <a:latin typeface="NanumGothic"/>
+                <a:ea typeface="NanumGothic"/>
+                <a:cs typeface="NanumGothic"/>
+              </a:rPr>
+              <a:t>Day 3 · 수</a:t>
+            </a:r>
+            <a:r>
+              <a:rPr sz="900" b="1">
+                <a:solidFill>
+                  <a:srgbClr val="64748B"/>
+                </a:solidFill>
+                <a:latin typeface="NanumGothic"/>
+                <a:ea typeface="NanumGothic"/>
+                <a:cs typeface="NanumGothic"/>
+              </a:rPr>
+              <a:t>   ·   12 / 25</a:t>
             </a:r>
           </a:p>
         </p:txBody>
@@ -6734,54 +6872,7 @@
       </p:sp>
       <p:sp>
         <p:nvSpPr>
-          <p:cNvPr id="8" name="TextBox 7"/>
-          <p:cNvSpPr txBox="1"/>
-          <p:nvPr/>
-        </p:nvSpPr>
-        <p:spPr>
-          <a:xfrm>
-            <a:off x="10241280" y="6419088"/>
-            <a:ext cx="1463040" cy="365760"/>
-          </a:xfrm>
-          <a:prstGeom prst="rect">
-            <a:avLst/>
-          </a:prstGeom>
-          <a:noFill/>
-        </p:spPr>
-        <p:txBody>
-          <a:bodyPr wrap="square" anchor="ctr" lIns="0" rIns="0" tIns="0" bIns="0">
-            <a:spAutoFit/>
-          </a:bodyPr>
-          <a:lstStyle/>
-          <a:p>
-            <a:pPr algn="r">
-              <a:lnSpc>
-                <a:spcPct val="100000"/>
-              </a:lnSpc>
-              <a:spcBef>
-                <a:spcPts val="0"/>
-              </a:spcBef>
-              <a:spcAft>
-                <a:spcPts val="600"/>
-              </a:spcAft>
-            </a:pPr>
-            <a:r>
-              <a:rPr sz="900" b="1">
-                <a:solidFill>
-                  <a:srgbClr val="10B981"/>
-                </a:solidFill>
-                <a:latin typeface="NanumGothic"/>
-                <a:ea typeface="NanumGothic"/>
-                <a:cs typeface="NanumGothic"/>
-              </a:rPr>
-              <a:t>Day 3 · 수</a:t>
-            </a:r>
-          </a:p>
-        </p:txBody>
-      </p:sp>
-      <p:sp>
-        <p:nvSpPr>
-          <p:cNvPr id="9" name="Oval 8"/>
+          <p:cNvPr id="8" name="Oval 7"/>
           <p:cNvSpPr/>
           <p:nvPr/>
         </p:nvSpPr>
@@ -6825,7 +6916,7 @@
       </p:sp>
       <p:sp>
         <p:nvSpPr>
-          <p:cNvPr id="10" name="TextBox 9"/>
+          <p:cNvPr id="9" name="TextBox 8"/>
           <p:cNvSpPr txBox="1"/>
           <p:nvPr/>
         </p:nvSpPr>
@@ -6872,7 +6963,7 @@
       </p:sp>
       <p:sp>
         <p:nvSpPr>
-          <p:cNvPr id="11" name="TextBox 10"/>
+          <p:cNvPr id="10" name="TextBox 9"/>
           <p:cNvSpPr txBox="1"/>
           <p:nvPr/>
         </p:nvSpPr>
@@ -6919,7 +7010,7 @@
       </p:sp>
       <p:sp>
         <p:nvSpPr>
-          <p:cNvPr id="12" name="Oval 11"/>
+          <p:cNvPr id="11" name="Oval 10"/>
           <p:cNvSpPr/>
           <p:nvPr/>
         </p:nvSpPr>
@@ -6963,7 +7054,7 @@
       </p:sp>
       <p:sp>
         <p:nvSpPr>
-          <p:cNvPr id="13" name="TextBox 12"/>
+          <p:cNvPr id="12" name="TextBox 11"/>
           <p:cNvSpPr txBox="1"/>
           <p:nvPr/>
         </p:nvSpPr>
@@ -7010,7 +7101,7 @@
       </p:sp>
       <p:sp>
         <p:nvSpPr>
-          <p:cNvPr id="14" name="TextBox 13"/>
+          <p:cNvPr id="13" name="TextBox 12"/>
           <p:cNvSpPr txBox="1"/>
           <p:nvPr/>
         </p:nvSpPr>
@@ -7057,7 +7148,7 @@
       </p:sp>
       <p:sp>
         <p:nvSpPr>
-          <p:cNvPr id="15" name="Oval 14"/>
+          <p:cNvPr id="14" name="Oval 13"/>
           <p:cNvSpPr/>
           <p:nvPr/>
         </p:nvSpPr>
@@ -7101,7 +7192,7 @@
       </p:sp>
       <p:sp>
         <p:nvSpPr>
-          <p:cNvPr id="16" name="TextBox 15"/>
+          <p:cNvPr id="15" name="TextBox 14"/>
           <p:cNvSpPr txBox="1"/>
           <p:nvPr/>
         </p:nvSpPr>
@@ -7148,7 +7239,7 @@
       </p:sp>
       <p:sp>
         <p:nvSpPr>
-          <p:cNvPr id="17" name="TextBox 16"/>
+          <p:cNvPr id="16" name="TextBox 15"/>
           <p:cNvSpPr txBox="1"/>
           <p:nvPr/>
         </p:nvSpPr>
@@ -7189,6 +7280,64 @@
                 <a:cs typeface="NanumGothic"/>
               </a:rPr>
               <a:t>동작을 눈으로 확인</a:t>
+            </a:r>
+          </a:p>
+        </p:txBody>
+      </p:sp>
+      <p:sp>
+        <p:nvSpPr>
+          <p:cNvPr id="17" name="TextBox 16"/>
+          <p:cNvSpPr txBox="1"/>
+          <p:nvPr/>
+        </p:nvSpPr>
+        <p:spPr>
+          <a:xfrm>
+            <a:off x="8988552" y="6419088"/>
+            <a:ext cx="2697480" cy="365760"/>
+          </a:xfrm>
+          <a:prstGeom prst="rect">
+            <a:avLst/>
+          </a:prstGeom>
+          <a:noFill/>
+        </p:spPr>
+        <p:txBody>
+          <a:bodyPr wrap="square" anchor="ctr" lIns="0" rIns="0" tIns="0" bIns="0">
+            <a:spAutoFit/>
+          </a:bodyPr>
+          <a:lstStyle/>
+          <a:p>
+            <a:pPr algn="r">
+              <a:lnSpc>
+                <a:spcPct val="100000"/>
+              </a:lnSpc>
+              <a:spcBef>
+                <a:spcPts val="0"/>
+              </a:spcBef>
+              <a:spcAft>
+                <a:spcPts val="600"/>
+              </a:spcAft>
+            </a:pPr>
+            <a:r>
+              <a:rPr sz="900" b="1">
+                <a:solidFill>
+                  <a:srgbClr val="10B981"/>
+                </a:solidFill>
+                <a:latin typeface="NanumGothic"/>
+                <a:ea typeface="NanumGothic"/>
+                <a:cs typeface="NanumGothic"/>
+              </a:rPr>
+              <a:t>Day 3 · 수</a:t>
+            </a:r>
+            <a:r>
+              <a:rPr sz="900" b="1">
+                <a:solidFill>
+                  <a:srgbClr val="64748B"/>
+                </a:solidFill>
+                <a:latin typeface="NanumGothic"/>
+                <a:ea typeface="NanumGothic"/>
+                <a:cs typeface="NanumGothic"/>
+              </a:rPr>
+              <a:t>   ·   13 / 25</a:t>
             </a:r>
           </a:p>
         </p:txBody>
@@ -7486,54 +7635,7 @@
       </p:sp>
       <p:sp>
         <p:nvSpPr>
-          <p:cNvPr id="8" name="TextBox 7"/>
-          <p:cNvSpPr txBox="1"/>
-          <p:nvPr/>
-        </p:nvSpPr>
-        <p:spPr>
-          <a:xfrm>
-            <a:off x="10241280" y="6419088"/>
-            <a:ext cx="1463040" cy="365760"/>
-          </a:xfrm>
-          <a:prstGeom prst="rect">
-            <a:avLst/>
-          </a:prstGeom>
-          <a:noFill/>
-        </p:spPr>
-        <p:txBody>
-          <a:bodyPr wrap="square" anchor="ctr" lIns="0" rIns="0" tIns="0" bIns="0">
-            <a:spAutoFit/>
-          </a:bodyPr>
-          <a:lstStyle/>
-          <a:p>
-            <a:pPr algn="r">
-              <a:lnSpc>
-                <a:spcPct val="100000"/>
-              </a:lnSpc>
-              <a:spcBef>
-                <a:spcPts val="0"/>
-              </a:spcBef>
-              <a:spcAft>
-                <a:spcPts val="600"/>
-              </a:spcAft>
-            </a:pPr>
-            <a:r>
-              <a:rPr sz="900" b="1">
-                <a:solidFill>
-                  <a:srgbClr val="10B981"/>
-                </a:solidFill>
-                <a:latin typeface="NanumGothic"/>
-                <a:ea typeface="NanumGothic"/>
-                <a:cs typeface="NanumGothic"/>
-              </a:rPr>
-              <a:t>Day 3 · 수</a:t>
-            </a:r>
-          </a:p>
-        </p:txBody>
-      </p:sp>
-      <p:sp>
-        <p:nvSpPr>
-          <p:cNvPr id="9" name="Rounded Rectangle 8"/>
+          <p:cNvPr id="8" name="Rounded Rectangle 7"/>
           <p:cNvSpPr/>
           <p:nvPr/>
         </p:nvSpPr>
@@ -7579,7 +7681,7 @@
       </p:sp>
       <p:sp>
         <p:nvSpPr>
-          <p:cNvPr id="10" name="TextBox 9"/>
+          <p:cNvPr id="9" name="TextBox 8"/>
           <p:cNvSpPr txBox="1"/>
           <p:nvPr/>
         </p:nvSpPr>
@@ -7626,7 +7728,7 @@
       </p:sp>
       <p:sp>
         <p:nvSpPr>
-          <p:cNvPr id="11" name="Oval 10"/>
+          <p:cNvPr id="10" name="Oval 9"/>
           <p:cNvSpPr/>
           <p:nvPr/>
         </p:nvSpPr>
@@ -7670,7 +7772,7 @@
       </p:sp>
       <p:sp>
         <p:nvSpPr>
-          <p:cNvPr id="12" name="TextBox 11"/>
+          <p:cNvPr id="11" name="TextBox 10"/>
           <p:cNvSpPr txBox="1"/>
           <p:nvPr/>
         </p:nvSpPr>
@@ -7717,7 +7819,7 @@
       </p:sp>
       <p:sp>
         <p:nvSpPr>
-          <p:cNvPr id="13" name="TextBox 12"/>
+          <p:cNvPr id="12" name="TextBox 11"/>
           <p:cNvSpPr txBox="1"/>
           <p:nvPr/>
         </p:nvSpPr>
@@ -7764,7 +7866,7 @@
       </p:sp>
       <p:sp>
         <p:nvSpPr>
-          <p:cNvPr id="14" name="Oval 13"/>
+          <p:cNvPr id="13" name="Oval 12"/>
           <p:cNvSpPr/>
           <p:nvPr/>
         </p:nvSpPr>
@@ -7808,7 +7910,7 @@
       </p:sp>
       <p:sp>
         <p:nvSpPr>
-          <p:cNvPr id="15" name="TextBox 14"/>
+          <p:cNvPr id="14" name="TextBox 13"/>
           <p:cNvSpPr txBox="1"/>
           <p:nvPr/>
         </p:nvSpPr>
@@ -7855,7 +7957,7 @@
       </p:sp>
       <p:sp>
         <p:nvSpPr>
-          <p:cNvPr id="16" name="TextBox 15"/>
+          <p:cNvPr id="15" name="TextBox 14"/>
           <p:cNvSpPr txBox="1"/>
           <p:nvPr/>
         </p:nvSpPr>
@@ -7902,7 +8004,7 @@
       </p:sp>
       <p:sp>
         <p:nvSpPr>
-          <p:cNvPr id="17" name="Oval 16"/>
+          <p:cNvPr id="16" name="Oval 15"/>
           <p:cNvSpPr/>
           <p:nvPr/>
         </p:nvSpPr>
@@ -7946,7 +8048,7 @@
       </p:sp>
       <p:sp>
         <p:nvSpPr>
-          <p:cNvPr id="18" name="TextBox 17"/>
+          <p:cNvPr id="17" name="TextBox 16"/>
           <p:cNvSpPr txBox="1"/>
           <p:nvPr/>
         </p:nvSpPr>
@@ -7993,7 +8095,7 @@
       </p:sp>
       <p:sp>
         <p:nvSpPr>
-          <p:cNvPr id="19" name="TextBox 18"/>
+          <p:cNvPr id="18" name="TextBox 17"/>
           <p:cNvSpPr txBox="1"/>
           <p:nvPr/>
         </p:nvSpPr>
@@ -8040,7 +8142,7 @@
       </p:sp>
       <p:sp>
         <p:nvSpPr>
-          <p:cNvPr id="20" name="Oval 19"/>
+          <p:cNvPr id="19" name="Oval 18"/>
           <p:cNvSpPr/>
           <p:nvPr/>
         </p:nvSpPr>
@@ -8084,7 +8186,7 @@
       </p:sp>
       <p:sp>
         <p:nvSpPr>
-          <p:cNvPr id="21" name="TextBox 20"/>
+          <p:cNvPr id="20" name="TextBox 19"/>
           <p:cNvSpPr txBox="1"/>
           <p:nvPr/>
         </p:nvSpPr>
@@ -8131,7 +8233,7 @@
       </p:sp>
       <p:sp>
         <p:nvSpPr>
-          <p:cNvPr id="22" name="TextBox 21"/>
+          <p:cNvPr id="21" name="TextBox 20"/>
           <p:cNvSpPr txBox="1"/>
           <p:nvPr/>
         </p:nvSpPr>
@@ -8178,7 +8280,7 @@
       </p:sp>
       <p:sp>
         <p:nvSpPr>
-          <p:cNvPr id="23" name="Rounded Rectangle 22"/>
+          <p:cNvPr id="22" name="Rounded Rectangle 21"/>
           <p:cNvSpPr/>
           <p:nvPr/>
         </p:nvSpPr>
@@ -8222,7 +8324,7 @@
       </p:sp>
       <p:sp>
         <p:nvSpPr>
-          <p:cNvPr id="24" name="TextBox 23"/>
+          <p:cNvPr id="23" name="TextBox 22"/>
           <p:cNvSpPr txBox="1"/>
           <p:nvPr/>
         </p:nvSpPr>
@@ -8269,7 +8371,7 @@
       </p:sp>
       <p:sp>
         <p:nvSpPr>
-          <p:cNvPr id="25" name="TextBox 24"/>
+          <p:cNvPr id="24" name="TextBox 23"/>
           <p:cNvSpPr txBox="1"/>
           <p:nvPr/>
         </p:nvSpPr>
@@ -8311,6 +8413,64 @@
               </a:rPr>
               <a:t>동작하는 미니 프로젝트
 (완성 시 1분 데모)</a:t>
+            </a:r>
+          </a:p>
+        </p:txBody>
+      </p:sp>
+      <p:sp>
+        <p:nvSpPr>
+          <p:cNvPr id="25" name="TextBox 24"/>
+          <p:cNvSpPr txBox="1"/>
+          <p:nvPr/>
+        </p:nvSpPr>
+        <p:spPr>
+          <a:xfrm>
+            <a:off x="8988552" y="6419088"/>
+            <a:ext cx="2697480" cy="365760"/>
+          </a:xfrm>
+          <a:prstGeom prst="rect">
+            <a:avLst/>
+          </a:prstGeom>
+          <a:noFill/>
+        </p:spPr>
+        <p:txBody>
+          <a:bodyPr wrap="square" anchor="ctr" lIns="0" rIns="0" tIns="0" bIns="0">
+            <a:spAutoFit/>
+          </a:bodyPr>
+          <a:lstStyle/>
+          <a:p>
+            <a:pPr algn="r">
+              <a:lnSpc>
+                <a:spcPct val="100000"/>
+              </a:lnSpc>
+              <a:spcBef>
+                <a:spcPts val="0"/>
+              </a:spcBef>
+              <a:spcAft>
+                <a:spcPts val="600"/>
+              </a:spcAft>
+            </a:pPr>
+            <a:r>
+              <a:rPr sz="900" b="1">
+                <a:solidFill>
+                  <a:srgbClr val="10B981"/>
+                </a:solidFill>
+                <a:latin typeface="NanumGothic"/>
+                <a:ea typeface="NanumGothic"/>
+                <a:cs typeface="NanumGothic"/>
+              </a:rPr>
+              <a:t>Day 3 · 수</a:t>
+            </a:r>
+            <a:r>
+              <a:rPr sz="900" b="1">
+                <a:solidFill>
+                  <a:srgbClr val="64748B"/>
+                </a:solidFill>
+                <a:latin typeface="NanumGothic"/>
+                <a:ea typeface="NanumGothic"/>
+                <a:cs typeface="NanumGothic"/>
+              </a:rPr>
+              <a:t>   ·   14 / 25</a:t>
             </a:r>
           </a:p>
         </p:txBody>
@@ -8608,54 +8768,7 @@
       </p:sp>
       <p:sp>
         <p:nvSpPr>
-          <p:cNvPr id="8" name="TextBox 7"/>
-          <p:cNvSpPr txBox="1"/>
-          <p:nvPr/>
-        </p:nvSpPr>
-        <p:spPr>
-          <a:xfrm>
-            <a:off x="10241280" y="6419088"/>
-            <a:ext cx="1463040" cy="365760"/>
-          </a:xfrm>
-          <a:prstGeom prst="rect">
-            <a:avLst/>
-          </a:prstGeom>
-          <a:noFill/>
-        </p:spPr>
-        <p:txBody>
-          <a:bodyPr wrap="square" anchor="ctr" lIns="0" rIns="0" tIns="0" bIns="0">
-            <a:spAutoFit/>
-          </a:bodyPr>
-          <a:lstStyle/>
-          <a:p>
-            <a:pPr algn="r">
-              <a:lnSpc>
-                <a:spcPct val="100000"/>
-              </a:lnSpc>
-              <a:spcBef>
-                <a:spcPts val="0"/>
-              </a:spcBef>
-              <a:spcAft>
-                <a:spcPts val="600"/>
-              </a:spcAft>
-            </a:pPr>
-            <a:r>
-              <a:rPr sz="900" b="1">
-                <a:solidFill>
-                  <a:srgbClr val="10B981"/>
-                </a:solidFill>
-                <a:latin typeface="NanumGothic"/>
-                <a:ea typeface="NanumGothic"/>
-                <a:cs typeface="NanumGothic"/>
-              </a:rPr>
-              <a:t>Day 3 · 수</a:t>
-            </a:r>
-          </a:p>
-        </p:txBody>
-      </p:sp>
-      <p:sp>
-        <p:nvSpPr>
-          <p:cNvPr id="9" name="Oval 8"/>
+          <p:cNvPr id="8" name="Oval 7"/>
           <p:cNvSpPr/>
           <p:nvPr/>
         </p:nvSpPr>
@@ -8699,7 +8812,7 @@
       </p:sp>
       <p:sp>
         <p:nvSpPr>
-          <p:cNvPr id="10" name="TextBox 9"/>
+          <p:cNvPr id="9" name="TextBox 8"/>
           <p:cNvSpPr txBox="1"/>
           <p:nvPr/>
         </p:nvSpPr>
@@ -8746,7 +8859,7 @@
       </p:sp>
       <p:sp>
         <p:nvSpPr>
-          <p:cNvPr id="11" name="TextBox 10"/>
+          <p:cNvPr id="10" name="TextBox 9"/>
           <p:cNvSpPr txBox="1"/>
           <p:nvPr/>
         </p:nvSpPr>
@@ -8793,7 +8906,7 @@
       </p:sp>
       <p:sp>
         <p:nvSpPr>
-          <p:cNvPr id="12" name="Oval 11"/>
+          <p:cNvPr id="11" name="Oval 10"/>
           <p:cNvSpPr/>
           <p:nvPr/>
         </p:nvSpPr>
@@ -8837,7 +8950,7 @@
       </p:sp>
       <p:sp>
         <p:nvSpPr>
-          <p:cNvPr id="13" name="TextBox 12"/>
+          <p:cNvPr id="12" name="TextBox 11"/>
           <p:cNvSpPr txBox="1"/>
           <p:nvPr/>
         </p:nvSpPr>
@@ -8884,7 +8997,7 @@
       </p:sp>
       <p:sp>
         <p:nvSpPr>
-          <p:cNvPr id="14" name="TextBox 13"/>
+          <p:cNvPr id="13" name="TextBox 12"/>
           <p:cNvSpPr txBox="1"/>
           <p:nvPr/>
         </p:nvSpPr>
@@ -8925,6 +9038,64 @@
                 <a:cs typeface="NanumGothic"/>
               </a:rPr>
               <a:t>다음 세션 연결</a:t>
+            </a:r>
+          </a:p>
+        </p:txBody>
+      </p:sp>
+      <p:sp>
+        <p:nvSpPr>
+          <p:cNvPr id="14" name="TextBox 13"/>
+          <p:cNvSpPr txBox="1"/>
+          <p:nvPr/>
+        </p:nvSpPr>
+        <p:spPr>
+          <a:xfrm>
+            <a:off x="8988552" y="6419088"/>
+            <a:ext cx="2697480" cy="365760"/>
+          </a:xfrm>
+          <a:prstGeom prst="rect">
+            <a:avLst/>
+          </a:prstGeom>
+          <a:noFill/>
+        </p:spPr>
+        <p:txBody>
+          <a:bodyPr wrap="square" anchor="ctr" lIns="0" rIns="0" tIns="0" bIns="0">
+            <a:spAutoFit/>
+          </a:bodyPr>
+          <a:lstStyle/>
+          <a:p>
+            <a:pPr algn="r">
+              <a:lnSpc>
+                <a:spcPct val="100000"/>
+              </a:lnSpc>
+              <a:spcBef>
+                <a:spcPts val="0"/>
+              </a:spcBef>
+              <a:spcAft>
+                <a:spcPts val="600"/>
+              </a:spcAft>
+            </a:pPr>
+            <a:r>
+              <a:rPr sz="900" b="1">
+                <a:solidFill>
+                  <a:srgbClr val="10B981"/>
+                </a:solidFill>
+                <a:latin typeface="NanumGothic"/>
+                <a:ea typeface="NanumGothic"/>
+                <a:cs typeface="NanumGothic"/>
+              </a:rPr>
+              <a:t>Day 3 · 수</a:t>
+            </a:r>
+            <a:r>
+              <a:rPr sz="900" b="1">
+                <a:solidFill>
+                  <a:srgbClr val="64748B"/>
+                </a:solidFill>
+                <a:latin typeface="NanumGothic"/>
+                <a:ea typeface="NanumGothic"/>
+                <a:cs typeface="NanumGothic"/>
+              </a:rPr>
+              <a:t>   ·   15 / 25</a:t>
             </a:r>
           </a:p>
         </p:txBody>
@@ -9231,6 +9402,64 @@
           </a:p>
         </p:txBody>
       </p:sp>
+      <p:sp>
+        <p:nvSpPr>
+          <p:cNvPr id="8" name="TextBox 7"/>
+          <p:cNvSpPr txBox="1"/>
+          <p:nvPr/>
+        </p:nvSpPr>
+        <p:spPr>
+          <a:xfrm>
+            <a:off x="8988552" y="6419088"/>
+            <a:ext cx="2697480" cy="365760"/>
+          </a:xfrm>
+          <a:prstGeom prst="rect">
+            <a:avLst/>
+          </a:prstGeom>
+          <a:noFill/>
+        </p:spPr>
+        <p:txBody>
+          <a:bodyPr wrap="square" anchor="ctr" lIns="0" rIns="0" tIns="0" bIns="0">
+            <a:spAutoFit/>
+          </a:bodyPr>
+          <a:lstStyle/>
+          <a:p>
+            <a:pPr algn="r">
+              <a:lnSpc>
+                <a:spcPct val="100000"/>
+              </a:lnSpc>
+              <a:spcBef>
+                <a:spcPts val="0"/>
+              </a:spcBef>
+              <a:spcAft>
+                <a:spcPts val="600"/>
+              </a:spcAft>
+            </a:pPr>
+            <a:r>
+              <a:rPr sz="900" b="1">
+                <a:solidFill>
+                  <a:srgbClr val="10B981"/>
+                </a:solidFill>
+                <a:latin typeface="NanumGothic"/>
+                <a:ea typeface="NanumGothic"/>
+                <a:cs typeface="NanumGothic"/>
+              </a:rPr>
+              <a:t>Day 3 · 수</a:t>
+            </a:r>
+            <a:r>
+              <a:rPr sz="900" b="1">
+                <a:solidFill>
+                  <a:srgbClr val="CBD5E1"/>
+                </a:solidFill>
+                <a:latin typeface="NanumGothic"/>
+                <a:ea typeface="NanumGothic"/>
+                <a:cs typeface="NanumGothic"/>
+              </a:rPr>
+              <a:t>   ·   16 / 25</a:t>
+            </a:r>
+          </a:p>
+        </p:txBody>
+      </p:sp>
     </p:spTree>
   </p:cSld>
   <p:clrMapOvr>
@@ -9524,54 +9753,7 @@
       </p:sp>
       <p:sp>
         <p:nvSpPr>
-          <p:cNvPr id="8" name="TextBox 7"/>
-          <p:cNvSpPr txBox="1"/>
-          <p:nvPr/>
-        </p:nvSpPr>
-        <p:spPr>
-          <a:xfrm>
-            <a:off x="10241280" y="6419088"/>
-            <a:ext cx="1463040" cy="365760"/>
-          </a:xfrm>
-          <a:prstGeom prst="rect">
-            <a:avLst/>
-          </a:prstGeom>
-          <a:noFill/>
-        </p:spPr>
-        <p:txBody>
-          <a:bodyPr wrap="square" anchor="ctr" lIns="0" rIns="0" tIns="0" bIns="0">
-            <a:spAutoFit/>
-          </a:bodyPr>
-          <a:lstStyle/>
-          <a:p>
-            <a:pPr algn="r">
-              <a:lnSpc>
-                <a:spcPct val="100000"/>
-              </a:lnSpc>
-              <a:spcBef>
-                <a:spcPts val="0"/>
-              </a:spcBef>
-              <a:spcAft>
-                <a:spcPts val="600"/>
-              </a:spcAft>
-            </a:pPr>
-            <a:r>
-              <a:rPr sz="900" b="1">
-                <a:solidFill>
-                  <a:srgbClr val="10B981"/>
-                </a:solidFill>
-                <a:latin typeface="NanumGothic"/>
-                <a:ea typeface="NanumGothic"/>
-                <a:cs typeface="NanumGothic"/>
-              </a:rPr>
-              <a:t>Day 3 · 수</a:t>
-            </a:r>
-          </a:p>
-        </p:txBody>
-      </p:sp>
-      <p:sp>
-        <p:nvSpPr>
-          <p:cNvPr id="9" name="Rounded Rectangle 8"/>
+          <p:cNvPr id="8" name="Rounded Rectangle 7"/>
           <p:cNvSpPr/>
           <p:nvPr/>
         </p:nvSpPr>
@@ -9617,7 +9799,7 @@
       </p:sp>
       <p:sp>
         <p:nvSpPr>
-          <p:cNvPr id="10" name="TextBox 9"/>
+          <p:cNvPr id="9" name="TextBox 8"/>
           <p:cNvSpPr txBox="1"/>
           <p:nvPr/>
         </p:nvSpPr>
@@ -9664,7 +9846,7 @@
       </p:sp>
       <p:sp>
         <p:nvSpPr>
-          <p:cNvPr id="11" name="TextBox 10"/>
+          <p:cNvPr id="10" name="TextBox 9"/>
           <p:cNvSpPr txBox="1"/>
           <p:nvPr/>
         </p:nvSpPr>
@@ -9711,7 +9893,7 @@
       </p:sp>
       <p:sp>
         <p:nvSpPr>
-          <p:cNvPr id="12" name="Rounded Rectangle 11"/>
+          <p:cNvPr id="11" name="Rounded Rectangle 10"/>
           <p:cNvSpPr/>
           <p:nvPr/>
         </p:nvSpPr>
@@ -9757,7 +9939,7 @@
       </p:sp>
       <p:sp>
         <p:nvSpPr>
-          <p:cNvPr id="13" name="Oval 12"/>
+          <p:cNvPr id="12" name="Oval 11"/>
           <p:cNvSpPr/>
           <p:nvPr/>
         </p:nvSpPr>
@@ -9801,7 +9983,7 @@
       </p:sp>
       <p:sp>
         <p:nvSpPr>
-          <p:cNvPr id="14" name="TextBox 13"/>
+          <p:cNvPr id="13" name="TextBox 12"/>
           <p:cNvSpPr txBox="1"/>
           <p:nvPr/>
         </p:nvSpPr>
@@ -9848,7 +10030,7 @@
       </p:sp>
       <p:sp>
         <p:nvSpPr>
-          <p:cNvPr id="15" name="TextBox 14"/>
+          <p:cNvPr id="14" name="TextBox 13"/>
           <p:cNvSpPr txBox="1"/>
           <p:nvPr/>
         </p:nvSpPr>
@@ -9895,7 +10077,7 @@
       </p:sp>
       <p:sp>
         <p:nvSpPr>
-          <p:cNvPr id="16" name="Rounded Rectangle 15"/>
+          <p:cNvPr id="15" name="Rounded Rectangle 14"/>
           <p:cNvSpPr/>
           <p:nvPr/>
         </p:nvSpPr>
@@ -9941,7 +10123,7 @@
       </p:sp>
       <p:sp>
         <p:nvSpPr>
-          <p:cNvPr id="17" name="Oval 16"/>
+          <p:cNvPr id="16" name="Oval 15"/>
           <p:cNvSpPr/>
           <p:nvPr/>
         </p:nvSpPr>
@@ -9985,7 +10167,7 @@
       </p:sp>
       <p:sp>
         <p:nvSpPr>
-          <p:cNvPr id="18" name="TextBox 17"/>
+          <p:cNvPr id="17" name="TextBox 16"/>
           <p:cNvSpPr txBox="1"/>
           <p:nvPr/>
         </p:nvSpPr>
@@ -10032,7 +10214,7 @@
       </p:sp>
       <p:sp>
         <p:nvSpPr>
-          <p:cNvPr id="19" name="TextBox 18"/>
+          <p:cNvPr id="18" name="TextBox 17"/>
           <p:cNvSpPr txBox="1"/>
           <p:nvPr/>
         </p:nvSpPr>
@@ -10079,7 +10261,7 @@
       </p:sp>
       <p:sp>
         <p:nvSpPr>
-          <p:cNvPr id="20" name="Rounded Rectangle 19"/>
+          <p:cNvPr id="19" name="Rounded Rectangle 18"/>
           <p:cNvSpPr/>
           <p:nvPr/>
         </p:nvSpPr>
@@ -10125,7 +10307,7 @@
       </p:sp>
       <p:sp>
         <p:nvSpPr>
-          <p:cNvPr id="21" name="Oval 20"/>
+          <p:cNvPr id="20" name="Oval 19"/>
           <p:cNvSpPr/>
           <p:nvPr/>
         </p:nvSpPr>
@@ -10169,7 +10351,7 @@
       </p:sp>
       <p:sp>
         <p:nvSpPr>
-          <p:cNvPr id="22" name="TextBox 21"/>
+          <p:cNvPr id="21" name="TextBox 20"/>
           <p:cNvSpPr txBox="1"/>
           <p:nvPr/>
         </p:nvSpPr>
@@ -10216,7 +10398,7 @@
       </p:sp>
       <p:sp>
         <p:nvSpPr>
-          <p:cNvPr id="23" name="TextBox 22"/>
+          <p:cNvPr id="22" name="TextBox 21"/>
           <p:cNvSpPr txBox="1"/>
           <p:nvPr/>
         </p:nvSpPr>
@@ -10263,7 +10445,7 @@
       </p:sp>
       <p:sp>
         <p:nvSpPr>
-          <p:cNvPr id="24" name="Rounded Rectangle 23"/>
+          <p:cNvPr id="23" name="Rounded Rectangle 22"/>
           <p:cNvSpPr/>
           <p:nvPr/>
         </p:nvSpPr>
@@ -10309,7 +10491,7 @@
       </p:sp>
       <p:sp>
         <p:nvSpPr>
-          <p:cNvPr id="25" name="Oval 24"/>
+          <p:cNvPr id="24" name="Oval 23"/>
           <p:cNvSpPr/>
           <p:nvPr/>
         </p:nvSpPr>
@@ -10353,7 +10535,7 @@
       </p:sp>
       <p:sp>
         <p:nvSpPr>
-          <p:cNvPr id="26" name="TextBox 25"/>
+          <p:cNvPr id="25" name="TextBox 24"/>
           <p:cNvSpPr txBox="1"/>
           <p:nvPr/>
         </p:nvSpPr>
@@ -10400,7 +10582,7 @@
       </p:sp>
       <p:sp>
         <p:nvSpPr>
-          <p:cNvPr id="27" name="TextBox 26"/>
+          <p:cNvPr id="26" name="TextBox 25"/>
           <p:cNvSpPr txBox="1"/>
           <p:nvPr/>
         </p:nvSpPr>
@@ -10447,7 +10629,7 @@
       </p:sp>
       <p:sp>
         <p:nvSpPr>
-          <p:cNvPr id="28" name="Rounded Rectangle 27"/>
+          <p:cNvPr id="27" name="Rounded Rectangle 26"/>
           <p:cNvSpPr/>
           <p:nvPr/>
         </p:nvSpPr>
@@ -10493,7 +10675,7 @@
       </p:sp>
       <p:sp>
         <p:nvSpPr>
-          <p:cNvPr id="29" name="Oval 28"/>
+          <p:cNvPr id="28" name="Oval 27"/>
           <p:cNvSpPr/>
           <p:nvPr/>
         </p:nvSpPr>
@@ -10537,7 +10719,7 @@
       </p:sp>
       <p:sp>
         <p:nvSpPr>
-          <p:cNvPr id="30" name="TextBox 29"/>
+          <p:cNvPr id="29" name="TextBox 28"/>
           <p:cNvSpPr txBox="1"/>
           <p:nvPr/>
         </p:nvSpPr>
@@ -10584,7 +10766,7 @@
       </p:sp>
       <p:sp>
         <p:nvSpPr>
-          <p:cNvPr id="31" name="TextBox 30"/>
+          <p:cNvPr id="30" name="TextBox 29"/>
           <p:cNvSpPr txBox="1"/>
           <p:nvPr/>
         </p:nvSpPr>
@@ -10631,7 +10813,7 @@
       </p:sp>
       <p:sp>
         <p:nvSpPr>
-          <p:cNvPr id="32" name="Rounded Rectangle 31"/>
+          <p:cNvPr id="31" name="Rounded Rectangle 30"/>
           <p:cNvSpPr/>
           <p:nvPr/>
         </p:nvSpPr>
@@ -10677,7 +10859,7 @@
       </p:sp>
       <p:sp>
         <p:nvSpPr>
-          <p:cNvPr id="33" name="Oval 32"/>
+          <p:cNvPr id="32" name="Oval 31"/>
           <p:cNvSpPr/>
           <p:nvPr/>
         </p:nvSpPr>
@@ -10721,7 +10903,7 @@
       </p:sp>
       <p:sp>
         <p:nvSpPr>
-          <p:cNvPr id="34" name="TextBox 33"/>
+          <p:cNvPr id="33" name="TextBox 32"/>
           <p:cNvSpPr txBox="1"/>
           <p:nvPr/>
         </p:nvSpPr>
@@ -10768,7 +10950,7 @@
       </p:sp>
       <p:sp>
         <p:nvSpPr>
-          <p:cNvPr id="35" name="TextBox 34"/>
+          <p:cNvPr id="34" name="TextBox 33"/>
           <p:cNvSpPr txBox="1"/>
           <p:nvPr/>
         </p:nvSpPr>
@@ -10815,7 +10997,7 @@
       </p:sp>
       <p:sp>
         <p:nvSpPr>
-          <p:cNvPr id="36" name="Rounded Rectangle 35"/>
+          <p:cNvPr id="35" name="Rounded Rectangle 34"/>
           <p:cNvSpPr/>
           <p:nvPr/>
         </p:nvSpPr>
@@ -10861,7 +11043,7 @@
       </p:sp>
       <p:sp>
         <p:nvSpPr>
-          <p:cNvPr id="37" name="Oval 36"/>
+          <p:cNvPr id="36" name="Oval 35"/>
           <p:cNvSpPr/>
           <p:nvPr/>
         </p:nvSpPr>
@@ -10905,7 +11087,7 @@
       </p:sp>
       <p:sp>
         <p:nvSpPr>
-          <p:cNvPr id="38" name="TextBox 37"/>
+          <p:cNvPr id="37" name="TextBox 36"/>
           <p:cNvSpPr txBox="1"/>
           <p:nvPr/>
         </p:nvSpPr>
@@ -10952,7 +11134,7 @@
       </p:sp>
       <p:sp>
         <p:nvSpPr>
-          <p:cNvPr id="39" name="TextBox 38"/>
+          <p:cNvPr id="38" name="TextBox 37"/>
           <p:cNvSpPr txBox="1"/>
           <p:nvPr/>
         </p:nvSpPr>
@@ -10993,6 +11175,64 @@
                 <a:cs typeface="NanumGothic"/>
               </a:rPr>
               <a:t>팀 구성·주제·기획(실습)</a:t>
+            </a:r>
+          </a:p>
+        </p:txBody>
+      </p:sp>
+      <p:sp>
+        <p:nvSpPr>
+          <p:cNvPr id="39" name="TextBox 38"/>
+          <p:cNvSpPr txBox="1"/>
+          <p:nvPr/>
+        </p:nvSpPr>
+        <p:spPr>
+          <a:xfrm>
+            <a:off x="8988552" y="6419088"/>
+            <a:ext cx="2697480" cy="365760"/>
+          </a:xfrm>
+          <a:prstGeom prst="rect">
+            <a:avLst/>
+          </a:prstGeom>
+          <a:noFill/>
+        </p:spPr>
+        <p:txBody>
+          <a:bodyPr wrap="square" anchor="ctr" lIns="0" rIns="0" tIns="0" bIns="0">
+            <a:spAutoFit/>
+          </a:bodyPr>
+          <a:lstStyle/>
+          <a:p>
+            <a:pPr algn="r">
+              <a:lnSpc>
+                <a:spcPct val="100000"/>
+              </a:lnSpc>
+              <a:spcBef>
+                <a:spcPts val="0"/>
+              </a:spcBef>
+              <a:spcAft>
+                <a:spcPts val="600"/>
+              </a:spcAft>
+            </a:pPr>
+            <a:r>
+              <a:rPr sz="900" b="1">
+                <a:solidFill>
+                  <a:srgbClr val="10B981"/>
+                </a:solidFill>
+                <a:latin typeface="NanumGothic"/>
+                <a:ea typeface="NanumGothic"/>
+                <a:cs typeface="NanumGothic"/>
+              </a:rPr>
+              <a:t>Day 3 · 수</a:t>
+            </a:r>
+            <a:r>
+              <a:rPr sz="900" b="1">
+                <a:solidFill>
+                  <a:srgbClr val="64748B"/>
+                </a:solidFill>
+                <a:latin typeface="NanumGothic"/>
+                <a:ea typeface="NanumGothic"/>
+                <a:cs typeface="NanumGothic"/>
+              </a:rPr>
+              <a:t>   ·   17 / 25</a:t>
             </a:r>
           </a:p>
         </p:txBody>
@@ -11290,54 +11530,7 @@
       </p:sp>
       <p:sp>
         <p:nvSpPr>
-          <p:cNvPr id="8" name="TextBox 7"/>
-          <p:cNvSpPr txBox="1"/>
-          <p:nvPr/>
-        </p:nvSpPr>
-        <p:spPr>
-          <a:xfrm>
-            <a:off x="10241280" y="6419088"/>
-            <a:ext cx="1463040" cy="365760"/>
-          </a:xfrm>
-          <a:prstGeom prst="rect">
-            <a:avLst/>
-          </a:prstGeom>
-          <a:noFill/>
-        </p:spPr>
-        <p:txBody>
-          <a:bodyPr wrap="square" anchor="ctr" lIns="0" rIns="0" tIns="0" bIns="0">
-            <a:spAutoFit/>
-          </a:bodyPr>
-          <a:lstStyle/>
-          <a:p>
-            <a:pPr algn="r">
-              <a:lnSpc>
-                <a:spcPct val="100000"/>
-              </a:lnSpc>
-              <a:spcBef>
-                <a:spcPts val="0"/>
-              </a:spcBef>
-              <a:spcAft>
-                <a:spcPts val="600"/>
-              </a:spcAft>
-            </a:pPr>
-            <a:r>
-              <a:rPr sz="900" b="1">
-                <a:solidFill>
-                  <a:srgbClr val="10B981"/>
-                </a:solidFill>
-                <a:latin typeface="NanumGothic"/>
-                <a:ea typeface="NanumGothic"/>
-                <a:cs typeface="NanumGothic"/>
-              </a:rPr>
-              <a:t>Day 3 · 수</a:t>
-            </a:r>
-          </a:p>
-        </p:txBody>
-      </p:sp>
-      <p:sp>
-        <p:nvSpPr>
-          <p:cNvPr id="9" name="Rounded Rectangle 8"/>
+          <p:cNvPr id="8" name="Rounded Rectangle 7"/>
           <p:cNvSpPr/>
           <p:nvPr/>
         </p:nvSpPr>
@@ -11383,7 +11576,7 @@
       </p:sp>
       <p:sp>
         <p:nvSpPr>
-          <p:cNvPr id="10" name="Rectangle 9"/>
+          <p:cNvPr id="9" name="Rectangle 8"/>
           <p:cNvSpPr/>
           <p:nvPr/>
         </p:nvSpPr>
@@ -11427,7 +11620,7 @@
       </p:sp>
       <p:sp>
         <p:nvSpPr>
-          <p:cNvPr id="11" name="TextBox 10"/>
+          <p:cNvPr id="10" name="TextBox 9"/>
           <p:cNvSpPr txBox="1"/>
           <p:nvPr/>
         </p:nvSpPr>
@@ -11474,7 +11667,7 @@
       </p:sp>
       <p:sp>
         <p:nvSpPr>
-          <p:cNvPr id="12" name="TextBox 11"/>
+          <p:cNvPr id="11" name="TextBox 10"/>
           <p:cNvSpPr txBox="1"/>
           <p:nvPr/>
         </p:nvSpPr>
@@ -11521,7 +11714,7 @@
       </p:sp>
       <p:sp>
         <p:nvSpPr>
-          <p:cNvPr id="13" name="TextBox 12"/>
+          <p:cNvPr id="12" name="TextBox 11"/>
           <p:cNvSpPr txBox="1"/>
           <p:nvPr/>
         </p:nvSpPr>
@@ -11568,7 +11761,7 @@
       </p:sp>
       <p:sp>
         <p:nvSpPr>
-          <p:cNvPr id="14" name="TextBox 13"/>
+          <p:cNvPr id="13" name="TextBox 12"/>
           <p:cNvSpPr txBox="1"/>
           <p:nvPr/>
         </p:nvSpPr>
@@ -11615,7 +11808,7 @@
       </p:sp>
       <p:sp>
         <p:nvSpPr>
-          <p:cNvPr id="15" name="Rounded Rectangle 14"/>
+          <p:cNvPr id="14" name="Rounded Rectangle 13"/>
           <p:cNvSpPr/>
           <p:nvPr/>
         </p:nvSpPr>
@@ -11661,7 +11854,7 @@
       </p:sp>
       <p:sp>
         <p:nvSpPr>
-          <p:cNvPr id="16" name="Rectangle 15"/>
+          <p:cNvPr id="15" name="Rectangle 14"/>
           <p:cNvSpPr/>
           <p:nvPr/>
         </p:nvSpPr>
@@ -11705,7 +11898,7 @@
       </p:sp>
       <p:sp>
         <p:nvSpPr>
-          <p:cNvPr id="17" name="TextBox 16"/>
+          <p:cNvPr id="16" name="TextBox 15"/>
           <p:cNvSpPr txBox="1"/>
           <p:nvPr/>
         </p:nvSpPr>
@@ -11752,7 +11945,7 @@
       </p:sp>
       <p:sp>
         <p:nvSpPr>
-          <p:cNvPr id="18" name="TextBox 17"/>
+          <p:cNvPr id="17" name="TextBox 16"/>
           <p:cNvSpPr txBox="1"/>
           <p:nvPr/>
         </p:nvSpPr>
@@ -11799,7 +11992,7 @@
       </p:sp>
       <p:sp>
         <p:nvSpPr>
-          <p:cNvPr id="19" name="TextBox 18"/>
+          <p:cNvPr id="18" name="TextBox 17"/>
           <p:cNvSpPr txBox="1"/>
           <p:nvPr/>
         </p:nvSpPr>
@@ -11846,7 +12039,7 @@
       </p:sp>
       <p:sp>
         <p:nvSpPr>
-          <p:cNvPr id="20" name="TextBox 19"/>
+          <p:cNvPr id="19" name="TextBox 18"/>
           <p:cNvSpPr txBox="1"/>
           <p:nvPr/>
         </p:nvSpPr>
@@ -11893,7 +12086,7 @@
       </p:sp>
       <p:sp>
         <p:nvSpPr>
-          <p:cNvPr id="21" name="Rounded Rectangle 20"/>
+          <p:cNvPr id="20" name="Rounded Rectangle 19"/>
           <p:cNvSpPr/>
           <p:nvPr/>
         </p:nvSpPr>
@@ -11939,7 +12132,7 @@
       </p:sp>
       <p:sp>
         <p:nvSpPr>
-          <p:cNvPr id="22" name="Rectangle 21"/>
+          <p:cNvPr id="21" name="Rectangle 20"/>
           <p:cNvSpPr/>
           <p:nvPr/>
         </p:nvSpPr>
@@ -11983,7 +12176,7 @@
       </p:sp>
       <p:sp>
         <p:nvSpPr>
-          <p:cNvPr id="23" name="TextBox 22"/>
+          <p:cNvPr id="22" name="TextBox 21"/>
           <p:cNvSpPr txBox="1"/>
           <p:nvPr/>
         </p:nvSpPr>
@@ -12030,7 +12223,7 @@
       </p:sp>
       <p:sp>
         <p:nvSpPr>
-          <p:cNvPr id="24" name="TextBox 23"/>
+          <p:cNvPr id="23" name="TextBox 22"/>
           <p:cNvSpPr txBox="1"/>
           <p:nvPr/>
         </p:nvSpPr>
@@ -12077,7 +12270,7 @@
       </p:sp>
       <p:sp>
         <p:nvSpPr>
-          <p:cNvPr id="25" name="TextBox 24"/>
+          <p:cNvPr id="24" name="TextBox 23"/>
           <p:cNvSpPr txBox="1"/>
           <p:nvPr/>
         </p:nvSpPr>
@@ -12124,7 +12317,7 @@
       </p:sp>
       <p:sp>
         <p:nvSpPr>
-          <p:cNvPr id="26" name="TextBox 25"/>
+          <p:cNvPr id="25" name="TextBox 24"/>
           <p:cNvSpPr txBox="1"/>
           <p:nvPr/>
         </p:nvSpPr>
@@ -12171,7 +12364,7 @@
       </p:sp>
       <p:sp>
         <p:nvSpPr>
-          <p:cNvPr id="27" name="Rounded Rectangle 26"/>
+          <p:cNvPr id="26" name="Rounded Rectangle 25"/>
           <p:cNvSpPr/>
           <p:nvPr/>
         </p:nvSpPr>
@@ -12217,7 +12410,7 @@
       </p:sp>
       <p:sp>
         <p:nvSpPr>
-          <p:cNvPr id="28" name="Rectangle 27"/>
+          <p:cNvPr id="27" name="Rectangle 26"/>
           <p:cNvSpPr/>
           <p:nvPr/>
         </p:nvSpPr>
@@ -12261,7 +12454,7 @@
       </p:sp>
       <p:sp>
         <p:nvSpPr>
-          <p:cNvPr id="29" name="TextBox 28"/>
+          <p:cNvPr id="28" name="TextBox 27"/>
           <p:cNvSpPr txBox="1"/>
           <p:nvPr/>
         </p:nvSpPr>
@@ -12308,7 +12501,7 @@
       </p:sp>
       <p:sp>
         <p:nvSpPr>
-          <p:cNvPr id="30" name="TextBox 29"/>
+          <p:cNvPr id="29" name="TextBox 28"/>
           <p:cNvSpPr txBox="1"/>
           <p:nvPr/>
         </p:nvSpPr>
@@ -12355,7 +12548,7 @@
       </p:sp>
       <p:sp>
         <p:nvSpPr>
-          <p:cNvPr id="31" name="TextBox 30"/>
+          <p:cNvPr id="30" name="TextBox 29"/>
           <p:cNvSpPr txBox="1"/>
           <p:nvPr/>
         </p:nvSpPr>
@@ -12402,7 +12595,7 @@
       </p:sp>
       <p:sp>
         <p:nvSpPr>
-          <p:cNvPr id="32" name="TextBox 31"/>
+          <p:cNvPr id="31" name="TextBox 30"/>
           <p:cNvSpPr txBox="1"/>
           <p:nvPr/>
         </p:nvSpPr>
@@ -12449,7 +12642,7 @@
       </p:sp>
       <p:sp>
         <p:nvSpPr>
-          <p:cNvPr id="33" name="Rounded Rectangle 32"/>
+          <p:cNvPr id="32" name="Rounded Rectangle 31"/>
           <p:cNvSpPr/>
           <p:nvPr/>
         </p:nvSpPr>
@@ -12495,7 +12688,7 @@
       </p:sp>
       <p:sp>
         <p:nvSpPr>
-          <p:cNvPr id="34" name="Rectangle 33"/>
+          <p:cNvPr id="33" name="Rectangle 32"/>
           <p:cNvSpPr/>
           <p:nvPr/>
         </p:nvSpPr>
@@ -12539,7 +12732,7 @@
       </p:sp>
       <p:sp>
         <p:nvSpPr>
-          <p:cNvPr id="35" name="TextBox 34"/>
+          <p:cNvPr id="34" name="TextBox 33"/>
           <p:cNvSpPr txBox="1"/>
           <p:nvPr/>
         </p:nvSpPr>
@@ -12586,7 +12779,7 @@
       </p:sp>
       <p:sp>
         <p:nvSpPr>
-          <p:cNvPr id="36" name="TextBox 35"/>
+          <p:cNvPr id="35" name="TextBox 34"/>
           <p:cNvSpPr txBox="1"/>
           <p:nvPr/>
         </p:nvSpPr>
@@ -12633,7 +12826,7 @@
       </p:sp>
       <p:sp>
         <p:nvSpPr>
-          <p:cNvPr id="37" name="TextBox 36"/>
+          <p:cNvPr id="36" name="TextBox 35"/>
           <p:cNvSpPr txBox="1"/>
           <p:nvPr/>
         </p:nvSpPr>
@@ -12680,7 +12873,7 @@
       </p:sp>
       <p:sp>
         <p:nvSpPr>
-          <p:cNvPr id="38" name="Rounded Rectangle 37"/>
+          <p:cNvPr id="37" name="Rounded Rectangle 36"/>
           <p:cNvSpPr/>
           <p:nvPr/>
         </p:nvSpPr>
@@ -12726,7 +12919,7 @@
       </p:sp>
       <p:sp>
         <p:nvSpPr>
-          <p:cNvPr id="39" name="TextBox 38"/>
+          <p:cNvPr id="38" name="TextBox 37"/>
           <p:cNvSpPr txBox="1"/>
           <p:nvPr/>
         </p:nvSpPr>
@@ -12778,6 +12971,64 @@
                 <a:cs typeface="NanumGothic"/>
               </a:rPr>
               <a:t>현실은 선형이 아니라 반복 — '재현'은 비싸서 보통 '검증'에 가깝다</a:t>
+            </a:r>
+          </a:p>
+        </p:txBody>
+      </p:sp>
+      <p:sp>
+        <p:nvSpPr>
+          <p:cNvPr id="39" name="TextBox 38"/>
+          <p:cNvSpPr txBox="1"/>
+          <p:nvPr/>
+        </p:nvSpPr>
+        <p:spPr>
+          <a:xfrm>
+            <a:off x="8988552" y="6419088"/>
+            <a:ext cx="2697480" cy="365760"/>
+          </a:xfrm>
+          <a:prstGeom prst="rect">
+            <a:avLst/>
+          </a:prstGeom>
+          <a:noFill/>
+        </p:spPr>
+        <p:txBody>
+          <a:bodyPr wrap="square" anchor="ctr" lIns="0" rIns="0" tIns="0" bIns="0">
+            <a:spAutoFit/>
+          </a:bodyPr>
+          <a:lstStyle/>
+          <a:p>
+            <a:pPr algn="r">
+              <a:lnSpc>
+                <a:spcPct val="100000"/>
+              </a:lnSpc>
+              <a:spcBef>
+                <a:spcPts val="0"/>
+              </a:spcBef>
+              <a:spcAft>
+                <a:spcPts val="600"/>
+              </a:spcAft>
+            </a:pPr>
+            <a:r>
+              <a:rPr sz="900" b="1">
+                <a:solidFill>
+                  <a:srgbClr val="10B981"/>
+                </a:solidFill>
+                <a:latin typeface="NanumGothic"/>
+                <a:ea typeface="NanumGothic"/>
+                <a:cs typeface="NanumGothic"/>
+              </a:rPr>
+              <a:t>Day 3 · 수</a:t>
+            </a:r>
+            <a:r>
+              <a:rPr sz="900" b="1">
+                <a:solidFill>
+                  <a:srgbClr val="64748B"/>
+                </a:solidFill>
+                <a:latin typeface="NanumGothic"/>
+                <a:ea typeface="NanumGothic"/>
+                <a:cs typeface="NanumGothic"/>
+              </a:rPr>
+              <a:t>   ·   18 / 25</a:t>
             </a:r>
           </a:p>
         </p:txBody>
@@ -13075,54 +13326,7 @@
       </p:sp>
       <p:sp>
         <p:nvSpPr>
-          <p:cNvPr id="8" name="TextBox 7"/>
-          <p:cNvSpPr txBox="1"/>
-          <p:nvPr/>
-        </p:nvSpPr>
-        <p:spPr>
-          <a:xfrm>
-            <a:off x="10241280" y="6419088"/>
-            <a:ext cx="1463040" cy="365760"/>
-          </a:xfrm>
-          <a:prstGeom prst="rect">
-            <a:avLst/>
-          </a:prstGeom>
-          <a:noFill/>
-        </p:spPr>
-        <p:txBody>
-          <a:bodyPr wrap="square" anchor="ctr" lIns="0" rIns="0" tIns="0" bIns="0">
-            <a:spAutoFit/>
-          </a:bodyPr>
-          <a:lstStyle/>
-          <a:p>
-            <a:pPr algn="r">
-              <a:lnSpc>
-                <a:spcPct val="100000"/>
-              </a:lnSpc>
-              <a:spcBef>
-                <a:spcPts val="0"/>
-              </a:spcBef>
-              <a:spcAft>
-                <a:spcPts val="600"/>
-              </a:spcAft>
-            </a:pPr>
-            <a:r>
-              <a:rPr sz="900" b="1">
-                <a:solidFill>
-                  <a:srgbClr val="10B981"/>
-                </a:solidFill>
-                <a:latin typeface="NanumGothic"/>
-                <a:ea typeface="NanumGothic"/>
-                <a:cs typeface="NanumGothic"/>
-              </a:rPr>
-              <a:t>Day 3 · 수</a:t>
-            </a:r>
-          </a:p>
-        </p:txBody>
-      </p:sp>
-      <p:sp>
-        <p:nvSpPr>
-          <p:cNvPr id="9" name="Oval 8"/>
+          <p:cNvPr id="8" name="Oval 7"/>
           <p:cNvSpPr/>
           <p:nvPr/>
         </p:nvSpPr>
@@ -13166,7 +13370,7 @@
       </p:sp>
       <p:sp>
         <p:nvSpPr>
-          <p:cNvPr id="10" name="TextBox 9"/>
+          <p:cNvPr id="9" name="TextBox 8"/>
           <p:cNvSpPr txBox="1"/>
           <p:nvPr/>
         </p:nvSpPr>
@@ -13213,7 +13417,7 @@
       </p:sp>
       <p:sp>
         <p:nvSpPr>
-          <p:cNvPr id="11" name="TextBox 10"/>
+          <p:cNvPr id="10" name="TextBox 9"/>
           <p:cNvSpPr txBox="1"/>
           <p:nvPr/>
         </p:nvSpPr>
@@ -13260,7 +13464,7 @@
       </p:sp>
       <p:sp>
         <p:nvSpPr>
-          <p:cNvPr id="12" name="Oval 11"/>
+          <p:cNvPr id="11" name="Oval 10"/>
           <p:cNvSpPr/>
           <p:nvPr/>
         </p:nvSpPr>
@@ -13304,7 +13508,7 @@
       </p:sp>
       <p:sp>
         <p:nvSpPr>
-          <p:cNvPr id="13" name="TextBox 12"/>
+          <p:cNvPr id="12" name="TextBox 11"/>
           <p:cNvSpPr txBox="1"/>
           <p:nvPr/>
         </p:nvSpPr>
@@ -13351,7 +13555,7 @@
       </p:sp>
       <p:sp>
         <p:nvSpPr>
-          <p:cNvPr id="14" name="TextBox 13"/>
+          <p:cNvPr id="13" name="TextBox 12"/>
           <p:cNvSpPr txBox="1"/>
           <p:nvPr/>
         </p:nvSpPr>
@@ -13398,7 +13602,7 @@
       </p:sp>
       <p:sp>
         <p:nvSpPr>
-          <p:cNvPr id="15" name="Oval 14"/>
+          <p:cNvPr id="14" name="Oval 13"/>
           <p:cNvSpPr/>
           <p:nvPr/>
         </p:nvSpPr>
@@ -13442,7 +13646,7 @@
       </p:sp>
       <p:sp>
         <p:nvSpPr>
-          <p:cNvPr id="16" name="TextBox 15"/>
+          <p:cNvPr id="15" name="TextBox 14"/>
           <p:cNvSpPr txBox="1"/>
           <p:nvPr/>
         </p:nvSpPr>
@@ -13489,7 +13693,7 @@
       </p:sp>
       <p:sp>
         <p:nvSpPr>
-          <p:cNvPr id="17" name="TextBox 16"/>
+          <p:cNvPr id="16" name="TextBox 15"/>
           <p:cNvSpPr txBox="1"/>
           <p:nvPr/>
         </p:nvSpPr>
@@ -13536,7 +13740,7 @@
       </p:sp>
       <p:sp>
         <p:nvSpPr>
-          <p:cNvPr id="18" name="Rounded Rectangle 17"/>
+          <p:cNvPr id="17" name="Rounded Rectangle 16"/>
           <p:cNvSpPr/>
           <p:nvPr/>
         </p:nvSpPr>
@@ -13582,7 +13786,7 @@
       </p:sp>
       <p:sp>
         <p:nvSpPr>
-          <p:cNvPr id="19" name="TextBox 18"/>
+          <p:cNvPr id="18" name="TextBox 17"/>
           <p:cNvSpPr txBox="1"/>
           <p:nvPr/>
         </p:nvSpPr>
@@ -13634,6 +13838,64 @@
                 <a:cs typeface="NanumGothic"/>
               </a:rPr>
               <a:t>이 단계들이 곧 리서치 에이전트가 다루는 부분</a:t>
+            </a:r>
+          </a:p>
+        </p:txBody>
+      </p:sp>
+      <p:sp>
+        <p:nvSpPr>
+          <p:cNvPr id="19" name="TextBox 18"/>
+          <p:cNvSpPr txBox="1"/>
+          <p:nvPr/>
+        </p:nvSpPr>
+        <p:spPr>
+          <a:xfrm>
+            <a:off x="8988552" y="6419088"/>
+            <a:ext cx="2697480" cy="365760"/>
+          </a:xfrm>
+          <a:prstGeom prst="rect">
+            <a:avLst/>
+          </a:prstGeom>
+          <a:noFill/>
+        </p:spPr>
+        <p:txBody>
+          <a:bodyPr wrap="square" anchor="ctr" lIns="0" rIns="0" tIns="0" bIns="0">
+            <a:spAutoFit/>
+          </a:bodyPr>
+          <a:lstStyle/>
+          <a:p>
+            <a:pPr algn="r">
+              <a:lnSpc>
+                <a:spcPct val="100000"/>
+              </a:lnSpc>
+              <a:spcBef>
+                <a:spcPts val="0"/>
+              </a:spcBef>
+              <a:spcAft>
+                <a:spcPts val="600"/>
+              </a:spcAft>
+            </a:pPr>
+            <a:r>
+              <a:rPr sz="900" b="1">
+                <a:solidFill>
+                  <a:srgbClr val="10B981"/>
+                </a:solidFill>
+                <a:latin typeface="NanumGothic"/>
+                <a:ea typeface="NanumGothic"/>
+                <a:cs typeface="NanumGothic"/>
+              </a:rPr>
+              <a:t>Day 3 · 수</a:t>
+            </a:r>
+            <a:r>
+              <a:rPr sz="900" b="1">
+                <a:solidFill>
+                  <a:srgbClr val="64748B"/>
+                </a:solidFill>
+                <a:latin typeface="NanumGothic"/>
+                <a:ea typeface="NanumGothic"/>
+                <a:cs typeface="NanumGothic"/>
+              </a:rPr>
+              <a:t>   ·   19 / 25</a:t>
             </a:r>
           </a:p>
         </p:txBody>
@@ -13931,54 +14193,7 @@
       </p:sp>
       <p:sp>
         <p:nvSpPr>
-          <p:cNvPr id="8" name="TextBox 7"/>
-          <p:cNvSpPr txBox="1"/>
-          <p:nvPr/>
-        </p:nvSpPr>
-        <p:spPr>
-          <a:xfrm>
-            <a:off x="10241280" y="6419088"/>
-            <a:ext cx="1463040" cy="365760"/>
-          </a:xfrm>
-          <a:prstGeom prst="rect">
-            <a:avLst/>
-          </a:prstGeom>
-          <a:noFill/>
-        </p:spPr>
-        <p:txBody>
-          <a:bodyPr wrap="square" anchor="ctr" lIns="0" rIns="0" tIns="0" bIns="0">
-            <a:spAutoFit/>
-          </a:bodyPr>
-          <a:lstStyle/>
-          <a:p>
-            <a:pPr algn="r">
-              <a:lnSpc>
-                <a:spcPct val="100000"/>
-              </a:lnSpc>
-              <a:spcBef>
-                <a:spcPts val="0"/>
-              </a:spcBef>
-              <a:spcAft>
-                <a:spcPts val="600"/>
-              </a:spcAft>
-            </a:pPr>
-            <a:r>
-              <a:rPr sz="900" b="1">
-                <a:solidFill>
-                  <a:srgbClr val="10B981"/>
-                </a:solidFill>
-                <a:latin typeface="NanumGothic"/>
-                <a:ea typeface="NanumGothic"/>
-                <a:cs typeface="NanumGothic"/>
-              </a:rPr>
-              <a:t>Day 3 · 수</a:t>
-            </a:r>
-          </a:p>
-        </p:txBody>
-      </p:sp>
-      <p:sp>
-        <p:nvSpPr>
-          <p:cNvPr id="9" name="Rounded Rectangle 8"/>
+          <p:cNvPr id="8" name="Rounded Rectangle 7"/>
           <p:cNvSpPr/>
           <p:nvPr/>
         </p:nvSpPr>
@@ -14024,7 +14239,7 @@
       </p:sp>
       <p:sp>
         <p:nvSpPr>
-          <p:cNvPr id="10" name="TextBox 9"/>
+          <p:cNvPr id="9" name="TextBox 8"/>
           <p:cNvSpPr txBox="1"/>
           <p:nvPr/>
         </p:nvSpPr>
@@ -14095,7 +14310,7 @@
       </p:sp>
       <p:sp>
         <p:nvSpPr>
-          <p:cNvPr id="11" name="TextBox 10"/>
+          <p:cNvPr id="10" name="TextBox 9"/>
           <p:cNvSpPr txBox="1"/>
           <p:nvPr/>
         </p:nvSpPr>
@@ -14142,7 +14357,7 @@
       </p:sp>
       <p:sp>
         <p:nvSpPr>
-          <p:cNvPr id="12" name="Rounded Rectangle 11"/>
+          <p:cNvPr id="11" name="Rounded Rectangle 10"/>
           <p:cNvSpPr/>
           <p:nvPr/>
         </p:nvSpPr>
@@ -14188,7 +14403,7 @@
       </p:sp>
       <p:sp>
         <p:nvSpPr>
-          <p:cNvPr id="13" name="TextBox 12"/>
+          <p:cNvPr id="12" name="TextBox 11"/>
           <p:cNvSpPr txBox="1"/>
           <p:nvPr/>
         </p:nvSpPr>
@@ -14259,7 +14474,7 @@
       </p:sp>
       <p:sp>
         <p:nvSpPr>
-          <p:cNvPr id="14" name="TextBox 13"/>
+          <p:cNvPr id="13" name="TextBox 12"/>
           <p:cNvSpPr txBox="1"/>
           <p:nvPr/>
         </p:nvSpPr>
@@ -14306,7 +14521,7 @@
       </p:sp>
       <p:sp>
         <p:nvSpPr>
-          <p:cNvPr id="15" name="Rounded Rectangle 14"/>
+          <p:cNvPr id="14" name="Rounded Rectangle 13"/>
           <p:cNvSpPr/>
           <p:nvPr/>
         </p:nvSpPr>
@@ -14350,7 +14565,7 @@
       </p:sp>
       <p:sp>
         <p:nvSpPr>
-          <p:cNvPr id="16" name="TextBox 15"/>
+          <p:cNvPr id="15" name="TextBox 14"/>
           <p:cNvSpPr txBox="1"/>
           <p:nvPr/>
         </p:nvSpPr>
@@ -14421,7 +14636,7 @@
       </p:sp>
       <p:sp>
         <p:nvSpPr>
-          <p:cNvPr id="17" name="TextBox 16"/>
+          <p:cNvPr id="16" name="TextBox 15"/>
           <p:cNvSpPr txBox="1"/>
           <p:nvPr/>
         </p:nvSpPr>
@@ -14468,7 +14683,7 @@
       </p:sp>
       <p:sp>
         <p:nvSpPr>
-          <p:cNvPr id="18" name="TextBox 17"/>
+          <p:cNvPr id="17" name="TextBox 16"/>
           <p:cNvSpPr txBox="1"/>
           <p:nvPr/>
         </p:nvSpPr>
@@ -14515,7 +14730,7 @@
       </p:sp>
       <p:sp>
         <p:nvSpPr>
-          <p:cNvPr id="19" name="Rounded Rectangle 18"/>
+          <p:cNvPr id="18" name="Rounded Rectangle 17"/>
           <p:cNvSpPr/>
           <p:nvPr/>
         </p:nvSpPr>
@@ -14561,7 +14776,7 @@
       </p:sp>
       <p:sp>
         <p:nvSpPr>
-          <p:cNvPr id="20" name="TextBox 19"/>
+          <p:cNvPr id="19" name="TextBox 18"/>
           <p:cNvSpPr txBox="1"/>
           <p:nvPr/>
         </p:nvSpPr>
@@ -14632,7 +14847,7 @@
       </p:sp>
       <p:sp>
         <p:nvSpPr>
-          <p:cNvPr id="21" name="TextBox 20"/>
+          <p:cNvPr id="20" name="TextBox 19"/>
           <p:cNvSpPr txBox="1"/>
           <p:nvPr/>
         </p:nvSpPr>
@@ -14679,7 +14894,7 @@
       </p:sp>
       <p:sp>
         <p:nvSpPr>
-          <p:cNvPr id="22" name="Rounded Rectangle 21"/>
+          <p:cNvPr id="21" name="Rounded Rectangle 20"/>
           <p:cNvSpPr/>
           <p:nvPr/>
         </p:nvSpPr>
@@ -14725,7 +14940,7 @@
       </p:sp>
       <p:sp>
         <p:nvSpPr>
-          <p:cNvPr id="23" name="TextBox 22"/>
+          <p:cNvPr id="22" name="TextBox 21"/>
           <p:cNvSpPr txBox="1"/>
           <p:nvPr/>
         </p:nvSpPr>
@@ -14796,7 +15011,7 @@
       </p:sp>
       <p:sp>
         <p:nvSpPr>
-          <p:cNvPr id="24" name="TextBox 23"/>
+          <p:cNvPr id="23" name="TextBox 22"/>
           <p:cNvSpPr txBox="1"/>
           <p:nvPr/>
         </p:nvSpPr>
@@ -14843,7 +15058,7 @@
       </p:sp>
       <p:sp>
         <p:nvSpPr>
-          <p:cNvPr id="25" name="TextBox 24"/>
+          <p:cNvPr id="24" name="TextBox 23"/>
           <p:cNvSpPr txBox="1"/>
           <p:nvPr/>
         </p:nvSpPr>
@@ -14895,6 +15110,64 @@
                 <a:cs typeface="NanumGothic"/>
               </a:rPr>
               <a:t>이론 → 도구 → 실전 → 결과 → 발표</a:t>
+            </a:r>
+          </a:p>
+        </p:txBody>
+      </p:sp>
+      <p:sp>
+        <p:nvSpPr>
+          <p:cNvPr id="25" name="TextBox 24"/>
+          <p:cNvSpPr txBox="1"/>
+          <p:nvPr/>
+        </p:nvSpPr>
+        <p:spPr>
+          <a:xfrm>
+            <a:off x="8988552" y="6419088"/>
+            <a:ext cx="2697480" cy="365760"/>
+          </a:xfrm>
+          <a:prstGeom prst="rect">
+            <a:avLst/>
+          </a:prstGeom>
+          <a:noFill/>
+        </p:spPr>
+        <p:txBody>
+          <a:bodyPr wrap="square" anchor="ctr" lIns="0" rIns="0" tIns="0" bIns="0">
+            <a:spAutoFit/>
+          </a:bodyPr>
+          <a:lstStyle/>
+          <a:p>
+            <a:pPr algn="r">
+              <a:lnSpc>
+                <a:spcPct val="100000"/>
+              </a:lnSpc>
+              <a:spcBef>
+                <a:spcPts val="0"/>
+              </a:spcBef>
+              <a:spcAft>
+                <a:spcPts val="600"/>
+              </a:spcAft>
+            </a:pPr>
+            <a:r>
+              <a:rPr sz="900" b="1">
+                <a:solidFill>
+                  <a:srgbClr val="10B981"/>
+                </a:solidFill>
+                <a:latin typeface="NanumGothic"/>
+                <a:ea typeface="NanumGothic"/>
+                <a:cs typeface="NanumGothic"/>
+              </a:rPr>
+              <a:t>Day 3 · 수</a:t>
+            </a:r>
+            <a:r>
+              <a:rPr sz="900" b="1">
+                <a:solidFill>
+                  <a:srgbClr val="64748B"/>
+                </a:solidFill>
+                <a:latin typeface="NanumGothic"/>
+                <a:ea typeface="NanumGothic"/>
+                <a:cs typeface="NanumGothic"/>
+              </a:rPr>
+              <a:t>   ·   2 / 25</a:t>
             </a:r>
           </a:p>
         </p:txBody>
@@ -15192,54 +15465,7 @@
       </p:sp>
       <p:sp>
         <p:nvSpPr>
-          <p:cNvPr id="8" name="TextBox 7"/>
-          <p:cNvSpPr txBox="1"/>
-          <p:nvPr/>
-        </p:nvSpPr>
-        <p:spPr>
-          <a:xfrm>
-            <a:off x="10241280" y="6419088"/>
-            <a:ext cx="1463040" cy="365760"/>
-          </a:xfrm>
-          <a:prstGeom prst="rect">
-            <a:avLst/>
-          </a:prstGeom>
-          <a:noFill/>
-        </p:spPr>
-        <p:txBody>
-          <a:bodyPr wrap="square" anchor="ctr" lIns="0" rIns="0" tIns="0" bIns="0">
-            <a:spAutoFit/>
-          </a:bodyPr>
-          <a:lstStyle/>
-          <a:p>
-            <a:pPr algn="r">
-              <a:lnSpc>
-                <a:spcPct val="100000"/>
-              </a:lnSpc>
-              <a:spcBef>
-                <a:spcPts val="0"/>
-              </a:spcBef>
-              <a:spcAft>
-                <a:spcPts val="600"/>
-              </a:spcAft>
-            </a:pPr>
-            <a:r>
-              <a:rPr sz="900" b="1">
-                <a:solidFill>
-                  <a:srgbClr val="10B981"/>
-                </a:solidFill>
-                <a:latin typeface="NanumGothic"/>
-                <a:ea typeface="NanumGothic"/>
-                <a:cs typeface="NanumGothic"/>
-              </a:rPr>
-              <a:t>Day 3 · 수</a:t>
-            </a:r>
-          </a:p>
-        </p:txBody>
-      </p:sp>
-      <p:sp>
-        <p:nvSpPr>
-          <p:cNvPr id="9" name="Rounded Rectangle 8"/>
+          <p:cNvPr id="8" name="Rounded Rectangle 7"/>
           <p:cNvSpPr/>
           <p:nvPr/>
         </p:nvSpPr>
@@ -15285,7 +15511,7 @@
       </p:sp>
       <p:sp>
         <p:nvSpPr>
-          <p:cNvPr id="10" name="Rounded Rectangle 9"/>
+          <p:cNvPr id="9" name="Rounded Rectangle 8"/>
           <p:cNvSpPr/>
           <p:nvPr/>
         </p:nvSpPr>
@@ -15329,7 +15555,7 @@
       </p:sp>
       <p:sp>
         <p:nvSpPr>
-          <p:cNvPr id="11" name="TextBox 10"/>
+          <p:cNvPr id="10" name="TextBox 9"/>
           <p:cNvSpPr txBox="1"/>
           <p:nvPr/>
         </p:nvSpPr>
@@ -15376,7 +15602,7 @@
       </p:sp>
       <p:sp>
         <p:nvSpPr>
-          <p:cNvPr id="12" name="TextBox 11"/>
+          <p:cNvPr id="11" name="TextBox 10"/>
           <p:cNvSpPr txBox="1"/>
           <p:nvPr/>
         </p:nvSpPr>
@@ -15434,7 +15660,7 @@
       </p:sp>
       <p:sp>
         <p:nvSpPr>
-          <p:cNvPr id="13" name="TextBox 12"/>
+          <p:cNvPr id="12" name="TextBox 11"/>
           <p:cNvSpPr txBox="1"/>
           <p:nvPr/>
         </p:nvSpPr>
@@ -15492,7 +15718,7 @@
       </p:sp>
       <p:sp>
         <p:nvSpPr>
-          <p:cNvPr id="14" name="TextBox 13"/>
+          <p:cNvPr id="13" name="TextBox 12"/>
           <p:cNvSpPr txBox="1"/>
           <p:nvPr/>
         </p:nvSpPr>
@@ -15550,7 +15776,7 @@
       </p:sp>
       <p:sp>
         <p:nvSpPr>
-          <p:cNvPr id="15" name="Rounded Rectangle 14"/>
+          <p:cNvPr id="14" name="Rounded Rectangle 13"/>
           <p:cNvSpPr/>
           <p:nvPr/>
         </p:nvSpPr>
@@ -15596,7 +15822,7 @@
       </p:sp>
       <p:sp>
         <p:nvSpPr>
-          <p:cNvPr id="16" name="Rounded Rectangle 15"/>
+          <p:cNvPr id="15" name="Rounded Rectangle 14"/>
           <p:cNvSpPr/>
           <p:nvPr/>
         </p:nvSpPr>
@@ -15640,7 +15866,7 @@
       </p:sp>
       <p:sp>
         <p:nvSpPr>
-          <p:cNvPr id="17" name="TextBox 16"/>
+          <p:cNvPr id="16" name="TextBox 15"/>
           <p:cNvSpPr txBox="1"/>
           <p:nvPr/>
         </p:nvSpPr>
@@ -15687,7 +15913,7 @@
       </p:sp>
       <p:sp>
         <p:nvSpPr>
-          <p:cNvPr id="18" name="TextBox 17"/>
+          <p:cNvPr id="17" name="TextBox 16"/>
           <p:cNvSpPr txBox="1"/>
           <p:nvPr/>
         </p:nvSpPr>
@@ -15745,7 +15971,7 @@
       </p:sp>
       <p:sp>
         <p:nvSpPr>
-          <p:cNvPr id="19" name="TextBox 18"/>
+          <p:cNvPr id="18" name="TextBox 17"/>
           <p:cNvSpPr txBox="1"/>
           <p:nvPr/>
         </p:nvSpPr>
@@ -15803,7 +16029,7 @@
       </p:sp>
       <p:sp>
         <p:nvSpPr>
-          <p:cNvPr id="20" name="TextBox 19"/>
+          <p:cNvPr id="19" name="TextBox 18"/>
           <p:cNvSpPr txBox="1"/>
           <p:nvPr/>
         </p:nvSpPr>
@@ -15855,6 +16081,64 @@
                 <a:cs typeface="NanumGothic"/>
               </a:rPr>
               <a:t>위양성↓ · 놓칠 위험</a:t>
+            </a:r>
+          </a:p>
+        </p:txBody>
+      </p:sp>
+      <p:sp>
+        <p:nvSpPr>
+          <p:cNvPr id="20" name="TextBox 19"/>
+          <p:cNvSpPr txBox="1"/>
+          <p:nvPr/>
+        </p:nvSpPr>
+        <p:spPr>
+          <a:xfrm>
+            <a:off x="8988552" y="6419088"/>
+            <a:ext cx="2697480" cy="365760"/>
+          </a:xfrm>
+          <a:prstGeom prst="rect">
+            <a:avLst/>
+          </a:prstGeom>
+          <a:noFill/>
+        </p:spPr>
+        <p:txBody>
+          <a:bodyPr wrap="square" anchor="ctr" lIns="0" rIns="0" tIns="0" bIns="0">
+            <a:spAutoFit/>
+          </a:bodyPr>
+          <a:lstStyle/>
+          <a:p>
+            <a:pPr algn="r">
+              <a:lnSpc>
+                <a:spcPct val="100000"/>
+              </a:lnSpc>
+              <a:spcBef>
+                <a:spcPts val="0"/>
+              </a:spcBef>
+              <a:spcAft>
+                <a:spcPts val="600"/>
+              </a:spcAft>
+            </a:pPr>
+            <a:r>
+              <a:rPr sz="900" b="1">
+                <a:solidFill>
+                  <a:srgbClr val="10B981"/>
+                </a:solidFill>
+                <a:latin typeface="NanumGothic"/>
+                <a:ea typeface="NanumGothic"/>
+                <a:cs typeface="NanumGothic"/>
+              </a:rPr>
+              <a:t>Day 3 · 수</a:t>
+            </a:r>
+            <a:r>
+              <a:rPr sz="900" b="1">
+                <a:solidFill>
+                  <a:srgbClr val="64748B"/>
+                </a:solidFill>
+                <a:latin typeface="NanumGothic"/>
+                <a:ea typeface="NanumGothic"/>
+                <a:cs typeface="NanumGothic"/>
+              </a:rPr>
+              <a:t>   ·   20 / 25</a:t>
             </a:r>
           </a:p>
         </p:txBody>
@@ -16152,54 +16436,7 @@
       </p:sp>
       <p:sp>
         <p:nvSpPr>
-          <p:cNvPr id="8" name="TextBox 7"/>
-          <p:cNvSpPr txBox="1"/>
-          <p:nvPr/>
-        </p:nvSpPr>
-        <p:spPr>
-          <a:xfrm>
-            <a:off x="10241280" y="6419088"/>
-            <a:ext cx="1463040" cy="365760"/>
-          </a:xfrm>
-          <a:prstGeom prst="rect">
-            <a:avLst/>
-          </a:prstGeom>
-          <a:noFill/>
-        </p:spPr>
-        <p:txBody>
-          <a:bodyPr wrap="square" anchor="ctr" lIns="0" rIns="0" tIns="0" bIns="0">
-            <a:spAutoFit/>
-          </a:bodyPr>
-          <a:lstStyle/>
-          <a:p>
-            <a:pPr algn="r">
-              <a:lnSpc>
-                <a:spcPct val="100000"/>
-              </a:lnSpc>
-              <a:spcBef>
-                <a:spcPts val="0"/>
-              </a:spcBef>
-              <a:spcAft>
-                <a:spcPts val="600"/>
-              </a:spcAft>
-            </a:pPr>
-            <a:r>
-              <a:rPr sz="900" b="1">
-                <a:solidFill>
-                  <a:srgbClr val="10B981"/>
-                </a:solidFill>
-                <a:latin typeface="NanumGothic"/>
-                <a:ea typeface="NanumGothic"/>
-                <a:cs typeface="NanumGothic"/>
-              </a:rPr>
-              <a:t>Day 3 · 수</a:t>
-            </a:r>
-          </a:p>
-        </p:txBody>
-      </p:sp>
-      <p:sp>
-        <p:nvSpPr>
-          <p:cNvPr id="9" name="Oval 8"/>
+          <p:cNvPr id="8" name="Oval 7"/>
           <p:cNvSpPr/>
           <p:nvPr/>
         </p:nvSpPr>
@@ -16243,7 +16480,7 @@
       </p:sp>
       <p:sp>
         <p:nvSpPr>
-          <p:cNvPr id="10" name="TextBox 9"/>
+          <p:cNvPr id="9" name="TextBox 8"/>
           <p:cNvSpPr txBox="1"/>
           <p:nvPr/>
         </p:nvSpPr>
@@ -16290,7 +16527,7 @@
       </p:sp>
       <p:sp>
         <p:nvSpPr>
-          <p:cNvPr id="11" name="TextBox 10"/>
+          <p:cNvPr id="10" name="TextBox 9"/>
           <p:cNvSpPr txBox="1"/>
           <p:nvPr/>
         </p:nvSpPr>
@@ -16337,7 +16574,7 @@
       </p:sp>
       <p:sp>
         <p:nvSpPr>
-          <p:cNvPr id="12" name="Oval 11"/>
+          <p:cNvPr id="11" name="Oval 10"/>
           <p:cNvSpPr/>
           <p:nvPr/>
         </p:nvSpPr>
@@ -16381,7 +16618,7 @@
       </p:sp>
       <p:sp>
         <p:nvSpPr>
-          <p:cNvPr id="13" name="TextBox 12"/>
+          <p:cNvPr id="12" name="TextBox 11"/>
           <p:cNvSpPr txBox="1"/>
           <p:nvPr/>
         </p:nvSpPr>
@@ -16428,7 +16665,7 @@
       </p:sp>
       <p:sp>
         <p:nvSpPr>
-          <p:cNvPr id="14" name="TextBox 13"/>
+          <p:cNvPr id="13" name="TextBox 12"/>
           <p:cNvSpPr txBox="1"/>
           <p:nvPr/>
         </p:nvSpPr>
@@ -16475,7 +16712,7 @@
       </p:sp>
       <p:sp>
         <p:nvSpPr>
-          <p:cNvPr id="15" name="Oval 14"/>
+          <p:cNvPr id="14" name="Oval 13"/>
           <p:cNvSpPr/>
           <p:nvPr/>
         </p:nvSpPr>
@@ -16519,7 +16756,7 @@
       </p:sp>
       <p:sp>
         <p:nvSpPr>
-          <p:cNvPr id="16" name="TextBox 15"/>
+          <p:cNvPr id="15" name="TextBox 14"/>
           <p:cNvSpPr txBox="1"/>
           <p:nvPr/>
         </p:nvSpPr>
@@ -16566,7 +16803,7 @@
       </p:sp>
       <p:sp>
         <p:nvSpPr>
-          <p:cNvPr id="17" name="TextBox 16"/>
+          <p:cNvPr id="16" name="TextBox 15"/>
           <p:cNvSpPr txBox="1"/>
           <p:nvPr/>
         </p:nvSpPr>
@@ -16613,7 +16850,7 @@
       </p:sp>
       <p:sp>
         <p:nvSpPr>
-          <p:cNvPr id="18" name="Rounded Rectangle 17"/>
+          <p:cNvPr id="17" name="Rounded Rectangle 16"/>
           <p:cNvSpPr/>
           <p:nvPr/>
         </p:nvSpPr>
@@ -16659,7 +16896,7 @@
       </p:sp>
       <p:sp>
         <p:nvSpPr>
-          <p:cNvPr id="19" name="TextBox 18"/>
+          <p:cNvPr id="18" name="TextBox 17"/>
           <p:cNvSpPr txBox="1"/>
           <p:nvPr/>
         </p:nvSpPr>
@@ -16711,6 +16948,64 @@
                 <a:cs typeface="NanumGothic"/>
               </a:rPr>
               <a:t>토론: 우리 주제에선 어디에 무게를 둘까?</a:t>
+            </a:r>
+          </a:p>
+        </p:txBody>
+      </p:sp>
+      <p:sp>
+        <p:nvSpPr>
+          <p:cNvPr id="19" name="TextBox 18"/>
+          <p:cNvSpPr txBox="1"/>
+          <p:nvPr/>
+        </p:nvSpPr>
+        <p:spPr>
+          <a:xfrm>
+            <a:off x="8988552" y="6419088"/>
+            <a:ext cx="2697480" cy="365760"/>
+          </a:xfrm>
+          <a:prstGeom prst="rect">
+            <a:avLst/>
+          </a:prstGeom>
+          <a:noFill/>
+        </p:spPr>
+        <p:txBody>
+          <a:bodyPr wrap="square" anchor="ctr" lIns="0" rIns="0" tIns="0" bIns="0">
+            <a:spAutoFit/>
+          </a:bodyPr>
+          <a:lstStyle/>
+          <a:p>
+            <a:pPr algn="r">
+              <a:lnSpc>
+                <a:spcPct val="100000"/>
+              </a:lnSpc>
+              <a:spcBef>
+                <a:spcPts val="0"/>
+              </a:spcBef>
+              <a:spcAft>
+                <a:spcPts val="600"/>
+              </a:spcAft>
+            </a:pPr>
+            <a:r>
+              <a:rPr sz="900" b="1">
+                <a:solidFill>
+                  <a:srgbClr val="10B981"/>
+                </a:solidFill>
+                <a:latin typeface="NanumGothic"/>
+                <a:ea typeface="NanumGothic"/>
+                <a:cs typeface="NanumGothic"/>
+              </a:rPr>
+              <a:t>Day 3 · 수</a:t>
+            </a:r>
+            <a:r>
+              <a:rPr sz="900" b="1">
+                <a:solidFill>
+                  <a:srgbClr val="64748B"/>
+                </a:solidFill>
+                <a:latin typeface="NanumGothic"/>
+                <a:ea typeface="NanumGothic"/>
+                <a:cs typeface="NanumGothic"/>
+              </a:rPr>
+              <a:t>   ·   21 / 25</a:t>
             </a:r>
           </a:p>
         </p:txBody>
@@ -17008,54 +17303,7 @@
       </p:sp>
       <p:sp>
         <p:nvSpPr>
-          <p:cNvPr id="8" name="TextBox 7"/>
-          <p:cNvSpPr txBox="1"/>
-          <p:nvPr/>
-        </p:nvSpPr>
-        <p:spPr>
-          <a:xfrm>
-            <a:off x="10241280" y="6419088"/>
-            <a:ext cx="1463040" cy="365760"/>
-          </a:xfrm>
-          <a:prstGeom prst="rect">
-            <a:avLst/>
-          </a:prstGeom>
-          <a:noFill/>
-        </p:spPr>
-        <p:txBody>
-          <a:bodyPr wrap="square" anchor="ctr" lIns="0" rIns="0" tIns="0" bIns="0">
-            <a:spAutoFit/>
-          </a:bodyPr>
-          <a:lstStyle/>
-          <a:p>
-            <a:pPr algn="r">
-              <a:lnSpc>
-                <a:spcPct val="100000"/>
-              </a:lnSpc>
-              <a:spcBef>
-                <a:spcPts val="0"/>
-              </a:spcBef>
-              <a:spcAft>
-                <a:spcPts val="600"/>
-              </a:spcAft>
-            </a:pPr>
-            <a:r>
-              <a:rPr sz="900" b="1">
-                <a:solidFill>
-                  <a:srgbClr val="10B981"/>
-                </a:solidFill>
-                <a:latin typeface="NanumGothic"/>
-                <a:ea typeface="NanumGothic"/>
-                <a:cs typeface="NanumGothic"/>
-              </a:rPr>
-              <a:t>Day 3 · 수</a:t>
-            </a:r>
-          </a:p>
-        </p:txBody>
-      </p:sp>
-      <p:sp>
-        <p:nvSpPr>
-          <p:cNvPr id="9" name="Oval 8"/>
+          <p:cNvPr id="8" name="Oval 7"/>
           <p:cNvSpPr/>
           <p:nvPr/>
         </p:nvSpPr>
@@ -17099,7 +17347,7 @@
       </p:sp>
       <p:sp>
         <p:nvSpPr>
-          <p:cNvPr id="10" name="TextBox 9"/>
+          <p:cNvPr id="9" name="TextBox 8"/>
           <p:cNvSpPr txBox="1"/>
           <p:nvPr/>
         </p:nvSpPr>
@@ -17146,7 +17394,7 @@
       </p:sp>
       <p:sp>
         <p:nvSpPr>
-          <p:cNvPr id="11" name="TextBox 10"/>
+          <p:cNvPr id="10" name="TextBox 9"/>
           <p:cNvSpPr txBox="1"/>
           <p:nvPr/>
         </p:nvSpPr>
@@ -17193,7 +17441,7 @@
       </p:sp>
       <p:sp>
         <p:nvSpPr>
-          <p:cNvPr id="12" name="Oval 11"/>
+          <p:cNvPr id="11" name="Oval 10"/>
           <p:cNvSpPr/>
           <p:nvPr/>
         </p:nvSpPr>
@@ -17237,7 +17485,7 @@
       </p:sp>
       <p:sp>
         <p:nvSpPr>
-          <p:cNvPr id="13" name="TextBox 12"/>
+          <p:cNvPr id="12" name="TextBox 11"/>
           <p:cNvSpPr txBox="1"/>
           <p:nvPr/>
         </p:nvSpPr>
@@ -17284,7 +17532,7 @@
       </p:sp>
       <p:sp>
         <p:nvSpPr>
-          <p:cNvPr id="14" name="TextBox 13"/>
+          <p:cNvPr id="13" name="TextBox 12"/>
           <p:cNvSpPr txBox="1"/>
           <p:nvPr/>
         </p:nvSpPr>
@@ -17331,7 +17579,7 @@
       </p:sp>
       <p:sp>
         <p:nvSpPr>
-          <p:cNvPr id="15" name="Oval 14"/>
+          <p:cNvPr id="14" name="Oval 13"/>
           <p:cNvSpPr/>
           <p:nvPr/>
         </p:nvSpPr>
@@ -17375,7 +17623,7 @@
       </p:sp>
       <p:sp>
         <p:nvSpPr>
-          <p:cNvPr id="16" name="TextBox 15"/>
+          <p:cNvPr id="15" name="TextBox 14"/>
           <p:cNvSpPr txBox="1"/>
           <p:nvPr/>
         </p:nvSpPr>
@@ -17422,7 +17670,7 @@
       </p:sp>
       <p:sp>
         <p:nvSpPr>
-          <p:cNvPr id="17" name="TextBox 16"/>
+          <p:cNvPr id="16" name="TextBox 15"/>
           <p:cNvSpPr txBox="1"/>
           <p:nvPr/>
         </p:nvSpPr>
@@ -17463,6 +17711,64 @@
                 <a:cs typeface="NanumGothic"/>
               </a:rPr>
               <a:t>rationale 갖춘 새 연구 가설 제안서 (Q&amp;A 보고서 아님)</a:t>
+            </a:r>
+          </a:p>
+        </p:txBody>
+      </p:sp>
+      <p:sp>
+        <p:nvSpPr>
+          <p:cNvPr id="17" name="TextBox 16"/>
+          <p:cNvSpPr txBox="1"/>
+          <p:nvPr/>
+        </p:nvSpPr>
+        <p:spPr>
+          <a:xfrm>
+            <a:off x="8988552" y="6419088"/>
+            <a:ext cx="2697480" cy="365760"/>
+          </a:xfrm>
+          <a:prstGeom prst="rect">
+            <a:avLst/>
+          </a:prstGeom>
+          <a:noFill/>
+        </p:spPr>
+        <p:txBody>
+          <a:bodyPr wrap="square" anchor="ctr" lIns="0" rIns="0" tIns="0" bIns="0">
+            <a:spAutoFit/>
+          </a:bodyPr>
+          <a:lstStyle/>
+          <a:p>
+            <a:pPr algn="r">
+              <a:lnSpc>
+                <a:spcPct val="100000"/>
+              </a:lnSpc>
+              <a:spcBef>
+                <a:spcPts val="0"/>
+              </a:spcBef>
+              <a:spcAft>
+                <a:spcPts val="600"/>
+              </a:spcAft>
+            </a:pPr>
+            <a:r>
+              <a:rPr sz="900" b="1">
+                <a:solidFill>
+                  <a:srgbClr val="10B981"/>
+                </a:solidFill>
+                <a:latin typeface="NanumGothic"/>
+                <a:ea typeface="NanumGothic"/>
+                <a:cs typeface="NanumGothic"/>
+              </a:rPr>
+              <a:t>Day 3 · 수</a:t>
+            </a:r>
+            <a:r>
+              <a:rPr sz="900" b="1">
+                <a:solidFill>
+                  <a:srgbClr val="64748B"/>
+                </a:solidFill>
+                <a:latin typeface="NanumGothic"/>
+                <a:ea typeface="NanumGothic"/>
+                <a:cs typeface="NanumGothic"/>
+              </a:rPr>
+              <a:t>   ·   22 / 25</a:t>
             </a:r>
           </a:p>
         </p:txBody>
@@ -17760,54 +18066,7 @@
       </p:sp>
       <p:sp>
         <p:nvSpPr>
-          <p:cNvPr id="8" name="TextBox 7"/>
-          <p:cNvSpPr txBox="1"/>
-          <p:nvPr/>
-        </p:nvSpPr>
-        <p:spPr>
-          <a:xfrm>
-            <a:off x="10241280" y="6419088"/>
-            <a:ext cx="1463040" cy="365760"/>
-          </a:xfrm>
-          <a:prstGeom prst="rect">
-            <a:avLst/>
-          </a:prstGeom>
-          <a:noFill/>
-        </p:spPr>
-        <p:txBody>
-          <a:bodyPr wrap="square" anchor="ctr" lIns="0" rIns="0" tIns="0" bIns="0">
-            <a:spAutoFit/>
-          </a:bodyPr>
-          <a:lstStyle/>
-          <a:p>
-            <a:pPr algn="r">
-              <a:lnSpc>
-                <a:spcPct val="100000"/>
-              </a:lnSpc>
-              <a:spcBef>
-                <a:spcPts val="0"/>
-              </a:spcBef>
-              <a:spcAft>
-                <a:spcPts val="600"/>
-              </a:spcAft>
-            </a:pPr>
-            <a:r>
-              <a:rPr sz="900" b="1">
-                <a:solidFill>
-                  <a:srgbClr val="10B981"/>
-                </a:solidFill>
-                <a:latin typeface="NanumGothic"/>
-                <a:ea typeface="NanumGothic"/>
-                <a:cs typeface="NanumGothic"/>
-              </a:rPr>
-              <a:t>Day 3 · 수</a:t>
-            </a:r>
-          </a:p>
-        </p:txBody>
-      </p:sp>
-      <p:sp>
-        <p:nvSpPr>
-          <p:cNvPr id="9" name="Rounded Rectangle 8"/>
+          <p:cNvPr id="8" name="Rounded Rectangle 7"/>
           <p:cNvSpPr/>
           <p:nvPr/>
         </p:nvSpPr>
@@ -17853,7 +18112,7 @@
       </p:sp>
       <p:sp>
         <p:nvSpPr>
-          <p:cNvPr id="10" name="Rectangle 9"/>
+          <p:cNvPr id="9" name="Rectangle 8"/>
           <p:cNvSpPr/>
           <p:nvPr/>
         </p:nvSpPr>
@@ -17897,7 +18156,7 @@
       </p:sp>
       <p:sp>
         <p:nvSpPr>
-          <p:cNvPr id="11" name="TextBox 10"/>
+          <p:cNvPr id="10" name="TextBox 9"/>
           <p:cNvSpPr txBox="1"/>
           <p:nvPr/>
         </p:nvSpPr>
@@ -17944,7 +18203,7 @@
       </p:sp>
       <p:sp>
         <p:nvSpPr>
-          <p:cNvPr id="12" name="TextBox 11"/>
+          <p:cNvPr id="11" name="TextBox 10"/>
           <p:cNvSpPr txBox="1"/>
           <p:nvPr/>
         </p:nvSpPr>
@@ -17991,7 +18250,7 @@
       </p:sp>
       <p:sp>
         <p:nvSpPr>
-          <p:cNvPr id="13" name="TextBox 12"/>
+          <p:cNvPr id="12" name="TextBox 11"/>
           <p:cNvSpPr txBox="1"/>
           <p:nvPr/>
         </p:nvSpPr>
@@ -18038,7 +18297,7 @@
       </p:sp>
       <p:sp>
         <p:nvSpPr>
-          <p:cNvPr id="14" name="TextBox 13"/>
+          <p:cNvPr id="13" name="TextBox 12"/>
           <p:cNvSpPr txBox="1"/>
           <p:nvPr/>
         </p:nvSpPr>
@@ -18085,7 +18344,7 @@
       </p:sp>
       <p:sp>
         <p:nvSpPr>
-          <p:cNvPr id="15" name="Rounded Rectangle 14"/>
+          <p:cNvPr id="14" name="Rounded Rectangle 13"/>
           <p:cNvSpPr/>
           <p:nvPr/>
         </p:nvSpPr>
@@ -18131,7 +18390,7 @@
       </p:sp>
       <p:sp>
         <p:nvSpPr>
-          <p:cNvPr id="16" name="Rectangle 15"/>
+          <p:cNvPr id="15" name="Rectangle 14"/>
           <p:cNvSpPr/>
           <p:nvPr/>
         </p:nvSpPr>
@@ -18175,7 +18434,7 @@
       </p:sp>
       <p:sp>
         <p:nvSpPr>
-          <p:cNvPr id="17" name="TextBox 16"/>
+          <p:cNvPr id="16" name="TextBox 15"/>
           <p:cNvSpPr txBox="1"/>
           <p:nvPr/>
         </p:nvSpPr>
@@ -18222,7 +18481,7 @@
       </p:sp>
       <p:sp>
         <p:nvSpPr>
-          <p:cNvPr id="18" name="TextBox 17"/>
+          <p:cNvPr id="17" name="TextBox 16"/>
           <p:cNvSpPr txBox="1"/>
           <p:nvPr/>
         </p:nvSpPr>
@@ -18269,7 +18528,7 @@
       </p:sp>
       <p:sp>
         <p:nvSpPr>
-          <p:cNvPr id="19" name="TextBox 18"/>
+          <p:cNvPr id="18" name="TextBox 17"/>
           <p:cNvSpPr txBox="1"/>
           <p:nvPr/>
         </p:nvSpPr>
@@ -18316,7 +18575,7 @@
       </p:sp>
       <p:sp>
         <p:nvSpPr>
-          <p:cNvPr id="20" name="TextBox 19"/>
+          <p:cNvPr id="19" name="TextBox 18"/>
           <p:cNvSpPr txBox="1"/>
           <p:nvPr/>
         </p:nvSpPr>
@@ -18363,7 +18622,7 @@
       </p:sp>
       <p:sp>
         <p:nvSpPr>
-          <p:cNvPr id="21" name="Rounded Rectangle 20"/>
+          <p:cNvPr id="20" name="Rounded Rectangle 19"/>
           <p:cNvSpPr/>
           <p:nvPr/>
         </p:nvSpPr>
@@ -18409,7 +18668,7 @@
       </p:sp>
       <p:sp>
         <p:nvSpPr>
-          <p:cNvPr id="22" name="Rectangle 21"/>
+          <p:cNvPr id="21" name="Rectangle 20"/>
           <p:cNvSpPr/>
           <p:nvPr/>
         </p:nvSpPr>
@@ -18453,7 +18712,7 @@
       </p:sp>
       <p:sp>
         <p:nvSpPr>
-          <p:cNvPr id="23" name="TextBox 22"/>
+          <p:cNvPr id="22" name="TextBox 21"/>
           <p:cNvSpPr txBox="1"/>
           <p:nvPr/>
         </p:nvSpPr>
@@ -18500,7 +18759,7 @@
       </p:sp>
       <p:sp>
         <p:nvSpPr>
-          <p:cNvPr id="24" name="TextBox 23"/>
+          <p:cNvPr id="23" name="TextBox 22"/>
           <p:cNvSpPr txBox="1"/>
           <p:nvPr/>
         </p:nvSpPr>
@@ -18547,7 +18806,7 @@
       </p:sp>
       <p:sp>
         <p:nvSpPr>
-          <p:cNvPr id="25" name="TextBox 24"/>
+          <p:cNvPr id="24" name="TextBox 23"/>
           <p:cNvSpPr txBox="1"/>
           <p:nvPr/>
         </p:nvSpPr>
@@ -18594,7 +18853,7 @@
       </p:sp>
       <p:sp>
         <p:nvSpPr>
-          <p:cNvPr id="26" name="TextBox 25"/>
+          <p:cNvPr id="25" name="TextBox 24"/>
           <p:cNvSpPr txBox="1"/>
           <p:nvPr/>
         </p:nvSpPr>
@@ -18641,7 +18900,7 @@
       </p:sp>
       <p:sp>
         <p:nvSpPr>
-          <p:cNvPr id="27" name="Rounded Rectangle 26"/>
+          <p:cNvPr id="26" name="Rounded Rectangle 25"/>
           <p:cNvSpPr/>
           <p:nvPr/>
         </p:nvSpPr>
@@ -18687,7 +18946,7 @@
       </p:sp>
       <p:sp>
         <p:nvSpPr>
-          <p:cNvPr id="28" name="Rectangle 27"/>
+          <p:cNvPr id="27" name="Rectangle 26"/>
           <p:cNvSpPr/>
           <p:nvPr/>
         </p:nvSpPr>
@@ -18731,7 +18990,7 @@
       </p:sp>
       <p:sp>
         <p:nvSpPr>
-          <p:cNvPr id="29" name="TextBox 28"/>
+          <p:cNvPr id="28" name="TextBox 27"/>
           <p:cNvSpPr txBox="1"/>
           <p:nvPr/>
         </p:nvSpPr>
@@ -18778,7 +19037,7 @@
       </p:sp>
       <p:sp>
         <p:nvSpPr>
-          <p:cNvPr id="30" name="TextBox 29"/>
+          <p:cNvPr id="29" name="TextBox 28"/>
           <p:cNvSpPr txBox="1"/>
           <p:nvPr/>
         </p:nvSpPr>
@@ -18825,7 +19084,7 @@
       </p:sp>
       <p:sp>
         <p:nvSpPr>
-          <p:cNvPr id="31" name="TextBox 30"/>
+          <p:cNvPr id="30" name="TextBox 29"/>
           <p:cNvSpPr txBox="1"/>
           <p:nvPr/>
         </p:nvSpPr>
@@ -18872,7 +19131,7 @@
       </p:sp>
       <p:sp>
         <p:nvSpPr>
-          <p:cNvPr id="32" name="TextBox 31"/>
+          <p:cNvPr id="31" name="TextBox 30"/>
           <p:cNvSpPr txBox="1"/>
           <p:nvPr/>
         </p:nvSpPr>
@@ -18919,7 +19178,7 @@
       </p:sp>
       <p:sp>
         <p:nvSpPr>
-          <p:cNvPr id="33" name="Rounded Rectangle 32"/>
+          <p:cNvPr id="32" name="Rounded Rectangle 31"/>
           <p:cNvSpPr/>
           <p:nvPr/>
         </p:nvSpPr>
@@ -18965,7 +19224,7 @@
       </p:sp>
       <p:sp>
         <p:nvSpPr>
-          <p:cNvPr id="34" name="Rectangle 33"/>
+          <p:cNvPr id="33" name="Rectangle 32"/>
           <p:cNvSpPr/>
           <p:nvPr/>
         </p:nvSpPr>
@@ -19009,7 +19268,7 @@
       </p:sp>
       <p:sp>
         <p:nvSpPr>
-          <p:cNvPr id="35" name="TextBox 34"/>
+          <p:cNvPr id="34" name="TextBox 33"/>
           <p:cNvSpPr txBox="1"/>
           <p:nvPr/>
         </p:nvSpPr>
@@ -19056,7 +19315,7 @@
       </p:sp>
       <p:sp>
         <p:nvSpPr>
-          <p:cNvPr id="36" name="TextBox 35"/>
+          <p:cNvPr id="35" name="TextBox 34"/>
           <p:cNvSpPr txBox="1"/>
           <p:nvPr/>
         </p:nvSpPr>
@@ -19103,7 +19362,7 @@
       </p:sp>
       <p:sp>
         <p:nvSpPr>
-          <p:cNvPr id="37" name="TextBox 36"/>
+          <p:cNvPr id="36" name="TextBox 35"/>
           <p:cNvSpPr txBox="1"/>
           <p:nvPr/>
         </p:nvSpPr>
@@ -19150,7 +19409,7 @@
       </p:sp>
       <p:sp>
         <p:nvSpPr>
-          <p:cNvPr id="38" name="Rounded Rectangle 37"/>
+          <p:cNvPr id="37" name="Rounded Rectangle 36"/>
           <p:cNvSpPr/>
           <p:nvPr/>
         </p:nvSpPr>
@@ -19196,7 +19455,7 @@
       </p:sp>
       <p:sp>
         <p:nvSpPr>
-          <p:cNvPr id="39" name="TextBox 38"/>
+          <p:cNvPr id="38" name="TextBox 37"/>
           <p:cNvSpPr txBox="1"/>
           <p:nvPr/>
         </p:nvSpPr>
@@ -19248,6 +19507,64 @@
                 <a:cs typeface="NanumGothic"/>
               </a:rPr>
               <a:t>agentic 5단계와 동일 — Day 4에 직접 구현·실행한다</a:t>
+            </a:r>
+          </a:p>
+        </p:txBody>
+      </p:sp>
+      <p:sp>
+        <p:nvSpPr>
+          <p:cNvPr id="39" name="TextBox 38"/>
+          <p:cNvSpPr txBox="1"/>
+          <p:nvPr/>
+        </p:nvSpPr>
+        <p:spPr>
+          <a:xfrm>
+            <a:off x="8988552" y="6419088"/>
+            <a:ext cx="2697480" cy="365760"/>
+          </a:xfrm>
+          <a:prstGeom prst="rect">
+            <a:avLst/>
+          </a:prstGeom>
+          <a:noFill/>
+        </p:spPr>
+        <p:txBody>
+          <a:bodyPr wrap="square" anchor="ctr" lIns="0" rIns="0" tIns="0" bIns="0">
+            <a:spAutoFit/>
+          </a:bodyPr>
+          <a:lstStyle/>
+          <a:p>
+            <a:pPr algn="r">
+              <a:lnSpc>
+                <a:spcPct val="100000"/>
+              </a:lnSpc>
+              <a:spcBef>
+                <a:spcPts val="0"/>
+              </a:spcBef>
+              <a:spcAft>
+                <a:spcPts val="600"/>
+              </a:spcAft>
+            </a:pPr>
+            <a:r>
+              <a:rPr sz="900" b="1">
+                <a:solidFill>
+                  <a:srgbClr val="10B981"/>
+                </a:solidFill>
+                <a:latin typeface="NanumGothic"/>
+                <a:ea typeface="NanumGothic"/>
+                <a:cs typeface="NanumGothic"/>
+              </a:rPr>
+              <a:t>Day 3 · 수</a:t>
+            </a:r>
+            <a:r>
+              <a:rPr sz="900" b="1">
+                <a:solidFill>
+                  <a:srgbClr val="64748B"/>
+                </a:solidFill>
+                <a:latin typeface="NanumGothic"/>
+                <a:ea typeface="NanumGothic"/>
+                <a:cs typeface="NanumGothic"/>
+              </a:rPr>
+              <a:t>   ·   23 / 25</a:t>
             </a:r>
           </a:p>
         </p:txBody>
@@ -19545,54 +19862,7 @@
       </p:sp>
       <p:sp>
         <p:nvSpPr>
-          <p:cNvPr id="8" name="TextBox 7"/>
-          <p:cNvSpPr txBox="1"/>
-          <p:nvPr/>
-        </p:nvSpPr>
-        <p:spPr>
-          <a:xfrm>
-            <a:off x="10241280" y="6419088"/>
-            <a:ext cx="1463040" cy="365760"/>
-          </a:xfrm>
-          <a:prstGeom prst="rect">
-            <a:avLst/>
-          </a:prstGeom>
-          <a:noFill/>
-        </p:spPr>
-        <p:txBody>
-          <a:bodyPr wrap="square" anchor="ctr" lIns="0" rIns="0" tIns="0" bIns="0">
-            <a:spAutoFit/>
-          </a:bodyPr>
-          <a:lstStyle/>
-          <a:p>
-            <a:pPr algn="r">
-              <a:lnSpc>
-                <a:spcPct val="100000"/>
-              </a:lnSpc>
-              <a:spcBef>
-                <a:spcPts val="0"/>
-              </a:spcBef>
-              <a:spcAft>
-                <a:spcPts val="600"/>
-              </a:spcAft>
-            </a:pPr>
-            <a:r>
-              <a:rPr sz="900" b="1">
-                <a:solidFill>
-                  <a:srgbClr val="10B981"/>
-                </a:solidFill>
-                <a:latin typeface="NanumGothic"/>
-                <a:ea typeface="NanumGothic"/>
-                <a:cs typeface="NanumGothic"/>
-              </a:rPr>
-              <a:t>Day 3 · 수</a:t>
-            </a:r>
-          </a:p>
-        </p:txBody>
-      </p:sp>
-      <p:sp>
-        <p:nvSpPr>
-          <p:cNvPr id="9" name="Rounded Rectangle 8"/>
+          <p:cNvPr id="8" name="Rounded Rectangle 7"/>
           <p:cNvSpPr/>
           <p:nvPr/>
         </p:nvSpPr>
@@ -19638,7 +19908,7 @@
       </p:sp>
       <p:sp>
         <p:nvSpPr>
-          <p:cNvPr id="10" name="TextBox 9"/>
+          <p:cNvPr id="9" name="TextBox 8"/>
           <p:cNvSpPr txBox="1"/>
           <p:nvPr/>
         </p:nvSpPr>
@@ -19685,7 +19955,7 @@
       </p:sp>
       <p:sp>
         <p:nvSpPr>
-          <p:cNvPr id="11" name="Oval 10"/>
+          <p:cNvPr id="10" name="Oval 9"/>
           <p:cNvSpPr/>
           <p:nvPr/>
         </p:nvSpPr>
@@ -19729,7 +19999,7 @@
       </p:sp>
       <p:sp>
         <p:nvSpPr>
-          <p:cNvPr id="12" name="TextBox 11"/>
+          <p:cNvPr id="11" name="TextBox 10"/>
           <p:cNvSpPr txBox="1"/>
           <p:nvPr/>
         </p:nvSpPr>
@@ -19776,7 +20046,7 @@
       </p:sp>
       <p:sp>
         <p:nvSpPr>
-          <p:cNvPr id="13" name="TextBox 12"/>
+          <p:cNvPr id="12" name="TextBox 11"/>
           <p:cNvSpPr txBox="1"/>
           <p:nvPr/>
         </p:nvSpPr>
@@ -19823,7 +20093,7 @@
       </p:sp>
       <p:sp>
         <p:nvSpPr>
-          <p:cNvPr id="14" name="Oval 13"/>
+          <p:cNvPr id="13" name="Oval 12"/>
           <p:cNvSpPr/>
           <p:nvPr/>
         </p:nvSpPr>
@@ -19867,7 +20137,7 @@
       </p:sp>
       <p:sp>
         <p:nvSpPr>
-          <p:cNvPr id="15" name="TextBox 14"/>
+          <p:cNvPr id="14" name="TextBox 13"/>
           <p:cNvSpPr txBox="1"/>
           <p:nvPr/>
         </p:nvSpPr>
@@ -19914,7 +20184,7 @@
       </p:sp>
       <p:sp>
         <p:nvSpPr>
-          <p:cNvPr id="16" name="TextBox 15"/>
+          <p:cNvPr id="15" name="TextBox 14"/>
           <p:cNvSpPr txBox="1"/>
           <p:nvPr/>
         </p:nvSpPr>
@@ -19961,7 +20231,7 @@
       </p:sp>
       <p:sp>
         <p:nvSpPr>
-          <p:cNvPr id="17" name="Oval 16"/>
+          <p:cNvPr id="16" name="Oval 15"/>
           <p:cNvSpPr/>
           <p:nvPr/>
         </p:nvSpPr>
@@ -20005,7 +20275,7 @@
       </p:sp>
       <p:sp>
         <p:nvSpPr>
-          <p:cNvPr id="18" name="TextBox 17"/>
+          <p:cNvPr id="17" name="TextBox 16"/>
           <p:cNvSpPr txBox="1"/>
           <p:nvPr/>
         </p:nvSpPr>
@@ -20052,7 +20322,7 @@
       </p:sp>
       <p:sp>
         <p:nvSpPr>
-          <p:cNvPr id="19" name="TextBox 18"/>
+          <p:cNvPr id="18" name="TextBox 17"/>
           <p:cNvSpPr txBox="1"/>
           <p:nvPr/>
         </p:nvSpPr>
@@ -20099,7 +20369,7 @@
       </p:sp>
       <p:sp>
         <p:nvSpPr>
-          <p:cNvPr id="20" name="Oval 19"/>
+          <p:cNvPr id="19" name="Oval 18"/>
           <p:cNvSpPr/>
           <p:nvPr/>
         </p:nvSpPr>
@@ -20143,7 +20413,7 @@
       </p:sp>
       <p:sp>
         <p:nvSpPr>
-          <p:cNvPr id="21" name="TextBox 20"/>
+          <p:cNvPr id="20" name="TextBox 19"/>
           <p:cNvSpPr txBox="1"/>
           <p:nvPr/>
         </p:nvSpPr>
@@ -20190,7 +20460,7 @@
       </p:sp>
       <p:sp>
         <p:nvSpPr>
-          <p:cNvPr id="22" name="TextBox 21"/>
+          <p:cNvPr id="21" name="TextBox 20"/>
           <p:cNvSpPr txBox="1"/>
           <p:nvPr/>
         </p:nvSpPr>
@@ -20237,7 +20507,7 @@
       </p:sp>
       <p:sp>
         <p:nvSpPr>
-          <p:cNvPr id="23" name="Rounded Rectangle 22"/>
+          <p:cNvPr id="22" name="Rounded Rectangle 21"/>
           <p:cNvSpPr/>
           <p:nvPr/>
         </p:nvSpPr>
@@ -20281,7 +20551,7 @@
       </p:sp>
       <p:sp>
         <p:nvSpPr>
-          <p:cNvPr id="24" name="TextBox 23"/>
+          <p:cNvPr id="23" name="TextBox 22"/>
           <p:cNvSpPr txBox="1"/>
           <p:nvPr/>
         </p:nvSpPr>
@@ -20328,7 +20598,7 @@
       </p:sp>
       <p:sp>
         <p:nvSpPr>
-          <p:cNvPr id="25" name="TextBox 24"/>
+          <p:cNvPr id="24" name="TextBox 23"/>
           <p:cNvSpPr txBox="1"/>
           <p:nvPr/>
         </p:nvSpPr>
@@ -20372,6 +20642,64 @@
 (분야 · 발견 목표 · corpus · 산출물=가설 제안 · 스코프)
 예: 신약/바이오 리서치 등
 템플릿: examples/research-agent/research-plan-template.md</a:t>
+            </a:r>
+          </a:p>
+        </p:txBody>
+      </p:sp>
+      <p:sp>
+        <p:nvSpPr>
+          <p:cNvPr id="25" name="TextBox 24"/>
+          <p:cNvSpPr txBox="1"/>
+          <p:nvPr/>
+        </p:nvSpPr>
+        <p:spPr>
+          <a:xfrm>
+            <a:off x="8988552" y="6419088"/>
+            <a:ext cx="2697480" cy="365760"/>
+          </a:xfrm>
+          <a:prstGeom prst="rect">
+            <a:avLst/>
+          </a:prstGeom>
+          <a:noFill/>
+        </p:spPr>
+        <p:txBody>
+          <a:bodyPr wrap="square" anchor="ctr" lIns="0" rIns="0" tIns="0" bIns="0">
+            <a:spAutoFit/>
+          </a:bodyPr>
+          <a:lstStyle/>
+          <a:p>
+            <a:pPr algn="r">
+              <a:lnSpc>
+                <a:spcPct val="100000"/>
+              </a:lnSpc>
+              <a:spcBef>
+                <a:spcPts val="0"/>
+              </a:spcBef>
+              <a:spcAft>
+                <a:spcPts val="600"/>
+              </a:spcAft>
+            </a:pPr>
+            <a:r>
+              <a:rPr sz="900" b="1">
+                <a:solidFill>
+                  <a:srgbClr val="10B981"/>
+                </a:solidFill>
+                <a:latin typeface="NanumGothic"/>
+                <a:ea typeface="NanumGothic"/>
+                <a:cs typeface="NanumGothic"/>
+              </a:rPr>
+              <a:t>Day 3 · 수</a:t>
+            </a:r>
+            <a:r>
+              <a:rPr sz="900" b="1">
+                <a:solidFill>
+                  <a:srgbClr val="64748B"/>
+                </a:solidFill>
+                <a:latin typeface="NanumGothic"/>
+                <a:ea typeface="NanumGothic"/>
+                <a:cs typeface="NanumGothic"/>
+              </a:rPr>
+              <a:t>   ·   24 / 25</a:t>
             </a:r>
           </a:p>
         </p:txBody>
@@ -20675,53 +21003,6 @@
         </p:nvSpPr>
         <p:spPr>
           <a:xfrm>
-            <a:off x="10241280" y="6419088"/>
-            <a:ext cx="1463040" cy="365760"/>
-          </a:xfrm>
-          <a:prstGeom prst="rect">
-            <a:avLst/>
-          </a:prstGeom>
-          <a:noFill/>
-        </p:spPr>
-        <p:txBody>
-          <a:bodyPr wrap="square" anchor="ctr" lIns="0" rIns="0" tIns="0" bIns="0">
-            <a:spAutoFit/>
-          </a:bodyPr>
-          <a:lstStyle/>
-          <a:p>
-            <a:pPr algn="r">
-              <a:lnSpc>
-                <a:spcPct val="100000"/>
-              </a:lnSpc>
-              <a:spcBef>
-                <a:spcPts val="0"/>
-              </a:spcBef>
-              <a:spcAft>
-                <a:spcPts val="600"/>
-              </a:spcAft>
-            </a:pPr>
-            <a:r>
-              <a:rPr sz="900" b="1">
-                <a:solidFill>
-                  <a:srgbClr val="10B981"/>
-                </a:solidFill>
-                <a:latin typeface="NanumGothic"/>
-                <a:ea typeface="NanumGothic"/>
-                <a:cs typeface="NanumGothic"/>
-              </a:rPr>
-              <a:t>Day 3 · 수</a:t>
-            </a:r>
-          </a:p>
-        </p:txBody>
-      </p:sp>
-      <p:sp>
-        <p:nvSpPr>
-          <p:cNvPr id="9" name="TextBox 8"/>
-          <p:cNvSpPr txBox="1"/>
-          <p:nvPr/>
-        </p:nvSpPr>
-        <p:spPr>
-          <a:xfrm>
             <a:off x="548640" y="1783080"/>
             <a:ext cx="6400800" cy="365760"/>
           </a:xfrm>
@@ -20763,7 +21044,7 @@
       </p:sp>
       <p:sp>
         <p:nvSpPr>
-          <p:cNvPr id="10" name="Oval 9"/>
+          <p:cNvPr id="9" name="Oval 8"/>
           <p:cNvSpPr/>
           <p:nvPr/>
         </p:nvSpPr>
@@ -20807,7 +21088,7 @@
       </p:sp>
       <p:sp>
         <p:nvSpPr>
-          <p:cNvPr id="11" name="TextBox 10"/>
+          <p:cNvPr id="10" name="TextBox 9"/>
           <p:cNvSpPr txBox="1"/>
           <p:nvPr/>
         </p:nvSpPr>
@@ -20854,7 +21135,7 @@
       </p:sp>
       <p:sp>
         <p:nvSpPr>
-          <p:cNvPr id="12" name="Oval 11"/>
+          <p:cNvPr id="11" name="Oval 10"/>
           <p:cNvSpPr/>
           <p:nvPr/>
         </p:nvSpPr>
@@ -20898,7 +21179,7 @@
       </p:sp>
       <p:sp>
         <p:nvSpPr>
-          <p:cNvPr id="13" name="TextBox 12"/>
+          <p:cNvPr id="12" name="TextBox 11"/>
           <p:cNvSpPr txBox="1"/>
           <p:nvPr/>
         </p:nvSpPr>
@@ -20945,7 +21226,7 @@
       </p:sp>
       <p:sp>
         <p:nvSpPr>
-          <p:cNvPr id="14" name="Oval 13"/>
+          <p:cNvPr id="13" name="Oval 12"/>
           <p:cNvSpPr/>
           <p:nvPr/>
         </p:nvSpPr>
@@ -20989,7 +21270,7 @@
       </p:sp>
       <p:sp>
         <p:nvSpPr>
-          <p:cNvPr id="15" name="TextBox 14"/>
+          <p:cNvPr id="14" name="TextBox 13"/>
           <p:cNvSpPr txBox="1"/>
           <p:nvPr/>
         </p:nvSpPr>
@@ -21036,7 +21317,7 @@
       </p:sp>
       <p:sp>
         <p:nvSpPr>
-          <p:cNvPr id="16" name="Rounded Rectangle 15"/>
+          <p:cNvPr id="15" name="Rounded Rectangle 14"/>
           <p:cNvSpPr/>
           <p:nvPr/>
         </p:nvSpPr>
@@ -21082,7 +21363,7 @@
       </p:sp>
       <p:sp>
         <p:nvSpPr>
-          <p:cNvPr id="17" name="TextBox 16"/>
+          <p:cNvPr id="16" name="TextBox 15"/>
           <p:cNvSpPr txBox="1"/>
           <p:nvPr/>
         </p:nvSpPr>
@@ -21129,7 +21410,7 @@
       </p:sp>
       <p:sp>
         <p:nvSpPr>
-          <p:cNvPr id="18" name="TextBox 17"/>
+          <p:cNvPr id="17" name="TextBox 16"/>
           <p:cNvSpPr txBox="1"/>
           <p:nvPr/>
         </p:nvSpPr>
@@ -21170,6 +21451,64 @@
                 <a:cs typeface="NanumGothic"/>
               </a:rPr>
               <a:t>확정한 분야로 corpus 기반 가설 생성 에이전트를 Day 4 3세션 안에 구현·실행해 새 가설을 제안합니다.</a:t>
+            </a:r>
+          </a:p>
+        </p:txBody>
+      </p:sp>
+      <p:sp>
+        <p:nvSpPr>
+          <p:cNvPr id="18" name="TextBox 17"/>
+          <p:cNvSpPr txBox="1"/>
+          <p:nvPr/>
+        </p:nvSpPr>
+        <p:spPr>
+          <a:xfrm>
+            <a:off x="8988552" y="6419088"/>
+            <a:ext cx="2697480" cy="365760"/>
+          </a:xfrm>
+          <a:prstGeom prst="rect">
+            <a:avLst/>
+          </a:prstGeom>
+          <a:noFill/>
+        </p:spPr>
+        <p:txBody>
+          <a:bodyPr wrap="square" anchor="ctr" lIns="0" rIns="0" tIns="0" bIns="0">
+            <a:spAutoFit/>
+          </a:bodyPr>
+          <a:lstStyle/>
+          <a:p>
+            <a:pPr algn="r">
+              <a:lnSpc>
+                <a:spcPct val="100000"/>
+              </a:lnSpc>
+              <a:spcBef>
+                <a:spcPts val="0"/>
+              </a:spcBef>
+              <a:spcAft>
+                <a:spcPts val="600"/>
+              </a:spcAft>
+            </a:pPr>
+            <a:r>
+              <a:rPr sz="900" b="1">
+                <a:solidFill>
+                  <a:srgbClr val="10B981"/>
+                </a:solidFill>
+                <a:latin typeface="NanumGothic"/>
+                <a:ea typeface="NanumGothic"/>
+                <a:cs typeface="NanumGothic"/>
+              </a:rPr>
+              <a:t>Day 3 · 수</a:t>
+            </a:r>
+            <a:r>
+              <a:rPr sz="900" b="1">
+                <a:solidFill>
+                  <a:srgbClr val="64748B"/>
+                </a:solidFill>
+                <a:latin typeface="NanumGothic"/>
+                <a:ea typeface="NanumGothic"/>
+                <a:cs typeface="NanumGothic"/>
+              </a:rPr>
+              <a:t>   ·   25 / 25</a:t>
             </a:r>
           </a:p>
         </p:txBody>
@@ -21467,54 +21806,7 @@
       </p:sp>
       <p:sp>
         <p:nvSpPr>
-          <p:cNvPr id="8" name="TextBox 7"/>
-          <p:cNvSpPr txBox="1"/>
-          <p:nvPr/>
-        </p:nvSpPr>
-        <p:spPr>
-          <a:xfrm>
-            <a:off x="10241280" y="6419088"/>
-            <a:ext cx="1463040" cy="365760"/>
-          </a:xfrm>
-          <a:prstGeom prst="rect">
-            <a:avLst/>
-          </a:prstGeom>
-          <a:noFill/>
-        </p:spPr>
-        <p:txBody>
-          <a:bodyPr wrap="square" anchor="ctr" lIns="0" rIns="0" tIns="0" bIns="0">
-            <a:spAutoFit/>
-          </a:bodyPr>
-          <a:lstStyle/>
-          <a:p>
-            <a:pPr algn="r">
-              <a:lnSpc>
-                <a:spcPct val="100000"/>
-              </a:lnSpc>
-              <a:spcBef>
-                <a:spcPts val="0"/>
-              </a:spcBef>
-              <a:spcAft>
-                <a:spcPts val="600"/>
-              </a:spcAft>
-            </a:pPr>
-            <a:r>
-              <a:rPr sz="900" b="1">
-                <a:solidFill>
-                  <a:srgbClr val="10B981"/>
-                </a:solidFill>
-                <a:latin typeface="NanumGothic"/>
-                <a:ea typeface="NanumGothic"/>
-                <a:cs typeface="NanumGothic"/>
-              </a:rPr>
-              <a:t>Day 3 · 수</a:t>
-            </a:r>
-          </a:p>
-        </p:txBody>
-      </p:sp>
-      <p:sp>
-        <p:nvSpPr>
-          <p:cNvPr id="9" name="Rounded Rectangle 8"/>
+          <p:cNvPr id="8" name="Rounded Rectangle 7"/>
           <p:cNvSpPr/>
           <p:nvPr/>
         </p:nvSpPr>
@@ -21560,7 +21852,7 @@
       </p:sp>
       <p:sp>
         <p:nvSpPr>
-          <p:cNvPr id="10" name="Rectangle 9"/>
+          <p:cNvPr id="9" name="Rectangle 8"/>
           <p:cNvSpPr/>
           <p:nvPr/>
         </p:nvSpPr>
@@ -21604,7 +21896,7 @@
       </p:sp>
       <p:sp>
         <p:nvSpPr>
-          <p:cNvPr id="11" name="Oval 10"/>
+          <p:cNvPr id="10" name="Oval 9"/>
           <p:cNvSpPr/>
           <p:nvPr/>
         </p:nvSpPr>
@@ -21648,7 +21940,7 @@
       </p:sp>
       <p:sp>
         <p:nvSpPr>
-          <p:cNvPr id="12" name="TextBox 11"/>
+          <p:cNvPr id="11" name="TextBox 10"/>
           <p:cNvSpPr txBox="1"/>
           <p:nvPr/>
         </p:nvSpPr>
@@ -21695,7 +21987,7 @@
       </p:sp>
       <p:sp>
         <p:nvSpPr>
-          <p:cNvPr id="13" name="TextBox 12"/>
+          <p:cNvPr id="12" name="TextBox 11"/>
           <p:cNvSpPr txBox="1"/>
           <p:nvPr/>
         </p:nvSpPr>
@@ -21742,7 +22034,7 @@
       </p:sp>
       <p:sp>
         <p:nvSpPr>
-          <p:cNvPr id="14" name="TextBox 13"/>
+          <p:cNvPr id="13" name="TextBox 12"/>
           <p:cNvSpPr txBox="1"/>
           <p:nvPr/>
         </p:nvSpPr>
@@ -21800,7 +22092,7 @@
       </p:sp>
       <p:sp>
         <p:nvSpPr>
-          <p:cNvPr id="15" name="TextBox 14"/>
+          <p:cNvPr id="14" name="TextBox 13"/>
           <p:cNvSpPr txBox="1"/>
           <p:nvPr/>
         </p:nvSpPr>
@@ -21847,7 +22139,7 @@
       </p:sp>
       <p:sp>
         <p:nvSpPr>
-          <p:cNvPr id="16" name="TextBox 15"/>
+          <p:cNvPr id="15" name="TextBox 14"/>
           <p:cNvSpPr txBox="1"/>
           <p:nvPr/>
         </p:nvSpPr>
@@ -21894,7 +22186,7 @@
       </p:sp>
       <p:sp>
         <p:nvSpPr>
-          <p:cNvPr id="17" name="Rounded Rectangle 16"/>
+          <p:cNvPr id="16" name="Rounded Rectangle 15"/>
           <p:cNvSpPr/>
           <p:nvPr/>
         </p:nvSpPr>
@@ -21940,7 +22232,7 @@
       </p:sp>
       <p:sp>
         <p:nvSpPr>
-          <p:cNvPr id="18" name="Rectangle 17"/>
+          <p:cNvPr id="17" name="Rectangle 16"/>
           <p:cNvSpPr/>
           <p:nvPr/>
         </p:nvSpPr>
@@ -21984,7 +22276,7 @@
       </p:sp>
       <p:sp>
         <p:nvSpPr>
-          <p:cNvPr id="19" name="Oval 18"/>
+          <p:cNvPr id="18" name="Oval 17"/>
           <p:cNvSpPr/>
           <p:nvPr/>
         </p:nvSpPr>
@@ -22028,7 +22320,7 @@
       </p:sp>
       <p:sp>
         <p:nvSpPr>
-          <p:cNvPr id="20" name="TextBox 19"/>
+          <p:cNvPr id="19" name="TextBox 18"/>
           <p:cNvSpPr txBox="1"/>
           <p:nvPr/>
         </p:nvSpPr>
@@ -22075,7 +22367,7 @@
       </p:sp>
       <p:sp>
         <p:nvSpPr>
-          <p:cNvPr id="21" name="TextBox 20"/>
+          <p:cNvPr id="20" name="TextBox 19"/>
           <p:cNvSpPr txBox="1"/>
           <p:nvPr/>
         </p:nvSpPr>
@@ -22122,7 +22414,7 @@
       </p:sp>
       <p:sp>
         <p:nvSpPr>
-          <p:cNvPr id="22" name="TextBox 21"/>
+          <p:cNvPr id="21" name="TextBox 20"/>
           <p:cNvSpPr txBox="1"/>
           <p:nvPr/>
         </p:nvSpPr>
@@ -22180,7 +22472,7 @@
       </p:sp>
       <p:sp>
         <p:nvSpPr>
-          <p:cNvPr id="23" name="TextBox 22"/>
+          <p:cNvPr id="22" name="TextBox 21"/>
           <p:cNvSpPr txBox="1"/>
           <p:nvPr/>
         </p:nvSpPr>
@@ -22227,7 +22519,7 @@
       </p:sp>
       <p:sp>
         <p:nvSpPr>
-          <p:cNvPr id="24" name="TextBox 23"/>
+          <p:cNvPr id="23" name="TextBox 22"/>
           <p:cNvSpPr txBox="1"/>
           <p:nvPr/>
         </p:nvSpPr>
@@ -22274,7 +22566,7 @@
       </p:sp>
       <p:sp>
         <p:nvSpPr>
-          <p:cNvPr id="25" name="Rounded Rectangle 24"/>
+          <p:cNvPr id="24" name="Rounded Rectangle 23"/>
           <p:cNvSpPr/>
           <p:nvPr/>
         </p:nvSpPr>
@@ -22320,7 +22612,7 @@
       </p:sp>
       <p:sp>
         <p:nvSpPr>
-          <p:cNvPr id="26" name="Rectangle 25"/>
+          <p:cNvPr id="25" name="Rectangle 24"/>
           <p:cNvSpPr/>
           <p:nvPr/>
         </p:nvSpPr>
@@ -22364,7 +22656,7 @@
       </p:sp>
       <p:sp>
         <p:nvSpPr>
-          <p:cNvPr id="27" name="Oval 26"/>
+          <p:cNvPr id="26" name="Oval 25"/>
           <p:cNvSpPr/>
           <p:nvPr/>
         </p:nvSpPr>
@@ -22408,7 +22700,7 @@
       </p:sp>
       <p:sp>
         <p:nvSpPr>
-          <p:cNvPr id="28" name="TextBox 27"/>
+          <p:cNvPr id="27" name="TextBox 26"/>
           <p:cNvSpPr txBox="1"/>
           <p:nvPr/>
         </p:nvSpPr>
@@ -22455,7 +22747,7 @@
       </p:sp>
       <p:sp>
         <p:nvSpPr>
-          <p:cNvPr id="29" name="TextBox 28"/>
+          <p:cNvPr id="28" name="TextBox 27"/>
           <p:cNvSpPr txBox="1"/>
           <p:nvPr/>
         </p:nvSpPr>
@@ -22502,7 +22794,7 @@
       </p:sp>
       <p:sp>
         <p:nvSpPr>
-          <p:cNvPr id="30" name="TextBox 29"/>
+          <p:cNvPr id="29" name="TextBox 28"/>
           <p:cNvSpPr txBox="1"/>
           <p:nvPr/>
         </p:nvSpPr>
@@ -22560,7 +22852,7 @@
       </p:sp>
       <p:sp>
         <p:nvSpPr>
-          <p:cNvPr id="31" name="TextBox 30"/>
+          <p:cNvPr id="30" name="TextBox 29"/>
           <p:cNvSpPr txBox="1"/>
           <p:nvPr/>
         </p:nvSpPr>
@@ -22607,7 +22899,7 @@
       </p:sp>
       <p:sp>
         <p:nvSpPr>
-          <p:cNvPr id="32" name="TextBox 31"/>
+          <p:cNvPr id="31" name="TextBox 30"/>
           <p:cNvSpPr txBox="1"/>
           <p:nvPr/>
         </p:nvSpPr>
@@ -22648,6 +22940,64 @@
                 <a:cs typeface="NanumGothic"/>
               </a:rPr>
               <a:t>90분</a:t>
+            </a:r>
+          </a:p>
+        </p:txBody>
+      </p:sp>
+      <p:sp>
+        <p:nvSpPr>
+          <p:cNvPr id="32" name="TextBox 31"/>
+          <p:cNvSpPr txBox="1"/>
+          <p:nvPr/>
+        </p:nvSpPr>
+        <p:spPr>
+          <a:xfrm>
+            <a:off x="8988552" y="6419088"/>
+            <a:ext cx="2697480" cy="365760"/>
+          </a:xfrm>
+          <a:prstGeom prst="rect">
+            <a:avLst/>
+          </a:prstGeom>
+          <a:noFill/>
+        </p:spPr>
+        <p:txBody>
+          <a:bodyPr wrap="square" anchor="ctr" lIns="0" rIns="0" tIns="0" bIns="0">
+            <a:spAutoFit/>
+          </a:bodyPr>
+          <a:lstStyle/>
+          <a:p>
+            <a:pPr algn="r">
+              <a:lnSpc>
+                <a:spcPct val="100000"/>
+              </a:lnSpc>
+              <a:spcBef>
+                <a:spcPts val="0"/>
+              </a:spcBef>
+              <a:spcAft>
+                <a:spcPts val="600"/>
+              </a:spcAft>
+            </a:pPr>
+            <a:r>
+              <a:rPr sz="900" b="1">
+                <a:solidFill>
+                  <a:srgbClr val="10B981"/>
+                </a:solidFill>
+                <a:latin typeface="NanumGothic"/>
+                <a:ea typeface="NanumGothic"/>
+                <a:cs typeface="NanumGothic"/>
+              </a:rPr>
+              <a:t>Day 3 · 수</a:t>
+            </a:r>
+            <a:r>
+              <a:rPr sz="900" b="1">
+                <a:solidFill>
+                  <a:srgbClr val="64748B"/>
+                </a:solidFill>
+                <a:latin typeface="NanumGothic"/>
+                <a:ea typeface="NanumGothic"/>
+                <a:cs typeface="NanumGothic"/>
+              </a:rPr>
+              <a:t>   ·   3 / 25</a:t>
             </a:r>
           </a:p>
         </p:txBody>
@@ -22954,6 +23304,64 @@
           </a:p>
         </p:txBody>
       </p:sp>
+      <p:sp>
+        <p:nvSpPr>
+          <p:cNvPr id="8" name="TextBox 7"/>
+          <p:cNvSpPr txBox="1"/>
+          <p:nvPr/>
+        </p:nvSpPr>
+        <p:spPr>
+          <a:xfrm>
+            <a:off x="8988552" y="6419088"/>
+            <a:ext cx="2697480" cy="365760"/>
+          </a:xfrm>
+          <a:prstGeom prst="rect">
+            <a:avLst/>
+          </a:prstGeom>
+          <a:noFill/>
+        </p:spPr>
+        <p:txBody>
+          <a:bodyPr wrap="square" anchor="ctr" lIns="0" rIns="0" tIns="0" bIns="0">
+            <a:spAutoFit/>
+          </a:bodyPr>
+          <a:lstStyle/>
+          <a:p>
+            <a:pPr algn="r">
+              <a:lnSpc>
+                <a:spcPct val="100000"/>
+              </a:lnSpc>
+              <a:spcBef>
+                <a:spcPts val="0"/>
+              </a:spcBef>
+              <a:spcAft>
+                <a:spcPts val="600"/>
+              </a:spcAft>
+            </a:pPr>
+            <a:r>
+              <a:rPr sz="900" b="1">
+                <a:solidFill>
+                  <a:srgbClr val="10B981"/>
+                </a:solidFill>
+                <a:latin typeface="NanumGothic"/>
+                <a:ea typeface="NanumGothic"/>
+                <a:cs typeface="NanumGothic"/>
+              </a:rPr>
+              <a:t>Day 3 · 수</a:t>
+            </a:r>
+            <a:r>
+              <a:rPr sz="900" b="1">
+                <a:solidFill>
+                  <a:srgbClr val="CBD5E1"/>
+                </a:solidFill>
+                <a:latin typeface="NanumGothic"/>
+                <a:ea typeface="NanumGothic"/>
+                <a:cs typeface="NanumGothic"/>
+              </a:rPr>
+              <a:t>   ·   4 / 25</a:t>
+            </a:r>
+          </a:p>
+        </p:txBody>
+      </p:sp>
     </p:spTree>
   </p:cSld>
   <p:clrMapOvr>
@@ -23247,54 +23655,7 @@
       </p:sp>
       <p:sp>
         <p:nvSpPr>
-          <p:cNvPr id="8" name="TextBox 7"/>
-          <p:cNvSpPr txBox="1"/>
-          <p:nvPr/>
-        </p:nvSpPr>
-        <p:spPr>
-          <a:xfrm>
-            <a:off x="10241280" y="6419088"/>
-            <a:ext cx="1463040" cy="365760"/>
-          </a:xfrm>
-          <a:prstGeom prst="rect">
-            <a:avLst/>
-          </a:prstGeom>
-          <a:noFill/>
-        </p:spPr>
-        <p:txBody>
-          <a:bodyPr wrap="square" anchor="ctr" lIns="0" rIns="0" tIns="0" bIns="0">
-            <a:spAutoFit/>
-          </a:bodyPr>
-          <a:lstStyle/>
-          <a:p>
-            <a:pPr algn="r">
-              <a:lnSpc>
-                <a:spcPct val="100000"/>
-              </a:lnSpc>
-              <a:spcBef>
-                <a:spcPts val="0"/>
-              </a:spcBef>
-              <a:spcAft>
-                <a:spcPts val="600"/>
-              </a:spcAft>
-            </a:pPr>
-            <a:r>
-              <a:rPr sz="900" b="1">
-                <a:solidFill>
-                  <a:srgbClr val="10B981"/>
-                </a:solidFill>
-                <a:latin typeface="NanumGothic"/>
-                <a:ea typeface="NanumGothic"/>
-                <a:cs typeface="NanumGothic"/>
-              </a:rPr>
-              <a:t>Day 3 · 수</a:t>
-            </a:r>
-          </a:p>
-        </p:txBody>
-      </p:sp>
-      <p:sp>
-        <p:nvSpPr>
-          <p:cNvPr id="9" name="Rounded Rectangle 8"/>
+          <p:cNvPr id="8" name="Rounded Rectangle 7"/>
           <p:cNvSpPr/>
           <p:nvPr/>
         </p:nvSpPr>
@@ -23340,7 +23701,7 @@
       </p:sp>
       <p:sp>
         <p:nvSpPr>
-          <p:cNvPr id="10" name="TextBox 9"/>
+          <p:cNvPr id="9" name="TextBox 8"/>
           <p:cNvSpPr txBox="1"/>
           <p:nvPr/>
         </p:nvSpPr>
@@ -23387,7 +23748,7 @@
       </p:sp>
       <p:sp>
         <p:nvSpPr>
-          <p:cNvPr id="11" name="TextBox 10"/>
+          <p:cNvPr id="10" name="TextBox 9"/>
           <p:cNvSpPr txBox="1"/>
           <p:nvPr/>
         </p:nvSpPr>
@@ -23434,7 +23795,7 @@
       </p:sp>
       <p:sp>
         <p:nvSpPr>
-          <p:cNvPr id="12" name="Rounded Rectangle 11"/>
+          <p:cNvPr id="11" name="Rounded Rectangle 10"/>
           <p:cNvSpPr/>
           <p:nvPr/>
         </p:nvSpPr>
@@ -23480,7 +23841,7 @@
       </p:sp>
       <p:sp>
         <p:nvSpPr>
-          <p:cNvPr id="13" name="Oval 12"/>
+          <p:cNvPr id="12" name="Oval 11"/>
           <p:cNvSpPr/>
           <p:nvPr/>
         </p:nvSpPr>
@@ -23524,7 +23885,7 @@
       </p:sp>
       <p:sp>
         <p:nvSpPr>
-          <p:cNvPr id="14" name="TextBox 13"/>
+          <p:cNvPr id="13" name="TextBox 12"/>
           <p:cNvSpPr txBox="1"/>
           <p:nvPr/>
         </p:nvSpPr>
@@ -23571,7 +23932,7 @@
       </p:sp>
       <p:sp>
         <p:nvSpPr>
-          <p:cNvPr id="15" name="TextBox 14"/>
+          <p:cNvPr id="14" name="TextBox 13"/>
           <p:cNvSpPr txBox="1"/>
           <p:nvPr/>
         </p:nvSpPr>
@@ -23618,7 +23979,7 @@
       </p:sp>
       <p:sp>
         <p:nvSpPr>
-          <p:cNvPr id="16" name="Rounded Rectangle 15"/>
+          <p:cNvPr id="15" name="Rounded Rectangle 14"/>
           <p:cNvSpPr/>
           <p:nvPr/>
         </p:nvSpPr>
@@ -23664,7 +24025,7 @@
       </p:sp>
       <p:sp>
         <p:nvSpPr>
-          <p:cNvPr id="17" name="Oval 16"/>
+          <p:cNvPr id="16" name="Oval 15"/>
           <p:cNvSpPr/>
           <p:nvPr/>
         </p:nvSpPr>
@@ -23708,7 +24069,7 @@
       </p:sp>
       <p:sp>
         <p:nvSpPr>
-          <p:cNvPr id="18" name="TextBox 17"/>
+          <p:cNvPr id="17" name="TextBox 16"/>
           <p:cNvSpPr txBox="1"/>
           <p:nvPr/>
         </p:nvSpPr>
@@ -23755,7 +24116,7 @@
       </p:sp>
       <p:sp>
         <p:nvSpPr>
-          <p:cNvPr id="19" name="TextBox 18"/>
+          <p:cNvPr id="18" name="TextBox 17"/>
           <p:cNvSpPr txBox="1"/>
           <p:nvPr/>
         </p:nvSpPr>
@@ -23802,7 +24163,7 @@
       </p:sp>
       <p:sp>
         <p:nvSpPr>
-          <p:cNvPr id="20" name="Rounded Rectangle 19"/>
+          <p:cNvPr id="19" name="Rounded Rectangle 18"/>
           <p:cNvSpPr/>
           <p:nvPr/>
         </p:nvSpPr>
@@ -23848,7 +24209,7 @@
       </p:sp>
       <p:sp>
         <p:nvSpPr>
-          <p:cNvPr id="21" name="Oval 20"/>
+          <p:cNvPr id="20" name="Oval 19"/>
           <p:cNvSpPr/>
           <p:nvPr/>
         </p:nvSpPr>
@@ -23892,7 +24253,7 @@
       </p:sp>
       <p:sp>
         <p:nvSpPr>
-          <p:cNvPr id="22" name="TextBox 21"/>
+          <p:cNvPr id="21" name="TextBox 20"/>
           <p:cNvSpPr txBox="1"/>
           <p:nvPr/>
         </p:nvSpPr>
@@ -23939,7 +24300,7 @@
       </p:sp>
       <p:sp>
         <p:nvSpPr>
-          <p:cNvPr id="23" name="TextBox 22"/>
+          <p:cNvPr id="22" name="TextBox 21"/>
           <p:cNvSpPr txBox="1"/>
           <p:nvPr/>
         </p:nvSpPr>
@@ -23986,7 +24347,7 @@
       </p:sp>
       <p:sp>
         <p:nvSpPr>
-          <p:cNvPr id="24" name="Rounded Rectangle 23"/>
+          <p:cNvPr id="23" name="Rounded Rectangle 22"/>
           <p:cNvSpPr/>
           <p:nvPr/>
         </p:nvSpPr>
@@ -24032,7 +24393,7 @@
       </p:sp>
       <p:sp>
         <p:nvSpPr>
-          <p:cNvPr id="25" name="Oval 24"/>
+          <p:cNvPr id="24" name="Oval 23"/>
           <p:cNvSpPr/>
           <p:nvPr/>
         </p:nvSpPr>
@@ -24076,7 +24437,7 @@
       </p:sp>
       <p:sp>
         <p:nvSpPr>
-          <p:cNvPr id="26" name="TextBox 25"/>
+          <p:cNvPr id="25" name="TextBox 24"/>
           <p:cNvSpPr txBox="1"/>
           <p:nvPr/>
         </p:nvSpPr>
@@ -24123,7 +24484,7 @@
       </p:sp>
       <p:sp>
         <p:nvSpPr>
-          <p:cNvPr id="27" name="TextBox 26"/>
+          <p:cNvPr id="26" name="TextBox 25"/>
           <p:cNvSpPr txBox="1"/>
           <p:nvPr/>
         </p:nvSpPr>
@@ -24170,7 +24531,7 @@
       </p:sp>
       <p:sp>
         <p:nvSpPr>
-          <p:cNvPr id="28" name="Rounded Rectangle 27"/>
+          <p:cNvPr id="27" name="Rounded Rectangle 26"/>
           <p:cNvSpPr/>
           <p:nvPr/>
         </p:nvSpPr>
@@ -24216,7 +24577,7 @@
       </p:sp>
       <p:sp>
         <p:nvSpPr>
-          <p:cNvPr id="29" name="Oval 28"/>
+          <p:cNvPr id="28" name="Oval 27"/>
           <p:cNvSpPr/>
           <p:nvPr/>
         </p:nvSpPr>
@@ -24260,7 +24621,7 @@
       </p:sp>
       <p:sp>
         <p:nvSpPr>
-          <p:cNvPr id="30" name="TextBox 29"/>
+          <p:cNvPr id="29" name="TextBox 28"/>
           <p:cNvSpPr txBox="1"/>
           <p:nvPr/>
         </p:nvSpPr>
@@ -24307,7 +24668,7 @@
       </p:sp>
       <p:sp>
         <p:nvSpPr>
-          <p:cNvPr id="31" name="TextBox 30"/>
+          <p:cNvPr id="30" name="TextBox 29"/>
           <p:cNvSpPr txBox="1"/>
           <p:nvPr/>
         </p:nvSpPr>
@@ -24348,6 +24709,64 @@
                 <a:cs typeface="NanumGothic"/>
               </a:rPr>
               <a:t>기획서 작성(실습)</a:t>
+            </a:r>
+          </a:p>
+        </p:txBody>
+      </p:sp>
+      <p:sp>
+        <p:nvSpPr>
+          <p:cNvPr id="31" name="TextBox 30"/>
+          <p:cNvSpPr txBox="1"/>
+          <p:nvPr/>
+        </p:nvSpPr>
+        <p:spPr>
+          <a:xfrm>
+            <a:off x="8988552" y="6419088"/>
+            <a:ext cx="2697480" cy="365760"/>
+          </a:xfrm>
+          <a:prstGeom prst="rect">
+            <a:avLst/>
+          </a:prstGeom>
+          <a:noFill/>
+        </p:spPr>
+        <p:txBody>
+          <a:bodyPr wrap="square" anchor="ctr" lIns="0" rIns="0" tIns="0" bIns="0">
+            <a:spAutoFit/>
+          </a:bodyPr>
+          <a:lstStyle/>
+          <a:p>
+            <a:pPr algn="r">
+              <a:lnSpc>
+                <a:spcPct val="100000"/>
+              </a:lnSpc>
+              <a:spcBef>
+                <a:spcPts val="0"/>
+              </a:spcBef>
+              <a:spcAft>
+                <a:spcPts val="600"/>
+              </a:spcAft>
+            </a:pPr>
+            <a:r>
+              <a:rPr sz="900" b="1">
+                <a:solidFill>
+                  <a:srgbClr val="10B981"/>
+                </a:solidFill>
+                <a:latin typeface="NanumGothic"/>
+                <a:ea typeface="NanumGothic"/>
+                <a:cs typeface="NanumGothic"/>
+              </a:rPr>
+              <a:t>Day 3 · 수</a:t>
+            </a:r>
+            <a:r>
+              <a:rPr sz="900" b="1">
+                <a:solidFill>
+                  <a:srgbClr val="64748B"/>
+                </a:solidFill>
+                <a:latin typeface="NanumGothic"/>
+                <a:ea typeface="NanumGothic"/>
+                <a:cs typeface="NanumGothic"/>
+              </a:rPr>
+              <a:t>   ·   5 / 25</a:t>
             </a:r>
           </a:p>
         </p:txBody>
@@ -24645,54 +25064,7 @@
       </p:sp>
       <p:sp>
         <p:nvSpPr>
-          <p:cNvPr id="8" name="TextBox 7"/>
-          <p:cNvSpPr txBox="1"/>
-          <p:nvPr/>
-        </p:nvSpPr>
-        <p:spPr>
-          <a:xfrm>
-            <a:off x="10241280" y="6419088"/>
-            <a:ext cx="1463040" cy="365760"/>
-          </a:xfrm>
-          <a:prstGeom prst="rect">
-            <a:avLst/>
-          </a:prstGeom>
-          <a:noFill/>
-        </p:spPr>
-        <p:txBody>
-          <a:bodyPr wrap="square" anchor="ctr" lIns="0" rIns="0" tIns="0" bIns="0">
-            <a:spAutoFit/>
-          </a:bodyPr>
-          <a:lstStyle/>
-          <a:p>
-            <a:pPr algn="r">
-              <a:lnSpc>
-                <a:spcPct val="100000"/>
-              </a:lnSpc>
-              <a:spcBef>
-                <a:spcPts val="0"/>
-              </a:spcBef>
-              <a:spcAft>
-                <a:spcPts val="600"/>
-              </a:spcAft>
-            </a:pPr>
-            <a:r>
-              <a:rPr sz="900" b="1">
-                <a:solidFill>
-                  <a:srgbClr val="10B981"/>
-                </a:solidFill>
-                <a:latin typeface="NanumGothic"/>
-                <a:ea typeface="NanumGothic"/>
-                <a:cs typeface="NanumGothic"/>
-              </a:rPr>
-              <a:t>Day 3 · 수</a:t>
-            </a:r>
-          </a:p>
-        </p:txBody>
-      </p:sp>
-      <p:sp>
-        <p:nvSpPr>
-          <p:cNvPr id="9" name="Oval 8"/>
+          <p:cNvPr id="8" name="Oval 7"/>
           <p:cNvSpPr/>
           <p:nvPr/>
         </p:nvSpPr>
@@ -24736,7 +25108,7 @@
       </p:sp>
       <p:sp>
         <p:nvSpPr>
-          <p:cNvPr id="10" name="TextBox 9"/>
+          <p:cNvPr id="9" name="TextBox 8"/>
           <p:cNvSpPr txBox="1"/>
           <p:nvPr/>
         </p:nvSpPr>
@@ -24783,7 +25155,7 @@
       </p:sp>
       <p:sp>
         <p:nvSpPr>
-          <p:cNvPr id="11" name="TextBox 10"/>
+          <p:cNvPr id="10" name="TextBox 9"/>
           <p:cNvSpPr txBox="1"/>
           <p:nvPr/>
         </p:nvSpPr>
@@ -24830,7 +25202,7 @@
       </p:sp>
       <p:sp>
         <p:nvSpPr>
-          <p:cNvPr id="12" name="Oval 11"/>
+          <p:cNvPr id="11" name="Oval 10"/>
           <p:cNvSpPr/>
           <p:nvPr/>
         </p:nvSpPr>
@@ -24874,7 +25246,7 @@
       </p:sp>
       <p:sp>
         <p:nvSpPr>
-          <p:cNvPr id="13" name="TextBox 12"/>
+          <p:cNvPr id="12" name="TextBox 11"/>
           <p:cNvSpPr txBox="1"/>
           <p:nvPr/>
         </p:nvSpPr>
@@ -24921,7 +25293,7 @@
       </p:sp>
       <p:sp>
         <p:nvSpPr>
-          <p:cNvPr id="14" name="TextBox 13"/>
+          <p:cNvPr id="13" name="TextBox 12"/>
           <p:cNvSpPr txBox="1"/>
           <p:nvPr/>
         </p:nvSpPr>
@@ -24968,7 +25340,7 @@
       </p:sp>
       <p:sp>
         <p:nvSpPr>
-          <p:cNvPr id="15" name="Oval 14"/>
+          <p:cNvPr id="14" name="Oval 13"/>
           <p:cNvSpPr/>
           <p:nvPr/>
         </p:nvSpPr>
@@ -25012,7 +25384,7 @@
       </p:sp>
       <p:sp>
         <p:nvSpPr>
-          <p:cNvPr id="16" name="TextBox 15"/>
+          <p:cNvPr id="15" name="TextBox 14"/>
           <p:cNvSpPr txBox="1"/>
           <p:nvPr/>
         </p:nvSpPr>
@@ -25059,7 +25431,7 @@
       </p:sp>
       <p:sp>
         <p:nvSpPr>
-          <p:cNvPr id="17" name="TextBox 16"/>
+          <p:cNvPr id="16" name="TextBox 15"/>
           <p:cNvSpPr txBox="1"/>
           <p:nvPr/>
         </p:nvSpPr>
@@ -25100,6 +25472,64 @@
                 <a:cs typeface="NanumGothic"/>
               </a:rPr>
               <a:t>산출물 합의</a:t>
+            </a:r>
+          </a:p>
+        </p:txBody>
+      </p:sp>
+      <p:sp>
+        <p:nvSpPr>
+          <p:cNvPr id="17" name="TextBox 16"/>
+          <p:cNvSpPr txBox="1"/>
+          <p:nvPr/>
+        </p:nvSpPr>
+        <p:spPr>
+          <a:xfrm>
+            <a:off x="8988552" y="6419088"/>
+            <a:ext cx="2697480" cy="365760"/>
+          </a:xfrm>
+          <a:prstGeom prst="rect">
+            <a:avLst/>
+          </a:prstGeom>
+          <a:noFill/>
+        </p:spPr>
+        <p:txBody>
+          <a:bodyPr wrap="square" anchor="ctr" lIns="0" rIns="0" tIns="0" bIns="0">
+            <a:spAutoFit/>
+          </a:bodyPr>
+          <a:lstStyle/>
+          <a:p>
+            <a:pPr algn="r">
+              <a:lnSpc>
+                <a:spcPct val="100000"/>
+              </a:lnSpc>
+              <a:spcBef>
+                <a:spcPts val="0"/>
+              </a:spcBef>
+              <a:spcAft>
+                <a:spcPts val="600"/>
+              </a:spcAft>
+            </a:pPr>
+            <a:r>
+              <a:rPr sz="900" b="1">
+                <a:solidFill>
+                  <a:srgbClr val="10B981"/>
+                </a:solidFill>
+                <a:latin typeface="NanumGothic"/>
+                <a:ea typeface="NanumGothic"/>
+                <a:cs typeface="NanumGothic"/>
+              </a:rPr>
+              <a:t>Day 3 · 수</a:t>
+            </a:r>
+            <a:r>
+              <a:rPr sz="900" b="1">
+                <a:solidFill>
+                  <a:srgbClr val="64748B"/>
+                </a:solidFill>
+                <a:latin typeface="NanumGothic"/>
+                <a:ea typeface="NanumGothic"/>
+                <a:cs typeface="NanumGothic"/>
+              </a:rPr>
+              <a:t>   ·   6 / 25</a:t>
             </a:r>
           </a:p>
         </p:txBody>
@@ -25397,54 +25827,7 @@
       </p:sp>
       <p:sp>
         <p:nvSpPr>
-          <p:cNvPr id="8" name="TextBox 7"/>
-          <p:cNvSpPr txBox="1"/>
-          <p:nvPr/>
-        </p:nvSpPr>
-        <p:spPr>
-          <a:xfrm>
-            <a:off x="10241280" y="6419088"/>
-            <a:ext cx="1463040" cy="365760"/>
-          </a:xfrm>
-          <a:prstGeom prst="rect">
-            <a:avLst/>
-          </a:prstGeom>
-          <a:noFill/>
-        </p:spPr>
-        <p:txBody>
-          <a:bodyPr wrap="square" anchor="ctr" lIns="0" rIns="0" tIns="0" bIns="0">
-            <a:spAutoFit/>
-          </a:bodyPr>
-          <a:lstStyle/>
-          <a:p>
-            <a:pPr algn="r">
-              <a:lnSpc>
-                <a:spcPct val="100000"/>
-              </a:lnSpc>
-              <a:spcBef>
-                <a:spcPts val="0"/>
-              </a:spcBef>
-              <a:spcAft>
-                <a:spcPts val="600"/>
-              </a:spcAft>
-            </a:pPr>
-            <a:r>
-              <a:rPr sz="900" b="1">
-                <a:solidFill>
-                  <a:srgbClr val="10B981"/>
-                </a:solidFill>
-                <a:latin typeface="NanumGothic"/>
-                <a:ea typeface="NanumGothic"/>
-                <a:cs typeface="NanumGothic"/>
-              </a:rPr>
-              <a:t>Day 3 · 수</a:t>
-            </a:r>
-          </a:p>
-        </p:txBody>
-      </p:sp>
-      <p:sp>
-        <p:nvSpPr>
-          <p:cNvPr id="9" name="Oval 8"/>
+          <p:cNvPr id="8" name="Oval 7"/>
           <p:cNvSpPr/>
           <p:nvPr/>
         </p:nvSpPr>
@@ -25488,7 +25871,7 @@
       </p:sp>
       <p:sp>
         <p:nvSpPr>
-          <p:cNvPr id="10" name="TextBox 9"/>
+          <p:cNvPr id="9" name="TextBox 8"/>
           <p:cNvSpPr txBox="1"/>
           <p:nvPr/>
         </p:nvSpPr>
@@ -25535,7 +25918,7 @@
       </p:sp>
       <p:sp>
         <p:nvSpPr>
-          <p:cNvPr id="11" name="TextBox 10"/>
+          <p:cNvPr id="10" name="TextBox 9"/>
           <p:cNvSpPr txBox="1"/>
           <p:nvPr/>
         </p:nvSpPr>
@@ -25582,7 +25965,7 @@
       </p:sp>
       <p:sp>
         <p:nvSpPr>
-          <p:cNvPr id="12" name="Oval 11"/>
+          <p:cNvPr id="11" name="Oval 10"/>
           <p:cNvSpPr/>
           <p:nvPr/>
         </p:nvSpPr>
@@ -25626,7 +26009,7 @@
       </p:sp>
       <p:sp>
         <p:nvSpPr>
-          <p:cNvPr id="13" name="TextBox 12"/>
+          <p:cNvPr id="12" name="TextBox 11"/>
           <p:cNvSpPr txBox="1"/>
           <p:nvPr/>
         </p:nvSpPr>
@@ -25673,7 +26056,7 @@
       </p:sp>
       <p:sp>
         <p:nvSpPr>
-          <p:cNvPr id="14" name="TextBox 13"/>
+          <p:cNvPr id="13" name="TextBox 12"/>
           <p:cNvSpPr txBox="1"/>
           <p:nvPr/>
         </p:nvSpPr>
@@ -25720,7 +26103,7 @@
       </p:sp>
       <p:sp>
         <p:nvSpPr>
-          <p:cNvPr id="15" name="Oval 14"/>
+          <p:cNvPr id="14" name="Oval 13"/>
           <p:cNvSpPr/>
           <p:nvPr/>
         </p:nvSpPr>
@@ -25764,7 +26147,7 @@
       </p:sp>
       <p:sp>
         <p:nvSpPr>
-          <p:cNvPr id="16" name="TextBox 15"/>
+          <p:cNvPr id="15" name="TextBox 14"/>
           <p:cNvSpPr txBox="1"/>
           <p:nvPr/>
         </p:nvSpPr>
@@ -25811,7 +26194,7 @@
       </p:sp>
       <p:sp>
         <p:nvSpPr>
-          <p:cNvPr id="17" name="TextBox 16"/>
+          <p:cNvPr id="16" name="TextBox 15"/>
           <p:cNvSpPr txBox="1"/>
           <p:nvPr/>
         </p:nvSpPr>
@@ -25852,6 +26235,64 @@
                 <a:cs typeface="NanumGothic"/>
               </a:rPr>
               <a:t>현실성 점검</a:t>
+            </a:r>
+          </a:p>
+        </p:txBody>
+      </p:sp>
+      <p:sp>
+        <p:nvSpPr>
+          <p:cNvPr id="17" name="TextBox 16"/>
+          <p:cNvSpPr txBox="1"/>
+          <p:nvPr/>
+        </p:nvSpPr>
+        <p:spPr>
+          <a:xfrm>
+            <a:off x="8988552" y="6419088"/>
+            <a:ext cx="2697480" cy="365760"/>
+          </a:xfrm>
+          <a:prstGeom prst="rect">
+            <a:avLst/>
+          </a:prstGeom>
+          <a:noFill/>
+        </p:spPr>
+        <p:txBody>
+          <a:bodyPr wrap="square" anchor="ctr" lIns="0" rIns="0" tIns="0" bIns="0">
+            <a:spAutoFit/>
+          </a:bodyPr>
+          <a:lstStyle/>
+          <a:p>
+            <a:pPr algn="r">
+              <a:lnSpc>
+                <a:spcPct val="100000"/>
+              </a:lnSpc>
+              <a:spcBef>
+                <a:spcPts val="0"/>
+              </a:spcBef>
+              <a:spcAft>
+                <a:spcPts val="600"/>
+              </a:spcAft>
+            </a:pPr>
+            <a:r>
+              <a:rPr sz="900" b="1">
+                <a:solidFill>
+                  <a:srgbClr val="10B981"/>
+                </a:solidFill>
+                <a:latin typeface="NanumGothic"/>
+                <a:ea typeface="NanumGothic"/>
+                <a:cs typeface="NanumGothic"/>
+              </a:rPr>
+              <a:t>Day 3 · 수</a:t>
+            </a:r>
+            <a:r>
+              <a:rPr sz="900" b="1">
+                <a:solidFill>
+                  <a:srgbClr val="64748B"/>
+                </a:solidFill>
+                <a:latin typeface="NanumGothic"/>
+                <a:ea typeface="NanumGothic"/>
+                <a:cs typeface="NanumGothic"/>
+              </a:rPr>
+              <a:t>   ·   7 / 25</a:t>
             </a:r>
           </a:p>
         </p:txBody>
@@ -26149,54 +26590,7 @@
       </p:sp>
       <p:sp>
         <p:nvSpPr>
-          <p:cNvPr id="8" name="TextBox 7"/>
-          <p:cNvSpPr txBox="1"/>
-          <p:nvPr/>
-        </p:nvSpPr>
-        <p:spPr>
-          <a:xfrm>
-            <a:off x="10241280" y="6419088"/>
-            <a:ext cx="1463040" cy="365760"/>
-          </a:xfrm>
-          <a:prstGeom prst="rect">
-            <a:avLst/>
-          </a:prstGeom>
-          <a:noFill/>
-        </p:spPr>
-        <p:txBody>
-          <a:bodyPr wrap="square" anchor="ctr" lIns="0" rIns="0" tIns="0" bIns="0">
-            <a:spAutoFit/>
-          </a:bodyPr>
-          <a:lstStyle/>
-          <a:p>
-            <a:pPr algn="r">
-              <a:lnSpc>
-                <a:spcPct val="100000"/>
-              </a:lnSpc>
-              <a:spcBef>
-                <a:spcPts val="0"/>
-              </a:spcBef>
-              <a:spcAft>
-                <a:spcPts val="600"/>
-              </a:spcAft>
-            </a:pPr>
-            <a:r>
-              <a:rPr sz="900" b="1">
-                <a:solidFill>
-                  <a:srgbClr val="10B981"/>
-                </a:solidFill>
-                <a:latin typeface="NanumGothic"/>
-                <a:ea typeface="NanumGothic"/>
-                <a:cs typeface="NanumGothic"/>
-              </a:rPr>
-              <a:t>Day 3 · 수</a:t>
-            </a:r>
-          </a:p>
-        </p:txBody>
-      </p:sp>
-      <p:sp>
-        <p:nvSpPr>
-          <p:cNvPr id="9" name="Oval 8"/>
+          <p:cNvPr id="8" name="Oval 7"/>
           <p:cNvSpPr/>
           <p:nvPr/>
         </p:nvSpPr>
@@ -26240,7 +26634,7 @@
       </p:sp>
       <p:sp>
         <p:nvSpPr>
-          <p:cNvPr id="10" name="TextBox 9"/>
+          <p:cNvPr id="9" name="TextBox 8"/>
           <p:cNvSpPr txBox="1"/>
           <p:nvPr/>
         </p:nvSpPr>
@@ -26287,7 +26681,7 @@
       </p:sp>
       <p:sp>
         <p:nvSpPr>
-          <p:cNvPr id="11" name="TextBox 10"/>
+          <p:cNvPr id="10" name="TextBox 9"/>
           <p:cNvSpPr txBox="1"/>
           <p:nvPr/>
         </p:nvSpPr>
@@ -26334,7 +26728,7 @@
       </p:sp>
       <p:sp>
         <p:nvSpPr>
-          <p:cNvPr id="12" name="Oval 11"/>
+          <p:cNvPr id="11" name="Oval 10"/>
           <p:cNvSpPr/>
           <p:nvPr/>
         </p:nvSpPr>
@@ -26378,7 +26772,7 @@
       </p:sp>
       <p:sp>
         <p:nvSpPr>
-          <p:cNvPr id="13" name="TextBox 12"/>
+          <p:cNvPr id="12" name="TextBox 11"/>
           <p:cNvSpPr txBox="1"/>
           <p:nvPr/>
         </p:nvSpPr>
@@ -26425,7 +26819,7 @@
       </p:sp>
       <p:sp>
         <p:nvSpPr>
-          <p:cNvPr id="14" name="TextBox 13"/>
+          <p:cNvPr id="13" name="TextBox 12"/>
           <p:cNvSpPr txBox="1"/>
           <p:nvPr/>
         </p:nvSpPr>
@@ -26472,7 +26866,7 @@
       </p:sp>
       <p:sp>
         <p:nvSpPr>
-          <p:cNvPr id="15" name="Oval 14"/>
+          <p:cNvPr id="14" name="Oval 13"/>
           <p:cNvSpPr/>
           <p:nvPr/>
         </p:nvSpPr>
@@ -26516,7 +26910,7 @@
       </p:sp>
       <p:sp>
         <p:nvSpPr>
-          <p:cNvPr id="16" name="TextBox 15"/>
+          <p:cNvPr id="15" name="TextBox 14"/>
           <p:cNvSpPr txBox="1"/>
           <p:nvPr/>
         </p:nvSpPr>
@@ -26563,7 +26957,7 @@
       </p:sp>
       <p:sp>
         <p:nvSpPr>
-          <p:cNvPr id="17" name="TextBox 16"/>
+          <p:cNvPr id="16" name="TextBox 15"/>
           <p:cNvSpPr txBox="1"/>
           <p:nvPr/>
         </p:nvSpPr>
@@ -26604,6 +26998,64 @@
                 <a:cs typeface="NanumGothic"/>
               </a:rPr>
               <a:t>전·후 차이를 한 줄로</a:t>
+            </a:r>
+          </a:p>
+        </p:txBody>
+      </p:sp>
+      <p:sp>
+        <p:nvSpPr>
+          <p:cNvPr id="17" name="TextBox 16"/>
+          <p:cNvSpPr txBox="1"/>
+          <p:nvPr/>
+        </p:nvSpPr>
+        <p:spPr>
+          <a:xfrm>
+            <a:off x="8988552" y="6419088"/>
+            <a:ext cx="2697480" cy="365760"/>
+          </a:xfrm>
+          <a:prstGeom prst="rect">
+            <a:avLst/>
+          </a:prstGeom>
+          <a:noFill/>
+        </p:spPr>
+        <p:txBody>
+          <a:bodyPr wrap="square" anchor="ctr" lIns="0" rIns="0" tIns="0" bIns="0">
+            <a:spAutoFit/>
+          </a:bodyPr>
+          <a:lstStyle/>
+          <a:p>
+            <a:pPr algn="r">
+              <a:lnSpc>
+                <a:spcPct val="100000"/>
+              </a:lnSpc>
+              <a:spcBef>
+                <a:spcPts val="0"/>
+              </a:spcBef>
+              <a:spcAft>
+                <a:spcPts val="600"/>
+              </a:spcAft>
+            </a:pPr>
+            <a:r>
+              <a:rPr sz="900" b="1">
+                <a:solidFill>
+                  <a:srgbClr val="10B981"/>
+                </a:solidFill>
+                <a:latin typeface="NanumGothic"/>
+                <a:ea typeface="NanumGothic"/>
+                <a:cs typeface="NanumGothic"/>
+              </a:rPr>
+              <a:t>Day 3 · 수</a:t>
+            </a:r>
+            <a:r>
+              <a:rPr sz="900" b="1">
+                <a:solidFill>
+                  <a:srgbClr val="64748B"/>
+                </a:solidFill>
+                <a:latin typeface="NanumGothic"/>
+                <a:ea typeface="NanumGothic"/>
+                <a:cs typeface="NanumGothic"/>
+              </a:rPr>
+              <a:t>   ·   8 / 25</a:t>
             </a:r>
           </a:p>
         </p:txBody>
@@ -26901,54 +27353,7 @@
       </p:sp>
       <p:sp>
         <p:nvSpPr>
-          <p:cNvPr id="8" name="TextBox 7"/>
-          <p:cNvSpPr txBox="1"/>
-          <p:nvPr/>
-        </p:nvSpPr>
-        <p:spPr>
-          <a:xfrm>
-            <a:off x="10241280" y="6419088"/>
-            <a:ext cx="1463040" cy="365760"/>
-          </a:xfrm>
-          <a:prstGeom prst="rect">
-            <a:avLst/>
-          </a:prstGeom>
-          <a:noFill/>
-        </p:spPr>
-        <p:txBody>
-          <a:bodyPr wrap="square" anchor="ctr" lIns="0" rIns="0" tIns="0" bIns="0">
-            <a:spAutoFit/>
-          </a:bodyPr>
-          <a:lstStyle/>
-          <a:p>
-            <a:pPr algn="r">
-              <a:lnSpc>
-                <a:spcPct val="100000"/>
-              </a:lnSpc>
-              <a:spcBef>
-                <a:spcPts val="0"/>
-              </a:spcBef>
-              <a:spcAft>
-                <a:spcPts val="600"/>
-              </a:spcAft>
-            </a:pPr>
-            <a:r>
-              <a:rPr sz="900" b="1">
-                <a:solidFill>
-                  <a:srgbClr val="10B981"/>
-                </a:solidFill>
-                <a:latin typeface="NanumGothic"/>
-                <a:ea typeface="NanumGothic"/>
-                <a:cs typeface="NanumGothic"/>
-              </a:rPr>
-              <a:t>Day 3 · 수</a:t>
-            </a:r>
-          </a:p>
-        </p:txBody>
-      </p:sp>
-      <p:sp>
-        <p:nvSpPr>
-          <p:cNvPr id="9" name="Rounded Rectangle 8"/>
+          <p:cNvPr id="8" name="Rounded Rectangle 7"/>
           <p:cNvSpPr/>
           <p:nvPr/>
         </p:nvSpPr>
@@ -26994,7 +27399,7 @@
       </p:sp>
       <p:sp>
         <p:nvSpPr>
-          <p:cNvPr id="10" name="Rounded Rectangle 9"/>
+          <p:cNvPr id="9" name="Rounded Rectangle 8"/>
           <p:cNvSpPr/>
           <p:nvPr/>
         </p:nvSpPr>
@@ -27038,7 +27443,7 @@
       </p:sp>
       <p:sp>
         <p:nvSpPr>
-          <p:cNvPr id="11" name="TextBox 10"/>
+          <p:cNvPr id="10" name="TextBox 9"/>
           <p:cNvSpPr txBox="1"/>
           <p:nvPr/>
         </p:nvSpPr>
@@ -27085,7 +27490,7 @@
       </p:sp>
       <p:sp>
         <p:nvSpPr>
-          <p:cNvPr id="12" name="TextBox 11"/>
+          <p:cNvPr id="11" name="TextBox 10"/>
           <p:cNvSpPr txBox="1"/>
           <p:nvPr/>
         </p:nvSpPr>
@@ -27143,7 +27548,7 @@
       </p:sp>
       <p:sp>
         <p:nvSpPr>
-          <p:cNvPr id="13" name="TextBox 12"/>
+          <p:cNvPr id="12" name="TextBox 11"/>
           <p:cNvSpPr txBox="1"/>
           <p:nvPr/>
         </p:nvSpPr>
@@ -27201,7 +27606,7 @@
       </p:sp>
       <p:sp>
         <p:nvSpPr>
-          <p:cNvPr id="14" name="TextBox 13"/>
+          <p:cNvPr id="13" name="TextBox 12"/>
           <p:cNvSpPr txBox="1"/>
           <p:nvPr/>
         </p:nvSpPr>
@@ -27259,7 +27664,7 @@
       </p:sp>
       <p:sp>
         <p:nvSpPr>
-          <p:cNvPr id="15" name="TextBox 14"/>
+          <p:cNvPr id="14" name="TextBox 13"/>
           <p:cNvSpPr txBox="1"/>
           <p:nvPr/>
         </p:nvSpPr>
@@ -27317,7 +27722,7 @@
       </p:sp>
       <p:sp>
         <p:nvSpPr>
-          <p:cNvPr id="16" name="Rounded Rectangle 15"/>
+          <p:cNvPr id="15" name="Rounded Rectangle 14"/>
           <p:cNvSpPr/>
           <p:nvPr/>
         </p:nvSpPr>
@@ -27363,7 +27768,7 @@
       </p:sp>
       <p:sp>
         <p:nvSpPr>
-          <p:cNvPr id="17" name="Rounded Rectangle 16"/>
+          <p:cNvPr id="16" name="Rounded Rectangle 15"/>
           <p:cNvSpPr/>
           <p:nvPr/>
         </p:nvSpPr>
@@ -27407,7 +27812,7 @@
       </p:sp>
       <p:sp>
         <p:nvSpPr>
-          <p:cNvPr id="18" name="TextBox 17"/>
+          <p:cNvPr id="17" name="TextBox 16"/>
           <p:cNvSpPr txBox="1"/>
           <p:nvPr/>
         </p:nvSpPr>
@@ -27454,7 +27859,7 @@
       </p:sp>
       <p:sp>
         <p:nvSpPr>
-          <p:cNvPr id="19" name="TextBox 18"/>
+          <p:cNvPr id="18" name="TextBox 17"/>
           <p:cNvSpPr txBox="1"/>
           <p:nvPr/>
         </p:nvSpPr>
@@ -27512,7 +27917,7 @@
       </p:sp>
       <p:sp>
         <p:nvSpPr>
-          <p:cNvPr id="20" name="TextBox 19"/>
+          <p:cNvPr id="19" name="TextBox 18"/>
           <p:cNvSpPr txBox="1"/>
           <p:nvPr/>
         </p:nvSpPr>
@@ -27570,7 +27975,7 @@
       </p:sp>
       <p:sp>
         <p:nvSpPr>
-          <p:cNvPr id="21" name="TextBox 20"/>
+          <p:cNvPr id="20" name="TextBox 19"/>
           <p:cNvSpPr txBox="1"/>
           <p:nvPr/>
         </p:nvSpPr>
@@ -27628,7 +28033,7 @@
       </p:sp>
       <p:sp>
         <p:nvSpPr>
-          <p:cNvPr id="22" name="TextBox 21"/>
+          <p:cNvPr id="21" name="TextBox 20"/>
           <p:cNvSpPr txBox="1"/>
           <p:nvPr/>
         </p:nvSpPr>
@@ -27680,6 +28085,64 @@
                 <a:cs typeface="NanumGothic"/>
               </a:rPr>
               <a:t>마감</a:t>
+            </a:r>
+          </a:p>
+        </p:txBody>
+      </p:sp>
+      <p:sp>
+        <p:nvSpPr>
+          <p:cNvPr id="22" name="TextBox 21"/>
+          <p:cNvSpPr txBox="1"/>
+          <p:nvPr/>
+        </p:nvSpPr>
+        <p:spPr>
+          <a:xfrm>
+            <a:off x="8988552" y="6419088"/>
+            <a:ext cx="2697480" cy="365760"/>
+          </a:xfrm>
+          <a:prstGeom prst="rect">
+            <a:avLst/>
+          </a:prstGeom>
+          <a:noFill/>
+        </p:spPr>
+        <p:txBody>
+          <a:bodyPr wrap="square" anchor="ctr" lIns="0" rIns="0" tIns="0" bIns="0">
+            <a:spAutoFit/>
+          </a:bodyPr>
+          <a:lstStyle/>
+          <a:p>
+            <a:pPr algn="r">
+              <a:lnSpc>
+                <a:spcPct val="100000"/>
+              </a:lnSpc>
+              <a:spcBef>
+                <a:spcPts val="0"/>
+              </a:spcBef>
+              <a:spcAft>
+                <a:spcPts val="600"/>
+              </a:spcAft>
+            </a:pPr>
+            <a:r>
+              <a:rPr sz="900" b="1">
+                <a:solidFill>
+                  <a:srgbClr val="10B981"/>
+                </a:solidFill>
+                <a:latin typeface="NanumGothic"/>
+                <a:ea typeface="NanumGothic"/>
+                <a:cs typeface="NanumGothic"/>
+              </a:rPr>
+              <a:t>Day 3 · 수</a:t>
+            </a:r>
+            <a:r>
+              <a:rPr sz="900" b="1">
+                <a:solidFill>
+                  <a:srgbClr val="64748B"/>
+                </a:solidFill>
+                <a:latin typeface="NanumGothic"/>
+                <a:ea typeface="NanumGothic"/>
+                <a:cs typeface="NanumGothic"/>
+              </a:rPr>
+              <a:t>   ·   9 / 25</a:t>
             </a:r>
           </a:p>
         </p:txBody>

--- a/slides/day3.pptx
+++ b/slides/day3.pptx
@@ -4331,7 +4331,7 @@
                 <a:ea typeface="NanumGothic"/>
                 <a:cs typeface="NanumGothic"/>
               </a:rPr>
-              <a:t>AI 에이전트와 응용  ·  원광대학교 5일 교육</a:t>
+              <a:t>신약 개발을 위한 AI Agent 특강</a:t>
             </a:r>
           </a:p>
         </p:txBody>
@@ -5824,7 +5824,7 @@
                 <a:ea typeface="NanumGothic"/>
                 <a:cs typeface="NanumGothic"/>
               </a:rPr>
-              <a:t>AI 에이전트와 응용  ·  원광대학교 5일 교육</a:t>
+              <a:t>신약 개발을 위한 AI Agent 특강</a:t>
             </a:r>
           </a:p>
         </p:txBody>
@@ -6865,7 +6865,7 @@
                 <a:ea typeface="NanumGothic"/>
                 <a:cs typeface="NanumGothic"/>
               </a:rPr>
-              <a:t>AI 에이전트와 응용  ·  원광대학교 5일 교육</a:t>
+              <a:t>신약 개발을 위한 AI Agent 특강</a:t>
             </a:r>
           </a:p>
         </p:txBody>
@@ -7628,7 +7628,7 @@
                 <a:ea typeface="NanumGothic"/>
                 <a:cs typeface="NanumGothic"/>
               </a:rPr>
-              <a:t>AI 에이전트와 응용  ·  원광대학교 5일 교육</a:t>
+              <a:t>신약 개발을 위한 AI Agent 특강</a:t>
             </a:r>
           </a:p>
         </p:txBody>
@@ -8761,7 +8761,7 @@
                 <a:ea typeface="NanumGothic"/>
                 <a:cs typeface="NanumGothic"/>
               </a:rPr>
-              <a:t>AI 에이전트와 응용  ·  원광대학교 5일 교육</a:t>
+              <a:t>신약 개발을 위한 AI Agent 특강</a:t>
             </a:r>
           </a:p>
         </p:txBody>
@@ -9746,7 +9746,7 @@
                 <a:ea typeface="NanumGothic"/>
                 <a:cs typeface="NanumGothic"/>
               </a:rPr>
-              <a:t>AI 에이전트와 응용  ·  원광대학교 5일 교육</a:t>
+              <a:t>신약 개발을 위한 AI Agent 특강</a:t>
             </a:r>
           </a:p>
         </p:txBody>
@@ -11523,7 +11523,7 @@
                 <a:ea typeface="NanumGothic"/>
                 <a:cs typeface="NanumGothic"/>
               </a:rPr>
-              <a:t>AI 에이전트와 응용  ·  원광대학교 5일 교육</a:t>
+              <a:t>신약 개발을 위한 AI Agent 특강</a:t>
             </a:r>
           </a:p>
         </p:txBody>
@@ -13319,7 +13319,7 @@
                 <a:ea typeface="NanumGothic"/>
                 <a:cs typeface="NanumGothic"/>
               </a:rPr>
-              <a:t>AI 에이전트와 응용  ·  원광대학교 5일 교육</a:t>
+              <a:t>신약 개발을 위한 AI Agent 특강</a:t>
             </a:r>
           </a:p>
         </p:txBody>
@@ -14186,7 +14186,7 @@
                 <a:ea typeface="NanumGothic"/>
                 <a:cs typeface="NanumGothic"/>
               </a:rPr>
-              <a:t>AI 에이전트와 응용  ·  원광대학교 5일 교육</a:t>
+              <a:t>신약 개발을 위한 AI Agent 특강</a:t>
             </a:r>
           </a:p>
         </p:txBody>
@@ -15458,7 +15458,7 @@
                 <a:ea typeface="NanumGothic"/>
                 <a:cs typeface="NanumGothic"/>
               </a:rPr>
-              <a:t>AI 에이전트와 응용  ·  원광대학교 5일 교육</a:t>
+              <a:t>신약 개발을 위한 AI Agent 특강</a:t>
             </a:r>
           </a:p>
         </p:txBody>
@@ -16429,7 +16429,7 @@
                 <a:ea typeface="NanumGothic"/>
                 <a:cs typeface="NanumGothic"/>
               </a:rPr>
-              <a:t>AI 에이전트와 응용  ·  원광대학교 5일 교육</a:t>
+              <a:t>신약 개발을 위한 AI Agent 특강</a:t>
             </a:r>
           </a:p>
         </p:txBody>
@@ -17296,7 +17296,7 @@
                 <a:ea typeface="NanumGothic"/>
                 <a:cs typeface="NanumGothic"/>
               </a:rPr>
-              <a:t>AI 에이전트와 응용  ·  원광대학교 5일 교육</a:t>
+              <a:t>신약 개발을 위한 AI Agent 특강</a:t>
             </a:r>
           </a:p>
         </p:txBody>
@@ -18059,7 +18059,7 @@
                 <a:ea typeface="NanumGothic"/>
                 <a:cs typeface="NanumGothic"/>
               </a:rPr>
-              <a:t>AI 에이전트와 응용  ·  원광대학교 5일 교육</a:t>
+              <a:t>신약 개발을 위한 AI Agent 특강</a:t>
             </a:r>
           </a:p>
         </p:txBody>
@@ -19855,7 +19855,7 @@
                 <a:ea typeface="NanumGothic"/>
                 <a:cs typeface="NanumGothic"/>
               </a:rPr>
-              <a:t>AI 에이전트와 응용  ·  원광대학교 5일 교육</a:t>
+              <a:t>신약 개발을 위한 AI Agent 특강</a:t>
             </a:r>
           </a:p>
         </p:txBody>
@@ -20990,7 +20990,7 @@
                 <a:ea typeface="NanumGothic"/>
                 <a:cs typeface="NanumGothic"/>
               </a:rPr>
-              <a:t>AI 에이전트와 응용  ·  원광대학교 5일 교육</a:t>
+              <a:t>신약 개발을 위한 AI Agent 특강</a:t>
             </a:r>
           </a:p>
         </p:txBody>
@@ -21799,7 +21799,7 @@
                 <a:ea typeface="NanumGothic"/>
                 <a:cs typeface="NanumGothic"/>
               </a:rPr>
-              <a:t>AI 에이전트와 응용  ·  원광대학교 5일 교육</a:t>
+              <a:t>신약 개발을 위한 AI Agent 특강</a:t>
             </a:r>
           </a:p>
         </p:txBody>
@@ -23648,7 +23648,7 @@
                 <a:ea typeface="NanumGothic"/>
                 <a:cs typeface="NanumGothic"/>
               </a:rPr>
-              <a:t>AI 에이전트와 응용  ·  원광대학교 5일 교육</a:t>
+              <a:t>신약 개발을 위한 AI Agent 특강</a:t>
             </a:r>
           </a:p>
         </p:txBody>
@@ -25057,7 +25057,7 @@
                 <a:ea typeface="NanumGothic"/>
                 <a:cs typeface="NanumGothic"/>
               </a:rPr>
-              <a:t>AI 에이전트와 응용  ·  원광대학교 5일 교육</a:t>
+              <a:t>신약 개발을 위한 AI Agent 특강</a:t>
             </a:r>
           </a:p>
         </p:txBody>
@@ -25820,7 +25820,7 @@
                 <a:ea typeface="NanumGothic"/>
                 <a:cs typeface="NanumGothic"/>
               </a:rPr>
-              <a:t>AI 에이전트와 응용  ·  원광대학교 5일 교육</a:t>
+              <a:t>신약 개발을 위한 AI Agent 특강</a:t>
             </a:r>
           </a:p>
         </p:txBody>
@@ -26583,7 +26583,7 @@
                 <a:ea typeface="NanumGothic"/>
                 <a:cs typeface="NanumGothic"/>
               </a:rPr>
-              <a:t>AI 에이전트와 응용  ·  원광대학교 5일 교육</a:t>
+              <a:t>신약 개발을 위한 AI Agent 특강</a:t>
             </a:r>
           </a:p>
         </p:txBody>
@@ -27346,7 +27346,7 @@
                 <a:ea typeface="NanumGothic"/>
                 <a:cs typeface="NanumGothic"/>
               </a:rPr>
-              <a:t>AI 에이전트와 응용  ·  원광대학교 5일 교육</a:t>
+              <a:t>신약 개발을 위한 AI Agent 특강</a:t>
             </a:r>
           </a:p>
         </p:txBody>

--- a/slides/day3.pptx
+++ b/slides/day3.pptx
@@ -12970,7 +12970,7 @@
                 <a:ea typeface="NanumGothic"/>
                 <a:cs typeface="NanumGothic"/>
               </a:rPr>
-              <a:t>현실은 선형이 아니라 반복 — '재현'은 비싸서 보통 '검증'에 가깝다</a:t>
+              <a:t>실제 연구 과정은 한 방향으로 진행되지 않고 반복적이며, 비용이 큰 '재현'보다 주장과 근거를 점검하는 '검증'에 가깝다.</a:t>
             </a:r>
           </a:p>
         </p:txBody>
@@ -13837,7 +13837,7 @@
                 <a:ea typeface="NanumGothic"/>
                 <a:cs typeface="NanumGothic"/>
               </a:rPr>
-              <a:t>이 단계들이 곧 리서치 에이전트가 다루는 부분</a:t>
+              <a:t>이 단계들이 바로 리서치 에이전트가 자동화하고자 하는 대상이다.</a:t>
             </a:r>
           </a:p>
         </p:txBody>
@@ -16947,7 +16947,7 @@
                 <a:ea typeface="NanumGothic"/>
                 <a:cs typeface="NanumGothic"/>
               </a:rPr>
-              <a:t>토론: 우리 주제에선 어디에 무게를 둘까?</a:t>
+              <a:t>우리 팀의 주제에서는 어디에 무게를 둘지 함께 토론해 본다.</a:t>
             </a:r>
           </a:p>
         </p:txBody>
@@ -19506,7 +19506,7 @@
                 <a:ea typeface="NanumGothic"/>
                 <a:cs typeface="NanumGothic"/>
               </a:rPr>
-              <a:t>agentic 5단계와 동일 — Day 4에 직접 구현·실행한다</a:t>
+              <a:t>앞서 살펴본 agentic 5단계와 동일한 흐름이며, 4일차에 직접 구현하고 실행한다.</a:t>
             </a:r>
           </a:p>
         </p:txBody>

--- a/slides/day3.pptx
+++ b/slides/day3.pptx
@@ -10810,7 +10810,7 @@
                 <a:ea typeface="NanumGothic"/>
                 <a:cs typeface="NanumGothic"/>
               </a:rPr>
-              <a:t>권고·funnel·신약 주의</a:t>
+              <a:t>권고·단계적 선별·신약 유의점</a:t>
             </a:r>
           </a:p>
         </p:txBody>
@@ -18351,7 +18351,7 @@
                 <a:ea typeface="NanumGothic"/>
                 <a:cs typeface="NanumGothic"/>
               </a:rPr>
-              <a:t>funnel</a:t>
+              <a:t>선별 절차</a:t>
             </a:r>
           </a:p>
         </p:txBody>
@@ -18398,7 +18398,7 @@
                 <a:ea typeface="NanumSquare"/>
                 <a:cs typeface="NanumSquare"/>
               </a:rPr>
-              <a:t>생성에서 검증까지 — 깔때기</a:t>
+              <a:t>생성에서 검증까지 — 단계적 선별</a:t>
             </a:r>
           </a:p>
         </p:txBody>
@@ -18951,7 +18951,7 @@
                 <a:ea typeface="NanumGothic"/>
                 <a:cs typeface="NanumGothic"/>
               </a:rPr>
-              <a:t>최소 prune</a:t>
+              <a:t>최소 정리</a:t>
             </a:r>
           </a:p>
         </p:txBody>
@@ -19229,7 +19229,7 @@
                 <a:ea typeface="NanumGothic"/>
                 <a:cs typeface="NanumGothic"/>
               </a:rPr>
-              <a:t>싼 경험적 스크린</a:t>
+              <a:t>싼 경험적 선별</a:t>
             </a:r>
           </a:p>
         </p:txBody>
@@ -19276,7 +19276,7 @@
                 <a:ea typeface="NanumGothic"/>
                 <a:cs typeface="NanumGothic"/>
               </a:rPr>
-              <a:t>실제 선별</a:t>
+              <a:t>실측으로 추리기</a:t>
             </a:r>
           </a:p>
         </p:txBody>
@@ -19658,7 +19658,7 @@
                 <a:ea typeface="NanumGothic"/>
                 <a:cs typeface="NanumGothic"/>
               </a:rPr>
-              <a:t>선별은 LLM의 취향이 아니라 싼 실측으로 한다 — winner를 미리 고르지 않는다.</a:t>
+              <a:t>선별은 모델의 판단이 아니라 비용이 낮은 실측으로 수행하며, 유망 가설을 미리 단정하지 않는다.</a:t>
             </a:r>
           </a:p>
         </p:txBody>
@@ -19869,7 +19869,7 @@
                 <a:ea typeface="NanumGothic"/>
                 <a:cs typeface="NanumGothic"/>
               </a:rPr>
-              <a:t>주의</a:t>
+              <a:t>유의점</a:t>
             </a:r>
           </a:p>
         </p:txBody>
@@ -19916,7 +19916,7 @@
                 <a:ea typeface="NanumSquare"/>
                 <a:cs typeface="NanumSquare"/>
               </a:rPr>
-              <a:t>함정 — 특히 신약 분야에서</a:t>
+              <a:t>유의점 — 특히 신약 분야에서</a:t>
             </a:r>
           </a:p>
         </p:txBody>
